--- a/an-introduction-to-sql-server-database-projects/an-introduction-to-sql-server-database-projects.pptx
+++ b/an-introduction-to-sql-server-database-projects/an-introduction-to-sql-server-database-projects.pptx
@@ -3,24 +3,34 @@
 <p:presentation xmlns:a="http://schemas.openxmlformats.org/drawingml/2006/main" xmlns:r="http://schemas.openxmlformats.org/officeDocument/2006/relationships" xmlns:p="http://schemas.openxmlformats.org/presentationml/2006/main" saveSubsetFonts="1" autoCompressPictures="0">
   <p:sldMasterIdLst>
     <p:sldMasterId id="2147483648" r:id="rId4"/>
+    <p:sldMasterId id="2147483668" r:id="rId5"/>
   </p:sldMasterIdLst>
   <p:notesMasterIdLst>
-    <p:notesMasterId r:id="rId18"/>
+    <p:notesMasterId r:id="rId28"/>
   </p:notesMasterIdLst>
   <p:sldIdLst>
-    <p:sldId id="260" r:id="rId5"/>
-    <p:sldId id="261" r:id="rId6"/>
-    <p:sldId id="264" r:id="rId7"/>
-    <p:sldId id="262" r:id="rId8"/>
-    <p:sldId id="263" r:id="rId9"/>
-    <p:sldId id="265" r:id="rId10"/>
-    <p:sldId id="266" r:id="rId11"/>
-    <p:sldId id="267" r:id="rId12"/>
-    <p:sldId id="268" r:id="rId13"/>
-    <p:sldId id="269" r:id="rId14"/>
-    <p:sldId id="270" r:id="rId15"/>
-    <p:sldId id="271" r:id="rId16"/>
-    <p:sldId id="272" r:id="rId17"/>
+    <p:sldId id="260" r:id="rId6"/>
+    <p:sldId id="279" r:id="rId7"/>
+    <p:sldId id="428" r:id="rId8"/>
+    <p:sldId id="261" r:id="rId9"/>
+    <p:sldId id="264" r:id="rId10"/>
+    <p:sldId id="262" r:id="rId11"/>
+    <p:sldId id="263" r:id="rId12"/>
+    <p:sldId id="265" r:id="rId13"/>
+    <p:sldId id="266" r:id="rId14"/>
+    <p:sldId id="267" r:id="rId15"/>
+    <p:sldId id="429" r:id="rId16"/>
+    <p:sldId id="268" r:id="rId17"/>
+    <p:sldId id="269" r:id="rId18"/>
+    <p:sldId id="270" r:id="rId19"/>
+    <p:sldId id="271" r:id="rId20"/>
+    <p:sldId id="272" r:id="rId21"/>
+    <p:sldId id="273" r:id="rId22"/>
+    <p:sldId id="275" r:id="rId23"/>
+    <p:sldId id="276" r:id="rId24"/>
+    <p:sldId id="274" r:id="rId25"/>
+    <p:sldId id="277" r:id="rId26"/>
+    <p:sldId id="278" r:id="rId27"/>
   </p:sldIdLst>
   <p:sldSz cx="12192000" cy="6858000"/>
   <p:notesSz cx="6858000" cy="9144000"/>
@@ -212,7 +222,7 @@
           <a:p>
             <a:fld id="{896D3B2D-3924-0B48-B558-93C031AA9A06}" type="datetimeFigureOut">
               <a:rPr lang="en-US" smtClean="0"/>
-              <a:t>3/4/2025</a:t>
+              <a:t>5/10/2025</a:t>
             </a:fld>
             <a:endParaRPr lang="en-US"/>
           </a:p>
@@ -479,6 +489,85 @@
 </p:notesMaster>
 </file>
 
+<file path=ppt/notesSlides/notesSlide1.xml><?xml version="1.0" encoding="utf-8"?>
+<p:notes xmlns:a="http://schemas.openxmlformats.org/drawingml/2006/main" xmlns:r="http://schemas.openxmlformats.org/officeDocument/2006/relationships" xmlns:p="http://schemas.openxmlformats.org/presentationml/2006/main">
+  <p:cSld>
+    <p:spTree>
+      <p:nvGrpSpPr>
+        <p:cNvPr id="1" name="">
+          <a:extLst>
+            <a:ext uri="{FF2B5EF4-FFF2-40B4-BE49-F238E27FC236}">
+              <a16:creationId xmlns:a16="http://schemas.microsoft.com/office/drawing/2014/main" id="{94E0DD0A-36D5-140F-E49A-07A66272FD76}"/>
+            </a:ext>
+          </a:extLst>
+        </p:cNvPr>
+        <p:cNvGrpSpPr/>
+        <p:nvPr/>
+      </p:nvGrpSpPr>
+      <p:grpSpPr>
+        <a:xfrm>
+          <a:off x="0" y="0"/>
+          <a:ext cx="0" cy="0"/>
+          <a:chOff x="0" y="0"/>
+          <a:chExt cx="0" cy="0"/>
+        </a:xfrm>
+      </p:grpSpPr>
+      <p:sp>
+        <p:nvSpPr>
+          <p:cNvPr id="2" name="Slide Image Placeholder 1">
+            <a:extLst>
+              <a:ext uri="{FF2B5EF4-FFF2-40B4-BE49-F238E27FC236}">
+                <a16:creationId xmlns:a16="http://schemas.microsoft.com/office/drawing/2014/main" id="{FCC8FAAD-A82C-CEDF-7DB5-AC8FA4DB2FD1}"/>
+              </a:ext>
+            </a:extLst>
+          </p:cNvPr>
+          <p:cNvSpPr>
+            <a:spLocks noGrp="1" noRot="1" noChangeAspect="1"/>
+          </p:cNvSpPr>
+          <p:nvPr>
+            <p:ph type="sldImg"/>
+          </p:nvPr>
+        </p:nvSpPr>
+        <p:spPr/>
+      </p:sp>
+      <p:sp>
+        <p:nvSpPr>
+          <p:cNvPr id="3" name="Notes Placeholder 2">
+            <a:extLst>
+              <a:ext uri="{FF2B5EF4-FFF2-40B4-BE49-F238E27FC236}">
+                <a16:creationId xmlns:a16="http://schemas.microsoft.com/office/drawing/2014/main" id="{7034EAE5-29C6-C6E7-9F6C-8B4A937C4059}"/>
+              </a:ext>
+            </a:extLst>
+          </p:cNvPr>
+          <p:cNvSpPr>
+            <a:spLocks noGrp="1"/>
+          </p:cNvSpPr>
+          <p:nvPr>
+            <p:ph type="body" idx="1"/>
+          </p:nvPr>
+        </p:nvSpPr>
+        <p:spPr/>
+        <p:txBody>
+          <a:bodyPr/>
+          <a:lstStyle/>
+          <a:p>
+            <a:endParaRPr lang="en-US"/>
+          </a:p>
+        </p:txBody>
+      </p:sp>
+    </p:spTree>
+    <p:extLst>
+      <p:ext uri="{BB962C8B-B14F-4D97-AF65-F5344CB8AC3E}">
+        <p14:creationId xmlns:p14="http://schemas.microsoft.com/office/powerpoint/2010/main" val="1186836877"/>
+      </p:ext>
+    </p:extLst>
+  </p:cSld>
+  <p:clrMapOvr>
+    <a:masterClrMapping/>
+  </p:clrMapOvr>
+</p:notes>
+</file>
+
 <file path=ppt/slideLayouts/slideLayout1.xml><?xml version="1.0" encoding="utf-8"?>
 <p:sldLayout xmlns:a="http://schemas.openxmlformats.org/drawingml/2006/main" xmlns:r="http://schemas.openxmlformats.org/officeDocument/2006/relationships" xmlns:p="http://schemas.openxmlformats.org/presentationml/2006/main" showMasterSp="0" type="title" preserve="1">
   <p:cSld name="Rubrikbild">
@@ -672,7 +761,7 @@
             <a:fld id="{B61BEF0D-F0BB-DE4B-95CE-6DB70DBA9567}" type="datetimeFigureOut">
               <a:rPr lang="en-US"/>
               <a:pPr/>
-              <a:t>3/4/2025</a:t>
+              <a:t>5/10/2025</a:t>
             </a:fld>
             <a:endParaRPr lang="en-US"/>
           </a:p>
@@ -956,7 +1045,7 @@
             <a:fld id="{B61BEF0D-F0BB-DE4B-95CE-6DB70DBA9567}" type="datetimeFigureOut">
               <a:rPr lang="en-US"/>
               <a:pPr/>
-              <a:t>3/4/2025</a:t>
+              <a:t>5/10/2025</a:t>
             </a:fld>
             <a:endParaRPr lang="en-US"/>
           </a:p>
@@ -1267,7 +1356,7 @@
             <a:fld id="{B61BEF0D-F0BB-DE4B-95CE-6DB70DBA9567}" type="datetimeFigureOut">
               <a:rPr lang="en-US"/>
               <a:pPr/>
-              <a:t>3/4/2025</a:t>
+              <a:t>5/10/2025</a:t>
             </a:fld>
             <a:endParaRPr lang="en-US"/>
           </a:p>
@@ -1605,7 +1694,7 @@
             <a:fld id="{B61BEF0D-F0BB-DE4B-95CE-6DB70DBA9567}" type="datetimeFigureOut">
               <a:rPr lang="en-US"/>
               <a:pPr/>
-              <a:t>3/4/2025</a:t>
+              <a:t>5/10/2025</a:t>
             </a:fld>
             <a:endParaRPr lang="en-US"/>
           </a:p>
@@ -1916,7 +2005,7 @@
             <a:fld id="{B61BEF0D-F0BB-DE4B-95CE-6DB70DBA9567}" type="datetimeFigureOut">
               <a:rPr lang="en-US"/>
               <a:pPr/>
-              <a:t>3/4/2025</a:t>
+              <a:t>5/10/2025</a:t>
             </a:fld>
             <a:endParaRPr lang="en-US"/>
           </a:p>
@@ -2306,7 +2395,7 @@
             <a:fld id="{B61BEF0D-F0BB-DE4B-95CE-6DB70DBA9567}" type="datetimeFigureOut">
               <a:rPr lang="en-US"/>
               <a:pPr/>
-              <a:t>3/4/2025</a:t>
+              <a:t>5/10/2025</a:t>
             </a:fld>
             <a:endParaRPr lang="en-US"/>
           </a:p>
@@ -2472,7 +2561,7 @@
           <a:p>
             <a:fld id="{55C6B4A9-1611-4792-9094-5F34BCA07E0B}" type="datetimeFigureOut">
               <a:rPr lang="en-US"/>
-              <a:t>3/4/2025</a:t>
+              <a:t>5/10/2025</a:t>
             </a:fld>
             <a:endParaRPr lang="en-US"/>
           </a:p>
@@ -2648,7 +2737,7 @@
             <a:fld id="{B61BEF0D-F0BB-DE4B-95CE-6DB70DBA9567}" type="datetimeFigureOut">
               <a:rPr lang="en-US"/>
               <a:pPr/>
-              <a:t>3/4/2025</a:t>
+              <a:t>5/10/2025</a:t>
             </a:fld>
             <a:endParaRPr lang="en-US"/>
           </a:p>
@@ -2698,6 +2787,699 @@
         </p:txBody>
       </p:sp>
     </p:spTree>
+  </p:cSld>
+  <p:clrMapOvr>
+    <a:masterClrMapping/>
+  </p:clrMapOvr>
+</p:sldLayout>
+</file>
+
+<file path=ppt/slideLayouts/slideLayout17.xml><?xml version="1.0" encoding="utf-8"?>
+<p:sldLayout xmlns:a="http://schemas.openxmlformats.org/drawingml/2006/main" xmlns:r="http://schemas.openxmlformats.org/officeDocument/2006/relationships" xmlns:p="http://schemas.openxmlformats.org/presentationml/2006/main" type="title" preserve="1">
+  <p:cSld name="Title Slide">
+    <p:spTree>
+      <p:nvGrpSpPr>
+        <p:cNvPr id="1" name=""/>
+        <p:cNvGrpSpPr/>
+        <p:nvPr/>
+      </p:nvGrpSpPr>
+      <p:grpSpPr>
+        <a:xfrm>
+          <a:off x="0" y="0"/>
+          <a:ext cx="0" cy="0"/>
+          <a:chOff x="0" y="0"/>
+          <a:chExt cx="0" cy="0"/>
+        </a:xfrm>
+      </p:grpSpPr>
+      <p:sp>
+        <p:nvSpPr>
+          <p:cNvPr id="2" name="Title 1">
+            <a:extLst>
+              <a:ext uri="{FF2B5EF4-FFF2-40B4-BE49-F238E27FC236}">
+                <a16:creationId xmlns:a16="http://schemas.microsoft.com/office/drawing/2014/main" id="{7375D5C0-D3A4-61E6-5660-DF7AB8989133}"/>
+              </a:ext>
+            </a:extLst>
+          </p:cNvPr>
+          <p:cNvSpPr>
+            <a:spLocks noGrp="1"/>
+          </p:cNvSpPr>
+          <p:nvPr>
+            <p:ph type="ctrTitle"/>
+          </p:nvPr>
+        </p:nvSpPr>
+        <p:spPr>
+          <a:xfrm>
+            <a:off x="1524000" y="1122363"/>
+            <a:ext cx="9144000" cy="2387600"/>
+          </a:xfrm>
+        </p:spPr>
+        <p:txBody>
+          <a:bodyPr anchor="b"/>
+          <a:lstStyle>
+            <a:lvl1pPr algn="ctr">
+              <a:defRPr sz="6000"/>
+            </a:lvl1pPr>
+          </a:lstStyle>
+          <a:p>
+            <a:r>
+              <a:rPr lang="en-US"/>
+              <a:t>Click to edit Master title style</a:t>
+            </a:r>
+          </a:p>
+        </p:txBody>
+      </p:sp>
+      <p:sp>
+        <p:nvSpPr>
+          <p:cNvPr id="3" name="Subtitle 2">
+            <a:extLst>
+              <a:ext uri="{FF2B5EF4-FFF2-40B4-BE49-F238E27FC236}">
+                <a16:creationId xmlns:a16="http://schemas.microsoft.com/office/drawing/2014/main" id="{F00DD6B0-6D1D-7C71-F5B3-A373C8384FC7}"/>
+              </a:ext>
+            </a:extLst>
+          </p:cNvPr>
+          <p:cNvSpPr>
+            <a:spLocks noGrp="1"/>
+          </p:cNvSpPr>
+          <p:nvPr>
+            <p:ph type="subTitle" idx="1"/>
+          </p:nvPr>
+        </p:nvSpPr>
+        <p:spPr>
+          <a:xfrm>
+            <a:off x="1524000" y="3602038"/>
+            <a:ext cx="9144000" cy="1655762"/>
+          </a:xfrm>
+        </p:spPr>
+        <p:txBody>
+          <a:bodyPr/>
+          <a:lstStyle>
+            <a:lvl1pPr marL="0" indent="0" algn="ctr">
+              <a:buNone/>
+              <a:defRPr sz="2400"/>
+            </a:lvl1pPr>
+            <a:lvl2pPr marL="457200" indent="0" algn="ctr">
+              <a:buNone/>
+              <a:defRPr sz="2000"/>
+            </a:lvl2pPr>
+            <a:lvl3pPr marL="914400" indent="0" algn="ctr">
+              <a:buNone/>
+              <a:defRPr sz="1800"/>
+            </a:lvl3pPr>
+            <a:lvl4pPr marL="1371600" indent="0" algn="ctr">
+              <a:buNone/>
+              <a:defRPr sz="1600"/>
+            </a:lvl4pPr>
+            <a:lvl5pPr marL="1828800" indent="0" algn="ctr">
+              <a:buNone/>
+              <a:defRPr sz="1600"/>
+            </a:lvl5pPr>
+            <a:lvl6pPr marL="2286000" indent="0" algn="ctr">
+              <a:buNone/>
+              <a:defRPr sz="1600"/>
+            </a:lvl6pPr>
+            <a:lvl7pPr marL="2743200" indent="0" algn="ctr">
+              <a:buNone/>
+              <a:defRPr sz="1600"/>
+            </a:lvl7pPr>
+            <a:lvl8pPr marL="3200400" indent="0" algn="ctr">
+              <a:buNone/>
+              <a:defRPr sz="1600"/>
+            </a:lvl8pPr>
+            <a:lvl9pPr marL="3657600" indent="0" algn="ctr">
+              <a:buNone/>
+              <a:defRPr sz="1600"/>
+            </a:lvl9pPr>
+          </a:lstStyle>
+          <a:p>
+            <a:r>
+              <a:rPr lang="en-US"/>
+              <a:t>Click to edit Master subtitle style</a:t>
+            </a:r>
+          </a:p>
+        </p:txBody>
+      </p:sp>
+      <p:sp>
+        <p:nvSpPr>
+          <p:cNvPr id="4" name="Date Placeholder 3">
+            <a:extLst>
+              <a:ext uri="{FF2B5EF4-FFF2-40B4-BE49-F238E27FC236}">
+                <a16:creationId xmlns:a16="http://schemas.microsoft.com/office/drawing/2014/main" id="{415C71A3-7C80-5027-4B9A-6BBD6FACAE1D}"/>
+              </a:ext>
+            </a:extLst>
+          </p:cNvPr>
+          <p:cNvSpPr>
+            <a:spLocks noGrp="1"/>
+          </p:cNvSpPr>
+          <p:nvPr>
+            <p:ph type="dt" sz="half" idx="10"/>
+          </p:nvPr>
+        </p:nvSpPr>
+        <p:spPr/>
+        <p:txBody>
+          <a:bodyPr/>
+          <a:lstStyle/>
+          <a:p>
+            <a:fld id="{A40CF832-788C-4A30-A874-A72157BA0ED2}" type="datetimeFigureOut">
+              <a:rPr lang="en-US" smtClean="0"/>
+              <a:t>5/10/2025</a:t>
+            </a:fld>
+            <a:endParaRPr lang="en-US"/>
+          </a:p>
+        </p:txBody>
+      </p:sp>
+      <p:sp>
+        <p:nvSpPr>
+          <p:cNvPr id="5" name="Footer Placeholder 4">
+            <a:extLst>
+              <a:ext uri="{FF2B5EF4-FFF2-40B4-BE49-F238E27FC236}">
+                <a16:creationId xmlns:a16="http://schemas.microsoft.com/office/drawing/2014/main" id="{4D4B61D6-B917-E461-AEE3-46A8D55003E7}"/>
+              </a:ext>
+            </a:extLst>
+          </p:cNvPr>
+          <p:cNvSpPr>
+            <a:spLocks noGrp="1"/>
+          </p:cNvSpPr>
+          <p:nvPr>
+            <p:ph type="ftr" sz="quarter" idx="11"/>
+          </p:nvPr>
+        </p:nvSpPr>
+        <p:spPr/>
+        <p:txBody>
+          <a:bodyPr/>
+          <a:lstStyle/>
+          <a:p>
+            <a:endParaRPr lang="en-US"/>
+          </a:p>
+        </p:txBody>
+      </p:sp>
+      <p:sp>
+        <p:nvSpPr>
+          <p:cNvPr id="6" name="Slide Number Placeholder 5">
+            <a:extLst>
+              <a:ext uri="{FF2B5EF4-FFF2-40B4-BE49-F238E27FC236}">
+                <a16:creationId xmlns:a16="http://schemas.microsoft.com/office/drawing/2014/main" id="{C2B4D2D2-3873-4B93-8EC2-07BA03937982}"/>
+              </a:ext>
+            </a:extLst>
+          </p:cNvPr>
+          <p:cNvSpPr>
+            <a:spLocks noGrp="1"/>
+          </p:cNvSpPr>
+          <p:nvPr>
+            <p:ph type="sldNum" sz="quarter" idx="12"/>
+          </p:nvPr>
+        </p:nvSpPr>
+        <p:spPr/>
+        <p:txBody>
+          <a:bodyPr/>
+          <a:lstStyle/>
+          <a:p>
+            <a:fld id="{585491E3-9838-4B39-AEBF-3B863E6BCAE0}" type="slidenum">
+              <a:rPr lang="en-US" smtClean="0"/>
+              <a:t>‹#›</a:t>
+            </a:fld>
+            <a:endParaRPr lang="en-US"/>
+          </a:p>
+        </p:txBody>
+      </p:sp>
+    </p:spTree>
+    <p:extLst>
+      <p:ext uri="{BB962C8B-B14F-4D97-AF65-F5344CB8AC3E}">
+        <p14:creationId xmlns:p14="http://schemas.microsoft.com/office/powerpoint/2010/main" val="1028376291"/>
+      </p:ext>
+    </p:extLst>
+  </p:cSld>
+  <p:clrMapOvr>
+    <a:masterClrMapping/>
+  </p:clrMapOvr>
+</p:sldLayout>
+</file>
+
+<file path=ppt/slideLayouts/slideLayout18.xml><?xml version="1.0" encoding="utf-8"?>
+<p:sldLayout xmlns:a="http://schemas.openxmlformats.org/drawingml/2006/main" xmlns:r="http://schemas.openxmlformats.org/officeDocument/2006/relationships" xmlns:p="http://schemas.openxmlformats.org/presentationml/2006/main" type="obj" preserve="1">
+  <p:cSld name="Title and Content">
+    <p:spTree>
+      <p:nvGrpSpPr>
+        <p:cNvPr id="1" name=""/>
+        <p:cNvGrpSpPr/>
+        <p:nvPr/>
+      </p:nvGrpSpPr>
+      <p:grpSpPr>
+        <a:xfrm>
+          <a:off x="0" y="0"/>
+          <a:ext cx="0" cy="0"/>
+          <a:chOff x="0" y="0"/>
+          <a:chExt cx="0" cy="0"/>
+        </a:xfrm>
+      </p:grpSpPr>
+      <p:sp>
+        <p:nvSpPr>
+          <p:cNvPr id="2" name="Title 1">
+            <a:extLst>
+              <a:ext uri="{FF2B5EF4-FFF2-40B4-BE49-F238E27FC236}">
+                <a16:creationId xmlns:a16="http://schemas.microsoft.com/office/drawing/2014/main" id="{E62EA6EE-13B6-FFE6-2484-339A8C421E2A}"/>
+              </a:ext>
+            </a:extLst>
+          </p:cNvPr>
+          <p:cNvSpPr>
+            <a:spLocks noGrp="1"/>
+          </p:cNvSpPr>
+          <p:nvPr>
+            <p:ph type="title"/>
+          </p:nvPr>
+        </p:nvSpPr>
+        <p:spPr/>
+        <p:txBody>
+          <a:bodyPr/>
+          <a:lstStyle/>
+          <a:p>
+            <a:r>
+              <a:rPr lang="en-US"/>
+              <a:t>Click to edit Master title style</a:t>
+            </a:r>
+          </a:p>
+        </p:txBody>
+      </p:sp>
+      <p:sp>
+        <p:nvSpPr>
+          <p:cNvPr id="3" name="Content Placeholder 2">
+            <a:extLst>
+              <a:ext uri="{FF2B5EF4-FFF2-40B4-BE49-F238E27FC236}">
+                <a16:creationId xmlns:a16="http://schemas.microsoft.com/office/drawing/2014/main" id="{20B642EB-876B-1624-B031-13C87CCD60BC}"/>
+              </a:ext>
+            </a:extLst>
+          </p:cNvPr>
+          <p:cNvSpPr>
+            <a:spLocks noGrp="1"/>
+          </p:cNvSpPr>
+          <p:nvPr>
+            <p:ph idx="1"/>
+          </p:nvPr>
+        </p:nvSpPr>
+        <p:spPr/>
+        <p:txBody>
+          <a:bodyPr/>
+          <a:lstStyle/>
+          <a:p>
+            <a:pPr lvl="0"/>
+            <a:r>
+              <a:rPr lang="en-US"/>
+              <a:t>Click to edit Master text styles</a:t>
+            </a:r>
+          </a:p>
+          <a:p>
+            <a:pPr lvl="1"/>
+            <a:r>
+              <a:rPr lang="en-US"/>
+              <a:t>Second level</a:t>
+            </a:r>
+          </a:p>
+          <a:p>
+            <a:pPr lvl="2"/>
+            <a:r>
+              <a:rPr lang="en-US"/>
+              <a:t>Third level</a:t>
+            </a:r>
+          </a:p>
+          <a:p>
+            <a:pPr lvl="3"/>
+            <a:r>
+              <a:rPr lang="en-US"/>
+              <a:t>Fourth level</a:t>
+            </a:r>
+          </a:p>
+          <a:p>
+            <a:pPr lvl="4"/>
+            <a:r>
+              <a:rPr lang="en-US"/>
+              <a:t>Fifth level</a:t>
+            </a:r>
+          </a:p>
+        </p:txBody>
+      </p:sp>
+      <p:sp>
+        <p:nvSpPr>
+          <p:cNvPr id="4" name="Date Placeholder 3">
+            <a:extLst>
+              <a:ext uri="{FF2B5EF4-FFF2-40B4-BE49-F238E27FC236}">
+                <a16:creationId xmlns:a16="http://schemas.microsoft.com/office/drawing/2014/main" id="{90201F18-F6AF-A006-03CB-2F1C7194968F}"/>
+              </a:ext>
+            </a:extLst>
+          </p:cNvPr>
+          <p:cNvSpPr>
+            <a:spLocks noGrp="1"/>
+          </p:cNvSpPr>
+          <p:nvPr>
+            <p:ph type="dt" sz="half" idx="10"/>
+          </p:nvPr>
+        </p:nvSpPr>
+        <p:spPr/>
+        <p:txBody>
+          <a:bodyPr/>
+          <a:lstStyle/>
+          <a:p>
+            <a:fld id="{A40CF832-788C-4A30-A874-A72157BA0ED2}" type="datetimeFigureOut">
+              <a:rPr lang="en-US" smtClean="0"/>
+              <a:t>5/10/2025</a:t>
+            </a:fld>
+            <a:endParaRPr lang="en-US"/>
+          </a:p>
+        </p:txBody>
+      </p:sp>
+      <p:sp>
+        <p:nvSpPr>
+          <p:cNvPr id="5" name="Footer Placeholder 4">
+            <a:extLst>
+              <a:ext uri="{FF2B5EF4-FFF2-40B4-BE49-F238E27FC236}">
+                <a16:creationId xmlns:a16="http://schemas.microsoft.com/office/drawing/2014/main" id="{3A5FD62B-4317-3E7A-AF51-51C05803E571}"/>
+              </a:ext>
+            </a:extLst>
+          </p:cNvPr>
+          <p:cNvSpPr>
+            <a:spLocks noGrp="1"/>
+          </p:cNvSpPr>
+          <p:nvPr>
+            <p:ph type="ftr" sz="quarter" idx="11"/>
+          </p:nvPr>
+        </p:nvSpPr>
+        <p:spPr/>
+        <p:txBody>
+          <a:bodyPr/>
+          <a:lstStyle/>
+          <a:p>
+            <a:endParaRPr lang="en-US"/>
+          </a:p>
+        </p:txBody>
+      </p:sp>
+      <p:sp>
+        <p:nvSpPr>
+          <p:cNvPr id="6" name="Slide Number Placeholder 5">
+            <a:extLst>
+              <a:ext uri="{FF2B5EF4-FFF2-40B4-BE49-F238E27FC236}">
+                <a16:creationId xmlns:a16="http://schemas.microsoft.com/office/drawing/2014/main" id="{5EB36A03-3979-703E-E069-3B43EC61B992}"/>
+              </a:ext>
+            </a:extLst>
+          </p:cNvPr>
+          <p:cNvSpPr>
+            <a:spLocks noGrp="1"/>
+          </p:cNvSpPr>
+          <p:nvPr>
+            <p:ph type="sldNum" sz="quarter" idx="12"/>
+          </p:nvPr>
+        </p:nvSpPr>
+        <p:spPr/>
+        <p:txBody>
+          <a:bodyPr/>
+          <a:lstStyle/>
+          <a:p>
+            <a:fld id="{585491E3-9838-4B39-AEBF-3B863E6BCAE0}" type="slidenum">
+              <a:rPr lang="en-US" smtClean="0"/>
+              <a:t>‹#›</a:t>
+            </a:fld>
+            <a:endParaRPr lang="en-US"/>
+          </a:p>
+        </p:txBody>
+      </p:sp>
+    </p:spTree>
+    <p:extLst>
+      <p:ext uri="{BB962C8B-B14F-4D97-AF65-F5344CB8AC3E}">
+        <p14:creationId xmlns:p14="http://schemas.microsoft.com/office/powerpoint/2010/main" val="3082191721"/>
+      </p:ext>
+    </p:extLst>
+  </p:cSld>
+  <p:clrMapOvr>
+    <a:masterClrMapping/>
+  </p:clrMapOvr>
+</p:sldLayout>
+</file>
+
+<file path=ppt/slideLayouts/slideLayout19.xml><?xml version="1.0" encoding="utf-8"?>
+<p:sldLayout xmlns:a="http://schemas.openxmlformats.org/drawingml/2006/main" xmlns:r="http://schemas.openxmlformats.org/officeDocument/2006/relationships" xmlns:p="http://schemas.openxmlformats.org/presentationml/2006/main" type="secHead" preserve="1">
+  <p:cSld name="Section Header">
+    <p:spTree>
+      <p:nvGrpSpPr>
+        <p:cNvPr id="1" name=""/>
+        <p:cNvGrpSpPr/>
+        <p:nvPr/>
+      </p:nvGrpSpPr>
+      <p:grpSpPr>
+        <a:xfrm>
+          <a:off x="0" y="0"/>
+          <a:ext cx="0" cy="0"/>
+          <a:chOff x="0" y="0"/>
+          <a:chExt cx="0" cy="0"/>
+        </a:xfrm>
+      </p:grpSpPr>
+      <p:sp>
+        <p:nvSpPr>
+          <p:cNvPr id="2" name="Title 1">
+            <a:extLst>
+              <a:ext uri="{FF2B5EF4-FFF2-40B4-BE49-F238E27FC236}">
+                <a16:creationId xmlns:a16="http://schemas.microsoft.com/office/drawing/2014/main" id="{5FA0C294-2E6D-3E23-8C04-FE2E25A5FA89}"/>
+              </a:ext>
+            </a:extLst>
+          </p:cNvPr>
+          <p:cNvSpPr>
+            <a:spLocks noGrp="1"/>
+          </p:cNvSpPr>
+          <p:nvPr>
+            <p:ph type="title"/>
+          </p:nvPr>
+        </p:nvSpPr>
+        <p:spPr>
+          <a:xfrm>
+            <a:off x="831850" y="1709738"/>
+            <a:ext cx="10515600" cy="2852737"/>
+          </a:xfrm>
+        </p:spPr>
+        <p:txBody>
+          <a:bodyPr anchor="b"/>
+          <a:lstStyle>
+            <a:lvl1pPr>
+              <a:defRPr sz="6000"/>
+            </a:lvl1pPr>
+          </a:lstStyle>
+          <a:p>
+            <a:r>
+              <a:rPr lang="en-US"/>
+              <a:t>Click to edit Master title style</a:t>
+            </a:r>
+          </a:p>
+        </p:txBody>
+      </p:sp>
+      <p:sp>
+        <p:nvSpPr>
+          <p:cNvPr id="3" name="Text Placeholder 2">
+            <a:extLst>
+              <a:ext uri="{FF2B5EF4-FFF2-40B4-BE49-F238E27FC236}">
+                <a16:creationId xmlns:a16="http://schemas.microsoft.com/office/drawing/2014/main" id="{8E383D64-67F7-B602-487B-C06BB227DE65}"/>
+              </a:ext>
+            </a:extLst>
+          </p:cNvPr>
+          <p:cNvSpPr>
+            <a:spLocks noGrp="1"/>
+          </p:cNvSpPr>
+          <p:nvPr>
+            <p:ph type="body" idx="1"/>
+          </p:nvPr>
+        </p:nvSpPr>
+        <p:spPr>
+          <a:xfrm>
+            <a:off x="831850" y="4589463"/>
+            <a:ext cx="10515600" cy="1500187"/>
+          </a:xfrm>
+        </p:spPr>
+        <p:txBody>
+          <a:bodyPr/>
+          <a:lstStyle>
+            <a:lvl1pPr marL="0" indent="0">
+              <a:buNone/>
+              <a:defRPr sz="2400">
+                <a:solidFill>
+                  <a:schemeClr val="tx1">
+                    <a:tint val="82000"/>
+                  </a:schemeClr>
+                </a:solidFill>
+              </a:defRPr>
+            </a:lvl1pPr>
+            <a:lvl2pPr marL="457200" indent="0">
+              <a:buNone/>
+              <a:defRPr sz="2000">
+                <a:solidFill>
+                  <a:schemeClr val="tx1">
+                    <a:tint val="82000"/>
+                  </a:schemeClr>
+                </a:solidFill>
+              </a:defRPr>
+            </a:lvl2pPr>
+            <a:lvl3pPr marL="914400" indent="0">
+              <a:buNone/>
+              <a:defRPr sz="1800">
+                <a:solidFill>
+                  <a:schemeClr val="tx1">
+                    <a:tint val="82000"/>
+                  </a:schemeClr>
+                </a:solidFill>
+              </a:defRPr>
+            </a:lvl3pPr>
+            <a:lvl4pPr marL="1371600" indent="0">
+              <a:buNone/>
+              <a:defRPr sz="1600">
+                <a:solidFill>
+                  <a:schemeClr val="tx1">
+                    <a:tint val="82000"/>
+                  </a:schemeClr>
+                </a:solidFill>
+              </a:defRPr>
+            </a:lvl4pPr>
+            <a:lvl5pPr marL="1828800" indent="0">
+              <a:buNone/>
+              <a:defRPr sz="1600">
+                <a:solidFill>
+                  <a:schemeClr val="tx1">
+                    <a:tint val="82000"/>
+                  </a:schemeClr>
+                </a:solidFill>
+              </a:defRPr>
+            </a:lvl5pPr>
+            <a:lvl6pPr marL="2286000" indent="0">
+              <a:buNone/>
+              <a:defRPr sz="1600">
+                <a:solidFill>
+                  <a:schemeClr val="tx1">
+                    <a:tint val="82000"/>
+                  </a:schemeClr>
+                </a:solidFill>
+              </a:defRPr>
+            </a:lvl6pPr>
+            <a:lvl7pPr marL="2743200" indent="0">
+              <a:buNone/>
+              <a:defRPr sz="1600">
+                <a:solidFill>
+                  <a:schemeClr val="tx1">
+                    <a:tint val="82000"/>
+                  </a:schemeClr>
+                </a:solidFill>
+              </a:defRPr>
+            </a:lvl7pPr>
+            <a:lvl8pPr marL="3200400" indent="0">
+              <a:buNone/>
+              <a:defRPr sz="1600">
+                <a:solidFill>
+                  <a:schemeClr val="tx1">
+                    <a:tint val="82000"/>
+                  </a:schemeClr>
+                </a:solidFill>
+              </a:defRPr>
+            </a:lvl8pPr>
+            <a:lvl9pPr marL="3657600" indent="0">
+              <a:buNone/>
+              <a:defRPr sz="1600">
+                <a:solidFill>
+                  <a:schemeClr val="tx1">
+                    <a:tint val="82000"/>
+                  </a:schemeClr>
+                </a:solidFill>
+              </a:defRPr>
+            </a:lvl9pPr>
+          </a:lstStyle>
+          <a:p>
+            <a:pPr lvl="0"/>
+            <a:r>
+              <a:rPr lang="en-US"/>
+              <a:t>Click to edit Master text styles</a:t>
+            </a:r>
+          </a:p>
+        </p:txBody>
+      </p:sp>
+      <p:sp>
+        <p:nvSpPr>
+          <p:cNvPr id="4" name="Date Placeholder 3">
+            <a:extLst>
+              <a:ext uri="{FF2B5EF4-FFF2-40B4-BE49-F238E27FC236}">
+                <a16:creationId xmlns:a16="http://schemas.microsoft.com/office/drawing/2014/main" id="{5EE73950-31A4-BD2A-71A1-5C8D7339A494}"/>
+              </a:ext>
+            </a:extLst>
+          </p:cNvPr>
+          <p:cNvSpPr>
+            <a:spLocks noGrp="1"/>
+          </p:cNvSpPr>
+          <p:nvPr>
+            <p:ph type="dt" sz="half" idx="10"/>
+          </p:nvPr>
+        </p:nvSpPr>
+        <p:spPr/>
+        <p:txBody>
+          <a:bodyPr/>
+          <a:lstStyle/>
+          <a:p>
+            <a:fld id="{A40CF832-788C-4A30-A874-A72157BA0ED2}" type="datetimeFigureOut">
+              <a:rPr lang="en-US" smtClean="0"/>
+              <a:t>5/10/2025</a:t>
+            </a:fld>
+            <a:endParaRPr lang="en-US"/>
+          </a:p>
+        </p:txBody>
+      </p:sp>
+      <p:sp>
+        <p:nvSpPr>
+          <p:cNvPr id="5" name="Footer Placeholder 4">
+            <a:extLst>
+              <a:ext uri="{FF2B5EF4-FFF2-40B4-BE49-F238E27FC236}">
+                <a16:creationId xmlns:a16="http://schemas.microsoft.com/office/drawing/2014/main" id="{F4E0B03D-F7F2-CCC2-122D-C4638D49C872}"/>
+              </a:ext>
+            </a:extLst>
+          </p:cNvPr>
+          <p:cNvSpPr>
+            <a:spLocks noGrp="1"/>
+          </p:cNvSpPr>
+          <p:nvPr>
+            <p:ph type="ftr" sz="quarter" idx="11"/>
+          </p:nvPr>
+        </p:nvSpPr>
+        <p:spPr/>
+        <p:txBody>
+          <a:bodyPr/>
+          <a:lstStyle/>
+          <a:p>
+            <a:endParaRPr lang="en-US"/>
+          </a:p>
+        </p:txBody>
+      </p:sp>
+      <p:sp>
+        <p:nvSpPr>
+          <p:cNvPr id="6" name="Slide Number Placeholder 5">
+            <a:extLst>
+              <a:ext uri="{FF2B5EF4-FFF2-40B4-BE49-F238E27FC236}">
+                <a16:creationId xmlns:a16="http://schemas.microsoft.com/office/drawing/2014/main" id="{9FF1CE34-BDF2-DAB5-D863-C9A969D4195B}"/>
+              </a:ext>
+            </a:extLst>
+          </p:cNvPr>
+          <p:cNvSpPr>
+            <a:spLocks noGrp="1"/>
+          </p:cNvSpPr>
+          <p:nvPr>
+            <p:ph type="sldNum" sz="quarter" idx="12"/>
+          </p:nvPr>
+        </p:nvSpPr>
+        <p:spPr/>
+        <p:txBody>
+          <a:bodyPr/>
+          <a:lstStyle/>
+          <a:p>
+            <a:fld id="{585491E3-9838-4B39-AEBF-3B863E6BCAE0}" type="slidenum">
+              <a:rPr lang="en-US" smtClean="0"/>
+              <a:t>‹#›</a:t>
+            </a:fld>
+            <a:endParaRPr lang="en-US"/>
+          </a:p>
+        </p:txBody>
+      </p:sp>
+    </p:spTree>
+    <p:extLst>
+      <p:ext uri="{BB962C8B-B14F-4D97-AF65-F5344CB8AC3E}">
+        <p14:creationId xmlns:p14="http://schemas.microsoft.com/office/powerpoint/2010/main" val="2934709516"/>
+      </p:ext>
+    </p:extLst>
   </p:cSld>
   <p:clrMapOvr>
     <a:masterClrMapping/>
@@ -2821,7 +3603,7 @@
             <a:fld id="{B61BEF0D-F0BB-DE4B-95CE-6DB70DBA9567}" type="datetimeFigureOut">
               <a:rPr lang="en-US"/>
               <a:pPr/>
-              <a:t>3/4/2025</a:t>
+              <a:t>5/10/2025</a:t>
             </a:fld>
             <a:endParaRPr lang="en-US"/>
           </a:p>
@@ -2871,6 +3653,2049 @@
         </p:txBody>
       </p:sp>
     </p:spTree>
+  </p:cSld>
+  <p:clrMapOvr>
+    <a:masterClrMapping/>
+  </p:clrMapOvr>
+</p:sldLayout>
+</file>
+
+<file path=ppt/slideLayouts/slideLayout20.xml><?xml version="1.0" encoding="utf-8"?>
+<p:sldLayout xmlns:a="http://schemas.openxmlformats.org/drawingml/2006/main" xmlns:r="http://schemas.openxmlformats.org/officeDocument/2006/relationships" xmlns:p="http://schemas.openxmlformats.org/presentationml/2006/main" type="twoObj" preserve="1">
+  <p:cSld name="Two Content">
+    <p:spTree>
+      <p:nvGrpSpPr>
+        <p:cNvPr id="1" name=""/>
+        <p:cNvGrpSpPr/>
+        <p:nvPr/>
+      </p:nvGrpSpPr>
+      <p:grpSpPr>
+        <a:xfrm>
+          <a:off x="0" y="0"/>
+          <a:ext cx="0" cy="0"/>
+          <a:chOff x="0" y="0"/>
+          <a:chExt cx="0" cy="0"/>
+        </a:xfrm>
+      </p:grpSpPr>
+      <p:sp>
+        <p:nvSpPr>
+          <p:cNvPr id="2" name="Title 1">
+            <a:extLst>
+              <a:ext uri="{FF2B5EF4-FFF2-40B4-BE49-F238E27FC236}">
+                <a16:creationId xmlns:a16="http://schemas.microsoft.com/office/drawing/2014/main" id="{89FE203A-16C0-A74E-85CC-C26A0A2B1E73}"/>
+              </a:ext>
+            </a:extLst>
+          </p:cNvPr>
+          <p:cNvSpPr>
+            <a:spLocks noGrp="1"/>
+          </p:cNvSpPr>
+          <p:nvPr>
+            <p:ph type="title"/>
+          </p:nvPr>
+        </p:nvSpPr>
+        <p:spPr/>
+        <p:txBody>
+          <a:bodyPr/>
+          <a:lstStyle/>
+          <a:p>
+            <a:r>
+              <a:rPr lang="en-US"/>
+              <a:t>Click to edit Master title style</a:t>
+            </a:r>
+          </a:p>
+        </p:txBody>
+      </p:sp>
+      <p:sp>
+        <p:nvSpPr>
+          <p:cNvPr id="3" name="Content Placeholder 2">
+            <a:extLst>
+              <a:ext uri="{FF2B5EF4-FFF2-40B4-BE49-F238E27FC236}">
+                <a16:creationId xmlns:a16="http://schemas.microsoft.com/office/drawing/2014/main" id="{1677619D-7282-DC33-8D24-5D6DF56E208C}"/>
+              </a:ext>
+            </a:extLst>
+          </p:cNvPr>
+          <p:cNvSpPr>
+            <a:spLocks noGrp="1"/>
+          </p:cNvSpPr>
+          <p:nvPr>
+            <p:ph sz="half" idx="1"/>
+          </p:nvPr>
+        </p:nvSpPr>
+        <p:spPr>
+          <a:xfrm>
+            <a:off x="838200" y="1825625"/>
+            <a:ext cx="5181600" cy="4351338"/>
+          </a:xfrm>
+        </p:spPr>
+        <p:txBody>
+          <a:bodyPr/>
+          <a:lstStyle/>
+          <a:p>
+            <a:pPr lvl="0"/>
+            <a:r>
+              <a:rPr lang="en-US"/>
+              <a:t>Click to edit Master text styles</a:t>
+            </a:r>
+          </a:p>
+          <a:p>
+            <a:pPr lvl="1"/>
+            <a:r>
+              <a:rPr lang="en-US"/>
+              <a:t>Second level</a:t>
+            </a:r>
+          </a:p>
+          <a:p>
+            <a:pPr lvl="2"/>
+            <a:r>
+              <a:rPr lang="en-US"/>
+              <a:t>Third level</a:t>
+            </a:r>
+          </a:p>
+          <a:p>
+            <a:pPr lvl="3"/>
+            <a:r>
+              <a:rPr lang="en-US"/>
+              <a:t>Fourth level</a:t>
+            </a:r>
+          </a:p>
+          <a:p>
+            <a:pPr lvl="4"/>
+            <a:r>
+              <a:rPr lang="en-US"/>
+              <a:t>Fifth level</a:t>
+            </a:r>
+          </a:p>
+        </p:txBody>
+      </p:sp>
+      <p:sp>
+        <p:nvSpPr>
+          <p:cNvPr id="4" name="Content Placeholder 3">
+            <a:extLst>
+              <a:ext uri="{FF2B5EF4-FFF2-40B4-BE49-F238E27FC236}">
+                <a16:creationId xmlns:a16="http://schemas.microsoft.com/office/drawing/2014/main" id="{4112F70B-DDAB-0ED6-7AC5-498400D3B57B}"/>
+              </a:ext>
+            </a:extLst>
+          </p:cNvPr>
+          <p:cNvSpPr>
+            <a:spLocks noGrp="1"/>
+          </p:cNvSpPr>
+          <p:nvPr>
+            <p:ph sz="half" idx="2"/>
+          </p:nvPr>
+        </p:nvSpPr>
+        <p:spPr>
+          <a:xfrm>
+            <a:off x="6172200" y="1825625"/>
+            <a:ext cx="5181600" cy="4351338"/>
+          </a:xfrm>
+        </p:spPr>
+        <p:txBody>
+          <a:bodyPr/>
+          <a:lstStyle/>
+          <a:p>
+            <a:pPr lvl="0"/>
+            <a:r>
+              <a:rPr lang="en-US"/>
+              <a:t>Click to edit Master text styles</a:t>
+            </a:r>
+          </a:p>
+          <a:p>
+            <a:pPr lvl="1"/>
+            <a:r>
+              <a:rPr lang="en-US"/>
+              <a:t>Second level</a:t>
+            </a:r>
+          </a:p>
+          <a:p>
+            <a:pPr lvl="2"/>
+            <a:r>
+              <a:rPr lang="en-US"/>
+              <a:t>Third level</a:t>
+            </a:r>
+          </a:p>
+          <a:p>
+            <a:pPr lvl="3"/>
+            <a:r>
+              <a:rPr lang="en-US"/>
+              <a:t>Fourth level</a:t>
+            </a:r>
+          </a:p>
+          <a:p>
+            <a:pPr lvl="4"/>
+            <a:r>
+              <a:rPr lang="en-US"/>
+              <a:t>Fifth level</a:t>
+            </a:r>
+          </a:p>
+        </p:txBody>
+      </p:sp>
+      <p:sp>
+        <p:nvSpPr>
+          <p:cNvPr id="5" name="Date Placeholder 4">
+            <a:extLst>
+              <a:ext uri="{FF2B5EF4-FFF2-40B4-BE49-F238E27FC236}">
+                <a16:creationId xmlns:a16="http://schemas.microsoft.com/office/drawing/2014/main" id="{B3F03CFE-477B-A1A2-F21B-6F0D93A9EB72}"/>
+              </a:ext>
+            </a:extLst>
+          </p:cNvPr>
+          <p:cNvSpPr>
+            <a:spLocks noGrp="1"/>
+          </p:cNvSpPr>
+          <p:nvPr>
+            <p:ph type="dt" sz="half" idx="10"/>
+          </p:nvPr>
+        </p:nvSpPr>
+        <p:spPr/>
+        <p:txBody>
+          <a:bodyPr/>
+          <a:lstStyle/>
+          <a:p>
+            <a:fld id="{A40CF832-788C-4A30-A874-A72157BA0ED2}" type="datetimeFigureOut">
+              <a:rPr lang="en-US" smtClean="0"/>
+              <a:t>5/10/2025</a:t>
+            </a:fld>
+            <a:endParaRPr lang="en-US"/>
+          </a:p>
+        </p:txBody>
+      </p:sp>
+      <p:sp>
+        <p:nvSpPr>
+          <p:cNvPr id="6" name="Footer Placeholder 5">
+            <a:extLst>
+              <a:ext uri="{FF2B5EF4-FFF2-40B4-BE49-F238E27FC236}">
+                <a16:creationId xmlns:a16="http://schemas.microsoft.com/office/drawing/2014/main" id="{45AD8EC1-5C61-A951-C40F-46F9849668F8}"/>
+              </a:ext>
+            </a:extLst>
+          </p:cNvPr>
+          <p:cNvSpPr>
+            <a:spLocks noGrp="1"/>
+          </p:cNvSpPr>
+          <p:nvPr>
+            <p:ph type="ftr" sz="quarter" idx="11"/>
+          </p:nvPr>
+        </p:nvSpPr>
+        <p:spPr/>
+        <p:txBody>
+          <a:bodyPr/>
+          <a:lstStyle/>
+          <a:p>
+            <a:endParaRPr lang="en-US"/>
+          </a:p>
+        </p:txBody>
+      </p:sp>
+      <p:sp>
+        <p:nvSpPr>
+          <p:cNvPr id="7" name="Slide Number Placeholder 6">
+            <a:extLst>
+              <a:ext uri="{FF2B5EF4-FFF2-40B4-BE49-F238E27FC236}">
+                <a16:creationId xmlns:a16="http://schemas.microsoft.com/office/drawing/2014/main" id="{94B3A397-9A9C-DF8E-598F-4724E51B7396}"/>
+              </a:ext>
+            </a:extLst>
+          </p:cNvPr>
+          <p:cNvSpPr>
+            <a:spLocks noGrp="1"/>
+          </p:cNvSpPr>
+          <p:nvPr>
+            <p:ph type="sldNum" sz="quarter" idx="12"/>
+          </p:nvPr>
+        </p:nvSpPr>
+        <p:spPr/>
+        <p:txBody>
+          <a:bodyPr/>
+          <a:lstStyle/>
+          <a:p>
+            <a:fld id="{585491E3-9838-4B39-AEBF-3B863E6BCAE0}" type="slidenum">
+              <a:rPr lang="en-US" smtClean="0"/>
+              <a:t>‹#›</a:t>
+            </a:fld>
+            <a:endParaRPr lang="en-US"/>
+          </a:p>
+        </p:txBody>
+      </p:sp>
+    </p:spTree>
+    <p:extLst>
+      <p:ext uri="{BB962C8B-B14F-4D97-AF65-F5344CB8AC3E}">
+        <p14:creationId xmlns:p14="http://schemas.microsoft.com/office/powerpoint/2010/main" val="1328175584"/>
+      </p:ext>
+    </p:extLst>
+  </p:cSld>
+  <p:clrMapOvr>
+    <a:masterClrMapping/>
+  </p:clrMapOvr>
+</p:sldLayout>
+</file>
+
+<file path=ppt/slideLayouts/slideLayout21.xml><?xml version="1.0" encoding="utf-8"?>
+<p:sldLayout xmlns:a="http://schemas.openxmlformats.org/drawingml/2006/main" xmlns:r="http://schemas.openxmlformats.org/officeDocument/2006/relationships" xmlns:p="http://schemas.openxmlformats.org/presentationml/2006/main" type="twoTxTwoObj" preserve="1">
+  <p:cSld name="Comparison">
+    <p:spTree>
+      <p:nvGrpSpPr>
+        <p:cNvPr id="1" name=""/>
+        <p:cNvGrpSpPr/>
+        <p:nvPr/>
+      </p:nvGrpSpPr>
+      <p:grpSpPr>
+        <a:xfrm>
+          <a:off x="0" y="0"/>
+          <a:ext cx="0" cy="0"/>
+          <a:chOff x="0" y="0"/>
+          <a:chExt cx="0" cy="0"/>
+        </a:xfrm>
+      </p:grpSpPr>
+      <p:sp>
+        <p:nvSpPr>
+          <p:cNvPr id="2" name="Title 1">
+            <a:extLst>
+              <a:ext uri="{FF2B5EF4-FFF2-40B4-BE49-F238E27FC236}">
+                <a16:creationId xmlns:a16="http://schemas.microsoft.com/office/drawing/2014/main" id="{82E72AAB-A70D-7001-CA13-45A1A72A0D46}"/>
+              </a:ext>
+            </a:extLst>
+          </p:cNvPr>
+          <p:cNvSpPr>
+            <a:spLocks noGrp="1"/>
+          </p:cNvSpPr>
+          <p:nvPr>
+            <p:ph type="title"/>
+          </p:nvPr>
+        </p:nvSpPr>
+        <p:spPr>
+          <a:xfrm>
+            <a:off x="839788" y="365125"/>
+            <a:ext cx="10515600" cy="1325563"/>
+          </a:xfrm>
+        </p:spPr>
+        <p:txBody>
+          <a:bodyPr/>
+          <a:lstStyle/>
+          <a:p>
+            <a:r>
+              <a:rPr lang="en-US"/>
+              <a:t>Click to edit Master title style</a:t>
+            </a:r>
+          </a:p>
+        </p:txBody>
+      </p:sp>
+      <p:sp>
+        <p:nvSpPr>
+          <p:cNvPr id="3" name="Text Placeholder 2">
+            <a:extLst>
+              <a:ext uri="{FF2B5EF4-FFF2-40B4-BE49-F238E27FC236}">
+                <a16:creationId xmlns:a16="http://schemas.microsoft.com/office/drawing/2014/main" id="{25184B8F-87D7-2544-83F2-68167710230A}"/>
+              </a:ext>
+            </a:extLst>
+          </p:cNvPr>
+          <p:cNvSpPr>
+            <a:spLocks noGrp="1"/>
+          </p:cNvSpPr>
+          <p:nvPr>
+            <p:ph type="body" idx="1"/>
+          </p:nvPr>
+        </p:nvSpPr>
+        <p:spPr>
+          <a:xfrm>
+            <a:off x="839788" y="1681163"/>
+            <a:ext cx="5157787" cy="823912"/>
+          </a:xfrm>
+        </p:spPr>
+        <p:txBody>
+          <a:bodyPr anchor="b"/>
+          <a:lstStyle>
+            <a:lvl1pPr marL="0" indent="0">
+              <a:buNone/>
+              <a:defRPr sz="2400" b="1"/>
+            </a:lvl1pPr>
+            <a:lvl2pPr marL="457200" indent="0">
+              <a:buNone/>
+              <a:defRPr sz="2000" b="1"/>
+            </a:lvl2pPr>
+            <a:lvl3pPr marL="914400" indent="0">
+              <a:buNone/>
+              <a:defRPr sz="1800" b="1"/>
+            </a:lvl3pPr>
+            <a:lvl4pPr marL="1371600" indent="0">
+              <a:buNone/>
+              <a:defRPr sz="1600" b="1"/>
+            </a:lvl4pPr>
+            <a:lvl5pPr marL="1828800" indent="0">
+              <a:buNone/>
+              <a:defRPr sz="1600" b="1"/>
+            </a:lvl5pPr>
+            <a:lvl6pPr marL="2286000" indent="0">
+              <a:buNone/>
+              <a:defRPr sz="1600" b="1"/>
+            </a:lvl6pPr>
+            <a:lvl7pPr marL="2743200" indent="0">
+              <a:buNone/>
+              <a:defRPr sz="1600" b="1"/>
+            </a:lvl7pPr>
+            <a:lvl8pPr marL="3200400" indent="0">
+              <a:buNone/>
+              <a:defRPr sz="1600" b="1"/>
+            </a:lvl8pPr>
+            <a:lvl9pPr marL="3657600" indent="0">
+              <a:buNone/>
+              <a:defRPr sz="1600" b="1"/>
+            </a:lvl9pPr>
+          </a:lstStyle>
+          <a:p>
+            <a:pPr lvl="0"/>
+            <a:r>
+              <a:rPr lang="en-US"/>
+              <a:t>Click to edit Master text styles</a:t>
+            </a:r>
+          </a:p>
+        </p:txBody>
+      </p:sp>
+      <p:sp>
+        <p:nvSpPr>
+          <p:cNvPr id="4" name="Content Placeholder 3">
+            <a:extLst>
+              <a:ext uri="{FF2B5EF4-FFF2-40B4-BE49-F238E27FC236}">
+                <a16:creationId xmlns:a16="http://schemas.microsoft.com/office/drawing/2014/main" id="{07C12A0F-F411-514A-41B9-F24A67EE444B}"/>
+              </a:ext>
+            </a:extLst>
+          </p:cNvPr>
+          <p:cNvSpPr>
+            <a:spLocks noGrp="1"/>
+          </p:cNvSpPr>
+          <p:nvPr>
+            <p:ph sz="half" idx="2"/>
+          </p:nvPr>
+        </p:nvSpPr>
+        <p:spPr>
+          <a:xfrm>
+            <a:off x="839788" y="2505075"/>
+            <a:ext cx="5157787" cy="3684588"/>
+          </a:xfrm>
+        </p:spPr>
+        <p:txBody>
+          <a:bodyPr/>
+          <a:lstStyle/>
+          <a:p>
+            <a:pPr lvl="0"/>
+            <a:r>
+              <a:rPr lang="en-US"/>
+              <a:t>Click to edit Master text styles</a:t>
+            </a:r>
+          </a:p>
+          <a:p>
+            <a:pPr lvl="1"/>
+            <a:r>
+              <a:rPr lang="en-US"/>
+              <a:t>Second level</a:t>
+            </a:r>
+          </a:p>
+          <a:p>
+            <a:pPr lvl="2"/>
+            <a:r>
+              <a:rPr lang="en-US"/>
+              <a:t>Third level</a:t>
+            </a:r>
+          </a:p>
+          <a:p>
+            <a:pPr lvl="3"/>
+            <a:r>
+              <a:rPr lang="en-US"/>
+              <a:t>Fourth level</a:t>
+            </a:r>
+          </a:p>
+          <a:p>
+            <a:pPr lvl="4"/>
+            <a:r>
+              <a:rPr lang="en-US"/>
+              <a:t>Fifth level</a:t>
+            </a:r>
+          </a:p>
+        </p:txBody>
+      </p:sp>
+      <p:sp>
+        <p:nvSpPr>
+          <p:cNvPr id="5" name="Text Placeholder 4">
+            <a:extLst>
+              <a:ext uri="{FF2B5EF4-FFF2-40B4-BE49-F238E27FC236}">
+                <a16:creationId xmlns:a16="http://schemas.microsoft.com/office/drawing/2014/main" id="{72996525-1740-0EC3-BFE0-38FE8F3AD123}"/>
+              </a:ext>
+            </a:extLst>
+          </p:cNvPr>
+          <p:cNvSpPr>
+            <a:spLocks noGrp="1"/>
+          </p:cNvSpPr>
+          <p:nvPr>
+            <p:ph type="body" sz="quarter" idx="3"/>
+          </p:nvPr>
+        </p:nvSpPr>
+        <p:spPr>
+          <a:xfrm>
+            <a:off x="6172200" y="1681163"/>
+            <a:ext cx="5183188" cy="823912"/>
+          </a:xfrm>
+        </p:spPr>
+        <p:txBody>
+          <a:bodyPr anchor="b"/>
+          <a:lstStyle>
+            <a:lvl1pPr marL="0" indent="0">
+              <a:buNone/>
+              <a:defRPr sz="2400" b="1"/>
+            </a:lvl1pPr>
+            <a:lvl2pPr marL="457200" indent="0">
+              <a:buNone/>
+              <a:defRPr sz="2000" b="1"/>
+            </a:lvl2pPr>
+            <a:lvl3pPr marL="914400" indent="0">
+              <a:buNone/>
+              <a:defRPr sz="1800" b="1"/>
+            </a:lvl3pPr>
+            <a:lvl4pPr marL="1371600" indent="0">
+              <a:buNone/>
+              <a:defRPr sz="1600" b="1"/>
+            </a:lvl4pPr>
+            <a:lvl5pPr marL="1828800" indent="0">
+              <a:buNone/>
+              <a:defRPr sz="1600" b="1"/>
+            </a:lvl5pPr>
+            <a:lvl6pPr marL="2286000" indent="0">
+              <a:buNone/>
+              <a:defRPr sz="1600" b="1"/>
+            </a:lvl6pPr>
+            <a:lvl7pPr marL="2743200" indent="0">
+              <a:buNone/>
+              <a:defRPr sz="1600" b="1"/>
+            </a:lvl7pPr>
+            <a:lvl8pPr marL="3200400" indent="0">
+              <a:buNone/>
+              <a:defRPr sz="1600" b="1"/>
+            </a:lvl8pPr>
+            <a:lvl9pPr marL="3657600" indent="0">
+              <a:buNone/>
+              <a:defRPr sz="1600" b="1"/>
+            </a:lvl9pPr>
+          </a:lstStyle>
+          <a:p>
+            <a:pPr lvl="0"/>
+            <a:r>
+              <a:rPr lang="en-US"/>
+              <a:t>Click to edit Master text styles</a:t>
+            </a:r>
+          </a:p>
+        </p:txBody>
+      </p:sp>
+      <p:sp>
+        <p:nvSpPr>
+          <p:cNvPr id="6" name="Content Placeholder 5">
+            <a:extLst>
+              <a:ext uri="{FF2B5EF4-FFF2-40B4-BE49-F238E27FC236}">
+                <a16:creationId xmlns:a16="http://schemas.microsoft.com/office/drawing/2014/main" id="{D883692C-E1BF-6155-0666-92A40A9CCBA3}"/>
+              </a:ext>
+            </a:extLst>
+          </p:cNvPr>
+          <p:cNvSpPr>
+            <a:spLocks noGrp="1"/>
+          </p:cNvSpPr>
+          <p:nvPr>
+            <p:ph sz="quarter" idx="4"/>
+          </p:nvPr>
+        </p:nvSpPr>
+        <p:spPr>
+          <a:xfrm>
+            <a:off x="6172200" y="2505075"/>
+            <a:ext cx="5183188" cy="3684588"/>
+          </a:xfrm>
+        </p:spPr>
+        <p:txBody>
+          <a:bodyPr/>
+          <a:lstStyle/>
+          <a:p>
+            <a:pPr lvl="0"/>
+            <a:r>
+              <a:rPr lang="en-US"/>
+              <a:t>Click to edit Master text styles</a:t>
+            </a:r>
+          </a:p>
+          <a:p>
+            <a:pPr lvl="1"/>
+            <a:r>
+              <a:rPr lang="en-US"/>
+              <a:t>Second level</a:t>
+            </a:r>
+          </a:p>
+          <a:p>
+            <a:pPr lvl="2"/>
+            <a:r>
+              <a:rPr lang="en-US"/>
+              <a:t>Third level</a:t>
+            </a:r>
+          </a:p>
+          <a:p>
+            <a:pPr lvl="3"/>
+            <a:r>
+              <a:rPr lang="en-US"/>
+              <a:t>Fourth level</a:t>
+            </a:r>
+          </a:p>
+          <a:p>
+            <a:pPr lvl="4"/>
+            <a:r>
+              <a:rPr lang="en-US"/>
+              <a:t>Fifth level</a:t>
+            </a:r>
+          </a:p>
+        </p:txBody>
+      </p:sp>
+      <p:sp>
+        <p:nvSpPr>
+          <p:cNvPr id="7" name="Date Placeholder 6">
+            <a:extLst>
+              <a:ext uri="{FF2B5EF4-FFF2-40B4-BE49-F238E27FC236}">
+                <a16:creationId xmlns:a16="http://schemas.microsoft.com/office/drawing/2014/main" id="{88B14E80-8307-A854-8CB3-4497297BE3EC}"/>
+              </a:ext>
+            </a:extLst>
+          </p:cNvPr>
+          <p:cNvSpPr>
+            <a:spLocks noGrp="1"/>
+          </p:cNvSpPr>
+          <p:nvPr>
+            <p:ph type="dt" sz="half" idx="10"/>
+          </p:nvPr>
+        </p:nvSpPr>
+        <p:spPr/>
+        <p:txBody>
+          <a:bodyPr/>
+          <a:lstStyle/>
+          <a:p>
+            <a:fld id="{A40CF832-788C-4A30-A874-A72157BA0ED2}" type="datetimeFigureOut">
+              <a:rPr lang="en-US" smtClean="0"/>
+              <a:t>5/10/2025</a:t>
+            </a:fld>
+            <a:endParaRPr lang="en-US"/>
+          </a:p>
+        </p:txBody>
+      </p:sp>
+      <p:sp>
+        <p:nvSpPr>
+          <p:cNvPr id="8" name="Footer Placeholder 7">
+            <a:extLst>
+              <a:ext uri="{FF2B5EF4-FFF2-40B4-BE49-F238E27FC236}">
+                <a16:creationId xmlns:a16="http://schemas.microsoft.com/office/drawing/2014/main" id="{37C69997-D89A-503A-2D29-EC2BE4923306}"/>
+              </a:ext>
+            </a:extLst>
+          </p:cNvPr>
+          <p:cNvSpPr>
+            <a:spLocks noGrp="1"/>
+          </p:cNvSpPr>
+          <p:nvPr>
+            <p:ph type="ftr" sz="quarter" idx="11"/>
+          </p:nvPr>
+        </p:nvSpPr>
+        <p:spPr/>
+        <p:txBody>
+          <a:bodyPr/>
+          <a:lstStyle/>
+          <a:p>
+            <a:endParaRPr lang="en-US"/>
+          </a:p>
+        </p:txBody>
+      </p:sp>
+      <p:sp>
+        <p:nvSpPr>
+          <p:cNvPr id="9" name="Slide Number Placeholder 8">
+            <a:extLst>
+              <a:ext uri="{FF2B5EF4-FFF2-40B4-BE49-F238E27FC236}">
+                <a16:creationId xmlns:a16="http://schemas.microsoft.com/office/drawing/2014/main" id="{0AFCE766-4360-CD39-023D-6ABAD9576A9C}"/>
+              </a:ext>
+            </a:extLst>
+          </p:cNvPr>
+          <p:cNvSpPr>
+            <a:spLocks noGrp="1"/>
+          </p:cNvSpPr>
+          <p:nvPr>
+            <p:ph type="sldNum" sz="quarter" idx="12"/>
+          </p:nvPr>
+        </p:nvSpPr>
+        <p:spPr/>
+        <p:txBody>
+          <a:bodyPr/>
+          <a:lstStyle/>
+          <a:p>
+            <a:fld id="{585491E3-9838-4B39-AEBF-3B863E6BCAE0}" type="slidenum">
+              <a:rPr lang="en-US" smtClean="0"/>
+              <a:t>‹#›</a:t>
+            </a:fld>
+            <a:endParaRPr lang="en-US"/>
+          </a:p>
+        </p:txBody>
+      </p:sp>
+    </p:spTree>
+    <p:extLst>
+      <p:ext uri="{BB962C8B-B14F-4D97-AF65-F5344CB8AC3E}">
+        <p14:creationId xmlns:p14="http://schemas.microsoft.com/office/powerpoint/2010/main" val="1445308030"/>
+      </p:ext>
+    </p:extLst>
+  </p:cSld>
+  <p:clrMapOvr>
+    <a:masterClrMapping/>
+  </p:clrMapOvr>
+</p:sldLayout>
+</file>
+
+<file path=ppt/slideLayouts/slideLayout22.xml><?xml version="1.0" encoding="utf-8"?>
+<p:sldLayout xmlns:a="http://schemas.openxmlformats.org/drawingml/2006/main" xmlns:r="http://schemas.openxmlformats.org/officeDocument/2006/relationships" xmlns:p="http://schemas.openxmlformats.org/presentationml/2006/main" type="titleOnly" preserve="1">
+  <p:cSld name="Title Only">
+    <p:spTree>
+      <p:nvGrpSpPr>
+        <p:cNvPr id="1" name=""/>
+        <p:cNvGrpSpPr/>
+        <p:nvPr/>
+      </p:nvGrpSpPr>
+      <p:grpSpPr>
+        <a:xfrm>
+          <a:off x="0" y="0"/>
+          <a:ext cx="0" cy="0"/>
+          <a:chOff x="0" y="0"/>
+          <a:chExt cx="0" cy="0"/>
+        </a:xfrm>
+      </p:grpSpPr>
+      <p:sp>
+        <p:nvSpPr>
+          <p:cNvPr id="2" name="Title 1">
+            <a:extLst>
+              <a:ext uri="{FF2B5EF4-FFF2-40B4-BE49-F238E27FC236}">
+                <a16:creationId xmlns:a16="http://schemas.microsoft.com/office/drawing/2014/main" id="{74DE2385-1093-2183-F7B5-F3FB6E1B49CB}"/>
+              </a:ext>
+            </a:extLst>
+          </p:cNvPr>
+          <p:cNvSpPr>
+            <a:spLocks noGrp="1"/>
+          </p:cNvSpPr>
+          <p:nvPr>
+            <p:ph type="title"/>
+          </p:nvPr>
+        </p:nvSpPr>
+        <p:spPr/>
+        <p:txBody>
+          <a:bodyPr/>
+          <a:lstStyle/>
+          <a:p>
+            <a:r>
+              <a:rPr lang="en-US"/>
+              <a:t>Click to edit Master title style</a:t>
+            </a:r>
+          </a:p>
+        </p:txBody>
+      </p:sp>
+      <p:sp>
+        <p:nvSpPr>
+          <p:cNvPr id="3" name="Date Placeholder 2">
+            <a:extLst>
+              <a:ext uri="{FF2B5EF4-FFF2-40B4-BE49-F238E27FC236}">
+                <a16:creationId xmlns:a16="http://schemas.microsoft.com/office/drawing/2014/main" id="{AB87E04E-8382-5C5F-7DB9-9F85BA2ED324}"/>
+              </a:ext>
+            </a:extLst>
+          </p:cNvPr>
+          <p:cNvSpPr>
+            <a:spLocks noGrp="1"/>
+          </p:cNvSpPr>
+          <p:nvPr>
+            <p:ph type="dt" sz="half" idx="10"/>
+          </p:nvPr>
+        </p:nvSpPr>
+        <p:spPr/>
+        <p:txBody>
+          <a:bodyPr/>
+          <a:lstStyle/>
+          <a:p>
+            <a:fld id="{A40CF832-788C-4A30-A874-A72157BA0ED2}" type="datetimeFigureOut">
+              <a:rPr lang="en-US" smtClean="0"/>
+              <a:t>5/10/2025</a:t>
+            </a:fld>
+            <a:endParaRPr lang="en-US"/>
+          </a:p>
+        </p:txBody>
+      </p:sp>
+      <p:sp>
+        <p:nvSpPr>
+          <p:cNvPr id="4" name="Footer Placeholder 3">
+            <a:extLst>
+              <a:ext uri="{FF2B5EF4-FFF2-40B4-BE49-F238E27FC236}">
+                <a16:creationId xmlns:a16="http://schemas.microsoft.com/office/drawing/2014/main" id="{2AB74B82-B851-9186-2A46-4C8AAA938E24}"/>
+              </a:ext>
+            </a:extLst>
+          </p:cNvPr>
+          <p:cNvSpPr>
+            <a:spLocks noGrp="1"/>
+          </p:cNvSpPr>
+          <p:nvPr>
+            <p:ph type="ftr" sz="quarter" idx="11"/>
+          </p:nvPr>
+        </p:nvSpPr>
+        <p:spPr/>
+        <p:txBody>
+          <a:bodyPr/>
+          <a:lstStyle/>
+          <a:p>
+            <a:endParaRPr lang="en-US"/>
+          </a:p>
+        </p:txBody>
+      </p:sp>
+      <p:sp>
+        <p:nvSpPr>
+          <p:cNvPr id="5" name="Slide Number Placeholder 4">
+            <a:extLst>
+              <a:ext uri="{FF2B5EF4-FFF2-40B4-BE49-F238E27FC236}">
+                <a16:creationId xmlns:a16="http://schemas.microsoft.com/office/drawing/2014/main" id="{9FE9DDB3-5810-FF9D-7E20-A9CFA7ADBA82}"/>
+              </a:ext>
+            </a:extLst>
+          </p:cNvPr>
+          <p:cNvSpPr>
+            <a:spLocks noGrp="1"/>
+          </p:cNvSpPr>
+          <p:nvPr>
+            <p:ph type="sldNum" sz="quarter" idx="12"/>
+          </p:nvPr>
+        </p:nvSpPr>
+        <p:spPr/>
+        <p:txBody>
+          <a:bodyPr/>
+          <a:lstStyle/>
+          <a:p>
+            <a:fld id="{585491E3-9838-4B39-AEBF-3B863E6BCAE0}" type="slidenum">
+              <a:rPr lang="en-US" smtClean="0"/>
+              <a:t>‹#›</a:t>
+            </a:fld>
+            <a:endParaRPr lang="en-US"/>
+          </a:p>
+        </p:txBody>
+      </p:sp>
+    </p:spTree>
+    <p:extLst>
+      <p:ext uri="{BB962C8B-B14F-4D97-AF65-F5344CB8AC3E}">
+        <p14:creationId xmlns:p14="http://schemas.microsoft.com/office/powerpoint/2010/main" val="4013479975"/>
+      </p:ext>
+    </p:extLst>
+  </p:cSld>
+  <p:clrMapOvr>
+    <a:masterClrMapping/>
+  </p:clrMapOvr>
+</p:sldLayout>
+</file>
+
+<file path=ppt/slideLayouts/slideLayout23.xml><?xml version="1.0" encoding="utf-8"?>
+<p:sldLayout xmlns:a="http://schemas.openxmlformats.org/drawingml/2006/main" xmlns:r="http://schemas.openxmlformats.org/officeDocument/2006/relationships" xmlns:p="http://schemas.openxmlformats.org/presentationml/2006/main" type="blank" preserve="1">
+  <p:cSld name="Blank">
+    <p:spTree>
+      <p:nvGrpSpPr>
+        <p:cNvPr id="1" name=""/>
+        <p:cNvGrpSpPr/>
+        <p:nvPr/>
+      </p:nvGrpSpPr>
+      <p:grpSpPr>
+        <a:xfrm>
+          <a:off x="0" y="0"/>
+          <a:ext cx="0" cy="0"/>
+          <a:chOff x="0" y="0"/>
+          <a:chExt cx="0" cy="0"/>
+        </a:xfrm>
+      </p:grpSpPr>
+      <p:sp>
+        <p:nvSpPr>
+          <p:cNvPr id="2" name="Date Placeholder 1">
+            <a:extLst>
+              <a:ext uri="{FF2B5EF4-FFF2-40B4-BE49-F238E27FC236}">
+                <a16:creationId xmlns:a16="http://schemas.microsoft.com/office/drawing/2014/main" id="{EC827F9E-8A0B-70A9-5DE0-65D8B30E90F6}"/>
+              </a:ext>
+            </a:extLst>
+          </p:cNvPr>
+          <p:cNvSpPr>
+            <a:spLocks noGrp="1"/>
+          </p:cNvSpPr>
+          <p:nvPr>
+            <p:ph type="dt" sz="half" idx="10"/>
+          </p:nvPr>
+        </p:nvSpPr>
+        <p:spPr/>
+        <p:txBody>
+          <a:bodyPr/>
+          <a:lstStyle/>
+          <a:p>
+            <a:fld id="{A40CF832-788C-4A30-A874-A72157BA0ED2}" type="datetimeFigureOut">
+              <a:rPr lang="en-US" smtClean="0"/>
+              <a:t>5/10/2025</a:t>
+            </a:fld>
+            <a:endParaRPr lang="en-US"/>
+          </a:p>
+        </p:txBody>
+      </p:sp>
+      <p:sp>
+        <p:nvSpPr>
+          <p:cNvPr id="3" name="Footer Placeholder 2">
+            <a:extLst>
+              <a:ext uri="{FF2B5EF4-FFF2-40B4-BE49-F238E27FC236}">
+                <a16:creationId xmlns:a16="http://schemas.microsoft.com/office/drawing/2014/main" id="{5B481B6D-E527-6F1D-CA4F-864D4F8946B2}"/>
+              </a:ext>
+            </a:extLst>
+          </p:cNvPr>
+          <p:cNvSpPr>
+            <a:spLocks noGrp="1"/>
+          </p:cNvSpPr>
+          <p:nvPr>
+            <p:ph type="ftr" sz="quarter" idx="11"/>
+          </p:nvPr>
+        </p:nvSpPr>
+        <p:spPr/>
+        <p:txBody>
+          <a:bodyPr/>
+          <a:lstStyle/>
+          <a:p>
+            <a:endParaRPr lang="en-US"/>
+          </a:p>
+        </p:txBody>
+      </p:sp>
+      <p:sp>
+        <p:nvSpPr>
+          <p:cNvPr id="4" name="Slide Number Placeholder 3">
+            <a:extLst>
+              <a:ext uri="{FF2B5EF4-FFF2-40B4-BE49-F238E27FC236}">
+                <a16:creationId xmlns:a16="http://schemas.microsoft.com/office/drawing/2014/main" id="{89DE466B-B7D4-CDBF-0DC2-D36B30638A4F}"/>
+              </a:ext>
+            </a:extLst>
+          </p:cNvPr>
+          <p:cNvSpPr>
+            <a:spLocks noGrp="1"/>
+          </p:cNvSpPr>
+          <p:nvPr>
+            <p:ph type="sldNum" sz="quarter" idx="12"/>
+          </p:nvPr>
+        </p:nvSpPr>
+        <p:spPr/>
+        <p:txBody>
+          <a:bodyPr/>
+          <a:lstStyle/>
+          <a:p>
+            <a:fld id="{585491E3-9838-4B39-AEBF-3B863E6BCAE0}" type="slidenum">
+              <a:rPr lang="en-US" smtClean="0"/>
+              <a:t>‹#›</a:t>
+            </a:fld>
+            <a:endParaRPr lang="en-US"/>
+          </a:p>
+        </p:txBody>
+      </p:sp>
+    </p:spTree>
+    <p:extLst>
+      <p:ext uri="{BB962C8B-B14F-4D97-AF65-F5344CB8AC3E}">
+        <p14:creationId xmlns:p14="http://schemas.microsoft.com/office/powerpoint/2010/main" val="1322768652"/>
+      </p:ext>
+    </p:extLst>
+  </p:cSld>
+  <p:clrMapOvr>
+    <a:masterClrMapping/>
+  </p:clrMapOvr>
+</p:sldLayout>
+</file>
+
+<file path=ppt/slideLayouts/slideLayout24.xml><?xml version="1.0" encoding="utf-8"?>
+<p:sldLayout xmlns:a="http://schemas.openxmlformats.org/drawingml/2006/main" xmlns:r="http://schemas.openxmlformats.org/officeDocument/2006/relationships" xmlns:p="http://schemas.openxmlformats.org/presentationml/2006/main" type="objTx" preserve="1">
+  <p:cSld name="Content with Caption">
+    <p:spTree>
+      <p:nvGrpSpPr>
+        <p:cNvPr id="1" name=""/>
+        <p:cNvGrpSpPr/>
+        <p:nvPr/>
+      </p:nvGrpSpPr>
+      <p:grpSpPr>
+        <a:xfrm>
+          <a:off x="0" y="0"/>
+          <a:ext cx="0" cy="0"/>
+          <a:chOff x="0" y="0"/>
+          <a:chExt cx="0" cy="0"/>
+        </a:xfrm>
+      </p:grpSpPr>
+      <p:sp>
+        <p:nvSpPr>
+          <p:cNvPr id="2" name="Title 1">
+            <a:extLst>
+              <a:ext uri="{FF2B5EF4-FFF2-40B4-BE49-F238E27FC236}">
+                <a16:creationId xmlns:a16="http://schemas.microsoft.com/office/drawing/2014/main" id="{9B5095B8-D80B-1AAD-7703-5CE2154C90F8}"/>
+              </a:ext>
+            </a:extLst>
+          </p:cNvPr>
+          <p:cNvSpPr>
+            <a:spLocks noGrp="1"/>
+          </p:cNvSpPr>
+          <p:nvPr>
+            <p:ph type="title"/>
+          </p:nvPr>
+        </p:nvSpPr>
+        <p:spPr>
+          <a:xfrm>
+            <a:off x="839788" y="457200"/>
+            <a:ext cx="3932237" cy="1600200"/>
+          </a:xfrm>
+        </p:spPr>
+        <p:txBody>
+          <a:bodyPr anchor="b"/>
+          <a:lstStyle>
+            <a:lvl1pPr>
+              <a:defRPr sz="3200"/>
+            </a:lvl1pPr>
+          </a:lstStyle>
+          <a:p>
+            <a:r>
+              <a:rPr lang="en-US"/>
+              <a:t>Click to edit Master title style</a:t>
+            </a:r>
+          </a:p>
+        </p:txBody>
+      </p:sp>
+      <p:sp>
+        <p:nvSpPr>
+          <p:cNvPr id="3" name="Content Placeholder 2">
+            <a:extLst>
+              <a:ext uri="{FF2B5EF4-FFF2-40B4-BE49-F238E27FC236}">
+                <a16:creationId xmlns:a16="http://schemas.microsoft.com/office/drawing/2014/main" id="{6AB2E391-EB7D-CB6C-5398-07D39544129F}"/>
+              </a:ext>
+            </a:extLst>
+          </p:cNvPr>
+          <p:cNvSpPr>
+            <a:spLocks noGrp="1"/>
+          </p:cNvSpPr>
+          <p:nvPr>
+            <p:ph idx="1"/>
+          </p:nvPr>
+        </p:nvSpPr>
+        <p:spPr>
+          <a:xfrm>
+            <a:off x="5183188" y="987425"/>
+            <a:ext cx="6172200" cy="4873625"/>
+          </a:xfrm>
+        </p:spPr>
+        <p:txBody>
+          <a:bodyPr/>
+          <a:lstStyle>
+            <a:lvl1pPr>
+              <a:defRPr sz="3200"/>
+            </a:lvl1pPr>
+            <a:lvl2pPr>
+              <a:defRPr sz="2800"/>
+            </a:lvl2pPr>
+            <a:lvl3pPr>
+              <a:defRPr sz="2400"/>
+            </a:lvl3pPr>
+            <a:lvl4pPr>
+              <a:defRPr sz="2000"/>
+            </a:lvl4pPr>
+            <a:lvl5pPr>
+              <a:defRPr sz="2000"/>
+            </a:lvl5pPr>
+            <a:lvl6pPr>
+              <a:defRPr sz="2000"/>
+            </a:lvl6pPr>
+            <a:lvl7pPr>
+              <a:defRPr sz="2000"/>
+            </a:lvl7pPr>
+            <a:lvl8pPr>
+              <a:defRPr sz="2000"/>
+            </a:lvl8pPr>
+            <a:lvl9pPr>
+              <a:defRPr sz="2000"/>
+            </a:lvl9pPr>
+          </a:lstStyle>
+          <a:p>
+            <a:pPr lvl="0"/>
+            <a:r>
+              <a:rPr lang="en-US"/>
+              <a:t>Click to edit Master text styles</a:t>
+            </a:r>
+          </a:p>
+          <a:p>
+            <a:pPr lvl="1"/>
+            <a:r>
+              <a:rPr lang="en-US"/>
+              <a:t>Second level</a:t>
+            </a:r>
+          </a:p>
+          <a:p>
+            <a:pPr lvl="2"/>
+            <a:r>
+              <a:rPr lang="en-US"/>
+              <a:t>Third level</a:t>
+            </a:r>
+          </a:p>
+          <a:p>
+            <a:pPr lvl="3"/>
+            <a:r>
+              <a:rPr lang="en-US"/>
+              <a:t>Fourth level</a:t>
+            </a:r>
+          </a:p>
+          <a:p>
+            <a:pPr lvl="4"/>
+            <a:r>
+              <a:rPr lang="en-US"/>
+              <a:t>Fifth level</a:t>
+            </a:r>
+          </a:p>
+        </p:txBody>
+      </p:sp>
+      <p:sp>
+        <p:nvSpPr>
+          <p:cNvPr id="4" name="Text Placeholder 3">
+            <a:extLst>
+              <a:ext uri="{FF2B5EF4-FFF2-40B4-BE49-F238E27FC236}">
+                <a16:creationId xmlns:a16="http://schemas.microsoft.com/office/drawing/2014/main" id="{12E6B379-D720-CF16-ED19-9AAE4F7A1281}"/>
+              </a:ext>
+            </a:extLst>
+          </p:cNvPr>
+          <p:cNvSpPr>
+            <a:spLocks noGrp="1"/>
+          </p:cNvSpPr>
+          <p:nvPr>
+            <p:ph type="body" sz="half" idx="2"/>
+          </p:nvPr>
+        </p:nvSpPr>
+        <p:spPr>
+          <a:xfrm>
+            <a:off x="839788" y="2057400"/>
+            <a:ext cx="3932237" cy="3811588"/>
+          </a:xfrm>
+        </p:spPr>
+        <p:txBody>
+          <a:bodyPr/>
+          <a:lstStyle>
+            <a:lvl1pPr marL="0" indent="0">
+              <a:buNone/>
+              <a:defRPr sz="1600"/>
+            </a:lvl1pPr>
+            <a:lvl2pPr marL="457200" indent="0">
+              <a:buNone/>
+              <a:defRPr sz="1400"/>
+            </a:lvl2pPr>
+            <a:lvl3pPr marL="914400" indent="0">
+              <a:buNone/>
+              <a:defRPr sz="1200"/>
+            </a:lvl3pPr>
+            <a:lvl4pPr marL="1371600" indent="0">
+              <a:buNone/>
+              <a:defRPr sz="1000"/>
+            </a:lvl4pPr>
+            <a:lvl5pPr marL="1828800" indent="0">
+              <a:buNone/>
+              <a:defRPr sz="1000"/>
+            </a:lvl5pPr>
+            <a:lvl6pPr marL="2286000" indent="0">
+              <a:buNone/>
+              <a:defRPr sz="1000"/>
+            </a:lvl6pPr>
+            <a:lvl7pPr marL="2743200" indent="0">
+              <a:buNone/>
+              <a:defRPr sz="1000"/>
+            </a:lvl7pPr>
+            <a:lvl8pPr marL="3200400" indent="0">
+              <a:buNone/>
+              <a:defRPr sz="1000"/>
+            </a:lvl8pPr>
+            <a:lvl9pPr marL="3657600" indent="0">
+              <a:buNone/>
+              <a:defRPr sz="1000"/>
+            </a:lvl9pPr>
+          </a:lstStyle>
+          <a:p>
+            <a:pPr lvl="0"/>
+            <a:r>
+              <a:rPr lang="en-US"/>
+              <a:t>Click to edit Master text styles</a:t>
+            </a:r>
+          </a:p>
+        </p:txBody>
+      </p:sp>
+      <p:sp>
+        <p:nvSpPr>
+          <p:cNvPr id="5" name="Date Placeholder 4">
+            <a:extLst>
+              <a:ext uri="{FF2B5EF4-FFF2-40B4-BE49-F238E27FC236}">
+                <a16:creationId xmlns:a16="http://schemas.microsoft.com/office/drawing/2014/main" id="{C1186FFA-01E2-73C0-2AD5-12E1AFA21309}"/>
+              </a:ext>
+            </a:extLst>
+          </p:cNvPr>
+          <p:cNvSpPr>
+            <a:spLocks noGrp="1"/>
+          </p:cNvSpPr>
+          <p:nvPr>
+            <p:ph type="dt" sz="half" idx="10"/>
+          </p:nvPr>
+        </p:nvSpPr>
+        <p:spPr/>
+        <p:txBody>
+          <a:bodyPr/>
+          <a:lstStyle/>
+          <a:p>
+            <a:fld id="{A40CF832-788C-4A30-A874-A72157BA0ED2}" type="datetimeFigureOut">
+              <a:rPr lang="en-US" smtClean="0"/>
+              <a:t>5/10/2025</a:t>
+            </a:fld>
+            <a:endParaRPr lang="en-US"/>
+          </a:p>
+        </p:txBody>
+      </p:sp>
+      <p:sp>
+        <p:nvSpPr>
+          <p:cNvPr id="6" name="Footer Placeholder 5">
+            <a:extLst>
+              <a:ext uri="{FF2B5EF4-FFF2-40B4-BE49-F238E27FC236}">
+                <a16:creationId xmlns:a16="http://schemas.microsoft.com/office/drawing/2014/main" id="{CA104D07-2FFB-0FE6-3B11-3608BF680DA4}"/>
+              </a:ext>
+            </a:extLst>
+          </p:cNvPr>
+          <p:cNvSpPr>
+            <a:spLocks noGrp="1"/>
+          </p:cNvSpPr>
+          <p:nvPr>
+            <p:ph type="ftr" sz="quarter" idx="11"/>
+          </p:nvPr>
+        </p:nvSpPr>
+        <p:spPr/>
+        <p:txBody>
+          <a:bodyPr/>
+          <a:lstStyle/>
+          <a:p>
+            <a:endParaRPr lang="en-US"/>
+          </a:p>
+        </p:txBody>
+      </p:sp>
+      <p:sp>
+        <p:nvSpPr>
+          <p:cNvPr id="7" name="Slide Number Placeholder 6">
+            <a:extLst>
+              <a:ext uri="{FF2B5EF4-FFF2-40B4-BE49-F238E27FC236}">
+                <a16:creationId xmlns:a16="http://schemas.microsoft.com/office/drawing/2014/main" id="{1F5A4AD7-6E95-C824-857F-4247F2341426}"/>
+              </a:ext>
+            </a:extLst>
+          </p:cNvPr>
+          <p:cNvSpPr>
+            <a:spLocks noGrp="1"/>
+          </p:cNvSpPr>
+          <p:nvPr>
+            <p:ph type="sldNum" sz="quarter" idx="12"/>
+          </p:nvPr>
+        </p:nvSpPr>
+        <p:spPr/>
+        <p:txBody>
+          <a:bodyPr/>
+          <a:lstStyle/>
+          <a:p>
+            <a:fld id="{585491E3-9838-4B39-AEBF-3B863E6BCAE0}" type="slidenum">
+              <a:rPr lang="en-US" smtClean="0"/>
+              <a:t>‹#›</a:t>
+            </a:fld>
+            <a:endParaRPr lang="en-US"/>
+          </a:p>
+        </p:txBody>
+      </p:sp>
+    </p:spTree>
+    <p:extLst>
+      <p:ext uri="{BB962C8B-B14F-4D97-AF65-F5344CB8AC3E}">
+        <p14:creationId xmlns:p14="http://schemas.microsoft.com/office/powerpoint/2010/main" val="1895663295"/>
+      </p:ext>
+    </p:extLst>
+  </p:cSld>
+  <p:clrMapOvr>
+    <a:masterClrMapping/>
+  </p:clrMapOvr>
+</p:sldLayout>
+</file>
+
+<file path=ppt/slideLayouts/slideLayout25.xml><?xml version="1.0" encoding="utf-8"?>
+<p:sldLayout xmlns:a="http://schemas.openxmlformats.org/drawingml/2006/main" xmlns:r="http://schemas.openxmlformats.org/officeDocument/2006/relationships" xmlns:p="http://schemas.openxmlformats.org/presentationml/2006/main" type="picTx" preserve="1">
+  <p:cSld name="Picture with Caption">
+    <p:spTree>
+      <p:nvGrpSpPr>
+        <p:cNvPr id="1" name=""/>
+        <p:cNvGrpSpPr/>
+        <p:nvPr/>
+      </p:nvGrpSpPr>
+      <p:grpSpPr>
+        <a:xfrm>
+          <a:off x="0" y="0"/>
+          <a:ext cx="0" cy="0"/>
+          <a:chOff x="0" y="0"/>
+          <a:chExt cx="0" cy="0"/>
+        </a:xfrm>
+      </p:grpSpPr>
+      <p:sp>
+        <p:nvSpPr>
+          <p:cNvPr id="2" name="Title 1">
+            <a:extLst>
+              <a:ext uri="{FF2B5EF4-FFF2-40B4-BE49-F238E27FC236}">
+                <a16:creationId xmlns:a16="http://schemas.microsoft.com/office/drawing/2014/main" id="{9C819ABC-2F1D-BA90-E5A5-10CD9A9FBED4}"/>
+              </a:ext>
+            </a:extLst>
+          </p:cNvPr>
+          <p:cNvSpPr>
+            <a:spLocks noGrp="1"/>
+          </p:cNvSpPr>
+          <p:nvPr>
+            <p:ph type="title"/>
+          </p:nvPr>
+        </p:nvSpPr>
+        <p:spPr>
+          <a:xfrm>
+            <a:off x="839788" y="457200"/>
+            <a:ext cx="3932237" cy="1600200"/>
+          </a:xfrm>
+        </p:spPr>
+        <p:txBody>
+          <a:bodyPr anchor="b"/>
+          <a:lstStyle>
+            <a:lvl1pPr>
+              <a:defRPr sz="3200"/>
+            </a:lvl1pPr>
+          </a:lstStyle>
+          <a:p>
+            <a:r>
+              <a:rPr lang="en-US"/>
+              <a:t>Click to edit Master title style</a:t>
+            </a:r>
+          </a:p>
+        </p:txBody>
+      </p:sp>
+      <p:sp>
+        <p:nvSpPr>
+          <p:cNvPr id="3" name="Picture Placeholder 2">
+            <a:extLst>
+              <a:ext uri="{FF2B5EF4-FFF2-40B4-BE49-F238E27FC236}">
+                <a16:creationId xmlns:a16="http://schemas.microsoft.com/office/drawing/2014/main" id="{88E4A561-6E11-14E0-D957-5331D733C184}"/>
+              </a:ext>
+            </a:extLst>
+          </p:cNvPr>
+          <p:cNvSpPr>
+            <a:spLocks noGrp="1"/>
+          </p:cNvSpPr>
+          <p:nvPr>
+            <p:ph type="pic" idx="1"/>
+          </p:nvPr>
+        </p:nvSpPr>
+        <p:spPr>
+          <a:xfrm>
+            <a:off x="5183188" y="987425"/>
+            <a:ext cx="6172200" cy="4873625"/>
+          </a:xfrm>
+        </p:spPr>
+        <p:txBody>
+          <a:bodyPr/>
+          <a:lstStyle>
+            <a:lvl1pPr marL="0" indent="0">
+              <a:buNone/>
+              <a:defRPr sz="3200"/>
+            </a:lvl1pPr>
+            <a:lvl2pPr marL="457200" indent="0">
+              <a:buNone/>
+              <a:defRPr sz="2800"/>
+            </a:lvl2pPr>
+            <a:lvl3pPr marL="914400" indent="0">
+              <a:buNone/>
+              <a:defRPr sz="2400"/>
+            </a:lvl3pPr>
+            <a:lvl4pPr marL="1371600" indent="0">
+              <a:buNone/>
+              <a:defRPr sz="2000"/>
+            </a:lvl4pPr>
+            <a:lvl5pPr marL="1828800" indent="0">
+              <a:buNone/>
+              <a:defRPr sz="2000"/>
+            </a:lvl5pPr>
+            <a:lvl6pPr marL="2286000" indent="0">
+              <a:buNone/>
+              <a:defRPr sz="2000"/>
+            </a:lvl6pPr>
+            <a:lvl7pPr marL="2743200" indent="0">
+              <a:buNone/>
+              <a:defRPr sz="2000"/>
+            </a:lvl7pPr>
+            <a:lvl8pPr marL="3200400" indent="0">
+              <a:buNone/>
+              <a:defRPr sz="2000"/>
+            </a:lvl8pPr>
+            <a:lvl9pPr marL="3657600" indent="0">
+              <a:buNone/>
+              <a:defRPr sz="2000"/>
+            </a:lvl9pPr>
+          </a:lstStyle>
+          <a:p>
+            <a:endParaRPr lang="en-US"/>
+          </a:p>
+        </p:txBody>
+      </p:sp>
+      <p:sp>
+        <p:nvSpPr>
+          <p:cNvPr id="4" name="Text Placeholder 3">
+            <a:extLst>
+              <a:ext uri="{FF2B5EF4-FFF2-40B4-BE49-F238E27FC236}">
+                <a16:creationId xmlns:a16="http://schemas.microsoft.com/office/drawing/2014/main" id="{913C73B7-26AF-DCA4-45CA-813AB4BE2D7F}"/>
+              </a:ext>
+            </a:extLst>
+          </p:cNvPr>
+          <p:cNvSpPr>
+            <a:spLocks noGrp="1"/>
+          </p:cNvSpPr>
+          <p:nvPr>
+            <p:ph type="body" sz="half" idx="2"/>
+          </p:nvPr>
+        </p:nvSpPr>
+        <p:spPr>
+          <a:xfrm>
+            <a:off x="839788" y="2057400"/>
+            <a:ext cx="3932237" cy="3811588"/>
+          </a:xfrm>
+        </p:spPr>
+        <p:txBody>
+          <a:bodyPr/>
+          <a:lstStyle>
+            <a:lvl1pPr marL="0" indent="0">
+              <a:buNone/>
+              <a:defRPr sz="1600"/>
+            </a:lvl1pPr>
+            <a:lvl2pPr marL="457200" indent="0">
+              <a:buNone/>
+              <a:defRPr sz="1400"/>
+            </a:lvl2pPr>
+            <a:lvl3pPr marL="914400" indent="0">
+              <a:buNone/>
+              <a:defRPr sz="1200"/>
+            </a:lvl3pPr>
+            <a:lvl4pPr marL="1371600" indent="0">
+              <a:buNone/>
+              <a:defRPr sz="1000"/>
+            </a:lvl4pPr>
+            <a:lvl5pPr marL="1828800" indent="0">
+              <a:buNone/>
+              <a:defRPr sz="1000"/>
+            </a:lvl5pPr>
+            <a:lvl6pPr marL="2286000" indent="0">
+              <a:buNone/>
+              <a:defRPr sz="1000"/>
+            </a:lvl6pPr>
+            <a:lvl7pPr marL="2743200" indent="0">
+              <a:buNone/>
+              <a:defRPr sz="1000"/>
+            </a:lvl7pPr>
+            <a:lvl8pPr marL="3200400" indent="0">
+              <a:buNone/>
+              <a:defRPr sz="1000"/>
+            </a:lvl8pPr>
+            <a:lvl9pPr marL="3657600" indent="0">
+              <a:buNone/>
+              <a:defRPr sz="1000"/>
+            </a:lvl9pPr>
+          </a:lstStyle>
+          <a:p>
+            <a:pPr lvl="0"/>
+            <a:r>
+              <a:rPr lang="en-US"/>
+              <a:t>Click to edit Master text styles</a:t>
+            </a:r>
+          </a:p>
+        </p:txBody>
+      </p:sp>
+      <p:sp>
+        <p:nvSpPr>
+          <p:cNvPr id="5" name="Date Placeholder 4">
+            <a:extLst>
+              <a:ext uri="{FF2B5EF4-FFF2-40B4-BE49-F238E27FC236}">
+                <a16:creationId xmlns:a16="http://schemas.microsoft.com/office/drawing/2014/main" id="{2DB3DD63-B60F-F425-C1DC-530E1DEA2047}"/>
+              </a:ext>
+            </a:extLst>
+          </p:cNvPr>
+          <p:cNvSpPr>
+            <a:spLocks noGrp="1"/>
+          </p:cNvSpPr>
+          <p:nvPr>
+            <p:ph type="dt" sz="half" idx="10"/>
+          </p:nvPr>
+        </p:nvSpPr>
+        <p:spPr/>
+        <p:txBody>
+          <a:bodyPr/>
+          <a:lstStyle/>
+          <a:p>
+            <a:fld id="{A40CF832-788C-4A30-A874-A72157BA0ED2}" type="datetimeFigureOut">
+              <a:rPr lang="en-US" smtClean="0"/>
+              <a:t>5/10/2025</a:t>
+            </a:fld>
+            <a:endParaRPr lang="en-US"/>
+          </a:p>
+        </p:txBody>
+      </p:sp>
+      <p:sp>
+        <p:nvSpPr>
+          <p:cNvPr id="6" name="Footer Placeholder 5">
+            <a:extLst>
+              <a:ext uri="{FF2B5EF4-FFF2-40B4-BE49-F238E27FC236}">
+                <a16:creationId xmlns:a16="http://schemas.microsoft.com/office/drawing/2014/main" id="{47B57511-41B3-BD3F-4EE0-A5E16FA1E6B3}"/>
+              </a:ext>
+            </a:extLst>
+          </p:cNvPr>
+          <p:cNvSpPr>
+            <a:spLocks noGrp="1"/>
+          </p:cNvSpPr>
+          <p:nvPr>
+            <p:ph type="ftr" sz="quarter" idx="11"/>
+          </p:nvPr>
+        </p:nvSpPr>
+        <p:spPr/>
+        <p:txBody>
+          <a:bodyPr/>
+          <a:lstStyle/>
+          <a:p>
+            <a:endParaRPr lang="en-US"/>
+          </a:p>
+        </p:txBody>
+      </p:sp>
+      <p:sp>
+        <p:nvSpPr>
+          <p:cNvPr id="7" name="Slide Number Placeholder 6">
+            <a:extLst>
+              <a:ext uri="{FF2B5EF4-FFF2-40B4-BE49-F238E27FC236}">
+                <a16:creationId xmlns:a16="http://schemas.microsoft.com/office/drawing/2014/main" id="{AACE1EF5-6030-20DB-35E0-72910A719F5A}"/>
+              </a:ext>
+            </a:extLst>
+          </p:cNvPr>
+          <p:cNvSpPr>
+            <a:spLocks noGrp="1"/>
+          </p:cNvSpPr>
+          <p:nvPr>
+            <p:ph type="sldNum" sz="quarter" idx="12"/>
+          </p:nvPr>
+        </p:nvSpPr>
+        <p:spPr/>
+        <p:txBody>
+          <a:bodyPr/>
+          <a:lstStyle/>
+          <a:p>
+            <a:fld id="{585491E3-9838-4B39-AEBF-3B863E6BCAE0}" type="slidenum">
+              <a:rPr lang="en-US" smtClean="0"/>
+              <a:t>‹#›</a:t>
+            </a:fld>
+            <a:endParaRPr lang="en-US"/>
+          </a:p>
+        </p:txBody>
+      </p:sp>
+    </p:spTree>
+    <p:extLst>
+      <p:ext uri="{BB962C8B-B14F-4D97-AF65-F5344CB8AC3E}">
+        <p14:creationId xmlns:p14="http://schemas.microsoft.com/office/powerpoint/2010/main" val="3200418133"/>
+      </p:ext>
+    </p:extLst>
+  </p:cSld>
+  <p:clrMapOvr>
+    <a:masterClrMapping/>
+  </p:clrMapOvr>
+</p:sldLayout>
+</file>
+
+<file path=ppt/slideLayouts/slideLayout26.xml><?xml version="1.0" encoding="utf-8"?>
+<p:sldLayout xmlns:a="http://schemas.openxmlformats.org/drawingml/2006/main" xmlns:r="http://schemas.openxmlformats.org/officeDocument/2006/relationships" xmlns:p="http://schemas.openxmlformats.org/presentationml/2006/main" type="vertTx" preserve="1">
+  <p:cSld name="Title and Vertical Text">
+    <p:spTree>
+      <p:nvGrpSpPr>
+        <p:cNvPr id="1" name=""/>
+        <p:cNvGrpSpPr/>
+        <p:nvPr/>
+      </p:nvGrpSpPr>
+      <p:grpSpPr>
+        <a:xfrm>
+          <a:off x="0" y="0"/>
+          <a:ext cx="0" cy="0"/>
+          <a:chOff x="0" y="0"/>
+          <a:chExt cx="0" cy="0"/>
+        </a:xfrm>
+      </p:grpSpPr>
+      <p:sp>
+        <p:nvSpPr>
+          <p:cNvPr id="2" name="Title 1">
+            <a:extLst>
+              <a:ext uri="{FF2B5EF4-FFF2-40B4-BE49-F238E27FC236}">
+                <a16:creationId xmlns:a16="http://schemas.microsoft.com/office/drawing/2014/main" id="{011435EC-D673-8992-CBA5-90014B3A1314}"/>
+              </a:ext>
+            </a:extLst>
+          </p:cNvPr>
+          <p:cNvSpPr>
+            <a:spLocks noGrp="1"/>
+          </p:cNvSpPr>
+          <p:nvPr>
+            <p:ph type="title"/>
+          </p:nvPr>
+        </p:nvSpPr>
+        <p:spPr/>
+        <p:txBody>
+          <a:bodyPr/>
+          <a:lstStyle/>
+          <a:p>
+            <a:r>
+              <a:rPr lang="en-US"/>
+              <a:t>Click to edit Master title style</a:t>
+            </a:r>
+          </a:p>
+        </p:txBody>
+      </p:sp>
+      <p:sp>
+        <p:nvSpPr>
+          <p:cNvPr id="3" name="Vertical Text Placeholder 2">
+            <a:extLst>
+              <a:ext uri="{FF2B5EF4-FFF2-40B4-BE49-F238E27FC236}">
+                <a16:creationId xmlns:a16="http://schemas.microsoft.com/office/drawing/2014/main" id="{654B72E5-3BAD-22D3-AE08-4569AEBA7949}"/>
+              </a:ext>
+            </a:extLst>
+          </p:cNvPr>
+          <p:cNvSpPr>
+            <a:spLocks noGrp="1"/>
+          </p:cNvSpPr>
+          <p:nvPr>
+            <p:ph type="body" orient="vert" idx="1"/>
+          </p:nvPr>
+        </p:nvSpPr>
+        <p:spPr/>
+        <p:txBody>
+          <a:bodyPr vert="eaVert"/>
+          <a:lstStyle/>
+          <a:p>
+            <a:pPr lvl="0"/>
+            <a:r>
+              <a:rPr lang="en-US"/>
+              <a:t>Click to edit Master text styles</a:t>
+            </a:r>
+          </a:p>
+          <a:p>
+            <a:pPr lvl="1"/>
+            <a:r>
+              <a:rPr lang="en-US"/>
+              <a:t>Second level</a:t>
+            </a:r>
+          </a:p>
+          <a:p>
+            <a:pPr lvl="2"/>
+            <a:r>
+              <a:rPr lang="en-US"/>
+              <a:t>Third level</a:t>
+            </a:r>
+          </a:p>
+          <a:p>
+            <a:pPr lvl="3"/>
+            <a:r>
+              <a:rPr lang="en-US"/>
+              <a:t>Fourth level</a:t>
+            </a:r>
+          </a:p>
+          <a:p>
+            <a:pPr lvl="4"/>
+            <a:r>
+              <a:rPr lang="en-US"/>
+              <a:t>Fifth level</a:t>
+            </a:r>
+          </a:p>
+        </p:txBody>
+      </p:sp>
+      <p:sp>
+        <p:nvSpPr>
+          <p:cNvPr id="4" name="Date Placeholder 3">
+            <a:extLst>
+              <a:ext uri="{FF2B5EF4-FFF2-40B4-BE49-F238E27FC236}">
+                <a16:creationId xmlns:a16="http://schemas.microsoft.com/office/drawing/2014/main" id="{5E34BD88-BB31-3027-6D5E-53A842B1DEBC}"/>
+              </a:ext>
+            </a:extLst>
+          </p:cNvPr>
+          <p:cNvSpPr>
+            <a:spLocks noGrp="1"/>
+          </p:cNvSpPr>
+          <p:nvPr>
+            <p:ph type="dt" sz="half" idx="10"/>
+          </p:nvPr>
+        </p:nvSpPr>
+        <p:spPr/>
+        <p:txBody>
+          <a:bodyPr/>
+          <a:lstStyle/>
+          <a:p>
+            <a:fld id="{A40CF832-788C-4A30-A874-A72157BA0ED2}" type="datetimeFigureOut">
+              <a:rPr lang="en-US" smtClean="0"/>
+              <a:t>5/10/2025</a:t>
+            </a:fld>
+            <a:endParaRPr lang="en-US"/>
+          </a:p>
+        </p:txBody>
+      </p:sp>
+      <p:sp>
+        <p:nvSpPr>
+          <p:cNvPr id="5" name="Footer Placeholder 4">
+            <a:extLst>
+              <a:ext uri="{FF2B5EF4-FFF2-40B4-BE49-F238E27FC236}">
+                <a16:creationId xmlns:a16="http://schemas.microsoft.com/office/drawing/2014/main" id="{9CA81009-507C-30DD-B462-C2E752D85888}"/>
+              </a:ext>
+            </a:extLst>
+          </p:cNvPr>
+          <p:cNvSpPr>
+            <a:spLocks noGrp="1"/>
+          </p:cNvSpPr>
+          <p:nvPr>
+            <p:ph type="ftr" sz="quarter" idx="11"/>
+          </p:nvPr>
+        </p:nvSpPr>
+        <p:spPr/>
+        <p:txBody>
+          <a:bodyPr/>
+          <a:lstStyle/>
+          <a:p>
+            <a:endParaRPr lang="en-US"/>
+          </a:p>
+        </p:txBody>
+      </p:sp>
+      <p:sp>
+        <p:nvSpPr>
+          <p:cNvPr id="6" name="Slide Number Placeholder 5">
+            <a:extLst>
+              <a:ext uri="{FF2B5EF4-FFF2-40B4-BE49-F238E27FC236}">
+                <a16:creationId xmlns:a16="http://schemas.microsoft.com/office/drawing/2014/main" id="{E0531FC5-4127-84E0-5708-29DBFECB3E2E}"/>
+              </a:ext>
+            </a:extLst>
+          </p:cNvPr>
+          <p:cNvSpPr>
+            <a:spLocks noGrp="1"/>
+          </p:cNvSpPr>
+          <p:nvPr>
+            <p:ph type="sldNum" sz="quarter" idx="12"/>
+          </p:nvPr>
+        </p:nvSpPr>
+        <p:spPr/>
+        <p:txBody>
+          <a:bodyPr/>
+          <a:lstStyle/>
+          <a:p>
+            <a:fld id="{585491E3-9838-4B39-AEBF-3B863E6BCAE0}" type="slidenum">
+              <a:rPr lang="en-US" smtClean="0"/>
+              <a:t>‹#›</a:t>
+            </a:fld>
+            <a:endParaRPr lang="en-US"/>
+          </a:p>
+        </p:txBody>
+      </p:sp>
+    </p:spTree>
+    <p:extLst>
+      <p:ext uri="{BB962C8B-B14F-4D97-AF65-F5344CB8AC3E}">
+        <p14:creationId xmlns:p14="http://schemas.microsoft.com/office/powerpoint/2010/main" val="2341850142"/>
+      </p:ext>
+    </p:extLst>
+  </p:cSld>
+  <p:clrMapOvr>
+    <a:masterClrMapping/>
+  </p:clrMapOvr>
+</p:sldLayout>
+</file>
+
+<file path=ppt/slideLayouts/slideLayout27.xml><?xml version="1.0" encoding="utf-8"?>
+<p:sldLayout xmlns:a="http://schemas.openxmlformats.org/drawingml/2006/main" xmlns:r="http://schemas.openxmlformats.org/officeDocument/2006/relationships" xmlns:p="http://schemas.openxmlformats.org/presentationml/2006/main" type="vertTitleAndTx" preserve="1">
+  <p:cSld name="Vertical Title and Text">
+    <p:spTree>
+      <p:nvGrpSpPr>
+        <p:cNvPr id="1" name=""/>
+        <p:cNvGrpSpPr/>
+        <p:nvPr/>
+      </p:nvGrpSpPr>
+      <p:grpSpPr>
+        <a:xfrm>
+          <a:off x="0" y="0"/>
+          <a:ext cx="0" cy="0"/>
+          <a:chOff x="0" y="0"/>
+          <a:chExt cx="0" cy="0"/>
+        </a:xfrm>
+      </p:grpSpPr>
+      <p:sp>
+        <p:nvSpPr>
+          <p:cNvPr id="2" name="Vertical Title 1">
+            <a:extLst>
+              <a:ext uri="{FF2B5EF4-FFF2-40B4-BE49-F238E27FC236}">
+                <a16:creationId xmlns:a16="http://schemas.microsoft.com/office/drawing/2014/main" id="{F9F56996-EB65-BAF7-64EC-6948A4F34190}"/>
+              </a:ext>
+            </a:extLst>
+          </p:cNvPr>
+          <p:cNvSpPr>
+            <a:spLocks noGrp="1"/>
+          </p:cNvSpPr>
+          <p:nvPr>
+            <p:ph type="title" orient="vert"/>
+          </p:nvPr>
+        </p:nvSpPr>
+        <p:spPr>
+          <a:xfrm>
+            <a:off x="8724900" y="365125"/>
+            <a:ext cx="2628900" cy="5811838"/>
+          </a:xfrm>
+        </p:spPr>
+        <p:txBody>
+          <a:bodyPr vert="eaVert"/>
+          <a:lstStyle/>
+          <a:p>
+            <a:r>
+              <a:rPr lang="en-US"/>
+              <a:t>Click to edit Master title style</a:t>
+            </a:r>
+          </a:p>
+        </p:txBody>
+      </p:sp>
+      <p:sp>
+        <p:nvSpPr>
+          <p:cNvPr id="3" name="Vertical Text Placeholder 2">
+            <a:extLst>
+              <a:ext uri="{FF2B5EF4-FFF2-40B4-BE49-F238E27FC236}">
+                <a16:creationId xmlns:a16="http://schemas.microsoft.com/office/drawing/2014/main" id="{88BC782F-36B1-0499-A1AC-3336563C22F2}"/>
+              </a:ext>
+            </a:extLst>
+          </p:cNvPr>
+          <p:cNvSpPr>
+            <a:spLocks noGrp="1"/>
+          </p:cNvSpPr>
+          <p:nvPr>
+            <p:ph type="body" orient="vert" idx="1"/>
+          </p:nvPr>
+        </p:nvSpPr>
+        <p:spPr>
+          <a:xfrm>
+            <a:off x="838200" y="365125"/>
+            <a:ext cx="7734300" cy="5811838"/>
+          </a:xfrm>
+        </p:spPr>
+        <p:txBody>
+          <a:bodyPr vert="eaVert"/>
+          <a:lstStyle/>
+          <a:p>
+            <a:pPr lvl="0"/>
+            <a:r>
+              <a:rPr lang="en-US"/>
+              <a:t>Click to edit Master text styles</a:t>
+            </a:r>
+          </a:p>
+          <a:p>
+            <a:pPr lvl="1"/>
+            <a:r>
+              <a:rPr lang="en-US"/>
+              <a:t>Second level</a:t>
+            </a:r>
+          </a:p>
+          <a:p>
+            <a:pPr lvl="2"/>
+            <a:r>
+              <a:rPr lang="en-US"/>
+              <a:t>Third level</a:t>
+            </a:r>
+          </a:p>
+          <a:p>
+            <a:pPr lvl="3"/>
+            <a:r>
+              <a:rPr lang="en-US"/>
+              <a:t>Fourth level</a:t>
+            </a:r>
+          </a:p>
+          <a:p>
+            <a:pPr lvl="4"/>
+            <a:r>
+              <a:rPr lang="en-US"/>
+              <a:t>Fifth level</a:t>
+            </a:r>
+          </a:p>
+        </p:txBody>
+      </p:sp>
+      <p:sp>
+        <p:nvSpPr>
+          <p:cNvPr id="4" name="Date Placeholder 3">
+            <a:extLst>
+              <a:ext uri="{FF2B5EF4-FFF2-40B4-BE49-F238E27FC236}">
+                <a16:creationId xmlns:a16="http://schemas.microsoft.com/office/drawing/2014/main" id="{A2D27777-04BC-7800-8D87-2EDA773B03E8}"/>
+              </a:ext>
+            </a:extLst>
+          </p:cNvPr>
+          <p:cNvSpPr>
+            <a:spLocks noGrp="1"/>
+          </p:cNvSpPr>
+          <p:nvPr>
+            <p:ph type="dt" sz="half" idx="10"/>
+          </p:nvPr>
+        </p:nvSpPr>
+        <p:spPr/>
+        <p:txBody>
+          <a:bodyPr/>
+          <a:lstStyle/>
+          <a:p>
+            <a:fld id="{A40CF832-788C-4A30-A874-A72157BA0ED2}" type="datetimeFigureOut">
+              <a:rPr lang="en-US" smtClean="0"/>
+              <a:t>5/10/2025</a:t>
+            </a:fld>
+            <a:endParaRPr lang="en-US"/>
+          </a:p>
+        </p:txBody>
+      </p:sp>
+      <p:sp>
+        <p:nvSpPr>
+          <p:cNvPr id="5" name="Footer Placeholder 4">
+            <a:extLst>
+              <a:ext uri="{FF2B5EF4-FFF2-40B4-BE49-F238E27FC236}">
+                <a16:creationId xmlns:a16="http://schemas.microsoft.com/office/drawing/2014/main" id="{F05A39FE-BF87-6257-88A8-58FC6865267A}"/>
+              </a:ext>
+            </a:extLst>
+          </p:cNvPr>
+          <p:cNvSpPr>
+            <a:spLocks noGrp="1"/>
+          </p:cNvSpPr>
+          <p:nvPr>
+            <p:ph type="ftr" sz="quarter" idx="11"/>
+          </p:nvPr>
+        </p:nvSpPr>
+        <p:spPr/>
+        <p:txBody>
+          <a:bodyPr/>
+          <a:lstStyle/>
+          <a:p>
+            <a:endParaRPr lang="en-US"/>
+          </a:p>
+        </p:txBody>
+      </p:sp>
+      <p:sp>
+        <p:nvSpPr>
+          <p:cNvPr id="6" name="Slide Number Placeholder 5">
+            <a:extLst>
+              <a:ext uri="{FF2B5EF4-FFF2-40B4-BE49-F238E27FC236}">
+                <a16:creationId xmlns:a16="http://schemas.microsoft.com/office/drawing/2014/main" id="{C3E53152-6F1F-E9BB-37F4-1E36AB69B427}"/>
+              </a:ext>
+            </a:extLst>
+          </p:cNvPr>
+          <p:cNvSpPr>
+            <a:spLocks noGrp="1"/>
+          </p:cNvSpPr>
+          <p:nvPr>
+            <p:ph type="sldNum" sz="quarter" idx="12"/>
+          </p:nvPr>
+        </p:nvSpPr>
+        <p:spPr/>
+        <p:txBody>
+          <a:bodyPr/>
+          <a:lstStyle/>
+          <a:p>
+            <a:fld id="{585491E3-9838-4B39-AEBF-3B863E6BCAE0}" type="slidenum">
+              <a:rPr lang="en-US" smtClean="0"/>
+              <a:t>‹#›</a:t>
+            </a:fld>
+            <a:endParaRPr lang="en-US"/>
+          </a:p>
+        </p:txBody>
+      </p:sp>
+    </p:spTree>
+    <p:extLst>
+      <p:ext uri="{BB962C8B-B14F-4D97-AF65-F5344CB8AC3E}">
+        <p14:creationId xmlns:p14="http://schemas.microsoft.com/office/powerpoint/2010/main" val="4090387869"/>
+      </p:ext>
+    </p:extLst>
+  </p:cSld>
+  <p:clrMapOvr>
+    <a:masterClrMapping/>
+  </p:clrMapOvr>
+</p:sldLayout>
+</file>
+
+<file path=ppt/slideLayouts/slideLayout28.xml><?xml version="1.0" encoding="utf-8"?>
+<p:sldLayout xmlns:a="http://schemas.openxmlformats.org/drawingml/2006/main" xmlns:r="http://schemas.openxmlformats.org/officeDocument/2006/relationships" xmlns:p="http://schemas.openxmlformats.org/presentationml/2006/main" userDrawn="1">
+  <p:cSld name="Virtual background dark">
+    <p:bg>
+      <p:bgPr>
+        <a:solidFill>
+          <a:schemeClr val="tx1"/>
+        </a:solidFill>
+        <a:effectLst/>
+      </p:bgPr>
+    </p:bg>
+    <p:spTree>
+      <p:nvGrpSpPr>
+        <p:cNvPr id="1" name=""/>
+        <p:cNvGrpSpPr/>
+        <p:nvPr/>
+      </p:nvGrpSpPr>
+      <p:grpSpPr>
+        <a:xfrm>
+          <a:off x="0" y="0"/>
+          <a:ext cx="0" cy="0"/>
+          <a:chOff x="0" y="0"/>
+          <a:chExt cx="0" cy="0"/>
+        </a:xfrm>
+      </p:grpSpPr>
+      <p:sp>
+        <p:nvSpPr>
+          <p:cNvPr id="2" name="Rectangle 1">
+            <a:extLst>
+              <a:ext uri="{FF2B5EF4-FFF2-40B4-BE49-F238E27FC236}">
+                <a16:creationId xmlns:a16="http://schemas.microsoft.com/office/drawing/2014/main" id="{BBB12E87-3B96-7F05-48CB-19DAB2A3F9A6}"/>
+              </a:ext>
+            </a:extLst>
+          </p:cNvPr>
+          <p:cNvSpPr/>
+          <p:nvPr userDrawn="1"/>
+        </p:nvSpPr>
+        <p:spPr>
+          <a:xfrm>
+            <a:off x="0" y="6791325"/>
+            <a:ext cx="12192000" cy="66675"/>
+          </a:xfrm>
+          <a:prstGeom prst="rect">
+            <a:avLst/>
+          </a:prstGeom>
+          <a:gradFill>
+            <a:gsLst>
+              <a:gs pos="0">
+                <a:schemeClr val="accent4"/>
+              </a:gs>
+              <a:gs pos="34000">
+                <a:schemeClr val="accent1"/>
+              </a:gs>
+              <a:gs pos="65560">
+                <a:schemeClr val="accent2"/>
+              </a:gs>
+              <a:gs pos="99890">
+                <a:schemeClr val="accent6"/>
+              </a:gs>
+            </a:gsLst>
+            <a:lin ang="0" scaled="1"/>
+          </a:gradFill>
+          <a:ln>
+            <a:noFill/>
+          </a:ln>
+        </p:spPr>
+        <p:style>
+          <a:lnRef idx="2">
+            <a:schemeClr val="accent1">
+              <a:shade val="50000"/>
+            </a:schemeClr>
+          </a:lnRef>
+          <a:fillRef idx="1">
+            <a:schemeClr val="accent1"/>
+          </a:fillRef>
+          <a:effectRef idx="0">
+            <a:schemeClr val="accent1"/>
+          </a:effectRef>
+          <a:fontRef idx="minor">
+            <a:schemeClr val="lt1"/>
+          </a:fontRef>
+        </p:style>
+        <p:txBody>
+          <a:bodyPr rtlCol="0" anchor="ctr"/>
+          <a:lstStyle/>
+          <a:p>
+            <a:pPr algn="ctr"/>
+            <a:endParaRPr lang="en-US" err="1">
+              <a:latin typeface="Roboto" panose="02000000000000000000" pitchFamily="2" charset="0"/>
+              <a:ea typeface="Roboto" panose="02000000000000000000" pitchFamily="2" charset="0"/>
+            </a:endParaRPr>
+          </a:p>
+        </p:txBody>
+      </p:sp>
+    </p:spTree>
+    <p:extLst>
+      <p:ext uri="{BB962C8B-B14F-4D97-AF65-F5344CB8AC3E}">
+        <p14:creationId xmlns:p14="http://schemas.microsoft.com/office/powerpoint/2010/main" val="2983617475"/>
+      </p:ext>
+    </p:extLst>
   </p:cSld>
   <p:clrMapOvr>
     <a:masterClrMapping/>
@@ -3065,7 +5890,7 @@
             <a:fld id="{B61BEF0D-F0BB-DE4B-95CE-6DB70DBA9567}" type="datetimeFigureOut">
               <a:rPr lang="en-US"/>
               <a:pPr/>
-              <a:t>3/4/2025</a:t>
+              <a:t>5/10/2025</a:t>
             </a:fld>
             <a:endParaRPr lang="en-US"/>
           </a:p>
@@ -3293,7 +6118,7 @@
           <a:p>
             <a:fld id="{EB712588-04B1-427B-82EE-E8DB90309F08}" type="datetimeFigureOut">
               <a:rPr lang="en-US"/>
-              <a:t>3/4/2025</a:t>
+              <a:t>5/10/2025</a:t>
             </a:fld>
             <a:endParaRPr lang="en-US"/>
           </a:p>
@@ -3663,7 +6488,7 @@
             <a:fld id="{B61BEF0D-F0BB-DE4B-95CE-6DB70DBA9567}" type="datetimeFigureOut">
               <a:rPr lang="en-US"/>
               <a:pPr/>
-              <a:t>3/4/2025</a:t>
+              <a:t>5/10/2025</a:t>
             </a:fld>
             <a:endParaRPr lang="en-US"/>
           </a:p>
@@ -3783,7 +6608,7 @@
             <a:fld id="{B61BEF0D-F0BB-DE4B-95CE-6DB70DBA9567}" type="datetimeFigureOut">
               <a:rPr lang="en-US"/>
               <a:pPr/>
-              <a:t>3/4/2025</a:t>
+              <a:t>5/10/2025</a:t>
             </a:fld>
             <a:endParaRPr lang="en-US"/>
           </a:p>
@@ -3875,7 +6700,7 @@
             <a:fld id="{B61BEF0D-F0BB-DE4B-95CE-6DB70DBA9567}" type="datetimeFigureOut">
               <a:rPr lang="en-US"/>
               <a:pPr/>
-              <a:t>3/4/2025</a:t>
+              <a:t>5/10/2025</a:t>
             </a:fld>
             <a:endParaRPr lang="en-US"/>
           </a:p>
@@ -4126,7 +6951,7 @@
           <a:p>
             <a:fld id="{42A54C80-263E-416B-A8E0-580EDEADCBDC}" type="datetimeFigureOut">
               <a:rPr lang="en-US"/>
-              <a:t>3/4/2025</a:t>
+              <a:t>5/10/2025</a:t>
             </a:fld>
             <a:endParaRPr lang="en-US"/>
           </a:p>
@@ -4385,7 +7210,7 @@
             <a:fld id="{B61BEF0D-F0BB-DE4B-95CE-6DB70DBA9567}" type="datetimeFigureOut">
               <a:rPr lang="en-US"/>
               <a:pPr/>
-              <a:t>3/4/2025</a:t>
+              <a:t>5/10/2025</a:t>
             </a:fld>
             <a:endParaRPr lang="en-US"/>
           </a:p>
@@ -4610,7 +7435,7 @@
             <a:fld id="{B61BEF0D-F0BB-DE4B-95CE-6DB70DBA9567}" type="datetimeFigureOut">
               <a:rPr lang="en-US"/>
               <a:pPr/>
-              <a:t>3/4/2025</a:t>
+              <a:t>5/10/2025</a:t>
             </a:fld>
             <a:endParaRPr lang="en-US"/>
           </a:p>
@@ -5149,6 +7974,575 @@
 </p:sldMaster>
 </file>
 
+<file path=ppt/slideMasters/slideMaster2.xml><?xml version="1.0" encoding="utf-8"?>
+<p:sldMaster xmlns:a="http://schemas.openxmlformats.org/drawingml/2006/main" xmlns:r="http://schemas.openxmlformats.org/officeDocument/2006/relationships" xmlns:p="http://schemas.openxmlformats.org/presentationml/2006/main">
+  <p:cSld>
+    <p:bg>
+      <p:bgRef idx="1001">
+        <a:schemeClr val="bg1"/>
+      </p:bgRef>
+    </p:bg>
+    <p:spTree>
+      <p:nvGrpSpPr>
+        <p:cNvPr id="1" name=""/>
+        <p:cNvGrpSpPr/>
+        <p:nvPr/>
+      </p:nvGrpSpPr>
+      <p:grpSpPr>
+        <a:xfrm>
+          <a:off x="0" y="0"/>
+          <a:ext cx="0" cy="0"/>
+          <a:chOff x="0" y="0"/>
+          <a:chExt cx="0" cy="0"/>
+        </a:xfrm>
+      </p:grpSpPr>
+      <p:sp>
+        <p:nvSpPr>
+          <p:cNvPr id="2" name="Title Placeholder 1">
+            <a:extLst>
+              <a:ext uri="{FF2B5EF4-FFF2-40B4-BE49-F238E27FC236}">
+                <a16:creationId xmlns:a16="http://schemas.microsoft.com/office/drawing/2014/main" id="{D88D91DD-9C86-5A26-FB7A-76238A55C547}"/>
+              </a:ext>
+            </a:extLst>
+          </p:cNvPr>
+          <p:cNvSpPr>
+            <a:spLocks noGrp="1"/>
+          </p:cNvSpPr>
+          <p:nvPr>
+            <p:ph type="title"/>
+          </p:nvPr>
+        </p:nvSpPr>
+        <p:spPr>
+          <a:xfrm>
+            <a:off x="838200" y="365125"/>
+            <a:ext cx="10515600" cy="1325563"/>
+          </a:xfrm>
+          <a:prstGeom prst="rect">
+            <a:avLst/>
+          </a:prstGeom>
+        </p:spPr>
+        <p:txBody>
+          <a:bodyPr vert="horz" lIns="91440" tIns="45720" rIns="91440" bIns="45720" rtlCol="0" anchor="ctr">
+            <a:normAutofit/>
+          </a:bodyPr>
+          <a:lstStyle/>
+          <a:p>
+            <a:r>
+              <a:rPr lang="en-US"/>
+              <a:t>Click to edit Master title style</a:t>
+            </a:r>
+          </a:p>
+        </p:txBody>
+      </p:sp>
+      <p:sp>
+        <p:nvSpPr>
+          <p:cNvPr id="3" name="Text Placeholder 2">
+            <a:extLst>
+              <a:ext uri="{FF2B5EF4-FFF2-40B4-BE49-F238E27FC236}">
+                <a16:creationId xmlns:a16="http://schemas.microsoft.com/office/drawing/2014/main" id="{7F7C6946-7BEC-D069-B51F-80526B722B4A}"/>
+              </a:ext>
+            </a:extLst>
+          </p:cNvPr>
+          <p:cNvSpPr>
+            <a:spLocks noGrp="1"/>
+          </p:cNvSpPr>
+          <p:nvPr>
+            <p:ph type="body" idx="1"/>
+          </p:nvPr>
+        </p:nvSpPr>
+        <p:spPr>
+          <a:xfrm>
+            <a:off x="838200" y="1825625"/>
+            <a:ext cx="10515600" cy="4351338"/>
+          </a:xfrm>
+          <a:prstGeom prst="rect">
+            <a:avLst/>
+          </a:prstGeom>
+        </p:spPr>
+        <p:txBody>
+          <a:bodyPr vert="horz" lIns="91440" tIns="45720" rIns="91440" bIns="45720" rtlCol="0">
+            <a:normAutofit/>
+          </a:bodyPr>
+          <a:lstStyle/>
+          <a:p>
+            <a:pPr lvl="0"/>
+            <a:r>
+              <a:rPr lang="en-US"/>
+              <a:t>Click to edit Master text styles</a:t>
+            </a:r>
+          </a:p>
+          <a:p>
+            <a:pPr lvl="1"/>
+            <a:r>
+              <a:rPr lang="en-US"/>
+              <a:t>Second level</a:t>
+            </a:r>
+          </a:p>
+          <a:p>
+            <a:pPr lvl="2"/>
+            <a:r>
+              <a:rPr lang="en-US"/>
+              <a:t>Third level</a:t>
+            </a:r>
+          </a:p>
+          <a:p>
+            <a:pPr lvl="3"/>
+            <a:r>
+              <a:rPr lang="en-US"/>
+              <a:t>Fourth level</a:t>
+            </a:r>
+          </a:p>
+          <a:p>
+            <a:pPr lvl="4"/>
+            <a:r>
+              <a:rPr lang="en-US"/>
+              <a:t>Fifth level</a:t>
+            </a:r>
+          </a:p>
+        </p:txBody>
+      </p:sp>
+      <p:sp>
+        <p:nvSpPr>
+          <p:cNvPr id="4" name="Date Placeholder 3">
+            <a:extLst>
+              <a:ext uri="{FF2B5EF4-FFF2-40B4-BE49-F238E27FC236}">
+                <a16:creationId xmlns:a16="http://schemas.microsoft.com/office/drawing/2014/main" id="{E4FBA022-6C80-2C5D-78F7-24B9C8C37E2B}"/>
+              </a:ext>
+            </a:extLst>
+          </p:cNvPr>
+          <p:cNvSpPr>
+            <a:spLocks noGrp="1"/>
+          </p:cNvSpPr>
+          <p:nvPr>
+            <p:ph type="dt" sz="half" idx="2"/>
+          </p:nvPr>
+        </p:nvSpPr>
+        <p:spPr>
+          <a:xfrm>
+            <a:off x="838200" y="6356350"/>
+            <a:ext cx="2743200" cy="365125"/>
+          </a:xfrm>
+          <a:prstGeom prst="rect">
+            <a:avLst/>
+          </a:prstGeom>
+        </p:spPr>
+        <p:txBody>
+          <a:bodyPr vert="horz" lIns="91440" tIns="45720" rIns="91440" bIns="45720" rtlCol="0" anchor="ctr"/>
+          <a:lstStyle>
+            <a:lvl1pPr algn="l">
+              <a:defRPr sz="1200">
+                <a:solidFill>
+                  <a:schemeClr val="tx1">
+                    <a:tint val="82000"/>
+                  </a:schemeClr>
+                </a:solidFill>
+              </a:defRPr>
+            </a:lvl1pPr>
+          </a:lstStyle>
+          <a:p>
+            <a:fld id="{A40CF832-788C-4A30-A874-A72157BA0ED2}" type="datetimeFigureOut">
+              <a:rPr lang="en-US" smtClean="0"/>
+              <a:t>5/10/2025</a:t>
+            </a:fld>
+            <a:endParaRPr lang="en-US"/>
+          </a:p>
+        </p:txBody>
+      </p:sp>
+      <p:sp>
+        <p:nvSpPr>
+          <p:cNvPr id="5" name="Footer Placeholder 4">
+            <a:extLst>
+              <a:ext uri="{FF2B5EF4-FFF2-40B4-BE49-F238E27FC236}">
+                <a16:creationId xmlns:a16="http://schemas.microsoft.com/office/drawing/2014/main" id="{508B292C-9725-0905-F7F4-D1A2D6A7F31A}"/>
+              </a:ext>
+            </a:extLst>
+          </p:cNvPr>
+          <p:cNvSpPr>
+            <a:spLocks noGrp="1"/>
+          </p:cNvSpPr>
+          <p:nvPr>
+            <p:ph type="ftr" sz="quarter" idx="3"/>
+          </p:nvPr>
+        </p:nvSpPr>
+        <p:spPr>
+          <a:xfrm>
+            <a:off x="4038600" y="6356350"/>
+            <a:ext cx="4114800" cy="365125"/>
+          </a:xfrm>
+          <a:prstGeom prst="rect">
+            <a:avLst/>
+          </a:prstGeom>
+        </p:spPr>
+        <p:txBody>
+          <a:bodyPr vert="horz" lIns="91440" tIns="45720" rIns="91440" bIns="45720" rtlCol="0" anchor="ctr"/>
+          <a:lstStyle>
+            <a:lvl1pPr algn="ctr">
+              <a:defRPr sz="1200">
+                <a:solidFill>
+                  <a:schemeClr val="tx1">
+                    <a:tint val="82000"/>
+                  </a:schemeClr>
+                </a:solidFill>
+              </a:defRPr>
+            </a:lvl1pPr>
+          </a:lstStyle>
+          <a:p>
+            <a:endParaRPr lang="en-US"/>
+          </a:p>
+        </p:txBody>
+      </p:sp>
+      <p:sp>
+        <p:nvSpPr>
+          <p:cNvPr id="6" name="Slide Number Placeholder 5">
+            <a:extLst>
+              <a:ext uri="{FF2B5EF4-FFF2-40B4-BE49-F238E27FC236}">
+                <a16:creationId xmlns:a16="http://schemas.microsoft.com/office/drawing/2014/main" id="{7C1B4A79-D050-B793-30B0-27CDA4199CF8}"/>
+              </a:ext>
+            </a:extLst>
+          </p:cNvPr>
+          <p:cNvSpPr>
+            <a:spLocks noGrp="1"/>
+          </p:cNvSpPr>
+          <p:nvPr>
+            <p:ph type="sldNum" sz="quarter" idx="4"/>
+          </p:nvPr>
+        </p:nvSpPr>
+        <p:spPr>
+          <a:xfrm>
+            <a:off x="8610600" y="6356350"/>
+            <a:ext cx="2743200" cy="365125"/>
+          </a:xfrm>
+          <a:prstGeom prst="rect">
+            <a:avLst/>
+          </a:prstGeom>
+        </p:spPr>
+        <p:txBody>
+          <a:bodyPr vert="horz" lIns="91440" tIns="45720" rIns="91440" bIns="45720" rtlCol="0" anchor="ctr"/>
+          <a:lstStyle>
+            <a:lvl1pPr algn="r">
+              <a:defRPr sz="1200">
+                <a:solidFill>
+                  <a:schemeClr val="tx1">
+                    <a:tint val="82000"/>
+                  </a:schemeClr>
+                </a:solidFill>
+              </a:defRPr>
+            </a:lvl1pPr>
+          </a:lstStyle>
+          <a:p>
+            <a:fld id="{585491E3-9838-4B39-AEBF-3B863E6BCAE0}" type="slidenum">
+              <a:rPr lang="en-US" smtClean="0"/>
+              <a:t>‹#›</a:t>
+            </a:fld>
+            <a:endParaRPr lang="en-US"/>
+          </a:p>
+        </p:txBody>
+      </p:sp>
+    </p:spTree>
+    <p:extLst>
+      <p:ext uri="{BB962C8B-B14F-4D97-AF65-F5344CB8AC3E}">
+        <p14:creationId xmlns:p14="http://schemas.microsoft.com/office/powerpoint/2010/main" val="2475330917"/>
+      </p:ext>
+    </p:extLst>
+  </p:cSld>
+  <p:clrMap bg1="lt1" tx1="dk1" bg2="lt2" tx2="dk2" accent1="accent1" accent2="accent2" accent3="accent3" accent4="accent4" accent5="accent5" accent6="accent6" hlink="hlink" folHlink="folHlink"/>
+  <p:sldLayoutIdLst>
+    <p:sldLayoutId id="2147483669" r:id="rId1"/>
+    <p:sldLayoutId id="2147483670" r:id="rId2"/>
+    <p:sldLayoutId id="2147483671" r:id="rId3"/>
+    <p:sldLayoutId id="2147483672" r:id="rId4"/>
+    <p:sldLayoutId id="2147483673" r:id="rId5"/>
+    <p:sldLayoutId id="2147483674" r:id="rId6"/>
+    <p:sldLayoutId id="2147483675" r:id="rId7"/>
+    <p:sldLayoutId id="2147483676" r:id="rId8"/>
+    <p:sldLayoutId id="2147483677" r:id="rId9"/>
+    <p:sldLayoutId id="2147483678" r:id="rId10"/>
+    <p:sldLayoutId id="2147483679" r:id="rId11"/>
+    <p:sldLayoutId id="2147483680" r:id="rId12"/>
+  </p:sldLayoutIdLst>
+  <p:txStyles>
+    <p:titleStyle>
+      <a:lvl1pPr algn="l" defTabSz="914400" rtl="0" eaLnBrk="1" latinLnBrk="0" hangingPunct="1">
+        <a:lnSpc>
+          <a:spcPct val="90000"/>
+        </a:lnSpc>
+        <a:spcBef>
+          <a:spcPct val="0"/>
+        </a:spcBef>
+        <a:buNone/>
+        <a:defRPr sz="4400" kern="1200">
+          <a:solidFill>
+            <a:schemeClr val="tx1"/>
+          </a:solidFill>
+          <a:latin typeface="+mj-lt"/>
+          <a:ea typeface="+mj-ea"/>
+          <a:cs typeface="+mj-cs"/>
+        </a:defRPr>
+      </a:lvl1pPr>
+    </p:titleStyle>
+    <p:bodyStyle>
+      <a:lvl1pPr marL="228600" indent="-228600" algn="l" defTabSz="914400" rtl="0" eaLnBrk="1" latinLnBrk="0" hangingPunct="1">
+        <a:lnSpc>
+          <a:spcPct val="90000"/>
+        </a:lnSpc>
+        <a:spcBef>
+          <a:spcPts val="1000"/>
+        </a:spcBef>
+        <a:buFont typeface="Arial" panose="020B0604020202020204" pitchFamily="34" charset="0"/>
+        <a:buChar char="•"/>
+        <a:defRPr sz="2800" kern="1200">
+          <a:solidFill>
+            <a:schemeClr val="tx1"/>
+          </a:solidFill>
+          <a:latin typeface="+mn-lt"/>
+          <a:ea typeface="+mn-ea"/>
+          <a:cs typeface="+mn-cs"/>
+        </a:defRPr>
+      </a:lvl1pPr>
+      <a:lvl2pPr marL="685800" indent="-228600" algn="l" defTabSz="914400" rtl="0" eaLnBrk="1" latinLnBrk="0" hangingPunct="1">
+        <a:lnSpc>
+          <a:spcPct val="90000"/>
+        </a:lnSpc>
+        <a:spcBef>
+          <a:spcPts val="500"/>
+        </a:spcBef>
+        <a:buFont typeface="Arial" panose="020B0604020202020204" pitchFamily="34" charset="0"/>
+        <a:buChar char="•"/>
+        <a:defRPr sz="2400" kern="1200">
+          <a:solidFill>
+            <a:schemeClr val="tx1"/>
+          </a:solidFill>
+          <a:latin typeface="+mn-lt"/>
+          <a:ea typeface="+mn-ea"/>
+          <a:cs typeface="+mn-cs"/>
+        </a:defRPr>
+      </a:lvl2pPr>
+      <a:lvl3pPr marL="1143000" indent="-228600" algn="l" defTabSz="914400" rtl="0" eaLnBrk="1" latinLnBrk="0" hangingPunct="1">
+        <a:lnSpc>
+          <a:spcPct val="90000"/>
+        </a:lnSpc>
+        <a:spcBef>
+          <a:spcPts val="500"/>
+        </a:spcBef>
+        <a:buFont typeface="Arial" panose="020B0604020202020204" pitchFamily="34" charset="0"/>
+        <a:buChar char="•"/>
+        <a:defRPr sz="2000" kern="1200">
+          <a:solidFill>
+            <a:schemeClr val="tx1"/>
+          </a:solidFill>
+          <a:latin typeface="+mn-lt"/>
+          <a:ea typeface="+mn-ea"/>
+          <a:cs typeface="+mn-cs"/>
+        </a:defRPr>
+      </a:lvl3pPr>
+      <a:lvl4pPr marL="1600200" indent="-228600" algn="l" defTabSz="914400" rtl="0" eaLnBrk="1" latinLnBrk="0" hangingPunct="1">
+        <a:lnSpc>
+          <a:spcPct val="90000"/>
+        </a:lnSpc>
+        <a:spcBef>
+          <a:spcPts val="500"/>
+        </a:spcBef>
+        <a:buFont typeface="Arial" panose="020B0604020202020204" pitchFamily="34" charset="0"/>
+        <a:buChar char="•"/>
+        <a:defRPr sz="1800" kern="1200">
+          <a:solidFill>
+            <a:schemeClr val="tx1"/>
+          </a:solidFill>
+          <a:latin typeface="+mn-lt"/>
+          <a:ea typeface="+mn-ea"/>
+          <a:cs typeface="+mn-cs"/>
+        </a:defRPr>
+      </a:lvl4pPr>
+      <a:lvl5pPr marL="2057400" indent="-228600" algn="l" defTabSz="914400" rtl="0" eaLnBrk="1" latinLnBrk="0" hangingPunct="1">
+        <a:lnSpc>
+          <a:spcPct val="90000"/>
+        </a:lnSpc>
+        <a:spcBef>
+          <a:spcPts val="500"/>
+        </a:spcBef>
+        <a:buFont typeface="Arial" panose="020B0604020202020204" pitchFamily="34" charset="0"/>
+        <a:buChar char="•"/>
+        <a:defRPr sz="1800" kern="1200">
+          <a:solidFill>
+            <a:schemeClr val="tx1"/>
+          </a:solidFill>
+          <a:latin typeface="+mn-lt"/>
+          <a:ea typeface="+mn-ea"/>
+          <a:cs typeface="+mn-cs"/>
+        </a:defRPr>
+      </a:lvl5pPr>
+      <a:lvl6pPr marL="2514600" indent="-228600" algn="l" defTabSz="914400" rtl="0" eaLnBrk="1" latinLnBrk="0" hangingPunct="1">
+        <a:lnSpc>
+          <a:spcPct val="90000"/>
+        </a:lnSpc>
+        <a:spcBef>
+          <a:spcPts val="500"/>
+        </a:spcBef>
+        <a:buFont typeface="Arial" panose="020B0604020202020204" pitchFamily="34" charset="0"/>
+        <a:buChar char="•"/>
+        <a:defRPr sz="1800" kern="1200">
+          <a:solidFill>
+            <a:schemeClr val="tx1"/>
+          </a:solidFill>
+          <a:latin typeface="+mn-lt"/>
+          <a:ea typeface="+mn-ea"/>
+          <a:cs typeface="+mn-cs"/>
+        </a:defRPr>
+      </a:lvl6pPr>
+      <a:lvl7pPr marL="2971800" indent="-228600" algn="l" defTabSz="914400" rtl="0" eaLnBrk="1" latinLnBrk="0" hangingPunct="1">
+        <a:lnSpc>
+          <a:spcPct val="90000"/>
+        </a:lnSpc>
+        <a:spcBef>
+          <a:spcPts val="500"/>
+        </a:spcBef>
+        <a:buFont typeface="Arial" panose="020B0604020202020204" pitchFamily="34" charset="0"/>
+        <a:buChar char="•"/>
+        <a:defRPr sz="1800" kern="1200">
+          <a:solidFill>
+            <a:schemeClr val="tx1"/>
+          </a:solidFill>
+          <a:latin typeface="+mn-lt"/>
+          <a:ea typeface="+mn-ea"/>
+          <a:cs typeface="+mn-cs"/>
+        </a:defRPr>
+      </a:lvl7pPr>
+      <a:lvl8pPr marL="3429000" indent="-228600" algn="l" defTabSz="914400" rtl="0" eaLnBrk="1" latinLnBrk="0" hangingPunct="1">
+        <a:lnSpc>
+          <a:spcPct val="90000"/>
+        </a:lnSpc>
+        <a:spcBef>
+          <a:spcPts val="500"/>
+        </a:spcBef>
+        <a:buFont typeface="Arial" panose="020B0604020202020204" pitchFamily="34" charset="0"/>
+        <a:buChar char="•"/>
+        <a:defRPr sz="1800" kern="1200">
+          <a:solidFill>
+            <a:schemeClr val="tx1"/>
+          </a:solidFill>
+          <a:latin typeface="+mn-lt"/>
+          <a:ea typeface="+mn-ea"/>
+          <a:cs typeface="+mn-cs"/>
+        </a:defRPr>
+      </a:lvl8pPr>
+      <a:lvl9pPr marL="3886200" indent="-228600" algn="l" defTabSz="914400" rtl="0" eaLnBrk="1" latinLnBrk="0" hangingPunct="1">
+        <a:lnSpc>
+          <a:spcPct val="90000"/>
+        </a:lnSpc>
+        <a:spcBef>
+          <a:spcPts val="500"/>
+        </a:spcBef>
+        <a:buFont typeface="Arial" panose="020B0604020202020204" pitchFamily="34" charset="0"/>
+        <a:buChar char="•"/>
+        <a:defRPr sz="1800" kern="1200">
+          <a:solidFill>
+            <a:schemeClr val="tx1"/>
+          </a:solidFill>
+          <a:latin typeface="+mn-lt"/>
+          <a:ea typeface="+mn-ea"/>
+          <a:cs typeface="+mn-cs"/>
+        </a:defRPr>
+      </a:lvl9pPr>
+    </p:bodyStyle>
+    <p:otherStyle>
+      <a:defPPr>
+        <a:defRPr lang="en-US"/>
+      </a:defPPr>
+      <a:lvl1pPr marL="0" algn="l" defTabSz="914400" rtl="0" eaLnBrk="1" latinLnBrk="0" hangingPunct="1">
+        <a:defRPr sz="1800" kern="1200">
+          <a:solidFill>
+            <a:schemeClr val="tx1"/>
+          </a:solidFill>
+          <a:latin typeface="+mn-lt"/>
+          <a:ea typeface="+mn-ea"/>
+          <a:cs typeface="+mn-cs"/>
+        </a:defRPr>
+      </a:lvl1pPr>
+      <a:lvl2pPr marL="457200" algn="l" defTabSz="914400" rtl="0" eaLnBrk="1" latinLnBrk="0" hangingPunct="1">
+        <a:defRPr sz="1800" kern="1200">
+          <a:solidFill>
+            <a:schemeClr val="tx1"/>
+          </a:solidFill>
+          <a:latin typeface="+mn-lt"/>
+          <a:ea typeface="+mn-ea"/>
+          <a:cs typeface="+mn-cs"/>
+        </a:defRPr>
+      </a:lvl2pPr>
+      <a:lvl3pPr marL="914400" algn="l" defTabSz="914400" rtl="0" eaLnBrk="1" latinLnBrk="0" hangingPunct="1">
+        <a:defRPr sz="1800" kern="1200">
+          <a:solidFill>
+            <a:schemeClr val="tx1"/>
+          </a:solidFill>
+          <a:latin typeface="+mn-lt"/>
+          <a:ea typeface="+mn-ea"/>
+          <a:cs typeface="+mn-cs"/>
+        </a:defRPr>
+      </a:lvl3pPr>
+      <a:lvl4pPr marL="1371600" algn="l" defTabSz="914400" rtl="0" eaLnBrk="1" latinLnBrk="0" hangingPunct="1">
+        <a:defRPr sz="1800" kern="1200">
+          <a:solidFill>
+            <a:schemeClr val="tx1"/>
+          </a:solidFill>
+          <a:latin typeface="+mn-lt"/>
+          <a:ea typeface="+mn-ea"/>
+          <a:cs typeface="+mn-cs"/>
+        </a:defRPr>
+      </a:lvl4pPr>
+      <a:lvl5pPr marL="1828800" algn="l" defTabSz="914400" rtl="0" eaLnBrk="1" latinLnBrk="0" hangingPunct="1">
+        <a:defRPr sz="1800" kern="1200">
+          <a:solidFill>
+            <a:schemeClr val="tx1"/>
+          </a:solidFill>
+          <a:latin typeface="+mn-lt"/>
+          <a:ea typeface="+mn-ea"/>
+          <a:cs typeface="+mn-cs"/>
+        </a:defRPr>
+      </a:lvl5pPr>
+      <a:lvl6pPr marL="2286000" algn="l" defTabSz="914400" rtl="0" eaLnBrk="1" latinLnBrk="0" hangingPunct="1">
+        <a:defRPr sz="1800" kern="1200">
+          <a:solidFill>
+            <a:schemeClr val="tx1"/>
+          </a:solidFill>
+          <a:latin typeface="+mn-lt"/>
+          <a:ea typeface="+mn-ea"/>
+          <a:cs typeface="+mn-cs"/>
+        </a:defRPr>
+      </a:lvl6pPr>
+      <a:lvl7pPr marL="2743200" algn="l" defTabSz="914400" rtl="0" eaLnBrk="1" latinLnBrk="0" hangingPunct="1">
+        <a:defRPr sz="1800" kern="1200">
+          <a:solidFill>
+            <a:schemeClr val="tx1"/>
+          </a:solidFill>
+          <a:latin typeface="+mn-lt"/>
+          <a:ea typeface="+mn-ea"/>
+          <a:cs typeface="+mn-cs"/>
+        </a:defRPr>
+      </a:lvl7pPr>
+      <a:lvl8pPr marL="3200400" algn="l" defTabSz="914400" rtl="0" eaLnBrk="1" latinLnBrk="0" hangingPunct="1">
+        <a:defRPr sz="1800" kern="1200">
+          <a:solidFill>
+            <a:schemeClr val="tx1"/>
+          </a:solidFill>
+          <a:latin typeface="+mn-lt"/>
+          <a:ea typeface="+mn-ea"/>
+          <a:cs typeface="+mn-cs"/>
+        </a:defRPr>
+      </a:lvl8pPr>
+      <a:lvl9pPr marL="3657600" algn="l" defTabSz="914400" rtl="0" eaLnBrk="1" latinLnBrk="0" hangingPunct="1">
+        <a:defRPr sz="1800" kern="1200">
+          <a:solidFill>
+            <a:schemeClr val="tx1"/>
+          </a:solidFill>
+          <a:latin typeface="+mn-lt"/>
+          <a:ea typeface="+mn-ea"/>
+          <a:cs typeface="+mn-cs"/>
+        </a:defRPr>
+      </a:lvl9pPr>
+    </p:otherStyle>
+  </p:txStyles>
+</p:sldMaster>
+</file>
+
 <file path=ppt/slides/slide1.xml><?xml version="1.0" encoding="utf-8"?>
 <p:sld xmlns:a="http://schemas.openxmlformats.org/drawingml/2006/main" xmlns:r="http://schemas.openxmlformats.org/officeDocument/2006/relationships" xmlns:p="http://schemas.openxmlformats.org/presentationml/2006/main">
   <p:cSld>
@@ -5309,7 +8703,13 @@
   <p:cSld>
     <p:spTree>
       <p:nvGrpSpPr>
-        <p:cNvPr id="1" name=""/>
+        <p:cNvPr id="1" name="">
+          <a:extLst>
+            <a:ext uri="{FF2B5EF4-FFF2-40B4-BE49-F238E27FC236}">
+              <a16:creationId xmlns:a16="http://schemas.microsoft.com/office/drawing/2014/main" id="{FB56CB45-0FED-AB92-18B7-D6035CE0D640}"/>
+            </a:ext>
+          </a:extLst>
+        </p:cNvPr>
         <p:cNvGrpSpPr/>
         <p:nvPr/>
       </p:nvGrpSpPr>
@@ -5326,7 +8726,7 @@
           <p:cNvPr id="2" name="Rubrik 1">
             <a:extLst>
               <a:ext uri="{FF2B5EF4-FFF2-40B4-BE49-F238E27FC236}">
-                <a16:creationId xmlns:a16="http://schemas.microsoft.com/office/drawing/2014/main" id="{41BD2D2D-8C5C-76A0-ADED-C851B8A4A725}"/>
+                <a16:creationId xmlns:a16="http://schemas.microsoft.com/office/drawing/2014/main" id="{DEC8900D-BCFA-CE4B-83F1-3C9668EBF241}"/>
               </a:ext>
             </a:extLst>
           </p:cNvPr>
@@ -5344,114 +8744,45 @@
           <a:p>
             <a:r>
               <a:rPr lang="sv-SE" dirty="0"/>
-              <a:t>SQL Server </a:t>
-            </a:r>
-            <a:r>
-              <a:rPr lang="sv-SE" dirty="0" err="1"/>
-              <a:t>Database</a:t>
-            </a:r>
-            <a:r>
-              <a:rPr lang="sv-SE" dirty="0"/>
-              <a:t> Projects</a:t>
-            </a:r>
-          </a:p>
-        </p:txBody>
-      </p:sp>
-      <p:sp>
-        <p:nvSpPr>
-          <p:cNvPr id="3" name="Platshållare för innehåll 2">
+              <a:t>Version 1.2.0</a:t>
+            </a:r>
+          </a:p>
+        </p:txBody>
+      </p:sp>
+      <p:pic>
+        <p:nvPicPr>
+          <p:cNvPr id="5" name="Bildobjekt 4">
             <a:extLst>
               <a:ext uri="{FF2B5EF4-FFF2-40B4-BE49-F238E27FC236}">
-                <a16:creationId xmlns:a16="http://schemas.microsoft.com/office/drawing/2014/main" id="{7EB283A5-1724-8B3C-3E44-780DC660A137}"/>
+                <a16:creationId xmlns:a16="http://schemas.microsoft.com/office/drawing/2014/main" id="{56D2E51E-E6AB-AC40-D569-664A64441FBE}"/>
               </a:ext>
             </a:extLst>
           </p:cNvPr>
-          <p:cNvSpPr>
-            <a:spLocks noGrp="1"/>
-          </p:cNvSpPr>
-          <p:nvPr>
-            <p:ph idx="1"/>
-          </p:nvPr>
-        </p:nvSpPr>
-        <p:spPr/>
-        <p:txBody>
-          <a:bodyPr/>
-          <a:lstStyle/>
-          <a:p>
-            <a:r>
-              <a:rPr lang="sv-SE" dirty="0" err="1"/>
-              <a:t>Mainly</a:t>
-            </a:r>
-            <a:r>
-              <a:rPr lang="sv-SE" dirty="0"/>
-              <a:t> a </a:t>
-            </a:r>
-            <a:r>
-              <a:rPr lang="sv-SE" dirty="0" err="1"/>
-              <a:t>tool</a:t>
-            </a:r>
-            <a:r>
-              <a:rPr lang="sv-SE" dirty="0"/>
-              <a:t> for </a:t>
-            </a:r>
-            <a:r>
-              <a:rPr lang="sv-SE" dirty="0" err="1"/>
-              <a:t>model</a:t>
-            </a:r>
-            <a:r>
-              <a:rPr lang="sv-SE" dirty="0"/>
-              <a:t> </a:t>
-            </a:r>
-            <a:r>
-              <a:rPr lang="sv-SE" dirty="0" err="1"/>
-              <a:t>based</a:t>
-            </a:r>
-            <a:r>
-              <a:rPr lang="sv-SE" dirty="0"/>
-              <a:t> </a:t>
-            </a:r>
-            <a:r>
-              <a:rPr lang="sv-SE" dirty="0" err="1"/>
-              <a:t>deployments</a:t>
-            </a:r>
-            <a:endParaRPr lang="sv-SE" dirty="0"/>
-          </a:p>
-          <a:p>
-            <a:r>
-              <a:rPr lang="sv-SE" dirty="0"/>
-              <a:t>Supports migrations </a:t>
-            </a:r>
-            <a:r>
-              <a:rPr lang="sv-SE" dirty="0" err="1"/>
-              <a:t>with</a:t>
-            </a:r>
-            <a:r>
-              <a:rPr lang="sv-SE" dirty="0"/>
-              <a:t> Pre- and Post </a:t>
-            </a:r>
-            <a:r>
-              <a:rPr lang="sv-SE" dirty="0" err="1"/>
-              <a:t>Deploy</a:t>
-            </a:r>
-            <a:r>
-              <a:rPr lang="sv-SE" dirty="0"/>
-              <a:t> scripts and </a:t>
-            </a:r>
-            <a:r>
-              <a:rPr lang="sv-SE" dirty="0" err="1"/>
-              <a:t>refactor</a:t>
-            </a:r>
-            <a:r>
-              <a:rPr lang="sv-SE" dirty="0"/>
-              <a:t>-log.</a:t>
-            </a:r>
-          </a:p>
-        </p:txBody>
-      </p:sp>
+          <p:cNvPicPr>
+            <a:picLocks noChangeAspect="1"/>
+          </p:cNvPicPr>
+          <p:nvPr/>
+        </p:nvPicPr>
+        <p:blipFill>
+          <a:blip r:embed="rId2"/>
+          <a:stretch>
+            <a:fillRect/>
+          </a:stretch>
+        </p:blipFill>
+        <p:spPr>
+          <a:xfrm>
+            <a:off x="3678607" y="609600"/>
+            <a:ext cx="6478854" cy="5680512"/>
+          </a:xfrm>
+          <a:prstGeom prst="rect">
+            <a:avLst/>
+          </a:prstGeom>
+        </p:spPr>
+      </p:pic>
     </p:spTree>
     <p:extLst>
       <p:ext uri="{BB962C8B-B14F-4D97-AF65-F5344CB8AC3E}">
-        <p14:creationId xmlns:p14="http://schemas.microsoft.com/office/powerpoint/2010/main" val="2425775469"/>
+        <p14:creationId xmlns:p14="http://schemas.microsoft.com/office/powerpoint/2010/main" val="3434008758"/>
       </p:ext>
     </p:extLst>
   </p:cSld>
@@ -5480,10 +8811,10 @@
       </p:grpSpPr>
       <p:sp>
         <p:nvSpPr>
-          <p:cNvPr id="2" name="Rubrik 1">
+          <p:cNvPr id="2" name="Title 1">
             <a:extLst>
               <a:ext uri="{FF2B5EF4-FFF2-40B4-BE49-F238E27FC236}">
-                <a16:creationId xmlns:a16="http://schemas.microsoft.com/office/drawing/2014/main" id="{C2255877-C3B2-3DA3-1D07-F0737210D63E}"/>
+                <a16:creationId xmlns:a16="http://schemas.microsoft.com/office/drawing/2014/main" id="{6C4B0CC8-6C08-B949-7F94-6E6B5C4DAC15}"/>
               </a:ext>
             </a:extLst>
           </p:cNvPr>
@@ -5500,26 +8831,19 @@
           <a:lstStyle/>
           <a:p>
             <a:r>
-              <a:rPr lang="sv-SE" dirty="0"/>
-              <a:t>SDK Style </a:t>
-            </a:r>
-            <a:r>
-              <a:rPr lang="sv-SE" dirty="0" err="1"/>
-              <a:t>Database</a:t>
-            </a:r>
-            <a:r>
-              <a:rPr lang="sv-SE" dirty="0"/>
-              <a:t> Projects</a:t>
-            </a:r>
-          </a:p>
-        </p:txBody>
-      </p:sp>
-      <p:sp>
-        <p:nvSpPr>
-          <p:cNvPr id="3" name="Platshållare för innehåll 2">
+              <a:rPr lang="en-GB" dirty="0"/>
+              <a:t>Short demo</a:t>
+            </a:r>
+            <a:endParaRPr lang="LID4096" dirty="0"/>
+          </a:p>
+        </p:txBody>
+      </p:sp>
+      <p:sp>
+        <p:nvSpPr>
+          <p:cNvPr id="3" name="Content Placeholder 2">
             <a:extLst>
               <a:ext uri="{FF2B5EF4-FFF2-40B4-BE49-F238E27FC236}">
-                <a16:creationId xmlns:a16="http://schemas.microsoft.com/office/drawing/2014/main" id="{7B54F8F6-6C3F-39C4-28EA-5125DF9BC373}"/>
+                <a16:creationId xmlns:a16="http://schemas.microsoft.com/office/drawing/2014/main" id="{D52D2805-BF0E-C045-BFF8-12A430A107E2}"/>
               </a:ext>
             </a:extLst>
           </p:cNvPr>
@@ -5530,535 +8854,26 @@
             <p:ph idx="1"/>
           </p:nvPr>
         </p:nvSpPr>
-        <p:spPr>
-          <a:xfrm>
-            <a:off x="677334" y="2160589"/>
-            <a:ext cx="10935546" cy="3880773"/>
-          </a:xfrm>
-        </p:spPr>
-        <p:txBody>
-          <a:bodyPr>
-            <a:normAutofit fontScale="92500" lnSpcReduction="20000"/>
-          </a:bodyPr>
+        <p:spPr/>
+        <p:txBody>
+          <a:bodyPr/>
           <a:lstStyle/>
           <a:p>
-            <a:r>
-              <a:rPr lang="sv-SE" dirty="0"/>
-              <a:t>.NET </a:t>
-            </a:r>
-            <a:r>
-              <a:rPr lang="sv-SE" dirty="0" err="1"/>
-              <a:t>Core</a:t>
-            </a:r>
-            <a:r>
-              <a:rPr lang="sv-SE" dirty="0"/>
-              <a:t> </a:t>
-            </a:r>
-            <a:r>
-              <a:rPr lang="sv-SE" dirty="0" err="1"/>
-              <a:t>based</a:t>
-            </a:r>
-            <a:r>
-              <a:rPr lang="sv-SE" dirty="0"/>
-              <a:t> </a:t>
-            </a:r>
-            <a:r>
-              <a:rPr lang="sv-SE" dirty="0" err="1"/>
-              <a:t>project</a:t>
-            </a:r>
-            <a:r>
-              <a:rPr lang="sv-SE" dirty="0"/>
-              <a:t> </a:t>
-            </a:r>
-            <a:r>
-              <a:rPr lang="sv-SE" dirty="0" err="1"/>
-              <a:t>file</a:t>
-            </a:r>
-            <a:endParaRPr lang="sv-SE" dirty="0"/>
-          </a:p>
-          <a:p>
-            <a:r>
-              <a:rPr lang="sv-SE" dirty="0"/>
-              <a:t>Minimalistic </a:t>
-            </a:r>
-            <a:r>
-              <a:rPr lang="sv-SE" dirty="0" err="1"/>
-              <a:t>project</a:t>
-            </a:r>
-            <a:r>
-              <a:rPr lang="sv-SE" dirty="0"/>
-              <a:t> </a:t>
-            </a:r>
-            <a:r>
-              <a:rPr lang="sv-SE" dirty="0" err="1"/>
-              <a:t>file</a:t>
-            </a:r>
-            <a:r>
-              <a:rPr lang="sv-SE" dirty="0"/>
-              <a:t> </a:t>
-            </a:r>
-            <a:r>
-              <a:rPr lang="sv-SE" dirty="0" err="1"/>
-              <a:t>compared</a:t>
-            </a:r>
-            <a:r>
-              <a:rPr lang="sv-SE" dirty="0"/>
-              <a:t> to SSDT </a:t>
-            </a:r>
-            <a:r>
-              <a:rPr lang="sv-SE" dirty="0" err="1"/>
-              <a:t>Database</a:t>
-            </a:r>
-            <a:r>
-              <a:rPr lang="sv-SE" dirty="0"/>
-              <a:t> Project</a:t>
-            </a:r>
-          </a:p>
-          <a:p>
-            <a:r>
-              <a:rPr lang="sv-SE" dirty="0" err="1"/>
-              <a:t>Create</a:t>
-            </a:r>
-            <a:r>
-              <a:rPr lang="sv-SE" dirty="0"/>
-              <a:t> </a:t>
-            </a:r>
-            <a:r>
-              <a:rPr lang="sv-SE" dirty="0" err="1"/>
-              <a:t>using</a:t>
-            </a:r>
-            <a:r>
-              <a:rPr lang="sv-SE" dirty="0"/>
-              <a:t> dotnet cli, </a:t>
-            </a:r>
-            <a:r>
-              <a:rPr lang="sv-SE" dirty="0" err="1"/>
-              <a:t>Azure</a:t>
-            </a:r>
-            <a:r>
-              <a:rPr lang="sv-SE" dirty="0"/>
-              <a:t> Data Studio or </a:t>
-            </a:r>
-            <a:r>
-              <a:rPr lang="sv-SE" dirty="0" err="1"/>
-              <a:t>VSCode</a:t>
-            </a:r>
-            <a:r>
-              <a:rPr lang="sv-SE" dirty="0"/>
-              <a:t> (or </a:t>
-            </a:r>
-            <a:r>
-              <a:rPr lang="sv-SE" dirty="0" err="1"/>
-              <a:t>preview</a:t>
-            </a:r>
-            <a:r>
-              <a:rPr lang="sv-SE" dirty="0"/>
-              <a:t> </a:t>
-            </a:r>
-            <a:r>
-              <a:rPr lang="sv-SE" dirty="0" err="1"/>
-              <a:t>of</a:t>
-            </a:r>
-            <a:r>
-              <a:rPr lang="sv-SE" dirty="0"/>
-              <a:t> SDK Style </a:t>
-            </a:r>
-            <a:r>
-              <a:rPr lang="sv-SE" dirty="0" err="1"/>
-              <a:t>projects</a:t>
-            </a:r>
-            <a:r>
-              <a:rPr lang="sv-SE" dirty="0"/>
-              <a:t> in Visual Studio 2022)</a:t>
-            </a:r>
-          </a:p>
-          <a:p>
-            <a:pPr lvl="1"/>
-            <a:r>
-              <a:rPr lang="sv-SE" dirty="0" err="1"/>
-              <a:t>Install</a:t>
-            </a:r>
-            <a:r>
-              <a:rPr lang="sv-SE" dirty="0"/>
-              <a:t> </a:t>
-            </a:r>
-            <a:r>
-              <a:rPr lang="sv-SE" dirty="0" err="1"/>
-              <a:t>sqlpackage</a:t>
-            </a:r>
-            <a:r>
-              <a:rPr lang="sv-SE" dirty="0"/>
-              <a:t> and the </a:t>
-            </a:r>
-            <a:r>
-              <a:rPr lang="sv-SE" dirty="0" err="1"/>
-              <a:t>sqlproj</a:t>
-            </a:r>
-            <a:r>
-              <a:rPr lang="sv-SE" dirty="0"/>
-              <a:t> </a:t>
-            </a:r>
-            <a:r>
-              <a:rPr lang="sv-SE" dirty="0" err="1"/>
-              <a:t>project</a:t>
-            </a:r>
-            <a:r>
-              <a:rPr lang="sv-SE" dirty="0"/>
-              <a:t> template</a:t>
-            </a:r>
-          </a:p>
-          <a:p>
-            <a:pPr lvl="2"/>
-            <a:r>
-              <a:rPr lang="sv-SE" dirty="0">
-                <a:latin typeface="Consolas" panose="020B0609020204030204" pitchFamily="49" charset="0"/>
-              </a:rPr>
-              <a:t>dotnet </a:t>
-            </a:r>
-            <a:r>
-              <a:rPr lang="sv-SE" dirty="0" err="1">
-                <a:latin typeface="Consolas" panose="020B0609020204030204" pitchFamily="49" charset="0"/>
-              </a:rPr>
-              <a:t>tool</a:t>
-            </a:r>
-            <a:r>
-              <a:rPr lang="sv-SE" dirty="0">
-                <a:latin typeface="Consolas" panose="020B0609020204030204" pitchFamily="49" charset="0"/>
-              </a:rPr>
-              <a:t> </a:t>
-            </a:r>
-            <a:r>
-              <a:rPr lang="sv-SE" dirty="0" err="1">
-                <a:latin typeface="Consolas" panose="020B0609020204030204" pitchFamily="49" charset="0"/>
-              </a:rPr>
-              <a:t>install</a:t>
-            </a:r>
-            <a:r>
-              <a:rPr lang="sv-SE" dirty="0">
-                <a:latin typeface="Consolas" panose="020B0609020204030204" pitchFamily="49" charset="0"/>
-              </a:rPr>
-              <a:t> –g </a:t>
-            </a:r>
-            <a:r>
-              <a:rPr lang="sv-SE" dirty="0" err="1">
-                <a:latin typeface="Consolas" panose="020B0609020204030204" pitchFamily="49" charset="0"/>
-              </a:rPr>
-              <a:t>microsoft.sqlpackage</a:t>
-            </a:r>
-            <a:endParaRPr lang="sv-SE" dirty="0">
-              <a:latin typeface="Consolas" panose="020B0609020204030204" pitchFamily="49" charset="0"/>
-            </a:endParaRPr>
-          </a:p>
-          <a:p>
-            <a:pPr lvl="2"/>
-            <a:r>
-              <a:rPr lang="sv-SE" dirty="0">
-                <a:latin typeface="Consolas" panose="020B0609020204030204" pitchFamily="49" charset="0"/>
-              </a:rPr>
-              <a:t>dotnet new </a:t>
-            </a:r>
-            <a:r>
-              <a:rPr lang="sv-SE" dirty="0" err="1">
-                <a:latin typeface="Consolas" panose="020B0609020204030204" pitchFamily="49" charset="0"/>
-              </a:rPr>
-              <a:t>install</a:t>
-            </a:r>
-            <a:r>
-              <a:rPr lang="sv-SE" dirty="0">
-                <a:latin typeface="Consolas" panose="020B0609020204030204" pitchFamily="49" charset="0"/>
-              </a:rPr>
-              <a:t> </a:t>
-            </a:r>
-            <a:r>
-              <a:rPr lang="sv-SE" dirty="0" err="1">
-                <a:latin typeface="Consolas" panose="020B0609020204030204" pitchFamily="49" charset="0"/>
-              </a:rPr>
-              <a:t>Microsoft.Build.Sql.Templates</a:t>
-            </a:r>
-            <a:endParaRPr lang="sv-SE" dirty="0">
-              <a:latin typeface="Consolas" panose="020B0609020204030204" pitchFamily="49" charset="0"/>
-            </a:endParaRPr>
-          </a:p>
-          <a:p>
-            <a:pPr lvl="1"/>
-            <a:r>
-              <a:rPr lang="sv-SE" dirty="0" err="1"/>
-              <a:t>Create</a:t>
-            </a:r>
-            <a:r>
-              <a:rPr lang="sv-SE" dirty="0"/>
-              <a:t> a new DB-</a:t>
-            </a:r>
-            <a:r>
-              <a:rPr lang="sv-SE" dirty="0" err="1"/>
-              <a:t>project</a:t>
-            </a:r>
-            <a:r>
-              <a:rPr lang="sv-SE" dirty="0"/>
-              <a:t> </a:t>
-            </a:r>
-            <a:r>
-              <a:rPr lang="sv-SE" dirty="0" err="1"/>
-              <a:t>with</a:t>
-            </a:r>
-            <a:r>
-              <a:rPr lang="sv-SE" dirty="0"/>
-              <a:t> </a:t>
-            </a:r>
-            <a:r>
-              <a:rPr lang="sv-SE" dirty="0" err="1"/>
-              <a:t>target</a:t>
-            </a:r>
-            <a:r>
-              <a:rPr lang="sv-SE" dirty="0"/>
-              <a:t> </a:t>
-            </a:r>
-            <a:r>
-              <a:rPr lang="sv-SE" dirty="0" err="1"/>
-              <a:t>platform</a:t>
-            </a:r>
-            <a:r>
-              <a:rPr lang="sv-SE" dirty="0"/>
-              <a:t> = </a:t>
-            </a:r>
-            <a:r>
-              <a:rPr lang="sv-SE" dirty="0" err="1"/>
-              <a:t>Sql</a:t>
-            </a:r>
-            <a:r>
-              <a:rPr lang="sv-SE" dirty="0"/>
-              <a:t> Server 2022 or </a:t>
-            </a:r>
-            <a:r>
-              <a:rPr lang="sv-SE" dirty="0" err="1"/>
-              <a:t>Azure</a:t>
-            </a:r>
-            <a:r>
-              <a:rPr lang="sv-SE" dirty="0"/>
-              <a:t> </a:t>
-            </a:r>
-            <a:r>
-              <a:rPr lang="sv-SE" dirty="0" err="1"/>
-              <a:t>Sql</a:t>
-            </a:r>
-            <a:r>
-              <a:rPr lang="sv-SE" dirty="0"/>
-              <a:t> (default)</a:t>
-            </a:r>
-          </a:p>
-          <a:p>
-            <a:pPr lvl="2"/>
-            <a:r>
-              <a:rPr lang="sv-SE" dirty="0">
-                <a:latin typeface="Consolas" panose="020B0609020204030204" pitchFamily="49" charset="0"/>
-              </a:rPr>
-              <a:t>dotnet new </a:t>
-            </a:r>
-            <a:r>
-              <a:rPr lang="sv-SE" dirty="0" err="1">
-                <a:latin typeface="Consolas" panose="020B0609020204030204" pitchFamily="49" charset="0"/>
-              </a:rPr>
-              <a:t>sqlproj</a:t>
-            </a:r>
-            <a:r>
-              <a:rPr lang="sv-SE" dirty="0">
-                <a:latin typeface="Consolas" panose="020B0609020204030204" pitchFamily="49" charset="0"/>
-              </a:rPr>
-              <a:t> –n </a:t>
-            </a:r>
-            <a:r>
-              <a:rPr lang="sv-SE" dirty="0" err="1">
-                <a:latin typeface="Consolas" panose="020B0609020204030204" pitchFamily="49" charset="0"/>
-              </a:rPr>
-              <a:t>ArtyPartyDatabaseName</a:t>
-            </a:r>
-            <a:r>
-              <a:rPr lang="sv-SE" dirty="0">
-                <a:latin typeface="Consolas" panose="020B0609020204030204" pitchFamily="49" charset="0"/>
-              </a:rPr>
-              <a:t> –o c:\git\ArtyPartyDatabaseName –</a:t>
-            </a:r>
-            <a:r>
-              <a:rPr lang="sv-SE" dirty="0" err="1">
-                <a:latin typeface="Consolas" panose="020B0609020204030204" pitchFamily="49" charset="0"/>
-              </a:rPr>
-              <a:t>tp</a:t>
-            </a:r>
-            <a:r>
-              <a:rPr lang="sv-SE" dirty="0">
-                <a:latin typeface="Consolas" panose="020B0609020204030204" pitchFamily="49" charset="0"/>
-              </a:rPr>
-              <a:t> Sql160</a:t>
-            </a:r>
-          </a:p>
-          <a:p>
-            <a:pPr lvl="1"/>
-            <a:r>
-              <a:rPr lang="sv-SE" dirty="0" err="1"/>
-              <a:t>Create</a:t>
-            </a:r>
-            <a:r>
-              <a:rPr lang="sv-SE" dirty="0"/>
-              <a:t> a new DB-</a:t>
-            </a:r>
-            <a:r>
-              <a:rPr lang="sv-SE" dirty="0" err="1"/>
-              <a:t>project</a:t>
-            </a:r>
-            <a:r>
-              <a:rPr lang="sv-SE" dirty="0"/>
-              <a:t> </a:t>
-            </a:r>
-            <a:r>
-              <a:rPr lang="sv-SE" dirty="0" err="1"/>
-              <a:t>with</a:t>
-            </a:r>
-            <a:r>
-              <a:rPr lang="sv-SE" dirty="0"/>
-              <a:t> </a:t>
-            </a:r>
-            <a:r>
-              <a:rPr lang="sv-SE" dirty="0" err="1"/>
-              <a:t>target</a:t>
-            </a:r>
-            <a:r>
-              <a:rPr lang="sv-SE" dirty="0"/>
-              <a:t> </a:t>
-            </a:r>
-            <a:r>
-              <a:rPr lang="sv-SE" dirty="0" err="1"/>
-              <a:t>platform</a:t>
-            </a:r>
-            <a:r>
-              <a:rPr lang="sv-SE" dirty="0"/>
-              <a:t> = </a:t>
-            </a:r>
-            <a:r>
-              <a:rPr lang="sv-SE" dirty="0" err="1"/>
-              <a:t>Fabric</a:t>
-            </a:r>
-            <a:r>
-              <a:rPr lang="sv-SE" dirty="0"/>
-              <a:t> DW</a:t>
-            </a:r>
-          </a:p>
-          <a:p>
-            <a:pPr lvl="2"/>
-            <a:r>
-              <a:rPr lang="sv-SE" dirty="0">
-                <a:latin typeface="Consolas" panose="020B0609020204030204" pitchFamily="49" charset="0"/>
-              </a:rPr>
-              <a:t>dotnet new </a:t>
-            </a:r>
-            <a:r>
-              <a:rPr lang="sv-SE" dirty="0" err="1">
-                <a:latin typeface="Consolas" panose="020B0609020204030204" pitchFamily="49" charset="0"/>
-              </a:rPr>
-              <a:t>sqlproj</a:t>
-            </a:r>
-            <a:r>
-              <a:rPr lang="sv-SE" dirty="0">
-                <a:latin typeface="Consolas" panose="020B0609020204030204" pitchFamily="49" charset="0"/>
-              </a:rPr>
-              <a:t> –n </a:t>
-            </a:r>
-            <a:r>
-              <a:rPr lang="sv-SE" dirty="0" err="1">
-                <a:latin typeface="Consolas" panose="020B0609020204030204" pitchFamily="49" charset="0"/>
-              </a:rPr>
-              <a:t>FabricateStuff</a:t>
-            </a:r>
-            <a:r>
-              <a:rPr lang="sv-SE" dirty="0">
-                <a:latin typeface="Consolas" panose="020B0609020204030204" pitchFamily="49" charset="0"/>
-              </a:rPr>
-              <a:t> –o c:\git\Fabric\db\FabricateStuff –</a:t>
-            </a:r>
-            <a:r>
-              <a:rPr lang="sv-SE" dirty="0" err="1">
-                <a:latin typeface="Consolas" panose="020B0609020204030204" pitchFamily="49" charset="0"/>
-              </a:rPr>
-              <a:t>tp</a:t>
-            </a:r>
-            <a:r>
-              <a:rPr lang="sv-SE" dirty="0">
-                <a:latin typeface="Consolas" panose="020B0609020204030204" pitchFamily="49" charset="0"/>
-              </a:rPr>
-              <a:t> </a:t>
-            </a:r>
-            <a:r>
-              <a:rPr lang="sv-SE" dirty="0" err="1">
-                <a:latin typeface="Consolas" panose="020B0609020204030204" pitchFamily="49" charset="0"/>
-              </a:rPr>
-              <a:t>SqlDwUnified</a:t>
-            </a:r>
-            <a:endParaRPr lang="sv-SE" dirty="0">
-              <a:latin typeface="Consolas" panose="020B0609020204030204" pitchFamily="49" charset="0"/>
-            </a:endParaRPr>
-          </a:p>
-          <a:p>
-            <a:pPr lvl="1"/>
-            <a:r>
-              <a:rPr lang="sv-SE" dirty="0"/>
-              <a:t> Get </a:t>
-            </a:r>
-            <a:r>
-              <a:rPr lang="sv-SE" dirty="0" err="1"/>
-              <a:t>some</a:t>
-            </a:r>
-            <a:r>
-              <a:rPr lang="sv-SE" dirty="0"/>
-              <a:t> </a:t>
-            </a:r>
-            <a:r>
-              <a:rPr lang="sv-SE" dirty="0" err="1"/>
-              <a:t>help</a:t>
-            </a:r>
-            <a:r>
-              <a:rPr lang="sv-SE" dirty="0"/>
-              <a:t> </a:t>
-            </a:r>
-            <a:r>
-              <a:rPr lang="sv-SE" dirty="0" err="1"/>
-              <a:t>with</a:t>
-            </a:r>
-            <a:r>
-              <a:rPr lang="sv-SE" dirty="0"/>
-              <a:t> options for dotnet new </a:t>
-            </a:r>
-            <a:r>
-              <a:rPr lang="sv-SE" dirty="0" err="1"/>
-              <a:t>sqlproj</a:t>
-            </a:r>
-            <a:endParaRPr lang="sv-SE" dirty="0"/>
-          </a:p>
-          <a:p>
-            <a:pPr lvl="2"/>
-            <a:r>
-              <a:rPr lang="sv-SE" dirty="0">
-                <a:latin typeface="Consolas" panose="020B0609020204030204" pitchFamily="49" charset="0"/>
-              </a:rPr>
-              <a:t>dotnet new </a:t>
-            </a:r>
-            <a:r>
-              <a:rPr lang="sv-SE" dirty="0" err="1">
-                <a:latin typeface="Consolas" panose="020B0609020204030204" pitchFamily="49" charset="0"/>
-              </a:rPr>
-              <a:t>sqlproj</a:t>
-            </a:r>
-            <a:r>
-              <a:rPr lang="sv-SE" dirty="0">
-                <a:latin typeface="Consolas" panose="020B0609020204030204" pitchFamily="49" charset="0"/>
-              </a:rPr>
-              <a:t> -h</a:t>
-            </a:r>
+            <a:pPr marL="0" indent="0">
+              <a:buNone/>
+            </a:pPr>
+            <a:r>
+              <a:rPr lang="en-GB" dirty="0"/>
+              <a:t>Migrations</a:t>
+            </a:r>
+            <a:endParaRPr lang="LID4096" dirty="0"/>
           </a:p>
         </p:txBody>
       </p:sp>
     </p:spTree>
     <p:extLst>
       <p:ext uri="{BB962C8B-B14F-4D97-AF65-F5344CB8AC3E}">
-        <p14:creationId xmlns:p14="http://schemas.microsoft.com/office/powerpoint/2010/main" val="3189988915"/>
+        <p14:creationId xmlns:p14="http://schemas.microsoft.com/office/powerpoint/2010/main" val="483047288"/>
       </p:ext>
     </p:extLst>
   </p:cSld>
@@ -6090,6 +8905,1759 @@
           <p:cNvPr id="2" name="Rubrik 1">
             <a:extLst>
               <a:ext uri="{FF2B5EF4-FFF2-40B4-BE49-F238E27FC236}">
+                <a16:creationId xmlns:a16="http://schemas.microsoft.com/office/drawing/2014/main" id="{4BFF07C0-1EBD-0808-1199-66A4D3075621}"/>
+              </a:ext>
+            </a:extLst>
+          </p:cNvPr>
+          <p:cNvSpPr>
+            <a:spLocks noGrp="1"/>
+          </p:cNvSpPr>
+          <p:nvPr>
+            <p:ph type="title"/>
+          </p:nvPr>
+        </p:nvSpPr>
+        <p:spPr/>
+        <p:txBody>
+          <a:bodyPr/>
+          <a:lstStyle/>
+          <a:p>
+            <a:r>
+              <a:rPr lang="sv-SE" dirty="0" err="1"/>
+              <a:t>Model</a:t>
+            </a:r>
+            <a:r>
+              <a:rPr lang="sv-SE" dirty="0"/>
+              <a:t> </a:t>
+            </a:r>
+            <a:r>
+              <a:rPr lang="sv-SE" dirty="0" err="1"/>
+              <a:t>based</a:t>
+            </a:r>
+            <a:r>
+              <a:rPr lang="sv-SE" dirty="0"/>
+              <a:t> </a:t>
+            </a:r>
+            <a:r>
+              <a:rPr lang="sv-SE" dirty="0" err="1"/>
+              <a:t>deployment</a:t>
+            </a:r>
+            <a:endParaRPr lang="sv-SE" dirty="0"/>
+          </a:p>
+        </p:txBody>
+      </p:sp>
+      <p:sp>
+        <p:nvSpPr>
+          <p:cNvPr id="3" name="Platshållare för innehåll 2">
+            <a:extLst>
+              <a:ext uri="{FF2B5EF4-FFF2-40B4-BE49-F238E27FC236}">
+                <a16:creationId xmlns:a16="http://schemas.microsoft.com/office/drawing/2014/main" id="{D1539999-38DF-6F25-D7AF-B1B565954712}"/>
+              </a:ext>
+            </a:extLst>
+          </p:cNvPr>
+          <p:cNvSpPr>
+            <a:spLocks noGrp="1"/>
+          </p:cNvSpPr>
+          <p:nvPr>
+            <p:ph idx="1"/>
+          </p:nvPr>
+        </p:nvSpPr>
+        <p:spPr/>
+        <p:txBody>
+          <a:bodyPr/>
+          <a:lstStyle/>
+          <a:p>
+            <a:r>
+              <a:rPr lang="sv-SE" dirty="0" err="1"/>
+              <a:t>Create</a:t>
+            </a:r>
+            <a:r>
+              <a:rPr lang="sv-SE" dirty="0"/>
+              <a:t> a data </a:t>
+            </a:r>
+            <a:r>
+              <a:rPr lang="sv-SE" dirty="0" err="1"/>
+              <a:t>model</a:t>
+            </a:r>
+            <a:r>
+              <a:rPr lang="sv-SE" dirty="0"/>
+              <a:t> in </a:t>
+            </a:r>
+            <a:r>
+              <a:rPr lang="sv-SE" dirty="0" err="1"/>
+              <a:t>code</a:t>
+            </a:r>
+            <a:endParaRPr lang="sv-SE" dirty="0"/>
+          </a:p>
+          <a:p>
+            <a:pPr lvl="1"/>
+            <a:r>
+              <a:rPr lang="sv-SE" dirty="0"/>
+              <a:t>SSDT </a:t>
+            </a:r>
+            <a:r>
+              <a:rPr lang="sv-SE" dirty="0" err="1"/>
+              <a:t>Database</a:t>
+            </a:r>
+            <a:r>
+              <a:rPr lang="sv-SE" dirty="0"/>
+              <a:t> Projects</a:t>
+            </a:r>
+          </a:p>
+          <a:p>
+            <a:pPr lvl="1"/>
+            <a:r>
+              <a:rPr lang="sv-SE" dirty="0"/>
+              <a:t>SDK Style </a:t>
+            </a:r>
+            <a:r>
+              <a:rPr lang="sv-SE" dirty="0" err="1"/>
+              <a:t>Database</a:t>
+            </a:r>
+            <a:r>
+              <a:rPr lang="sv-SE" dirty="0"/>
+              <a:t> Projects</a:t>
+            </a:r>
+          </a:p>
+          <a:p>
+            <a:r>
+              <a:rPr lang="sv-SE" dirty="0" err="1"/>
+              <a:t>Compile</a:t>
+            </a:r>
+            <a:r>
+              <a:rPr lang="sv-SE" dirty="0"/>
+              <a:t> the </a:t>
+            </a:r>
+            <a:r>
+              <a:rPr lang="sv-SE" dirty="0" err="1"/>
+              <a:t>model</a:t>
+            </a:r>
+            <a:r>
+              <a:rPr lang="sv-SE" dirty="0"/>
+              <a:t> to a </a:t>
+            </a:r>
+            <a:r>
+              <a:rPr lang="sv-SE" dirty="0" err="1"/>
+              <a:t>dacpac</a:t>
+            </a:r>
+            <a:endParaRPr lang="sv-SE" dirty="0"/>
+          </a:p>
+          <a:p>
+            <a:pPr lvl="1"/>
+            <a:r>
+              <a:rPr lang="sv-SE" dirty="0" err="1"/>
+              <a:t>sqlpackage</a:t>
+            </a:r>
+            <a:r>
+              <a:rPr lang="sv-SE" dirty="0"/>
+              <a:t> </a:t>
+            </a:r>
+          </a:p>
+          <a:p>
+            <a:pPr lvl="1"/>
+            <a:r>
+              <a:rPr lang="sv-SE" dirty="0"/>
+              <a:t>dotnet </a:t>
+            </a:r>
+            <a:r>
+              <a:rPr lang="sv-SE" dirty="0" err="1"/>
+              <a:t>build</a:t>
+            </a:r>
+            <a:endParaRPr lang="sv-SE" dirty="0"/>
+          </a:p>
+          <a:p>
+            <a:r>
+              <a:rPr lang="sv-SE" dirty="0" err="1"/>
+              <a:t>Deploy</a:t>
+            </a:r>
+            <a:r>
+              <a:rPr lang="sv-SE" dirty="0"/>
+              <a:t> </a:t>
+            </a:r>
+            <a:r>
+              <a:rPr lang="sv-SE" dirty="0" err="1"/>
+              <a:t>using</a:t>
+            </a:r>
+            <a:r>
+              <a:rPr lang="sv-SE" dirty="0"/>
+              <a:t> a </a:t>
+            </a:r>
+            <a:r>
+              <a:rPr lang="sv-SE" dirty="0" err="1"/>
+              <a:t>tool</a:t>
+            </a:r>
+            <a:r>
+              <a:rPr lang="sv-SE" dirty="0"/>
+              <a:t> </a:t>
+            </a:r>
+            <a:r>
+              <a:rPr lang="sv-SE" dirty="0" err="1"/>
+              <a:t>that</a:t>
+            </a:r>
+            <a:r>
+              <a:rPr lang="sv-SE" dirty="0"/>
+              <a:t> </a:t>
+            </a:r>
+            <a:r>
+              <a:rPr lang="sv-SE" dirty="0" err="1"/>
+              <a:t>can</a:t>
+            </a:r>
+            <a:r>
+              <a:rPr lang="sv-SE" dirty="0"/>
+              <a:t> </a:t>
+            </a:r>
+            <a:r>
+              <a:rPr lang="sv-SE" dirty="0" err="1"/>
+              <a:t>compare</a:t>
+            </a:r>
+            <a:r>
+              <a:rPr lang="sv-SE" dirty="0"/>
+              <a:t> the </a:t>
+            </a:r>
+            <a:r>
+              <a:rPr lang="sv-SE" dirty="0" err="1"/>
+              <a:t>model</a:t>
+            </a:r>
+            <a:r>
+              <a:rPr lang="sv-SE" dirty="0"/>
+              <a:t> </a:t>
+            </a:r>
+            <a:r>
+              <a:rPr lang="sv-SE" dirty="0" err="1"/>
+              <a:t>with</a:t>
+            </a:r>
+            <a:r>
+              <a:rPr lang="sv-SE" dirty="0"/>
+              <a:t> the </a:t>
+            </a:r>
+            <a:r>
+              <a:rPr lang="sv-SE" dirty="0" err="1"/>
+              <a:t>target</a:t>
+            </a:r>
+            <a:r>
+              <a:rPr lang="sv-SE" dirty="0"/>
+              <a:t> data </a:t>
+            </a:r>
+            <a:r>
+              <a:rPr lang="sv-SE" dirty="0" err="1"/>
+              <a:t>model</a:t>
+            </a:r>
+            <a:r>
+              <a:rPr lang="sv-SE" dirty="0"/>
+              <a:t> and make </a:t>
+            </a:r>
+            <a:r>
+              <a:rPr lang="sv-SE" dirty="0" err="1"/>
+              <a:t>corrections</a:t>
+            </a:r>
+            <a:r>
+              <a:rPr lang="sv-SE" dirty="0"/>
+              <a:t> to the </a:t>
+            </a:r>
+            <a:r>
+              <a:rPr lang="sv-SE" dirty="0" err="1"/>
+              <a:t>target</a:t>
+            </a:r>
+            <a:endParaRPr lang="sv-SE" dirty="0"/>
+          </a:p>
+          <a:p>
+            <a:pPr lvl="1"/>
+            <a:r>
+              <a:rPr lang="sv-SE" dirty="0" err="1"/>
+              <a:t>Sqlpackage</a:t>
+            </a:r>
+            <a:endParaRPr lang="sv-SE" dirty="0"/>
+          </a:p>
+          <a:p>
+            <a:pPr marL="0" indent="0">
+              <a:buNone/>
+            </a:pPr>
+            <a:endParaRPr lang="sv-SE" dirty="0"/>
+          </a:p>
+        </p:txBody>
+      </p:sp>
+    </p:spTree>
+    <p:extLst>
+      <p:ext uri="{BB962C8B-B14F-4D97-AF65-F5344CB8AC3E}">
+        <p14:creationId xmlns:p14="http://schemas.microsoft.com/office/powerpoint/2010/main" val="2475718225"/>
+      </p:ext>
+    </p:extLst>
+  </p:cSld>
+  <p:clrMapOvr>
+    <a:masterClrMapping/>
+  </p:clrMapOvr>
+</p:sld>
+</file>
+
+<file path=ppt/slides/slide13.xml><?xml version="1.0" encoding="utf-8"?>
+<p:sld xmlns:a="http://schemas.openxmlformats.org/drawingml/2006/main" xmlns:r="http://schemas.openxmlformats.org/officeDocument/2006/relationships" xmlns:p="http://schemas.openxmlformats.org/presentationml/2006/main">
+  <p:cSld>
+    <p:spTree>
+      <p:nvGrpSpPr>
+        <p:cNvPr id="1" name=""/>
+        <p:cNvGrpSpPr/>
+        <p:nvPr/>
+      </p:nvGrpSpPr>
+      <p:grpSpPr>
+        <a:xfrm>
+          <a:off x="0" y="0"/>
+          <a:ext cx="0" cy="0"/>
+          <a:chOff x="0" y="0"/>
+          <a:chExt cx="0" cy="0"/>
+        </a:xfrm>
+      </p:grpSpPr>
+      <p:sp>
+        <p:nvSpPr>
+          <p:cNvPr id="2" name="Rubrik 1">
+            <a:extLst>
+              <a:ext uri="{FF2B5EF4-FFF2-40B4-BE49-F238E27FC236}">
+                <a16:creationId xmlns:a16="http://schemas.microsoft.com/office/drawing/2014/main" id="{41BD2D2D-8C5C-76A0-ADED-C851B8A4A725}"/>
+              </a:ext>
+            </a:extLst>
+          </p:cNvPr>
+          <p:cNvSpPr>
+            <a:spLocks noGrp="1"/>
+          </p:cNvSpPr>
+          <p:nvPr>
+            <p:ph type="title"/>
+          </p:nvPr>
+        </p:nvSpPr>
+        <p:spPr/>
+        <p:txBody>
+          <a:bodyPr/>
+          <a:lstStyle/>
+          <a:p>
+            <a:r>
+              <a:rPr lang="sv-SE" dirty="0"/>
+              <a:t>SQL Server </a:t>
+            </a:r>
+            <a:r>
+              <a:rPr lang="sv-SE" dirty="0" err="1"/>
+              <a:t>Database</a:t>
+            </a:r>
+            <a:r>
+              <a:rPr lang="sv-SE" dirty="0"/>
+              <a:t> Projects</a:t>
+            </a:r>
+          </a:p>
+        </p:txBody>
+      </p:sp>
+      <p:sp>
+        <p:nvSpPr>
+          <p:cNvPr id="3" name="Platshållare för innehåll 2">
+            <a:extLst>
+              <a:ext uri="{FF2B5EF4-FFF2-40B4-BE49-F238E27FC236}">
+                <a16:creationId xmlns:a16="http://schemas.microsoft.com/office/drawing/2014/main" id="{7EB283A5-1724-8B3C-3E44-780DC660A137}"/>
+              </a:ext>
+            </a:extLst>
+          </p:cNvPr>
+          <p:cNvSpPr>
+            <a:spLocks noGrp="1"/>
+          </p:cNvSpPr>
+          <p:nvPr>
+            <p:ph idx="1"/>
+          </p:nvPr>
+        </p:nvSpPr>
+        <p:spPr/>
+        <p:txBody>
+          <a:bodyPr/>
+          <a:lstStyle/>
+          <a:p>
+            <a:r>
+              <a:rPr lang="sv-SE" dirty="0" err="1"/>
+              <a:t>Mainly</a:t>
+            </a:r>
+            <a:r>
+              <a:rPr lang="sv-SE" dirty="0"/>
+              <a:t> a </a:t>
+            </a:r>
+            <a:r>
+              <a:rPr lang="sv-SE" dirty="0" err="1"/>
+              <a:t>tool</a:t>
+            </a:r>
+            <a:r>
+              <a:rPr lang="sv-SE" dirty="0"/>
+              <a:t> for </a:t>
+            </a:r>
+            <a:r>
+              <a:rPr lang="sv-SE" dirty="0" err="1"/>
+              <a:t>model</a:t>
+            </a:r>
+            <a:r>
+              <a:rPr lang="sv-SE" dirty="0"/>
+              <a:t> </a:t>
+            </a:r>
+            <a:r>
+              <a:rPr lang="sv-SE" dirty="0" err="1"/>
+              <a:t>based</a:t>
+            </a:r>
+            <a:r>
+              <a:rPr lang="sv-SE" dirty="0"/>
+              <a:t> </a:t>
+            </a:r>
+            <a:r>
+              <a:rPr lang="sv-SE" dirty="0" err="1"/>
+              <a:t>deployments</a:t>
+            </a:r>
+            <a:endParaRPr lang="sv-SE" dirty="0"/>
+          </a:p>
+          <a:p>
+            <a:r>
+              <a:rPr lang="sv-SE" dirty="0"/>
+              <a:t>Supports migrations </a:t>
+            </a:r>
+            <a:r>
+              <a:rPr lang="sv-SE" dirty="0" err="1"/>
+              <a:t>with</a:t>
+            </a:r>
+            <a:r>
+              <a:rPr lang="sv-SE" dirty="0"/>
+              <a:t> Pre- and Post </a:t>
+            </a:r>
+            <a:r>
+              <a:rPr lang="sv-SE" dirty="0" err="1"/>
+              <a:t>Deploy</a:t>
+            </a:r>
+            <a:r>
+              <a:rPr lang="sv-SE" dirty="0"/>
+              <a:t> scripts and </a:t>
+            </a:r>
+            <a:r>
+              <a:rPr lang="sv-SE" dirty="0" err="1"/>
+              <a:t>refactor</a:t>
+            </a:r>
+            <a:r>
+              <a:rPr lang="sv-SE" dirty="0"/>
+              <a:t>-log.</a:t>
+            </a:r>
+          </a:p>
+        </p:txBody>
+      </p:sp>
+    </p:spTree>
+    <p:extLst>
+      <p:ext uri="{BB962C8B-B14F-4D97-AF65-F5344CB8AC3E}">
+        <p14:creationId xmlns:p14="http://schemas.microsoft.com/office/powerpoint/2010/main" val="2425775469"/>
+      </p:ext>
+    </p:extLst>
+  </p:cSld>
+  <p:clrMapOvr>
+    <a:masterClrMapping/>
+  </p:clrMapOvr>
+</p:sld>
+</file>
+
+<file path=ppt/slides/slide14.xml><?xml version="1.0" encoding="utf-8"?>
+<p:sld xmlns:a="http://schemas.openxmlformats.org/drawingml/2006/main" xmlns:r="http://schemas.openxmlformats.org/officeDocument/2006/relationships" xmlns:p="http://schemas.openxmlformats.org/presentationml/2006/main">
+  <p:cSld>
+    <p:spTree>
+      <p:nvGrpSpPr>
+        <p:cNvPr id="1" name=""/>
+        <p:cNvGrpSpPr/>
+        <p:nvPr/>
+      </p:nvGrpSpPr>
+      <p:grpSpPr>
+        <a:xfrm>
+          <a:off x="0" y="0"/>
+          <a:ext cx="0" cy="0"/>
+          <a:chOff x="0" y="0"/>
+          <a:chExt cx="0" cy="0"/>
+        </a:xfrm>
+      </p:grpSpPr>
+      <p:sp>
+        <p:nvSpPr>
+          <p:cNvPr id="4" name="Speech Bubble: Rectangle with Corners Rounded 3">
+            <a:extLst>
+              <a:ext uri="{FF2B5EF4-FFF2-40B4-BE49-F238E27FC236}">
+                <a16:creationId xmlns:a16="http://schemas.microsoft.com/office/drawing/2014/main" id="{4F8E6A7D-FFAA-B823-8804-EC93946E6E19}"/>
+              </a:ext>
+            </a:extLst>
+          </p:cNvPr>
+          <p:cNvSpPr/>
+          <p:nvPr/>
+        </p:nvSpPr>
+        <p:spPr>
+          <a:xfrm>
+            <a:off x="7337146" y="365760"/>
+            <a:ext cx="4440326" cy="2106778"/>
+          </a:xfrm>
+          <a:prstGeom prst="wedgeRoundRectCallout">
+            <a:avLst>
+              <a:gd name="adj1" fmla="val -25605"/>
+              <a:gd name="adj2" fmla="val 139359"/>
+              <a:gd name="adj3" fmla="val 16667"/>
+            </a:avLst>
+          </a:prstGeom>
+          <a:solidFill>
+            <a:srgbClr val="FFFF00"/>
+          </a:solidFill>
+        </p:spPr>
+        <p:style>
+          <a:lnRef idx="2">
+            <a:schemeClr val="accent1">
+              <a:shade val="15000"/>
+            </a:schemeClr>
+          </a:lnRef>
+          <a:fillRef idx="1">
+            <a:schemeClr val="accent1"/>
+          </a:fillRef>
+          <a:effectRef idx="0">
+            <a:schemeClr val="accent1"/>
+          </a:effectRef>
+          <a:fontRef idx="minor">
+            <a:schemeClr val="lt1"/>
+          </a:fontRef>
+        </p:style>
+        <p:txBody>
+          <a:bodyPr rtlCol="0" anchor="ctr"/>
+          <a:lstStyle/>
+          <a:p>
+            <a:pPr algn="ctr"/>
+            <a:r>
+              <a:rPr lang="en-GB" b="1" dirty="0">
+                <a:solidFill>
+                  <a:schemeClr val="tx1"/>
+                </a:solidFill>
+              </a:rPr>
+              <a:t>Warning!</a:t>
+            </a:r>
+          </a:p>
+          <a:p>
+            <a:pPr algn="ctr"/>
+            <a:r>
+              <a:rPr lang="en-GB" b="1" dirty="0">
+                <a:solidFill>
+                  <a:schemeClr val="tx1"/>
+                </a:solidFill>
+              </a:rPr>
+              <a:t>Copy/Paste of these commands from PowerPoint won’t work.</a:t>
+            </a:r>
+          </a:p>
+          <a:p>
+            <a:pPr algn="ctr"/>
+            <a:r>
+              <a:rPr lang="en-GB" b="1" dirty="0">
+                <a:solidFill>
+                  <a:schemeClr val="tx1"/>
+                </a:solidFill>
+              </a:rPr>
+              <a:t>Because hyphens are broken.</a:t>
+            </a:r>
+          </a:p>
+          <a:p>
+            <a:pPr algn="ctr"/>
+            <a:r>
+              <a:rPr lang="en-GB" b="1" dirty="0">
+                <a:solidFill>
+                  <a:schemeClr val="tx1"/>
+                </a:solidFill>
+              </a:rPr>
+              <a:t>-o is not the same as </a:t>
+            </a:r>
+            <a:r>
+              <a:rPr lang="sv-SE" b="1" dirty="0">
+                <a:solidFill>
+                  <a:schemeClr val="tx1"/>
+                </a:solidFill>
+                <a:latin typeface="Consolas" panose="020B0609020204030204" pitchFamily="49" charset="0"/>
+              </a:rPr>
+              <a:t>–o</a:t>
+            </a:r>
+            <a:endParaRPr lang="LID4096" b="1" dirty="0">
+              <a:solidFill>
+                <a:schemeClr val="tx1"/>
+              </a:solidFill>
+            </a:endParaRPr>
+          </a:p>
+        </p:txBody>
+      </p:sp>
+      <p:sp>
+        <p:nvSpPr>
+          <p:cNvPr id="2" name="Rubrik 1">
+            <a:extLst>
+              <a:ext uri="{FF2B5EF4-FFF2-40B4-BE49-F238E27FC236}">
+                <a16:creationId xmlns:a16="http://schemas.microsoft.com/office/drawing/2014/main" id="{C2255877-C3B2-3DA3-1D07-F0737210D63E}"/>
+              </a:ext>
+            </a:extLst>
+          </p:cNvPr>
+          <p:cNvSpPr>
+            <a:spLocks noGrp="1"/>
+          </p:cNvSpPr>
+          <p:nvPr>
+            <p:ph type="title"/>
+          </p:nvPr>
+        </p:nvSpPr>
+        <p:spPr/>
+        <p:txBody>
+          <a:bodyPr/>
+          <a:lstStyle/>
+          <a:p>
+            <a:r>
+              <a:rPr lang="sv-SE" dirty="0"/>
+              <a:t>SDK Style </a:t>
+            </a:r>
+            <a:r>
+              <a:rPr lang="sv-SE" dirty="0" err="1"/>
+              <a:t>Database</a:t>
+            </a:r>
+            <a:r>
+              <a:rPr lang="sv-SE" dirty="0"/>
+              <a:t> Projects</a:t>
+            </a:r>
+          </a:p>
+        </p:txBody>
+      </p:sp>
+      <p:sp>
+        <p:nvSpPr>
+          <p:cNvPr id="3" name="Platshållare för innehåll 2">
+            <a:extLst>
+              <a:ext uri="{FF2B5EF4-FFF2-40B4-BE49-F238E27FC236}">
+                <a16:creationId xmlns:a16="http://schemas.microsoft.com/office/drawing/2014/main" id="{7B54F8F6-6C3F-39C4-28EA-5125DF9BC373}"/>
+              </a:ext>
+            </a:extLst>
+          </p:cNvPr>
+          <p:cNvSpPr>
+            <a:spLocks noGrp="1"/>
+          </p:cNvSpPr>
+          <p:nvPr>
+            <p:ph idx="1"/>
+          </p:nvPr>
+        </p:nvSpPr>
+        <p:spPr>
+          <a:xfrm>
+            <a:off x="677334" y="2160589"/>
+            <a:ext cx="10935546" cy="3880773"/>
+          </a:xfrm>
+        </p:spPr>
+        <p:txBody>
+          <a:bodyPr>
+            <a:normAutofit fontScale="92500" lnSpcReduction="20000"/>
+          </a:bodyPr>
+          <a:lstStyle/>
+          <a:p>
+            <a:r>
+              <a:rPr lang="sv-SE" dirty="0"/>
+              <a:t>.NET </a:t>
+            </a:r>
+            <a:r>
+              <a:rPr lang="sv-SE" dirty="0" err="1"/>
+              <a:t>Core</a:t>
+            </a:r>
+            <a:r>
+              <a:rPr lang="sv-SE" dirty="0"/>
+              <a:t> </a:t>
+            </a:r>
+            <a:r>
+              <a:rPr lang="sv-SE" dirty="0" err="1"/>
+              <a:t>based</a:t>
+            </a:r>
+            <a:r>
+              <a:rPr lang="sv-SE" dirty="0"/>
+              <a:t> </a:t>
+            </a:r>
+            <a:r>
+              <a:rPr lang="sv-SE" dirty="0" err="1"/>
+              <a:t>project</a:t>
+            </a:r>
+            <a:r>
+              <a:rPr lang="sv-SE" dirty="0"/>
+              <a:t> </a:t>
+            </a:r>
+            <a:r>
+              <a:rPr lang="sv-SE" dirty="0" err="1"/>
+              <a:t>file</a:t>
+            </a:r>
+            <a:endParaRPr lang="sv-SE" dirty="0"/>
+          </a:p>
+          <a:p>
+            <a:r>
+              <a:rPr lang="sv-SE" dirty="0"/>
+              <a:t>Minimalistic </a:t>
+            </a:r>
+            <a:r>
+              <a:rPr lang="sv-SE" dirty="0" err="1"/>
+              <a:t>project</a:t>
+            </a:r>
+            <a:r>
+              <a:rPr lang="sv-SE" dirty="0"/>
+              <a:t> </a:t>
+            </a:r>
+            <a:r>
+              <a:rPr lang="sv-SE" dirty="0" err="1"/>
+              <a:t>file</a:t>
+            </a:r>
+            <a:r>
+              <a:rPr lang="sv-SE" dirty="0"/>
+              <a:t> </a:t>
+            </a:r>
+            <a:r>
+              <a:rPr lang="sv-SE" dirty="0" err="1"/>
+              <a:t>compared</a:t>
+            </a:r>
+            <a:r>
+              <a:rPr lang="sv-SE" dirty="0"/>
+              <a:t> to SSDT </a:t>
+            </a:r>
+            <a:r>
+              <a:rPr lang="sv-SE" dirty="0" err="1"/>
+              <a:t>Database</a:t>
+            </a:r>
+            <a:r>
+              <a:rPr lang="sv-SE" dirty="0"/>
+              <a:t> Project</a:t>
+            </a:r>
+          </a:p>
+          <a:p>
+            <a:r>
+              <a:rPr lang="sv-SE" dirty="0" err="1"/>
+              <a:t>Create</a:t>
+            </a:r>
+            <a:r>
+              <a:rPr lang="sv-SE" dirty="0"/>
+              <a:t> </a:t>
+            </a:r>
+            <a:r>
+              <a:rPr lang="sv-SE" dirty="0" err="1"/>
+              <a:t>using</a:t>
+            </a:r>
+            <a:r>
+              <a:rPr lang="sv-SE" dirty="0"/>
+              <a:t> dotnet cli, </a:t>
+            </a:r>
+            <a:r>
+              <a:rPr lang="sv-SE" dirty="0" err="1"/>
+              <a:t>Azure</a:t>
+            </a:r>
+            <a:r>
+              <a:rPr lang="sv-SE" dirty="0"/>
+              <a:t> Data Studio or </a:t>
+            </a:r>
+            <a:r>
+              <a:rPr lang="sv-SE" dirty="0" err="1"/>
+              <a:t>VSCode</a:t>
+            </a:r>
+            <a:r>
+              <a:rPr lang="sv-SE" dirty="0"/>
+              <a:t> (or </a:t>
+            </a:r>
+            <a:r>
+              <a:rPr lang="sv-SE" dirty="0" err="1"/>
+              <a:t>preview</a:t>
+            </a:r>
+            <a:r>
+              <a:rPr lang="sv-SE" dirty="0"/>
+              <a:t> </a:t>
+            </a:r>
+            <a:r>
+              <a:rPr lang="sv-SE" dirty="0" err="1"/>
+              <a:t>of</a:t>
+            </a:r>
+            <a:r>
+              <a:rPr lang="sv-SE" dirty="0"/>
+              <a:t> SDK Style </a:t>
+            </a:r>
+            <a:r>
+              <a:rPr lang="sv-SE" dirty="0" err="1"/>
+              <a:t>projects</a:t>
+            </a:r>
+            <a:r>
+              <a:rPr lang="sv-SE" dirty="0"/>
+              <a:t> in Visual Studio 2022)</a:t>
+            </a:r>
+          </a:p>
+          <a:p>
+            <a:pPr lvl="1"/>
+            <a:r>
+              <a:rPr lang="sv-SE" dirty="0" err="1"/>
+              <a:t>Install</a:t>
+            </a:r>
+            <a:r>
+              <a:rPr lang="sv-SE" dirty="0"/>
+              <a:t> </a:t>
+            </a:r>
+            <a:r>
+              <a:rPr lang="sv-SE" dirty="0" err="1"/>
+              <a:t>sqlpackage</a:t>
+            </a:r>
+            <a:r>
+              <a:rPr lang="sv-SE" dirty="0"/>
+              <a:t> and the </a:t>
+            </a:r>
+            <a:r>
+              <a:rPr lang="sv-SE" dirty="0" err="1"/>
+              <a:t>sqlproj</a:t>
+            </a:r>
+            <a:r>
+              <a:rPr lang="sv-SE" dirty="0"/>
+              <a:t> </a:t>
+            </a:r>
+            <a:r>
+              <a:rPr lang="sv-SE" dirty="0" err="1"/>
+              <a:t>project</a:t>
+            </a:r>
+            <a:r>
+              <a:rPr lang="sv-SE" dirty="0"/>
+              <a:t> template</a:t>
+            </a:r>
+          </a:p>
+          <a:p>
+            <a:pPr lvl="2"/>
+            <a:r>
+              <a:rPr lang="sv-SE" dirty="0">
+                <a:latin typeface="Consolas" panose="020B0609020204030204" pitchFamily="49" charset="0"/>
+              </a:rPr>
+              <a:t>dotnet </a:t>
+            </a:r>
+            <a:r>
+              <a:rPr lang="sv-SE" dirty="0" err="1">
+                <a:latin typeface="Consolas" panose="020B0609020204030204" pitchFamily="49" charset="0"/>
+              </a:rPr>
+              <a:t>tool</a:t>
+            </a:r>
+            <a:r>
+              <a:rPr lang="sv-SE" dirty="0">
+                <a:latin typeface="Consolas" panose="020B0609020204030204" pitchFamily="49" charset="0"/>
+              </a:rPr>
+              <a:t> </a:t>
+            </a:r>
+            <a:r>
+              <a:rPr lang="sv-SE" dirty="0" err="1">
+                <a:latin typeface="Consolas" panose="020B0609020204030204" pitchFamily="49" charset="0"/>
+              </a:rPr>
+              <a:t>install</a:t>
+            </a:r>
+            <a:r>
+              <a:rPr lang="sv-SE" dirty="0">
+                <a:latin typeface="Consolas" panose="020B0609020204030204" pitchFamily="49" charset="0"/>
+              </a:rPr>
+              <a:t> --global </a:t>
+            </a:r>
+            <a:r>
+              <a:rPr lang="sv-SE" dirty="0" err="1">
+                <a:latin typeface="Consolas" panose="020B0609020204030204" pitchFamily="49" charset="0"/>
+              </a:rPr>
+              <a:t>microsoft.sqlpackage</a:t>
+            </a:r>
+            <a:endParaRPr lang="sv-SE" dirty="0">
+              <a:latin typeface="Consolas" panose="020B0609020204030204" pitchFamily="49" charset="0"/>
+            </a:endParaRPr>
+          </a:p>
+          <a:p>
+            <a:pPr lvl="2"/>
+            <a:r>
+              <a:rPr lang="sv-SE" dirty="0">
+                <a:latin typeface="Consolas" panose="020B0609020204030204" pitchFamily="49" charset="0"/>
+              </a:rPr>
+              <a:t>dotnet new </a:t>
+            </a:r>
+            <a:r>
+              <a:rPr lang="sv-SE" dirty="0" err="1">
+                <a:latin typeface="Consolas" panose="020B0609020204030204" pitchFamily="49" charset="0"/>
+              </a:rPr>
+              <a:t>install</a:t>
+            </a:r>
+            <a:r>
+              <a:rPr lang="sv-SE" dirty="0">
+                <a:latin typeface="Consolas" panose="020B0609020204030204" pitchFamily="49" charset="0"/>
+              </a:rPr>
+              <a:t> </a:t>
+            </a:r>
+            <a:r>
+              <a:rPr lang="sv-SE" dirty="0" err="1">
+                <a:latin typeface="Consolas" panose="020B0609020204030204" pitchFamily="49" charset="0"/>
+              </a:rPr>
+              <a:t>Microsoft.Build.Sql.Templates</a:t>
+            </a:r>
+            <a:endParaRPr lang="sv-SE" dirty="0">
+              <a:latin typeface="Consolas" panose="020B0609020204030204" pitchFamily="49" charset="0"/>
+            </a:endParaRPr>
+          </a:p>
+          <a:p>
+            <a:pPr lvl="1"/>
+            <a:r>
+              <a:rPr lang="sv-SE" dirty="0" err="1"/>
+              <a:t>Create</a:t>
+            </a:r>
+            <a:r>
+              <a:rPr lang="sv-SE" dirty="0"/>
+              <a:t> a new DB-</a:t>
+            </a:r>
+            <a:r>
+              <a:rPr lang="sv-SE" dirty="0" err="1"/>
+              <a:t>project</a:t>
+            </a:r>
+            <a:r>
+              <a:rPr lang="sv-SE" dirty="0"/>
+              <a:t> </a:t>
+            </a:r>
+            <a:r>
+              <a:rPr lang="sv-SE" dirty="0" err="1"/>
+              <a:t>with</a:t>
+            </a:r>
+            <a:r>
+              <a:rPr lang="sv-SE" dirty="0"/>
+              <a:t> </a:t>
+            </a:r>
+            <a:r>
+              <a:rPr lang="sv-SE" dirty="0" err="1"/>
+              <a:t>target</a:t>
+            </a:r>
+            <a:r>
+              <a:rPr lang="sv-SE" dirty="0"/>
+              <a:t> </a:t>
+            </a:r>
+            <a:r>
+              <a:rPr lang="sv-SE" dirty="0" err="1"/>
+              <a:t>platform</a:t>
+            </a:r>
+            <a:r>
+              <a:rPr lang="sv-SE" dirty="0"/>
+              <a:t> = </a:t>
+            </a:r>
+            <a:r>
+              <a:rPr lang="sv-SE" dirty="0" err="1"/>
+              <a:t>Sql</a:t>
+            </a:r>
+            <a:r>
+              <a:rPr lang="sv-SE" dirty="0"/>
+              <a:t> Server 2022 or </a:t>
+            </a:r>
+            <a:r>
+              <a:rPr lang="sv-SE" dirty="0" err="1"/>
+              <a:t>Azure</a:t>
+            </a:r>
+            <a:r>
+              <a:rPr lang="sv-SE" dirty="0"/>
+              <a:t> </a:t>
+            </a:r>
+            <a:r>
+              <a:rPr lang="sv-SE" dirty="0" err="1"/>
+              <a:t>Sql</a:t>
+            </a:r>
+            <a:r>
+              <a:rPr lang="sv-SE" dirty="0"/>
+              <a:t> (default)</a:t>
+            </a:r>
+          </a:p>
+          <a:p>
+            <a:pPr lvl="2"/>
+            <a:r>
+              <a:rPr lang="sv-SE" dirty="0">
+                <a:latin typeface="Consolas" panose="020B0609020204030204" pitchFamily="49" charset="0"/>
+              </a:rPr>
+              <a:t>dotnet new </a:t>
+            </a:r>
+            <a:r>
+              <a:rPr lang="sv-SE" dirty="0" err="1">
+                <a:latin typeface="Consolas" panose="020B0609020204030204" pitchFamily="49" charset="0"/>
+              </a:rPr>
+              <a:t>sqlproj</a:t>
+            </a:r>
+            <a:r>
+              <a:rPr lang="sv-SE" dirty="0">
+                <a:latin typeface="Consolas" panose="020B0609020204030204" pitchFamily="49" charset="0"/>
+              </a:rPr>
+              <a:t> –n </a:t>
+            </a:r>
+            <a:r>
+              <a:rPr lang="sv-SE" dirty="0" err="1">
+                <a:latin typeface="Consolas" panose="020B0609020204030204" pitchFamily="49" charset="0"/>
+              </a:rPr>
+              <a:t>ArtyPartyDatabaseName</a:t>
+            </a:r>
+            <a:r>
+              <a:rPr lang="sv-SE" dirty="0">
+                <a:latin typeface="Consolas" panose="020B0609020204030204" pitchFamily="49" charset="0"/>
+              </a:rPr>
+              <a:t> –o c:\git\ArtyPartyDatabaseName –</a:t>
+            </a:r>
+            <a:r>
+              <a:rPr lang="sv-SE" dirty="0" err="1">
+                <a:latin typeface="Consolas" panose="020B0609020204030204" pitchFamily="49" charset="0"/>
+              </a:rPr>
+              <a:t>tp</a:t>
+            </a:r>
+            <a:r>
+              <a:rPr lang="sv-SE" dirty="0">
+                <a:latin typeface="Consolas" panose="020B0609020204030204" pitchFamily="49" charset="0"/>
+              </a:rPr>
+              <a:t> Sql160</a:t>
+            </a:r>
+          </a:p>
+          <a:p>
+            <a:pPr lvl="1"/>
+            <a:r>
+              <a:rPr lang="sv-SE" dirty="0" err="1"/>
+              <a:t>Create</a:t>
+            </a:r>
+            <a:r>
+              <a:rPr lang="sv-SE" dirty="0"/>
+              <a:t> a new DB-</a:t>
+            </a:r>
+            <a:r>
+              <a:rPr lang="sv-SE" dirty="0" err="1"/>
+              <a:t>project</a:t>
+            </a:r>
+            <a:r>
+              <a:rPr lang="sv-SE" dirty="0"/>
+              <a:t> </a:t>
+            </a:r>
+            <a:r>
+              <a:rPr lang="sv-SE" dirty="0" err="1"/>
+              <a:t>with</a:t>
+            </a:r>
+            <a:r>
+              <a:rPr lang="sv-SE" dirty="0"/>
+              <a:t> </a:t>
+            </a:r>
+            <a:r>
+              <a:rPr lang="sv-SE" dirty="0" err="1"/>
+              <a:t>target</a:t>
+            </a:r>
+            <a:r>
+              <a:rPr lang="sv-SE" dirty="0"/>
+              <a:t> </a:t>
+            </a:r>
+            <a:r>
+              <a:rPr lang="sv-SE" dirty="0" err="1"/>
+              <a:t>platform</a:t>
+            </a:r>
+            <a:r>
+              <a:rPr lang="sv-SE" dirty="0"/>
+              <a:t> = </a:t>
+            </a:r>
+            <a:r>
+              <a:rPr lang="sv-SE" dirty="0" err="1"/>
+              <a:t>Fabric</a:t>
+            </a:r>
+            <a:r>
+              <a:rPr lang="sv-SE" dirty="0"/>
+              <a:t> DW</a:t>
+            </a:r>
+          </a:p>
+          <a:p>
+            <a:pPr lvl="2"/>
+            <a:r>
+              <a:rPr lang="sv-SE" dirty="0">
+                <a:latin typeface="Consolas" panose="020B0609020204030204" pitchFamily="49" charset="0"/>
+              </a:rPr>
+              <a:t>dotnet new </a:t>
+            </a:r>
+            <a:r>
+              <a:rPr lang="sv-SE" dirty="0" err="1">
+                <a:latin typeface="Consolas" panose="020B0609020204030204" pitchFamily="49" charset="0"/>
+              </a:rPr>
+              <a:t>sqlproj</a:t>
+            </a:r>
+            <a:r>
+              <a:rPr lang="sv-SE" dirty="0">
+                <a:latin typeface="Consolas" panose="020B0609020204030204" pitchFamily="49" charset="0"/>
+              </a:rPr>
+              <a:t> –n </a:t>
+            </a:r>
+            <a:r>
+              <a:rPr lang="sv-SE" dirty="0" err="1">
+                <a:latin typeface="Consolas" panose="020B0609020204030204" pitchFamily="49" charset="0"/>
+              </a:rPr>
+              <a:t>FabricateStuff</a:t>
+            </a:r>
+            <a:r>
+              <a:rPr lang="sv-SE" dirty="0">
+                <a:latin typeface="Consolas" panose="020B0609020204030204" pitchFamily="49" charset="0"/>
+              </a:rPr>
+              <a:t> –o c:\git\Fabric\db\FabricateStuff –</a:t>
+            </a:r>
+            <a:r>
+              <a:rPr lang="sv-SE" dirty="0" err="1">
+                <a:latin typeface="Consolas" panose="020B0609020204030204" pitchFamily="49" charset="0"/>
+              </a:rPr>
+              <a:t>tp</a:t>
+            </a:r>
+            <a:r>
+              <a:rPr lang="sv-SE" dirty="0">
+                <a:latin typeface="Consolas" panose="020B0609020204030204" pitchFamily="49" charset="0"/>
+              </a:rPr>
+              <a:t> </a:t>
+            </a:r>
+            <a:r>
+              <a:rPr lang="sv-SE" dirty="0" err="1">
+                <a:latin typeface="Consolas" panose="020B0609020204030204" pitchFamily="49" charset="0"/>
+              </a:rPr>
+              <a:t>SqlDwUnified</a:t>
+            </a:r>
+            <a:endParaRPr lang="sv-SE" dirty="0">
+              <a:latin typeface="Consolas" panose="020B0609020204030204" pitchFamily="49" charset="0"/>
+            </a:endParaRPr>
+          </a:p>
+          <a:p>
+            <a:pPr lvl="1"/>
+            <a:r>
+              <a:rPr lang="sv-SE" dirty="0"/>
+              <a:t> Get </a:t>
+            </a:r>
+            <a:r>
+              <a:rPr lang="sv-SE" dirty="0" err="1"/>
+              <a:t>some</a:t>
+            </a:r>
+            <a:r>
+              <a:rPr lang="sv-SE" dirty="0"/>
+              <a:t> </a:t>
+            </a:r>
+            <a:r>
+              <a:rPr lang="sv-SE" dirty="0" err="1"/>
+              <a:t>help</a:t>
+            </a:r>
+            <a:r>
+              <a:rPr lang="sv-SE" dirty="0"/>
+              <a:t> </a:t>
+            </a:r>
+            <a:r>
+              <a:rPr lang="sv-SE" dirty="0" err="1"/>
+              <a:t>with</a:t>
+            </a:r>
+            <a:r>
+              <a:rPr lang="sv-SE" dirty="0"/>
+              <a:t> options for dotnet new </a:t>
+            </a:r>
+            <a:r>
+              <a:rPr lang="sv-SE" dirty="0" err="1"/>
+              <a:t>sqlproj</a:t>
+            </a:r>
+            <a:endParaRPr lang="sv-SE" dirty="0"/>
+          </a:p>
+          <a:p>
+            <a:pPr lvl="2"/>
+            <a:r>
+              <a:rPr lang="sv-SE" dirty="0">
+                <a:latin typeface="Consolas" panose="020B0609020204030204" pitchFamily="49" charset="0"/>
+              </a:rPr>
+              <a:t>dotnet new </a:t>
+            </a:r>
+            <a:r>
+              <a:rPr lang="sv-SE" dirty="0" err="1">
+                <a:latin typeface="Consolas" panose="020B0609020204030204" pitchFamily="49" charset="0"/>
+              </a:rPr>
+              <a:t>sqlproj</a:t>
+            </a:r>
+            <a:r>
+              <a:rPr lang="sv-SE" dirty="0">
+                <a:latin typeface="Consolas" panose="020B0609020204030204" pitchFamily="49" charset="0"/>
+              </a:rPr>
+              <a:t> -h</a:t>
+            </a:r>
+          </a:p>
+        </p:txBody>
+      </p:sp>
+    </p:spTree>
+    <p:extLst>
+      <p:ext uri="{BB962C8B-B14F-4D97-AF65-F5344CB8AC3E}">
+        <p14:creationId xmlns:p14="http://schemas.microsoft.com/office/powerpoint/2010/main" val="3189988915"/>
+      </p:ext>
+    </p:extLst>
+  </p:cSld>
+  <p:clrMapOvr>
+    <a:masterClrMapping/>
+  </p:clrMapOvr>
+  <p:timing>
+    <p:tnLst>
+      <p:par>
+        <p:cTn id="1" dur="indefinite" restart="never" nodeType="tmRoot">
+          <p:childTnLst>
+            <p:seq concurrent="1" nextAc="seek">
+              <p:cTn id="2" dur="indefinite" nodeType="mainSeq">
+                <p:childTnLst>
+                  <p:par>
+                    <p:cTn id="3" fill="hold">
+                      <p:stCondLst>
+                        <p:cond delay="indefinite"/>
+                      </p:stCondLst>
+                      <p:childTnLst>
+                        <p:par>
+                          <p:cTn id="4" fill="hold">
+                            <p:stCondLst>
+                              <p:cond delay="0"/>
+                            </p:stCondLst>
+                            <p:childTnLst>
+                              <p:par>
+                                <p:cTn id="5" presetID="1" presetClass="entr" presetSubtype="0" fill="hold" grpId="0" nodeType="clickEffect">
+                                  <p:stCondLst>
+                                    <p:cond delay="0"/>
+                                  </p:stCondLst>
+                                  <p:childTnLst>
+                                    <p:set>
+                                      <p:cBhvr>
+                                        <p:cTn id="6" dur="1" fill="hold">
+                                          <p:stCondLst>
+                                            <p:cond delay="0"/>
+                                          </p:stCondLst>
+                                        </p:cTn>
+                                        <p:tgtEl>
+                                          <p:spTgt spid="3">
+                                            <p:txEl>
+                                              <p:pRg st="0" end="0"/>
+                                            </p:txEl>
+                                          </p:spTgt>
+                                        </p:tgtEl>
+                                        <p:attrNameLst>
+                                          <p:attrName>style.visibility</p:attrName>
+                                        </p:attrNameLst>
+                                      </p:cBhvr>
+                                      <p:to>
+                                        <p:strVal val="visible"/>
+                                      </p:to>
+                                    </p:set>
+                                  </p:childTnLst>
+                                </p:cTn>
+                              </p:par>
+                            </p:childTnLst>
+                          </p:cTn>
+                        </p:par>
+                      </p:childTnLst>
+                    </p:cTn>
+                  </p:par>
+                  <p:par>
+                    <p:cTn id="7" fill="hold">
+                      <p:stCondLst>
+                        <p:cond delay="indefinite"/>
+                      </p:stCondLst>
+                      <p:childTnLst>
+                        <p:par>
+                          <p:cTn id="8" fill="hold">
+                            <p:stCondLst>
+                              <p:cond delay="0"/>
+                            </p:stCondLst>
+                            <p:childTnLst>
+                              <p:par>
+                                <p:cTn id="9" presetID="1" presetClass="entr" presetSubtype="0" fill="hold" grpId="0" nodeType="clickEffect">
+                                  <p:stCondLst>
+                                    <p:cond delay="0"/>
+                                  </p:stCondLst>
+                                  <p:childTnLst>
+                                    <p:set>
+                                      <p:cBhvr>
+                                        <p:cTn id="10" dur="1" fill="hold">
+                                          <p:stCondLst>
+                                            <p:cond delay="0"/>
+                                          </p:stCondLst>
+                                        </p:cTn>
+                                        <p:tgtEl>
+                                          <p:spTgt spid="3">
+                                            <p:txEl>
+                                              <p:pRg st="1" end="1"/>
+                                            </p:txEl>
+                                          </p:spTgt>
+                                        </p:tgtEl>
+                                        <p:attrNameLst>
+                                          <p:attrName>style.visibility</p:attrName>
+                                        </p:attrNameLst>
+                                      </p:cBhvr>
+                                      <p:to>
+                                        <p:strVal val="visible"/>
+                                      </p:to>
+                                    </p:set>
+                                  </p:childTnLst>
+                                </p:cTn>
+                              </p:par>
+                            </p:childTnLst>
+                          </p:cTn>
+                        </p:par>
+                      </p:childTnLst>
+                    </p:cTn>
+                  </p:par>
+                  <p:par>
+                    <p:cTn id="11" fill="hold">
+                      <p:stCondLst>
+                        <p:cond delay="indefinite"/>
+                      </p:stCondLst>
+                      <p:childTnLst>
+                        <p:par>
+                          <p:cTn id="12" fill="hold">
+                            <p:stCondLst>
+                              <p:cond delay="0"/>
+                            </p:stCondLst>
+                            <p:childTnLst>
+                              <p:par>
+                                <p:cTn id="13" presetID="1" presetClass="entr" presetSubtype="0" fill="hold" grpId="0" nodeType="clickEffect">
+                                  <p:stCondLst>
+                                    <p:cond delay="0"/>
+                                  </p:stCondLst>
+                                  <p:childTnLst>
+                                    <p:set>
+                                      <p:cBhvr>
+                                        <p:cTn id="14" dur="1" fill="hold">
+                                          <p:stCondLst>
+                                            <p:cond delay="0"/>
+                                          </p:stCondLst>
+                                        </p:cTn>
+                                        <p:tgtEl>
+                                          <p:spTgt spid="3">
+                                            <p:txEl>
+                                              <p:pRg st="2" end="2"/>
+                                            </p:txEl>
+                                          </p:spTgt>
+                                        </p:tgtEl>
+                                        <p:attrNameLst>
+                                          <p:attrName>style.visibility</p:attrName>
+                                        </p:attrNameLst>
+                                      </p:cBhvr>
+                                      <p:to>
+                                        <p:strVal val="visible"/>
+                                      </p:to>
+                                    </p:set>
+                                  </p:childTnLst>
+                                </p:cTn>
+                              </p:par>
+                            </p:childTnLst>
+                          </p:cTn>
+                        </p:par>
+                      </p:childTnLst>
+                    </p:cTn>
+                  </p:par>
+                  <p:par>
+                    <p:cTn id="15" fill="hold">
+                      <p:stCondLst>
+                        <p:cond delay="indefinite"/>
+                      </p:stCondLst>
+                      <p:childTnLst>
+                        <p:par>
+                          <p:cTn id="16" fill="hold">
+                            <p:stCondLst>
+                              <p:cond delay="0"/>
+                            </p:stCondLst>
+                            <p:childTnLst>
+                              <p:par>
+                                <p:cTn id="17" presetID="1" presetClass="entr" presetSubtype="0" fill="hold" grpId="0" nodeType="clickEffect">
+                                  <p:stCondLst>
+                                    <p:cond delay="0"/>
+                                  </p:stCondLst>
+                                  <p:childTnLst>
+                                    <p:set>
+                                      <p:cBhvr>
+                                        <p:cTn id="18" dur="1" fill="hold">
+                                          <p:stCondLst>
+                                            <p:cond delay="0"/>
+                                          </p:stCondLst>
+                                        </p:cTn>
+                                        <p:tgtEl>
+                                          <p:spTgt spid="3">
+                                            <p:txEl>
+                                              <p:pRg st="3" end="3"/>
+                                            </p:txEl>
+                                          </p:spTgt>
+                                        </p:tgtEl>
+                                        <p:attrNameLst>
+                                          <p:attrName>style.visibility</p:attrName>
+                                        </p:attrNameLst>
+                                      </p:cBhvr>
+                                      <p:to>
+                                        <p:strVal val="visible"/>
+                                      </p:to>
+                                    </p:set>
+                                  </p:childTnLst>
+                                </p:cTn>
+                              </p:par>
+                              <p:par>
+                                <p:cTn id="19" presetID="1" presetClass="entr" presetSubtype="0" fill="hold" grpId="0" nodeType="withEffect">
+                                  <p:stCondLst>
+                                    <p:cond delay="0"/>
+                                  </p:stCondLst>
+                                  <p:childTnLst>
+                                    <p:set>
+                                      <p:cBhvr>
+                                        <p:cTn id="20" dur="1" fill="hold">
+                                          <p:stCondLst>
+                                            <p:cond delay="0"/>
+                                          </p:stCondLst>
+                                        </p:cTn>
+                                        <p:tgtEl>
+                                          <p:spTgt spid="3">
+                                            <p:txEl>
+                                              <p:pRg st="4" end="4"/>
+                                            </p:txEl>
+                                          </p:spTgt>
+                                        </p:tgtEl>
+                                        <p:attrNameLst>
+                                          <p:attrName>style.visibility</p:attrName>
+                                        </p:attrNameLst>
+                                      </p:cBhvr>
+                                      <p:to>
+                                        <p:strVal val="visible"/>
+                                      </p:to>
+                                    </p:set>
+                                  </p:childTnLst>
+                                </p:cTn>
+                              </p:par>
+                              <p:par>
+                                <p:cTn id="21" presetID="1" presetClass="entr" presetSubtype="0" fill="hold" grpId="0" nodeType="withEffect">
+                                  <p:stCondLst>
+                                    <p:cond delay="0"/>
+                                  </p:stCondLst>
+                                  <p:childTnLst>
+                                    <p:set>
+                                      <p:cBhvr>
+                                        <p:cTn id="22" dur="1" fill="hold">
+                                          <p:stCondLst>
+                                            <p:cond delay="0"/>
+                                          </p:stCondLst>
+                                        </p:cTn>
+                                        <p:tgtEl>
+                                          <p:spTgt spid="3">
+                                            <p:txEl>
+                                              <p:pRg st="5" end="5"/>
+                                            </p:txEl>
+                                          </p:spTgt>
+                                        </p:tgtEl>
+                                        <p:attrNameLst>
+                                          <p:attrName>style.visibility</p:attrName>
+                                        </p:attrNameLst>
+                                      </p:cBhvr>
+                                      <p:to>
+                                        <p:strVal val="visible"/>
+                                      </p:to>
+                                    </p:set>
+                                  </p:childTnLst>
+                                </p:cTn>
+                              </p:par>
+                            </p:childTnLst>
+                          </p:cTn>
+                        </p:par>
+                      </p:childTnLst>
+                    </p:cTn>
+                  </p:par>
+                  <p:par>
+                    <p:cTn id="23" fill="hold">
+                      <p:stCondLst>
+                        <p:cond delay="indefinite"/>
+                      </p:stCondLst>
+                      <p:childTnLst>
+                        <p:par>
+                          <p:cTn id="24" fill="hold">
+                            <p:stCondLst>
+                              <p:cond delay="0"/>
+                            </p:stCondLst>
+                            <p:childTnLst>
+                              <p:par>
+                                <p:cTn id="25" presetID="1" presetClass="entr" presetSubtype="0" fill="hold" grpId="0" nodeType="clickEffect">
+                                  <p:stCondLst>
+                                    <p:cond delay="0"/>
+                                  </p:stCondLst>
+                                  <p:childTnLst>
+                                    <p:set>
+                                      <p:cBhvr>
+                                        <p:cTn id="26" dur="1" fill="hold">
+                                          <p:stCondLst>
+                                            <p:cond delay="0"/>
+                                          </p:stCondLst>
+                                        </p:cTn>
+                                        <p:tgtEl>
+                                          <p:spTgt spid="3">
+                                            <p:txEl>
+                                              <p:pRg st="6" end="6"/>
+                                            </p:txEl>
+                                          </p:spTgt>
+                                        </p:tgtEl>
+                                        <p:attrNameLst>
+                                          <p:attrName>style.visibility</p:attrName>
+                                        </p:attrNameLst>
+                                      </p:cBhvr>
+                                      <p:to>
+                                        <p:strVal val="visible"/>
+                                      </p:to>
+                                    </p:set>
+                                  </p:childTnLst>
+                                </p:cTn>
+                              </p:par>
+                              <p:par>
+                                <p:cTn id="27" presetID="1" presetClass="entr" presetSubtype="0" fill="hold" grpId="0" nodeType="withEffect">
+                                  <p:stCondLst>
+                                    <p:cond delay="0"/>
+                                  </p:stCondLst>
+                                  <p:childTnLst>
+                                    <p:set>
+                                      <p:cBhvr>
+                                        <p:cTn id="28" dur="1" fill="hold">
+                                          <p:stCondLst>
+                                            <p:cond delay="0"/>
+                                          </p:stCondLst>
+                                        </p:cTn>
+                                        <p:tgtEl>
+                                          <p:spTgt spid="3">
+                                            <p:txEl>
+                                              <p:pRg st="7" end="7"/>
+                                            </p:txEl>
+                                          </p:spTgt>
+                                        </p:tgtEl>
+                                        <p:attrNameLst>
+                                          <p:attrName>style.visibility</p:attrName>
+                                        </p:attrNameLst>
+                                      </p:cBhvr>
+                                      <p:to>
+                                        <p:strVal val="visible"/>
+                                      </p:to>
+                                    </p:set>
+                                  </p:childTnLst>
+                                </p:cTn>
+                              </p:par>
+                            </p:childTnLst>
+                          </p:cTn>
+                        </p:par>
+                      </p:childTnLst>
+                    </p:cTn>
+                  </p:par>
+                  <p:par>
+                    <p:cTn id="29" fill="hold">
+                      <p:stCondLst>
+                        <p:cond delay="indefinite"/>
+                      </p:stCondLst>
+                      <p:childTnLst>
+                        <p:par>
+                          <p:cTn id="30" fill="hold">
+                            <p:stCondLst>
+                              <p:cond delay="0"/>
+                            </p:stCondLst>
+                            <p:childTnLst>
+                              <p:par>
+                                <p:cTn id="31" presetID="1" presetClass="entr" presetSubtype="0" fill="hold" grpId="0" nodeType="clickEffect">
+                                  <p:stCondLst>
+                                    <p:cond delay="0"/>
+                                  </p:stCondLst>
+                                  <p:childTnLst>
+                                    <p:set>
+                                      <p:cBhvr>
+                                        <p:cTn id="32" dur="1" fill="hold">
+                                          <p:stCondLst>
+                                            <p:cond delay="0"/>
+                                          </p:stCondLst>
+                                        </p:cTn>
+                                        <p:tgtEl>
+                                          <p:spTgt spid="3">
+                                            <p:txEl>
+                                              <p:pRg st="8" end="8"/>
+                                            </p:txEl>
+                                          </p:spTgt>
+                                        </p:tgtEl>
+                                        <p:attrNameLst>
+                                          <p:attrName>style.visibility</p:attrName>
+                                        </p:attrNameLst>
+                                      </p:cBhvr>
+                                      <p:to>
+                                        <p:strVal val="visible"/>
+                                      </p:to>
+                                    </p:set>
+                                  </p:childTnLst>
+                                </p:cTn>
+                              </p:par>
+                              <p:par>
+                                <p:cTn id="33" presetID="1" presetClass="entr" presetSubtype="0" fill="hold" grpId="0" nodeType="withEffect">
+                                  <p:stCondLst>
+                                    <p:cond delay="0"/>
+                                  </p:stCondLst>
+                                  <p:childTnLst>
+                                    <p:set>
+                                      <p:cBhvr>
+                                        <p:cTn id="34" dur="1" fill="hold">
+                                          <p:stCondLst>
+                                            <p:cond delay="0"/>
+                                          </p:stCondLst>
+                                        </p:cTn>
+                                        <p:tgtEl>
+                                          <p:spTgt spid="3">
+                                            <p:txEl>
+                                              <p:pRg st="9" end="9"/>
+                                            </p:txEl>
+                                          </p:spTgt>
+                                        </p:tgtEl>
+                                        <p:attrNameLst>
+                                          <p:attrName>style.visibility</p:attrName>
+                                        </p:attrNameLst>
+                                      </p:cBhvr>
+                                      <p:to>
+                                        <p:strVal val="visible"/>
+                                      </p:to>
+                                    </p:set>
+                                  </p:childTnLst>
+                                </p:cTn>
+                              </p:par>
+                            </p:childTnLst>
+                          </p:cTn>
+                        </p:par>
+                      </p:childTnLst>
+                    </p:cTn>
+                  </p:par>
+                  <p:par>
+                    <p:cTn id="35" fill="hold">
+                      <p:stCondLst>
+                        <p:cond delay="indefinite"/>
+                      </p:stCondLst>
+                      <p:childTnLst>
+                        <p:par>
+                          <p:cTn id="36" fill="hold">
+                            <p:stCondLst>
+                              <p:cond delay="0"/>
+                            </p:stCondLst>
+                            <p:childTnLst>
+                              <p:par>
+                                <p:cTn id="37" presetID="1" presetClass="entr" presetSubtype="0" fill="hold" grpId="0" nodeType="clickEffect">
+                                  <p:stCondLst>
+                                    <p:cond delay="0"/>
+                                  </p:stCondLst>
+                                  <p:childTnLst>
+                                    <p:set>
+                                      <p:cBhvr>
+                                        <p:cTn id="38" dur="1" fill="hold">
+                                          <p:stCondLst>
+                                            <p:cond delay="0"/>
+                                          </p:stCondLst>
+                                        </p:cTn>
+                                        <p:tgtEl>
+                                          <p:spTgt spid="3">
+                                            <p:txEl>
+                                              <p:pRg st="10" end="10"/>
+                                            </p:txEl>
+                                          </p:spTgt>
+                                        </p:tgtEl>
+                                        <p:attrNameLst>
+                                          <p:attrName>style.visibility</p:attrName>
+                                        </p:attrNameLst>
+                                      </p:cBhvr>
+                                      <p:to>
+                                        <p:strVal val="visible"/>
+                                      </p:to>
+                                    </p:set>
+                                  </p:childTnLst>
+                                </p:cTn>
+                              </p:par>
+                              <p:par>
+                                <p:cTn id="39" presetID="1" presetClass="entr" presetSubtype="0" fill="hold" grpId="0" nodeType="withEffect">
+                                  <p:stCondLst>
+                                    <p:cond delay="0"/>
+                                  </p:stCondLst>
+                                  <p:childTnLst>
+                                    <p:set>
+                                      <p:cBhvr>
+                                        <p:cTn id="40" dur="1" fill="hold">
+                                          <p:stCondLst>
+                                            <p:cond delay="0"/>
+                                          </p:stCondLst>
+                                        </p:cTn>
+                                        <p:tgtEl>
+                                          <p:spTgt spid="3">
+                                            <p:txEl>
+                                              <p:pRg st="11" end="11"/>
+                                            </p:txEl>
+                                          </p:spTgt>
+                                        </p:tgtEl>
+                                        <p:attrNameLst>
+                                          <p:attrName>style.visibility</p:attrName>
+                                        </p:attrNameLst>
+                                      </p:cBhvr>
+                                      <p:to>
+                                        <p:strVal val="visible"/>
+                                      </p:to>
+                                    </p:set>
+                                  </p:childTnLst>
+                                </p:cTn>
+                              </p:par>
+                            </p:childTnLst>
+                          </p:cTn>
+                        </p:par>
+                      </p:childTnLst>
+                    </p:cTn>
+                  </p:par>
+                  <p:par>
+                    <p:cTn id="41" fill="hold">
+                      <p:stCondLst>
+                        <p:cond delay="indefinite"/>
+                      </p:stCondLst>
+                      <p:childTnLst>
+                        <p:par>
+                          <p:cTn id="42" fill="hold">
+                            <p:stCondLst>
+                              <p:cond delay="0"/>
+                            </p:stCondLst>
+                            <p:childTnLst>
+                              <p:par>
+                                <p:cTn id="43" presetID="1" presetClass="entr" presetSubtype="0" fill="hold" grpId="0" nodeType="clickEffect">
+                                  <p:stCondLst>
+                                    <p:cond delay="0"/>
+                                  </p:stCondLst>
+                                  <p:childTnLst>
+                                    <p:set>
+                                      <p:cBhvr>
+                                        <p:cTn id="44" dur="1" fill="hold">
+                                          <p:stCondLst>
+                                            <p:cond delay="0"/>
+                                          </p:stCondLst>
+                                        </p:cTn>
+                                        <p:tgtEl>
+                                          <p:spTgt spid="4"/>
+                                        </p:tgtEl>
+                                        <p:attrNameLst>
+                                          <p:attrName>style.visibility</p:attrName>
+                                        </p:attrNameLst>
+                                      </p:cBhvr>
+                                      <p:to>
+                                        <p:strVal val="visible"/>
+                                      </p:to>
+                                    </p:set>
+                                  </p:childTnLst>
+                                </p:cTn>
+                              </p:par>
+                            </p:childTnLst>
+                          </p:cTn>
+                        </p:par>
+                      </p:childTnLst>
+                    </p:cTn>
+                  </p:par>
+                </p:childTnLst>
+              </p:cTn>
+              <p:prevCondLst>
+                <p:cond evt="onPrev" delay="0">
+                  <p:tgtEl>
+                    <p:sldTgt/>
+                  </p:tgtEl>
+                </p:cond>
+              </p:prevCondLst>
+              <p:nextCondLst>
+                <p:cond evt="onNext" delay="0">
+                  <p:tgtEl>
+                    <p:sldTgt/>
+                  </p:tgtEl>
+                </p:cond>
+              </p:nextCondLst>
+            </p:seq>
+          </p:childTnLst>
+        </p:cTn>
+      </p:par>
+    </p:tnLst>
+    <p:bldLst>
+      <p:bldP spid="4" grpId="0" animBg="1"/>
+      <p:bldP spid="3" grpId="0" uiExpand="1" build="p"/>
+    </p:bldLst>
+  </p:timing>
+</p:sld>
+</file>
+
+<file path=ppt/slides/slide15.xml><?xml version="1.0" encoding="utf-8"?>
+<p:sld xmlns:a="http://schemas.openxmlformats.org/drawingml/2006/main" xmlns:r="http://schemas.openxmlformats.org/officeDocument/2006/relationships" xmlns:p="http://schemas.openxmlformats.org/presentationml/2006/main">
+  <p:cSld>
+    <p:spTree>
+      <p:nvGrpSpPr>
+        <p:cNvPr id="1" name=""/>
+        <p:cNvGrpSpPr/>
+        <p:nvPr/>
+      </p:nvGrpSpPr>
+      <p:grpSpPr>
+        <a:xfrm>
+          <a:off x="0" y="0"/>
+          <a:ext cx="0" cy="0"/>
+          <a:chOff x="0" y="0"/>
+          <a:chExt cx="0" cy="0"/>
+        </a:xfrm>
+      </p:grpSpPr>
+      <p:sp>
+        <p:nvSpPr>
+          <p:cNvPr id="2" name="Rubrik 1">
+            <a:extLst>
+              <a:ext uri="{FF2B5EF4-FFF2-40B4-BE49-F238E27FC236}">
                 <a16:creationId xmlns:a16="http://schemas.microsoft.com/office/drawing/2014/main" id="{1BA59C8D-A0B5-92CB-01C5-435A152ECC07}"/>
               </a:ext>
             </a:extLst>
@@ -6208,7 +10776,7 @@
 </p:sld>
 </file>
 
-<file path=ppt/slides/slide13.xml><?xml version="1.0" encoding="utf-8"?>
+<file path=ppt/slides/slide16.xml><?xml version="1.0" encoding="utf-8"?>
 <p:sld xmlns:a="http://schemas.openxmlformats.org/drawingml/2006/main" xmlns:r="http://schemas.openxmlformats.org/officeDocument/2006/relationships" xmlns:p="http://schemas.openxmlformats.org/presentationml/2006/main">
   <p:cSld>
     <p:spTree>
@@ -6339,6 +10907,347 @@
 </p:sld>
 </file>
 
+<file path=ppt/slides/slide17.xml><?xml version="1.0" encoding="utf-8"?>
+<p:sld xmlns:a="http://schemas.openxmlformats.org/drawingml/2006/main" xmlns:r="http://schemas.openxmlformats.org/officeDocument/2006/relationships" xmlns:p="http://schemas.openxmlformats.org/presentationml/2006/main">
+  <p:cSld>
+    <p:spTree>
+      <p:nvGrpSpPr>
+        <p:cNvPr id="1" name=""/>
+        <p:cNvGrpSpPr/>
+        <p:nvPr/>
+      </p:nvGrpSpPr>
+      <p:grpSpPr>
+        <a:xfrm>
+          <a:off x="0" y="0"/>
+          <a:ext cx="0" cy="0"/>
+          <a:chOff x="0" y="0"/>
+          <a:chExt cx="0" cy="0"/>
+        </a:xfrm>
+      </p:grpSpPr>
+      <p:sp>
+        <p:nvSpPr>
+          <p:cNvPr id="2" name="Title 1">
+            <a:extLst>
+              <a:ext uri="{FF2B5EF4-FFF2-40B4-BE49-F238E27FC236}">
+                <a16:creationId xmlns:a16="http://schemas.microsoft.com/office/drawing/2014/main" id="{A7B8F760-B367-6E08-C5A6-FA249A9DA3DF}"/>
+              </a:ext>
+            </a:extLst>
+          </p:cNvPr>
+          <p:cNvSpPr>
+            <a:spLocks noGrp="1"/>
+          </p:cNvSpPr>
+          <p:nvPr>
+            <p:ph type="ctrTitle"/>
+          </p:nvPr>
+        </p:nvSpPr>
+        <p:spPr/>
+        <p:txBody>
+          <a:bodyPr/>
+          <a:lstStyle/>
+          <a:p>
+            <a:r>
+              <a:rPr lang="en-GB" dirty="0"/>
+              <a:t>Create, don’t alter</a:t>
+            </a:r>
+            <a:endParaRPr lang="LID4096" dirty="0"/>
+          </a:p>
+        </p:txBody>
+      </p:sp>
+      <p:sp>
+        <p:nvSpPr>
+          <p:cNvPr id="4" name="Subtitle 3">
+            <a:extLst>
+              <a:ext uri="{FF2B5EF4-FFF2-40B4-BE49-F238E27FC236}">
+                <a16:creationId xmlns:a16="http://schemas.microsoft.com/office/drawing/2014/main" id="{610C7DCB-DAE1-0CD7-C8ED-063D70AD4AA6}"/>
+              </a:ext>
+            </a:extLst>
+          </p:cNvPr>
+          <p:cNvSpPr>
+            <a:spLocks noGrp="1"/>
+          </p:cNvSpPr>
+          <p:nvPr>
+            <p:ph type="subTitle" idx="1"/>
+          </p:nvPr>
+        </p:nvSpPr>
+        <p:spPr/>
+        <p:txBody>
+          <a:bodyPr/>
+          <a:lstStyle/>
+          <a:p>
+            <a:r>
+              <a:rPr lang="en-GB" dirty="0"/>
+              <a:t>…except in pre- and post-deploy</a:t>
+            </a:r>
+            <a:endParaRPr lang="LID4096" dirty="0"/>
+          </a:p>
+        </p:txBody>
+      </p:sp>
+    </p:spTree>
+    <p:extLst>
+      <p:ext uri="{BB962C8B-B14F-4D97-AF65-F5344CB8AC3E}">
+        <p14:creationId xmlns:p14="http://schemas.microsoft.com/office/powerpoint/2010/main" val="931876582"/>
+      </p:ext>
+    </p:extLst>
+  </p:cSld>
+  <p:clrMapOvr>
+    <a:masterClrMapping/>
+  </p:clrMapOvr>
+</p:sld>
+</file>
+
+<file path=ppt/slides/slide18.xml><?xml version="1.0" encoding="utf-8"?>
+<p:sld xmlns:a="http://schemas.openxmlformats.org/drawingml/2006/main" xmlns:r="http://schemas.openxmlformats.org/officeDocument/2006/relationships" xmlns:p="http://schemas.openxmlformats.org/presentationml/2006/main">
+  <p:cSld>
+    <p:spTree>
+      <p:nvGrpSpPr>
+        <p:cNvPr id="1" name=""/>
+        <p:cNvGrpSpPr/>
+        <p:nvPr/>
+      </p:nvGrpSpPr>
+      <p:grpSpPr>
+        <a:xfrm>
+          <a:off x="0" y="0"/>
+          <a:ext cx="0" cy="0"/>
+          <a:chOff x="0" y="0"/>
+          <a:chExt cx="0" cy="0"/>
+        </a:xfrm>
+      </p:grpSpPr>
+      <p:sp>
+        <p:nvSpPr>
+          <p:cNvPr id="2" name="Title 1">
+            <a:extLst>
+              <a:ext uri="{FF2B5EF4-FFF2-40B4-BE49-F238E27FC236}">
+                <a16:creationId xmlns:a16="http://schemas.microsoft.com/office/drawing/2014/main" id="{AEFAB30D-54DA-3A1F-3B93-84F647E0A622}"/>
+              </a:ext>
+            </a:extLst>
+          </p:cNvPr>
+          <p:cNvSpPr>
+            <a:spLocks noGrp="1"/>
+          </p:cNvSpPr>
+          <p:nvPr>
+            <p:ph type="title"/>
+          </p:nvPr>
+        </p:nvSpPr>
+        <p:spPr/>
+        <p:txBody>
+          <a:bodyPr/>
+          <a:lstStyle/>
+          <a:p>
+            <a:r>
+              <a:rPr lang="en-GB" dirty="0"/>
+              <a:t>Get started</a:t>
+            </a:r>
+            <a:endParaRPr lang="LID4096" dirty="0"/>
+          </a:p>
+        </p:txBody>
+      </p:sp>
+      <p:sp>
+        <p:nvSpPr>
+          <p:cNvPr id="3" name="Content Placeholder 2">
+            <a:extLst>
+              <a:ext uri="{FF2B5EF4-FFF2-40B4-BE49-F238E27FC236}">
+                <a16:creationId xmlns:a16="http://schemas.microsoft.com/office/drawing/2014/main" id="{E4071478-AF36-5F1B-AA7C-A686E5AB46C6}"/>
+              </a:ext>
+            </a:extLst>
+          </p:cNvPr>
+          <p:cNvSpPr>
+            <a:spLocks noGrp="1"/>
+          </p:cNvSpPr>
+          <p:nvPr>
+            <p:ph idx="1"/>
+          </p:nvPr>
+        </p:nvSpPr>
+        <p:spPr/>
+        <p:txBody>
+          <a:bodyPr/>
+          <a:lstStyle/>
+          <a:p>
+            <a:r>
+              <a:rPr lang="en-GB" dirty="0"/>
+              <a:t>Start clean</a:t>
+            </a:r>
+          </a:p>
+          <a:p>
+            <a:r>
+              <a:rPr lang="en-GB" dirty="0"/>
+              <a:t>Import existing database with Schema Comparison</a:t>
+            </a:r>
+          </a:p>
+        </p:txBody>
+      </p:sp>
+    </p:spTree>
+    <p:extLst>
+      <p:ext uri="{BB962C8B-B14F-4D97-AF65-F5344CB8AC3E}">
+        <p14:creationId xmlns:p14="http://schemas.microsoft.com/office/powerpoint/2010/main" val="2316356074"/>
+      </p:ext>
+    </p:extLst>
+  </p:cSld>
+  <p:clrMapOvr>
+    <a:masterClrMapping/>
+  </p:clrMapOvr>
+</p:sld>
+</file>
+
+<file path=ppt/slides/slide19.xml><?xml version="1.0" encoding="utf-8"?>
+<p:sld xmlns:a="http://schemas.openxmlformats.org/drawingml/2006/main" xmlns:r="http://schemas.openxmlformats.org/officeDocument/2006/relationships" xmlns:p="http://schemas.openxmlformats.org/presentationml/2006/main">
+  <p:cSld>
+    <p:spTree>
+      <p:nvGrpSpPr>
+        <p:cNvPr id="1" name=""/>
+        <p:cNvGrpSpPr/>
+        <p:nvPr/>
+      </p:nvGrpSpPr>
+      <p:grpSpPr>
+        <a:xfrm>
+          <a:off x="0" y="0"/>
+          <a:ext cx="0" cy="0"/>
+          <a:chOff x="0" y="0"/>
+          <a:chExt cx="0" cy="0"/>
+        </a:xfrm>
+      </p:grpSpPr>
+      <p:sp>
+        <p:nvSpPr>
+          <p:cNvPr id="2" name="Title 1">
+            <a:extLst>
+              <a:ext uri="{FF2B5EF4-FFF2-40B4-BE49-F238E27FC236}">
+                <a16:creationId xmlns:a16="http://schemas.microsoft.com/office/drawing/2014/main" id="{937EF7FE-4AD3-24F3-DFAC-A603E30D423C}"/>
+              </a:ext>
+            </a:extLst>
+          </p:cNvPr>
+          <p:cNvSpPr>
+            <a:spLocks noGrp="1"/>
+          </p:cNvSpPr>
+          <p:nvPr>
+            <p:ph type="title"/>
+          </p:nvPr>
+        </p:nvSpPr>
+        <p:spPr/>
+        <p:txBody>
+          <a:bodyPr/>
+          <a:lstStyle/>
+          <a:p>
+            <a:r>
+              <a:rPr lang="en-GB" dirty="0"/>
+              <a:t>Database references</a:t>
+            </a:r>
+            <a:endParaRPr lang="LID4096" dirty="0"/>
+          </a:p>
+        </p:txBody>
+      </p:sp>
+      <p:sp>
+        <p:nvSpPr>
+          <p:cNvPr id="3" name="Content Placeholder 2">
+            <a:extLst>
+              <a:ext uri="{FF2B5EF4-FFF2-40B4-BE49-F238E27FC236}">
+                <a16:creationId xmlns:a16="http://schemas.microsoft.com/office/drawing/2014/main" id="{AA23214C-7556-D124-FFBE-2C39A324D01F}"/>
+              </a:ext>
+            </a:extLst>
+          </p:cNvPr>
+          <p:cNvSpPr>
+            <a:spLocks noGrp="1"/>
+          </p:cNvSpPr>
+          <p:nvPr>
+            <p:ph idx="1"/>
+          </p:nvPr>
+        </p:nvSpPr>
+        <p:spPr/>
+        <p:txBody>
+          <a:bodyPr/>
+          <a:lstStyle/>
+          <a:p>
+            <a:r>
+              <a:rPr lang="en-GB" dirty="0"/>
+              <a:t>Cross database</a:t>
+            </a:r>
+          </a:p>
+          <a:p>
+            <a:pPr lvl="1"/>
+            <a:r>
+              <a:rPr lang="en-GB" dirty="0"/>
+              <a:t>Reference system databases</a:t>
+            </a:r>
+          </a:p>
+          <a:p>
+            <a:pPr lvl="1"/>
+            <a:r>
+              <a:rPr lang="en-GB" dirty="0"/>
+              <a:t>Reference user databases</a:t>
+            </a:r>
+          </a:p>
+          <a:p>
+            <a:pPr lvl="2"/>
+            <a:r>
+              <a:rPr lang="en-GB" dirty="0"/>
+              <a:t>Database project reference</a:t>
+            </a:r>
+          </a:p>
+          <a:p>
+            <a:pPr lvl="2"/>
+            <a:r>
+              <a:rPr lang="en-GB" dirty="0" err="1"/>
+              <a:t>Dacpac</a:t>
+            </a:r>
+            <a:r>
+              <a:rPr lang="en-GB" dirty="0"/>
+              <a:t> reference</a:t>
+            </a:r>
+          </a:p>
+          <a:p>
+            <a:pPr lvl="2"/>
+            <a:r>
+              <a:rPr lang="en-GB" dirty="0" err="1"/>
+              <a:t>Nuget</a:t>
+            </a:r>
+            <a:r>
+              <a:rPr lang="en-GB" dirty="0"/>
+              <a:t> reference (SDK-style only)</a:t>
+            </a:r>
+          </a:p>
+          <a:p>
+            <a:r>
+              <a:rPr lang="en-GB" dirty="0"/>
+              <a:t>Reference as inheritance</a:t>
+            </a:r>
+          </a:p>
+          <a:p>
+            <a:pPr lvl="1"/>
+            <a:r>
+              <a:rPr lang="en-GB" dirty="0"/>
+              <a:t>Useful </a:t>
+            </a:r>
+            <a:r>
+              <a:rPr lang="en-GB" dirty="0" err="1"/>
+              <a:t>eg</a:t>
+            </a:r>
+            <a:r>
+              <a:rPr lang="en-GB" dirty="0"/>
+              <a:t> when using </a:t>
+            </a:r>
+            <a:r>
+              <a:rPr lang="en-GB" dirty="0" err="1"/>
+              <a:t>tSQLt</a:t>
+            </a:r>
+            <a:r>
+              <a:rPr lang="en-GB" dirty="0"/>
+              <a:t> for tests</a:t>
+            </a:r>
+            <a:endParaRPr lang="LID4096" dirty="0"/>
+          </a:p>
+        </p:txBody>
+      </p:sp>
+    </p:spTree>
+    <p:extLst>
+      <p:ext uri="{BB962C8B-B14F-4D97-AF65-F5344CB8AC3E}">
+        <p14:creationId xmlns:p14="http://schemas.microsoft.com/office/powerpoint/2010/main" val="403353632"/>
+      </p:ext>
+    </p:extLst>
+  </p:cSld>
+  <p:clrMapOvr>
+    <a:masterClrMapping/>
+  </p:clrMapOvr>
+</p:sld>
+</file>
+
 <file path=ppt/slides/slide2.xml><?xml version="1.0" encoding="utf-8"?>
 <p:sld xmlns:a="http://schemas.openxmlformats.org/drawingml/2006/main" xmlns:r="http://schemas.openxmlformats.org/officeDocument/2006/relationships" xmlns:p="http://schemas.openxmlformats.org/presentationml/2006/main">
   <p:cSld>
@@ -6358,6 +11267,1501 @@
       </p:grpSpPr>
       <p:sp>
         <p:nvSpPr>
+          <p:cNvPr id="2" name="Title 1">
+            <a:extLst>
+              <a:ext uri="{FF2B5EF4-FFF2-40B4-BE49-F238E27FC236}">
+                <a16:creationId xmlns:a16="http://schemas.microsoft.com/office/drawing/2014/main" id="{CDED8742-F3DF-DA82-5FEB-E751713523CB}"/>
+              </a:ext>
+            </a:extLst>
+          </p:cNvPr>
+          <p:cNvSpPr>
+            <a:spLocks noGrp="1"/>
+          </p:cNvSpPr>
+          <p:nvPr>
+            <p:ph type="title"/>
+          </p:nvPr>
+        </p:nvSpPr>
+        <p:spPr/>
+        <p:txBody>
+          <a:bodyPr/>
+          <a:lstStyle/>
+          <a:p>
+            <a:r>
+              <a:rPr lang="en-GB" dirty="0"/>
+              <a:t>Free events aren’t really free</a:t>
+            </a:r>
+            <a:endParaRPr lang="LID4096" dirty="0"/>
+          </a:p>
+        </p:txBody>
+      </p:sp>
+      <p:sp>
+        <p:nvSpPr>
+          <p:cNvPr id="3" name="Content Placeholder 2">
+            <a:extLst>
+              <a:ext uri="{FF2B5EF4-FFF2-40B4-BE49-F238E27FC236}">
+                <a16:creationId xmlns:a16="http://schemas.microsoft.com/office/drawing/2014/main" id="{A39A4567-296C-7C0B-D1BA-6EB2293ABB7B}"/>
+              </a:ext>
+            </a:extLst>
+          </p:cNvPr>
+          <p:cNvSpPr>
+            <a:spLocks noGrp="1"/>
+          </p:cNvSpPr>
+          <p:nvPr>
+            <p:ph idx="1"/>
+          </p:nvPr>
+        </p:nvSpPr>
+        <p:spPr/>
+        <p:txBody>
+          <a:bodyPr/>
+          <a:lstStyle/>
+          <a:p>
+            <a:r>
+              <a:rPr lang="en-GB" dirty="0"/>
+              <a:t>Visit the sponsors!!!!!</a:t>
+            </a:r>
+            <a:endParaRPr lang="LID4096" dirty="0"/>
+          </a:p>
+        </p:txBody>
+      </p:sp>
+    </p:spTree>
+    <p:extLst>
+      <p:ext uri="{BB962C8B-B14F-4D97-AF65-F5344CB8AC3E}">
+        <p14:creationId xmlns:p14="http://schemas.microsoft.com/office/powerpoint/2010/main" val="1078720218"/>
+      </p:ext>
+    </p:extLst>
+  </p:cSld>
+  <p:clrMapOvr>
+    <a:masterClrMapping/>
+  </p:clrMapOvr>
+  <p:timing>
+    <p:tnLst>
+      <p:par>
+        <p:cTn id="1" dur="indefinite" restart="never" nodeType="tmRoot">
+          <p:childTnLst>
+            <p:seq concurrent="1" nextAc="seek">
+              <p:cTn id="2" dur="indefinite" nodeType="mainSeq">
+                <p:childTnLst>
+                  <p:par>
+                    <p:cTn id="3" fill="hold">
+                      <p:stCondLst>
+                        <p:cond delay="indefinite"/>
+                      </p:stCondLst>
+                      <p:childTnLst>
+                        <p:par>
+                          <p:cTn id="4" fill="hold">
+                            <p:stCondLst>
+                              <p:cond delay="0"/>
+                            </p:stCondLst>
+                            <p:childTnLst>
+                              <p:par>
+                                <p:cTn id="5" presetID="1" presetClass="entr" presetSubtype="0" fill="hold" grpId="0" nodeType="clickEffect">
+                                  <p:stCondLst>
+                                    <p:cond delay="0"/>
+                                  </p:stCondLst>
+                                  <p:childTnLst>
+                                    <p:set>
+                                      <p:cBhvr>
+                                        <p:cTn id="6" dur="1" fill="hold">
+                                          <p:stCondLst>
+                                            <p:cond delay="0"/>
+                                          </p:stCondLst>
+                                        </p:cTn>
+                                        <p:tgtEl>
+                                          <p:spTgt spid="3">
+                                            <p:txEl>
+                                              <p:pRg st="0" end="0"/>
+                                            </p:txEl>
+                                          </p:spTgt>
+                                        </p:tgtEl>
+                                        <p:attrNameLst>
+                                          <p:attrName>style.visibility</p:attrName>
+                                        </p:attrNameLst>
+                                      </p:cBhvr>
+                                      <p:to>
+                                        <p:strVal val="visible"/>
+                                      </p:to>
+                                    </p:set>
+                                  </p:childTnLst>
+                                </p:cTn>
+                              </p:par>
+                            </p:childTnLst>
+                          </p:cTn>
+                        </p:par>
+                      </p:childTnLst>
+                    </p:cTn>
+                  </p:par>
+                </p:childTnLst>
+              </p:cTn>
+              <p:prevCondLst>
+                <p:cond evt="onPrev" delay="0">
+                  <p:tgtEl>
+                    <p:sldTgt/>
+                  </p:tgtEl>
+                </p:cond>
+              </p:prevCondLst>
+              <p:nextCondLst>
+                <p:cond evt="onNext" delay="0">
+                  <p:tgtEl>
+                    <p:sldTgt/>
+                  </p:tgtEl>
+                </p:cond>
+              </p:nextCondLst>
+            </p:seq>
+          </p:childTnLst>
+        </p:cTn>
+      </p:par>
+    </p:tnLst>
+    <p:bldLst>
+      <p:bldP spid="3" grpId="0" build="p"/>
+    </p:bldLst>
+  </p:timing>
+</p:sld>
+</file>
+
+<file path=ppt/slides/slide20.xml><?xml version="1.0" encoding="utf-8"?>
+<p:sld xmlns:a="http://schemas.openxmlformats.org/drawingml/2006/main" xmlns:r="http://schemas.openxmlformats.org/officeDocument/2006/relationships" xmlns:p="http://schemas.openxmlformats.org/presentationml/2006/main">
+  <p:cSld>
+    <p:spTree>
+      <p:nvGrpSpPr>
+        <p:cNvPr id="1" name=""/>
+        <p:cNvGrpSpPr/>
+        <p:nvPr/>
+      </p:nvGrpSpPr>
+      <p:grpSpPr>
+        <a:xfrm>
+          <a:off x="0" y="0"/>
+          <a:ext cx="0" cy="0"/>
+          <a:chOff x="0" y="0"/>
+          <a:chExt cx="0" cy="0"/>
+        </a:xfrm>
+      </p:grpSpPr>
+      <p:pic>
+        <p:nvPicPr>
+          <p:cNvPr id="9" name="Picture 8">
+            <a:extLst>
+              <a:ext uri="{FF2B5EF4-FFF2-40B4-BE49-F238E27FC236}">
+                <a16:creationId xmlns:a16="http://schemas.microsoft.com/office/drawing/2014/main" id="{9DD853DA-0891-1F38-3928-1627F615C871}"/>
+              </a:ext>
+            </a:extLst>
+          </p:cNvPr>
+          <p:cNvPicPr>
+            <a:picLocks noChangeAspect="1"/>
+          </p:cNvPicPr>
+          <p:nvPr/>
+        </p:nvPicPr>
+        <p:blipFill>
+          <a:blip r:embed="rId2"/>
+          <a:stretch>
+            <a:fillRect/>
+          </a:stretch>
+        </p:blipFill>
+        <p:spPr>
+          <a:xfrm>
+            <a:off x="5835472" y="1161057"/>
+            <a:ext cx="6356527" cy="2364869"/>
+          </a:xfrm>
+          <a:prstGeom prst="rect">
+            <a:avLst/>
+          </a:prstGeom>
+        </p:spPr>
+      </p:pic>
+      <p:sp>
+        <p:nvSpPr>
+          <p:cNvPr id="2" name="Title 1">
+            <a:extLst>
+              <a:ext uri="{FF2B5EF4-FFF2-40B4-BE49-F238E27FC236}">
+                <a16:creationId xmlns:a16="http://schemas.microsoft.com/office/drawing/2014/main" id="{9770F726-3103-E09B-3850-C19C0BB4357D}"/>
+              </a:ext>
+            </a:extLst>
+          </p:cNvPr>
+          <p:cNvSpPr>
+            <a:spLocks noGrp="1"/>
+          </p:cNvSpPr>
+          <p:nvPr>
+            <p:ph type="title"/>
+          </p:nvPr>
+        </p:nvSpPr>
+        <p:spPr/>
+        <p:txBody>
+          <a:bodyPr/>
+          <a:lstStyle/>
+          <a:p>
+            <a:r>
+              <a:rPr lang="en-GB" dirty="0"/>
+              <a:t>The </a:t>
+            </a:r>
+            <a:r>
+              <a:rPr lang="en-GB" dirty="0" err="1"/>
+              <a:t>dacpac</a:t>
+            </a:r>
+            <a:endParaRPr lang="LID4096" dirty="0"/>
+          </a:p>
+        </p:txBody>
+      </p:sp>
+      <p:sp>
+        <p:nvSpPr>
+          <p:cNvPr id="3" name="Content Placeholder 2">
+            <a:extLst>
+              <a:ext uri="{FF2B5EF4-FFF2-40B4-BE49-F238E27FC236}">
+                <a16:creationId xmlns:a16="http://schemas.microsoft.com/office/drawing/2014/main" id="{D4297819-062B-1B1A-C3DF-9CDF049D3DB1}"/>
+              </a:ext>
+            </a:extLst>
+          </p:cNvPr>
+          <p:cNvSpPr>
+            <a:spLocks noGrp="1"/>
+          </p:cNvSpPr>
+          <p:nvPr>
+            <p:ph idx="1"/>
+          </p:nvPr>
+        </p:nvSpPr>
+        <p:spPr>
+          <a:xfrm>
+            <a:off x="677334" y="2160589"/>
+            <a:ext cx="5335760" cy="3880773"/>
+          </a:xfrm>
+        </p:spPr>
+        <p:txBody>
+          <a:bodyPr/>
+          <a:lstStyle/>
+          <a:p>
+            <a:r>
+              <a:rPr lang="en-GB" dirty="0"/>
+              <a:t>Zip-file with .</a:t>
+            </a:r>
+            <a:r>
+              <a:rPr lang="en-GB" dirty="0" err="1"/>
+              <a:t>dacpac</a:t>
+            </a:r>
+            <a:r>
+              <a:rPr lang="en-GB" dirty="0"/>
+              <a:t> extension</a:t>
+            </a:r>
+          </a:p>
+          <a:p>
+            <a:r>
+              <a:rPr lang="en-GB" dirty="0"/>
+              <a:t>Contains xml-files</a:t>
+            </a:r>
+          </a:p>
+          <a:p>
+            <a:pPr lvl="1"/>
+            <a:r>
+              <a:rPr lang="en-GB" dirty="0"/>
+              <a:t>[Content types.xml]</a:t>
+            </a:r>
+          </a:p>
+          <a:p>
+            <a:pPr lvl="1"/>
+            <a:r>
+              <a:rPr lang="en-GB" dirty="0"/>
+              <a:t>DacMetadata.xml – Build version of the </a:t>
+            </a:r>
+            <a:r>
+              <a:rPr lang="en-GB" dirty="0" err="1"/>
+              <a:t>dacpac</a:t>
+            </a:r>
+            <a:endParaRPr lang="en-GB" dirty="0"/>
+          </a:p>
+          <a:p>
+            <a:pPr lvl="1"/>
+            <a:r>
+              <a:rPr lang="en-GB" dirty="0"/>
+              <a:t>Origin.xml – Schema version of model-file</a:t>
+            </a:r>
+          </a:p>
+          <a:p>
+            <a:pPr lvl="1"/>
+            <a:r>
+              <a:rPr lang="en-GB" dirty="0"/>
+              <a:t>Model.xml – the data model for the database</a:t>
+            </a:r>
+          </a:p>
+          <a:p>
+            <a:pPr marL="0" indent="0">
+              <a:buNone/>
+            </a:pPr>
+            <a:endParaRPr lang="en-GB" dirty="0"/>
+          </a:p>
+          <a:p>
+            <a:pPr lvl="1"/>
+            <a:endParaRPr lang="LID4096" dirty="0"/>
+          </a:p>
+        </p:txBody>
+      </p:sp>
+      <p:pic>
+        <p:nvPicPr>
+          <p:cNvPr id="5" name="Picture 4">
+            <a:extLst>
+              <a:ext uri="{FF2B5EF4-FFF2-40B4-BE49-F238E27FC236}">
+                <a16:creationId xmlns:a16="http://schemas.microsoft.com/office/drawing/2014/main" id="{A1C74ADE-6770-E178-A225-92AF86F390F6}"/>
+              </a:ext>
+            </a:extLst>
+          </p:cNvPr>
+          <p:cNvPicPr>
+            <a:picLocks noChangeAspect="1"/>
+          </p:cNvPicPr>
+          <p:nvPr/>
+        </p:nvPicPr>
+        <p:blipFill>
+          <a:blip r:embed="rId3"/>
+          <a:stretch>
+            <a:fillRect/>
+          </a:stretch>
+        </p:blipFill>
+        <p:spPr>
+          <a:xfrm>
+            <a:off x="5724356" y="31866"/>
+            <a:ext cx="5982256" cy="5009771"/>
+          </a:xfrm>
+          <a:prstGeom prst="rect">
+            <a:avLst/>
+          </a:prstGeom>
+        </p:spPr>
+      </p:pic>
+      <p:pic>
+        <p:nvPicPr>
+          <p:cNvPr id="7" name="Picture 6">
+            <a:extLst>
+              <a:ext uri="{FF2B5EF4-FFF2-40B4-BE49-F238E27FC236}">
+                <a16:creationId xmlns:a16="http://schemas.microsoft.com/office/drawing/2014/main" id="{A5DEBAE6-7A5D-368F-E822-2E64CE6FE765}"/>
+              </a:ext>
+            </a:extLst>
+          </p:cNvPr>
+          <p:cNvPicPr>
+            <a:picLocks noChangeAspect="1"/>
+          </p:cNvPicPr>
+          <p:nvPr/>
+        </p:nvPicPr>
+        <p:blipFill>
+          <a:blip r:embed="rId4"/>
+          <a:stretch>
+            <a:fillRect/>
+          </a:stretch>
+        </p:blipFill>
+        <p:spPr>
+          <a:xfrm>
+            <a:off x="5754047" y="31866"/>
+            <a:ext cx="5922874" cy="5045543"/>
+          </a:xfrm>
+          <a:prstGeom prst="rect">
+            <a:avLst/>
+          </a:prstGeom>
+        </p:spPr>
+      </p:pic>
+    </p:spTree>
+    <p:extLst>
+      <p:ext uri="{BB962C8B-B14F-4D97-AF65-F5344CB8AC3E}">
+        <p14:creationId xmlns:p14="http://schemas.microsoft.com/office/powerpoint/2010/main" val="4172303363"/>
+      </p:ext>
+    </p:extLst>
+  </p:cSld>
+  <p:clrMapOvr>
+    <a:masterClrMapping/>
+  </p:clrMapOvr>
+  <p:timing>
+    <p:tnLst>
+      <p:par>
+        <p:cTn id="1" dur="indefinite" restart="never" nodeType="tmRoot">
+          <p:childTnLst>
+            <p:seq concurrent="1" nextAc="seek">
+              <p:cTn id="2" dur="indefinite" nodeType="mainSeq">
+                <p:childTnLst>
+                  <p:par>
+                    <p:cTn id="3" fill="hold">
+                      <p:stCondLst>
+                        <p:cond delay="indefinite"/>
+                      </p:stCondLst>
+                      <p:childTnLst>
+                        <p:par>
+                          <p:cTn id="4" fill="hold">
+                            <p:stCondLst>
+                              <p:cond delay="0"/>
+                            </p:stCondLst>
+                            <p:childTnLst>
+                              <p:par>
+                                <p:cTn id="5" presetID="1" presetClass="entr" presetSubtype="0" fill="hold" grpId="0" nodeType="clickEffect">
+                                  <p:stCondLst>
+                                    <p:cond delay="0"/>
+                                  </p:stCondLst>
+                                  <p:childTnLst>
+                                    <p:set>
+                                      <p:cBhvr>
+                                        <p:cTn id="6" dur="1" fill="hold">
+                                          <p:stCondLst>
+                                            <p:cond delay="0"/>
+                                          </p:stCondLst>
+                                        </p:cTn>
+                                        <p:tgtEl>
+                                          <p:spTgt spid="3">
+                                            <p:txEl>
+                                              <p:pRg st="0" end="0"/>
+                                            </p:txEl>
+                                          </p:spTgt>
+                                        </p:tgtEl>
+                                        <p:attrNameLst>
+                                          <p:attrName>style.visibility</p:attrName>
+                                        </p:attrNameLst>
+                                      </p:cBhvr>
+                                      <p:to>
+                                        <p:strVal val="visible"/>
+                                      </p:to>
+                                    </p:set>
+                                  </p:childTnLst>
+                                </p:cTn>
+                              </p:par>
+                            </p:childTnLst>
+                          </p:cTn>
+                        </p:par>
+                      </p:childTnLst>
+                    </p:cTn>
+                  </p:par>
+                  <p:par>
+                    <p:cTn id="7" fill="hold">
+                      <p:stCondLst>
+                        <p:cond delay="indefinite"/>
+                      </p:stCondLst>
+                      <p:childTnLst>
+                        <p:par>
+                          <p:cTn id="8" fill="hold">
+                            <p:stCondLst>
+                              <p:cond delay="0"/>
+                            </p:stCondLst>
+                            <p:childTnLst>
+                              <p:par>
+                                <p:cTn id="9" presetID="1" presetClass="entr" presetSubtype="0" fill="hold" grpId="0" nodeType="clickEffect">
+                                  <p:stCondLst>
+                                    <p:cond delay="0"/>
+                                  </p:stCondLst>
+                                  <p:childTnLst>
+                                    <p:set>
+                                      <p:cBhvr>
+                                        <p:cTn id="10" dur="1" fill="hold">
+                                          <p:stCondLst>
+                                            <p:cond delay="0"/>
+                                          </p:stCondLst>
+                                        </p:cTn>
+                                        <p:tgtEl>
+                                          <p:spTgt spid="3">
+                                            <p:txEl>
+                                              <p:pRg st="1" end="1"/>
+                                            </p:txEl>
+                                          </p:spTgt>
+                                        </p:tgtEl>
+                                        <p:attrNameLst>
+                                          <p:attrName>style.visibility</p:attrName>
+                                        </p:attrNameLst>
+                                      </p:cBhvr>
+                                      <p:to>
+                                        <p:strVal val="visible"/>
+                                      </p:to>
+                                    </p:set>
+                                  </p:childTnLst>
+                                </p:cTn>
+                              </p:par>
+                            </p:childTnLst>
+                          </p:cTn>
+                        </p:par>
+                      </p:childTnLst>
+                    </p:cTn>
+                  </p:par>
+                  <p:par>
+                    <p:cTn id="11" fill="hold">
+                      <p:stCondLst>
+                        <p:cond delay="indefinite"/>
+                      </p:stCondLst>
+                      <p:childTnLst>
+                        <p:par>
+                          <p:cTn id="12" fill="hold">
+                            <p:stCondLst>
+                              <p:cond delay="0"/>
+                            </p:stCondLst>
+                            <p:childTnLst>
+                              <p:par>
+                                <p:cTn id="13" presetID="1" presetClass="entr" presetSubtype="0" fill="hold" grpId="0" nodeType="clickEffect">
+                                  <p:stCondLst>
+                                    <p:cond delay="0"/>
+                                  </p:stCondLst>
+                                  <p:childTnLst>
+                                    <p:set>
+                                      <p:cBhvr>
+                                        <p:cTn id="14" dur="1" fill="hold">
+                                          <p:stCondLst>
+                                            <p:cond delay="0"/>
+                                          </p:stCondLst>
+                                        </p:cTn>
+                                        <p:tgtEl>
+                                          <p:spTgt spid="3">
+                                            <p:txEl>
+                                              <p:pRg st="2" end="2"/>
+                                            </p:txEl>
+                                          </p:spTgt>
+                                        </p:tgtEl>
+                                        <p:attrNameLst>
+                                          <p:attrName>style.visibility</p:attrName>
+                                        </p:attrNameLst>
+                                      </p:cBhvr>
+                                      <p:to>
+                                        <p:strVal val="visible"/>
+                                      </p:to>
+                                    </p:set>
+                                  </p:childTnLst>
+                                </p:cTn>
+                              </p:par>
+                            </p:childTnLst>
+                          </p:cTn>
+                        </p:par>
+                      </p:childTnLst>
+                    </p:cTn>
+                  </p:par>
+                  <p:par>
+                    <p:cTn id="15" fill="hold">
+                      <p:stCondLst>
+                        <p:cond delay="indefinite"/>
+                      </p:stCondLst>
+                      <p:childTnLst>
+                        <p:par>
+                          <p:cTn id="16" fill="hold">
+                            <p:stCondLst>
+                              <p:cond delay="0"/>
+                            </p:stCondLst>
+                            <p:childTnLst>
+                              <p:par>
+                                <p:cTn id="17" presetID="1" presetClass="entr" presetSubtype="0" fill="hold" grpId="0" nodeType="clickEffect">
+                                  <p:stCondLst>
+                                    <p:cond delay="0"/>
+                                  </p:stCondLst>
+                                  <p:childTnLst>
+                                    <p:set>
+                                      <p:cBhvr>
+                                        <p:cTn id="18" dur="1" fill="hold">
+                                          <p:stCondLst>
+                                            <p:cond delay="0"/>
+                                          </p:stCondLst>
+                                        </p:cTn>
+                                        <p:tgtEl>
+                                          <p:spTgt spid="3">
+                                            <p:txEl>
+                                              <p:pRg st="3" end="3"/>
+                                            </p:txEl>
+                                          </p:spTgt>
+                                        </p:tgtEl>
+                                        <p:attrNameLst>
+                                          <p:attrName>style.visibility</p:attrName>
+                                        </p:attrNameLst>
+                                      </p:cBhvr>
+                                      <p:to>
+                                        <p:strVal val="visible"/>
+                                      </p:to>
+                                    </p:set>
+                                  </p:childTnLst>
+                                </p:cTn>
+                              </p:par>
+                            </p:childTnLst>
+                          </p:cTn>
+                        </p:par>
+                      </p:childTnLst>
+                    </p:cTn>
+                  </p:par>
+                  <p:par>
+                    <p:cTn id="19" fill="hold">
+                      <p:stCondLst>
+                        <p:cond delay="indefinite"/>
+                      </p:stCondLst>
+                      <p:childTnLst>
+                        <p:par>
+                          <p:cTn id="20" fill="hold">
+                            <p:stCondLst>
+                              <p:cond delay="0"/>
+                            </p:stCondLst>
+                            <p:childTnLst>
+                              <p:par>
+                                <p:cTn id="21" presetID="1" presetClass="entr" presetSubtype="0" fill="hold" grpId="0" nodeType="clickEffect">
+                                  <p:stCondLst>
+                                    <p:cond delay="0"/>
+                                  </p:stCondLst>
+                                  <p:childTnLst>
+                                    <p:set>
+                                      <p:cBhvr>
+                                        <p:cTn id="22" dur="1" fill="hold">
+                                          <p:stCondLst>
+                                            <p:cond delay="0"/>
+                                          </p:stCondLst>
+                                        </p:cTn>
+                                        <p:tgtEl>
+                                          <p:spTgt spid="3">
+                                            <p:txEl>
+                                              <p:pRg st="4" end="4"/>
+                                            </p:txEl>
+                                          </p:spTgt>
+                                        </p:tgtEl>
+                                        <p:attrNameLst>
+                                          <p:attrName>style.visibility</p:attrName>
+                                        </p:attrNameLst>
+                                      </p:cBhvr>
+                                      <p:to>
+                                        <p:strVal val="visible"/>
+                                      </p:to>
+                                    </p:set>
+                                  </p:childTnLst>
+                                </p:cTn>
+                              </p:par>
+                            </p:childTnLst>
+                          </p:cTn>
+                        </p:par>
+                      </p:childTnLst>
+                    </p:cTn>
+                  </p:par>
+                  <p:par>
+                    <p:cTn id="23" fill="hold">
+                      <p:stCondLst>
+                        <p:cond delay="indefinite"/>
+                      </p:stCondLst>
+                      <p:childTnLst>
+                        <p:par>
+                          <p:cTn id="24" fill="hold">
+                            <p:stCondLst>
+                              <p:cond delay="0"/>
+                            </p:stCondLst>
+                            <p:childTnLst>
+                              <p:par>
+                                <p:cTn id="25" presetID="1" presetClass="entr" presetSubtype="0" fill="hold" nodeType="clickEffect">
+                                  <p:stCondLst>
+                                    <p:cond delay="0"/>
+                                  </p:stCondLst>
+                                  <p:childTnLst>
+                                    <p:set>
+                                      <p:cBhvr>
+                                        <p:cTn id="26" dur="1" fill="hold">
+                                          <p:stCondLst>
+                                            <p:cond delay="0"/>
+                                          </p:stCondLst>
+                                        </p:cTn>
+                                        <p:tgtEl>
+                                          <p:spTgt spid="9"/>
+                                        </p:tgtEl>
+                                        <p:attrNameLst>
+                                          <p:attrName>style.visibility</p:attrName>
+                                        </p:attrNameLst>
+                                      </p:cBhvr>
+                                      <p:to>
+                                        <p:strVal val="visible"/>
+                                      </p:to>
+                                    </p:set>
+                                  </p:childTnLst>
+                                </p:cTn>
+                              </p:par>
+                            </p:childTnLst>
+                          </p:cTn>
+                        </p:par>
+                      </p:childTnLst>
+                    </p:cTn>
+                  </p:par>
+                  <p:par>
+                    <p:cTn id="27" fill="hold">
+                      <p:stCondLst>
+                        <p:cond delay="indefinite"/>
+                      </p:stCondLst>
+                      <p:childTnLst>
+                        <p:par>
+                          <p:cTn id="28" fill="hold">
+                            <p:stCondLst>
+                              <p:cond delay="0"/>
+                            </p:stCondLst>
+                            <p:childTnLst>
+                              <p:par>
+                                <p:cTn id="29" presetID="1" presetClass="entr" presetSubtype="0" fill="hold" grpId="0" nodeType="clickEffect">
+                                  <p:stCondLst>
+                                    <p:cond delay="0"/>
+                                  </p:stCondLst>
+                                  <p:childTnLst>
+                                    <p:set>
+                                      <p:cBhvr>
+                                        <p:cTn id="30" dur="1" fill="hold">
+                                          <p:stCondLst>
+                                            <p:cond delay="0"/>
+                                          </p:stCondLst>
+                                        </p:cTn>
+                                        <p:tgtEl>
+                                          <p:spTgt spid="3">
+                                            <p:txEl>
+                                              <p:pRg st="5" end="5"/>
+                                            </p:txEl>
+                                          </p:spTgt>
+                                        </p:tgtEl>
+                                        <p:attrNameLst>
+                                          <p:attrName>style.visibility</p:attrName>
+                                        </p:attrNameLst>
+                                      </p:cBhvr>
+                                      <p:to>
+                                        <p:strVal val="visible"/>
+                                      </p:to>
+                                    </p:set>
+                                  </p:childTnLst>
+                                </p:cTn>
+                              </p:par>
+                            </p:childTnLst>
+                          </p:cTn>
+                        </p:par>
+                      </p:childTnLst>
+                    </p:cTn>
+                  </p:par>
+                  <p:par>
+                    <p:cTn id="31" fill="hold">
+                      <p:stCondLst>
+                        <p:cond delay="indefinite"/>
+                      </p:stCondLst>
+                      <p:childTnLst>
+                        <p:par>
+                          <p:cTn id="32" fill="hold">
+                            <p:stCondLst>
+                              <p:cond delay="0"/>
+                            </p:stCondLst>
+                            <p:childTnLst>
+                              <p:par>
+                                <p:cTn id="33" presetID="1" presetClass="entr" presetSubtype="0" fill="hold" nodeType="clickEffect">
+                                  <p:stCondLst>
+                                    <p:cond delay="0"/>
+                                  </p:stCondLst>
+                                  <p:childTnLst>
+                                    <p:set>
+                                      <p:cBhvr>
+                                        <p:cTn id="34" dur="1" fill="hold">
+                                          <p:stCondLst>
+                                            <p:cond delay="0"/>
+                                          </p:stCondLst>
+                                        </p:cTn>
+                                        <p:tgtEl>
+                                          <p:spTgt spid="5"/>
+                                        </p:tgtEl>
+                                        <p:attrNameLst>
+                                          <p:attrName>style.visibility</p:attrName>
+                                        </p:attrNameLst>
+                                      </p:cBhvr>
+                                      <p:to>
+                                        <p:strVal val="visible"/>
+                                      </p:to>
+                                    </p:set>
+                                  </p:childTnLst>
+                                </p:cTn>
+                              </p:par>
+                            </p:childTnLst>
+                          </p:cTn>
+                        </p:par>
+                      </p:childTnLst>
+                    </p:cTn>
+                  </p:par>
+                  <p:par>
+                    <p:cTn id="35" fill="hold">
+                      <p:stCondLst>
+                        <p:cond delay="indefinite"/>
+                      </p:stCondLst>
+                      <p:childTnLst>
+                        <p:par>
+                          <p:cTn id="36" fill="hold">
+                            <p:stCondLst>
+                              <p:cond delay="0"/>
+                            </p:stCondLst>
+                            <p:childTnLst>
+                              <p:par>
+                                <p:cTn id="37" presetID="1" presetClass="entr" presetSubtype="0" fill="hold" nodeType="clickEffect">
+                                  <p:stCondLst>
+                                    <p:cond delay="0"/>
+                                  </p:stCondLst>
+                                  <p:childTnLst>
+                                    <p:set>
+                                      <p:cBhvr>
+                                        <p:cTn id="38" dur="1" fill="hold">
+                                          <p:stCondLst>
+                                            <p:cond delay="0"/>
+                                          </p:stCondLst>
+                                        </p:cTn>
+                                        <p:tgtEl>
+                                          <p:spTgt spid="7"/>
+                                        </p:tgtEl>
+                                        <p:attrNameLst>
+                                          <p:attrName>style.visibility</p:attrName>
+                                        </p:attrNameLst>
+                                      </p:cBhvr>
+                                      <p:to>
+                                        <p:strVal val="visible"/>
+                                      </p:to>
+                                    </p:set>
+                                  </p:childTnLst>
+                                </p:cTn>
+                              </p:par>
+                            </p:childTnLst>
+                          </p:cTn>
+                        </p:par>
+                      </p:childTnLst>
+                    </p:cTn>
+                  </p:par>
+                </p:childTnLst>
+              </p:cTn>
+              <p:prevCondLst>
+                <p:cond evt="onPrev" delay="0">
+                  <p:tgtEl>
+                    <p:sldTgt/>
+                  </p:tgtEl>
+                </p:cond>
+              </p:prevCondLst>
+              <p:nextCondLst>
+                <p:cond evt="onNext" delay="0">
+                  <p:tgtEl>
+                    <p:sldTgt/>
+                  </p:tgtEl>
+                </p:cond>
+              </p:nextCondLst>
+            </p:seq>
+          </p:childTnLst>
+        </p:cTn>
+      </p:par>
+    </p:tnLst>
+    <p:bldLst>
+      <p:bldP spid="3" grpId="0" uiExpand="1" build="p"/>
+    </p:bldLst>
+  </p:timing>
+</p:sld>
+</file>
+
+<file path=ppt/slides/slide21.xml><?xml version="1.0" encoding="utf-8"?>
+<p:sld xmlns:a="http://schemas.openxmlformats.org/drawingml/2006/main" xmlns:r="http://schemas.openxmlformats.org/officeDocument/2006/relationships" xmlns:p="http://schemas.openxmlformats.org/presentationml/2006/main">
+  <p:cSld>
+    <p:spTree>
+      <p:nvGrpSpPr>
+        <p:cNvPr id="1" name=""/>
+        <p:cNvGrpSpPr/>
+        <p:nvPr/>
+      </p:nvGrpSpPr>
+      <p:grpSpPr>
+        <a:xfrm>
+          <a:off x="0" y="0"/>
+          <a:ext cx="0" cy="0"/>
+          <a:chOff x="0" y="0"/>
+          <a:chExt cx="0" cy="0"/>
+        </a:xfrm>
+      </p:grpSpPr>
+      <p:sp>
+        <p:nvSpPr>
+          <p:cNvPr id="2" name="Title 1">
+            <a:extLst>
+              <a:ext uri="{FF2B5EF4-FFF2-40B4-BE49-F238E27FC236}">
+                <a16:creationId xmlns:a16="http://schemas.microsoft.com/office/drawing/2014/main" id="{E532E17D-6843-9CA5-6E77-CE249D89D86A}"/>
+              </a:ext>
+            </a:extLst>
+          </p:cNvPr>
+          <p:cNvSpPr>
+            <a:spLocks noGrp="1"/>
+          </p:cNvSpPr>
+          <p:nvPr>
+            <p:ph type="title"/>
+          </p:nvPr>
+        </p:nvSpPr>
+        <p:spPr/>
+        <p:txBody>
+          <a:bodyPr/>
+          <a:lstStyle/>
+          <a:p>
+            <a:r>
+              <a:rPr lang="en-GB" dirty="0"/>
+              <a:t>Deploy </a:t>
+            </a:r>
+            <a:r>
+              <a:rPr lang="en-GB" dirty="0" err="1"/>
+              <a:t>dacpac</a:t>
+            </a:r>
+            <a:endParaRPr lang="LID4096" dirty="0"/>
+          </a:p>
+        </p:txBody>
+      </p:sp>
+      <p:sp>
+        <p:nvSpPr>
+          <p:cNvPr id="3" name="Content Placeholder 2">
+            <a:extLst>
+              <a:ext uri="{FF2B5EF4-FFF2-40B4-BE49-F238E27FC236}">
+                <a16:creationId xmlns:a16="http://schemas.microsoft.com/office/drawing/2014/main" id="{7E2DC42A-F835-EC06-1EAD-6160065B1DC1}"/>
+              </a:ext>
+            </a:extLst>
+          </p:cNvPr>
+          <p:cNvSpPr>
+            <a:spLocks noGrp="1"/>
+          </p:cNvSpPr>
+          <p:nvPr>
+            <p:ph idx="1"/>
+          </p:nvPr>
+        </p:nvSpPr>
+        <p:spPr/>
+        <p:txBody>
+          <a:bodyPr/>
+          <a:lstStyle/>
+          <a:p>
+            <a:r>
+              <a:rPr lang="en-GB" dirty="0"/>
+              <a:t>Publish action from Visual Studio/Azure Data Studio/</a:t>
+            </a:r>
+            <a:r>
+              <a:rPr lang="en-GB" dirty="0" err="1"/>
+              <a:t>VSCode</a:t>
+            </a:r>
+            <a:endParaRPr lang="en-GB" dirty="0"/>
+          </a:p>
+          <a:p>
+            <a:r>
+              <a:rPr lang="en-GB" dirty="0"/>
+              <a:t>Sqlpackage.exe /Action=Publish</a:t>
+            </a:r>
+          </a:p>
+          <a:p>
+            <a:r>
+              <a:rPr lang="en-GB" dirty="0"/>
+              <a:t>Azure DevOps pipeline</a:t>
+            </a:r>
+          </a:p>
+          <a:p>
+            <a:r>
+              <a:rPr lang="en-GB" dirty="0"/>
+              <a:t>GitHub action</a:t>
+            </a:r>
+          </a:p>
+          <a:p>
+            <a:r>
+              <a:rPr lang="en-GB" dirty="0"/>
+              <a:t>…</a:t>
+            </a:r>
+          </a:p>
+          <a:p>
+            <a:r>
+              <a:rPr lang="en-GB" dirty="0"/>
+              <a:t>…</a:t>
+            </a:r>
+          </a:p>
+          <a:p>
+            <a:r>
+              <a:rPr lang="en-GB" dirty="0"/>
+              <a:t>…</a:t>
+            </a:r>
+            <a:endParaRPr lang="LID4096" dirty="0"/>
+          </a:p>
+        </p:txBody>
+      </p:sp>
+    </p:spTree>
+    <p:extLst>
+      <p:ext uri="{BB962C8B-B14F-4D97-AF65-F5344CB8AC3E}">
+        <p14:creationId xmlns:p14="http://schemas.microsoft.com/office/powerpoint/2010/main" val="297265126"/>
+      </p:ext>
+    </p:extLst>
+  </p:cSld>
+  <p:clrMapOvr>
+    <a:masterClrMapping/>
+  </p:clrMapOvr>
+</p:sld>
+</file>
+
+<file path=ppt/slides/slide22.xml><?xml version="1.0" encoding="utf-8"?>
+<p:sld xmlns:a="http://schemas.openxmlformats.org/drawingml/2006/main" xmlns:r="http://schemas.openxmlformats.org/officeDocument/2006/relationships" xmlns:p="http://schemas.openxmlformats.org/presentationml/2006/main">
+  <p:cSld>
+    <p:spTree>
+      <p:nvGrpSpPr>
+        <p:cNvPr id="1" name=""/>
+        <p:cNvGrpSpPr/>
+        <p:nvPr/>
+      </p:nvGrpSpPr>
+      <p:grpSpPr>
+        <a:xfrm>
+          <a:off x="0" y="0"/>
+          <a:ext cx="0" cy="0"/>
+          <a:chOff x="0" y="0"/>
+          <a:chExt cx="0" cy="0"/>
+        </a:xfrm>
+      </p:grpSpPr>
+      <p:sp>
+        <p:nvSpPr>
+          <p:cNvPr id="4" name="Title 3">
+            <a:extLst>
+              <a:ext uri="{FF2B5EF4-FFF2-40B4-BE49-F238E27FC236}">
+                <a16:creationId xmlns:a16="http://schemas.microsoft.com/office/drawing/2014/main" id="{3642C689-C3E5-FBBC-6CD1-73FF8D04F9E7}"/>
+              </a:ext>
+            </a:extLst>
+          </p:cNvPr>
+          <p:cNvSpPr>
+            <a:spLocks noGrp="1"/>
+          </p:cNvSpPr>
+          <p:nvPr>
+            <p:ph type="title"/>
+          </p:nvPr>
+        </p:nvSpPr>
+        <p:spPr>
+          <a:xfrm>
+            <a:off x="677335" y="747709"/>
+            <a:ext cx="8596668" cy="1826581"/>
+          </a:xfrm>
+        </p:spPr>
+        <p:txBody>
+          <a:bodyPr/>
+          <a:lstStyle/>
+          <a:p>
+            <a:r>
+              <a:rPr lang="en-GB" dirty="0"/>
+              <a:t>DEMO</a:t>
+            </a:r>
+            <a:endParaRPr lang="LID4096" dirty="0"/>
+          </a:p>
+        </p:txBody>
+      </p:sp>
+      <p:sp>
+        <p:nvSpPr>
+          <p:cNvPr id="5" name="Text Placeholder 4">
+            <a:extLst>
+              <a:ext uri="{FF2B5EF4-FFF2-40B4-BE49-F238E27FC236}">
+                <a16:creationId xmlns:a16="http://schemas.microsoft.com/office/drawing/2014/main" id="{C69A438A-8EDA-FCC9-F817-316FD95ACDA1}"/>
+              </a:ext>
+            </a:extLst>
+          </p:cNvPr>
+          <p:cNvSpPr>
+            <a:spLocks noGrp="1"/>
+          </p:cNvSpPr>
+          <p:nvPr>
+            <p:ph type="body" idx="1"/>
+          </p:nvPr>
+        </p:nvSpPr>
+        <p:spPr>
+          <a:xfrm>
+            <a:off x="677335" y="3240964"/>
+            <a:ext cx="8596668" cy="2085493"/>
+          </a:xfrm>
+        </p:spPr>
+        <p:txBody>
+          <a:bodyPr>
+            <a:normAutofit lnSpcReduction="10000"/>
+          </a:bodyPr>
+          <a:lstStyle/>
+          <a:p>
+            <a:r>
+              <a:rPr lang="en-GB" dirty="0"/>
+              <a:t>Create database project</a:t>
+            </a:r>
+          </a:p>
+          <a:p>
+            <a:r>
+              <a:rPr lang="en-GB" dirty="0"/>
+              <a:t>Import existing database</a:t>
+            </a:r>
+          </a:p>
+          <a:p>
+            <a:r>
+              <a:rPr lang="en-GB" dirty="0"/>
+              <a:t>Database references</a:t>
+            </a:r>
+          </a:p>
+          <a:p>
+            <a:r>
+              <a:rPr lang="en-GB" dirty="0"/>
+              <a:t>Refactoring objects</a:t>
+            </a:r>
+          </a:p>
+          <a:p>
+            <a:r>
+              <a:rPr lang="en-GB" dirty="0"/>
+              <a:t>Deploy using publish action</a:t>
+            </a:r>
+            <a:endParaRPr lang="LID4096" dirty="0"/>
+          </a:p>
+        </p:txBody>
+      </p:sp>
+    </p:spTree>
+    <p:extLst>
+      <p:ext uri="{BB962C8B-B14F-4D97-AF65-F5344CB8AC3E}">
+        <p14:creationId xmlns:p14="http://schemas.microsoft.com/office/powerpoint/2010/main" val="763902318"/>
+      </p:ext>
+    </p:extLst>
+  </p:cSld>
+  <p:clrMapOvr>
+    <a:masterClrMapping/>
+  </p:clrMapOvr>
+</p:sld>
+</file>
+
+<file path=ppt/slides/slide3.xml><?xml version="1.0" encoding="utf-8"?>
+<p:sld xmlns:a="http://schemas.openxmlformats.org/drawingml/2006/main" xmlns:r="http://schemas.openxmlformats.org/officeDocument/2006/relationships" xmlns:p="http://schemas.openxmlformats.org/presentationml/2006/main">
+  <p:cSld>
+    <p:bg>
+      <p:bgPr>
+        <a:solidFill>
+          <a:schemeClr val="tx2">
+            <a:lumMod val="25000"/>
+            <a:lumOff val="75000"/>
+          </a:schemeClr>
+        </a:solidFill>
+        <a:effectLst/>
+      </p:bgPr>
+    </p:bg>
+    <p:spTree>
+      <p:nvGrpSpPr>
+        <p:cNvPr id="1" name="">
+          <a:extLst>
+            <a:ext uri="{FF2B5EF4-FFF2-40B4-BE49-F238E27FC236}">
+              <a16:creationId xmlns:a16="http://schemas.microsoft.com/office/drawing/2014/main" id="{AAC6105C-5259-01B6-6476-37D103B303B1}"/>
+            </a:ext>
+          </a:extLst>
+        </p:cNvPr>
+        <p:cNvGrpSpPr/>
+        <p:nvPr/>
+      </p:nvGrpSpPr>
+      <p:grpSpPr>
+        <a:xfrm>
+          <a:off x="0" y="0"/>
+          <a:ext cx="0" cy="0"/>
+          <a:chOff x="0" y="0"/>
+          <a:chExt cx="0" cy="0"/>
+        </a:xfrm>
+      </p:grpSpPr>
+      <p:sp>
+        <p:nvSpPr>
+          <p:cNvPr id="2" name="TextBox 1">
+            <a:extLst>
+              <a:ext uri="{FF2B5EF4-FFF2-40B4-BE49-F238E27FC236}">
+                <a16:creationId xmlns:a16="http://schemas.microsoft.com/office/drawing/2014/main" id="{8A0B0E9B-705E-1F83-7712-3AA2F4F59507}"/>
+              </a:ext>
+            </a:extLst>
+          </p:cNvPr>
+          <p:cNvSpPr txBox="1"/>
+          <p:nvPr/>
+        </p:nvSpPr>
+        <p:spPr>
+          <a:xfrm>
+            <a:off x="4711353" y="365757"/>
+            <a:ext cx="6805061" cy="1631216"/>
+          </a:xfrm>
+          <a:prstGeom prst="rect">
+            <a:avLst/>
+          </a:prstGeom>
+          <a:noFill/>
+        </p:spPr>
+        <p:txBody>
+          <a:bodyPr wrap="square" rtlCol="0">
+            <a:spAutoFit/>
+          </a:bodyPr>
+          <a:lstStyle/>
+          <a:p>
+            <a:pPr marL="0" marR="0" lvl="0" indent="0" algn="ctr" defTabSz="914400" rtl="0" eaLnBrk="1" fontAlgn="auto" latinLnBrk="0" hangingPunct="1">
+              <a:lnSpc>
+                <a:spcPct val="100000"/>
+              </a:lnSpc>
+              <a:spcBef>
+                <a:spcPts val="0"/>
+              </a:spcBef>
+              <a:spcAft>
+                <a:spcPts val="0"/>
+              </a:spcAft>
+              <a:buClrTx/>
+              <a:buSzTx/>
+              <a:buFontTx/>
+              <a:buNone/>
+              <a:tabLst/>
+              <a:defRPr/>
+            </a:pPr>
+            <a:r>
+              <a:rPr kumimoji="0" lang="en-US" sz="5000" b="1" i="0" u="none" strike="noStrike" kern="1200" cap="none" spc="0" normalizeH="0" baseline="0" noProof="0" dirty="0">
+                <a:ln>
+                  <a:noFill/>
+                </a:ln>
+                <a:solidFill>
+                  <a:srgbClr val="156082">
+                    <a:lumMod val="50000"/>
+                  </a:srgbClr>
+                </a:solidFill>
+                <a:effectLst/>
+                <a:uLnTx/>
+                <a:uFillTx/>
+                <a:latin typeface="Aptos" panose="02110004020202020204"/>
+                <a:ea typeface="+mn-ea"/>
+                <a:cs typeface="+mn-cs"/>
+              </a:rPr>
+              <a:t>Thank You To Our Sponsors! </a:t>
+            </a:r>
+          </a:p>
+        </p:txBody>
+      </p:sp>
+      <p:pic>
+        <p:nvPicPr>
+          <p:cNvPr id="14" name="Picture 13" descr="A logo with text and colorful arrows&#10;&#10;AI-generated content may be incorrect.">
+            <a:extLst>
+              <a:ext uri="{FF2B5EF4-FFF2-40B4-BE49-F238E27FC236}">
+                <a16:creationId xmlns:a16="http://schemas.microsoft.com/office/drawing/2014/main" id="{460A906B-6413-D200-DE7A-332CCD751723}"/>
+              </a:ext>
+            </a:extLst>
+          </p:cNvPr>
+          <p:cNvPicPr>
+            <a:picLocks noChangeAspect="1"/>
+          </p:cNvPicPr>
+          <p:nvPr/>
+        </p:nvPicPr>
+        <p:blipFill>
+          <a:blip r:embed="rId3">
+            <a:extLst>
+              <a:ext uri="{28A0092B-C50C-407E-A947-70E740481C1C}">
+                <a14:useLocalDpi xmlns:a14="http://schemas.microsoft.com/office/drawing/2010/main" val="0"/>
+              </a:ext>
+            </a:extLst>
+          </a:blip>
+          <a:stretch>
+            <a:fillRect/>
+          </a:stretch>
+        </p:blipFill>
+        <p:spPr>
+          <a:xfrm>
+            <a:off x="668742" y="207716"/>
+            <a:ext cx="4042611" cy="1947299"/>
+          </a:xfrm>
+          <a:prstGeom prst="rect">
+            <a:avLst/>
+          </a:prstGeom>
+        </p:spPr>
+      </p:pic>
+      <p:pic>
+        <p:nvPicPr>
+          <p:cNvPr id="16" name="Picture 15">
+            <a:extLst>
+              <a:ext uri="{FF2B5EF4-FFF2-40B4-BE49-F238E27FC236}">
+                <a16:creationId xmlns:a16="http://schemas.microsoft.com/office/drawing/2014/main" id="{93AB514A-7E63-B358-5CF1-BEF8647B4BEE}"/>
+              </a:ext>
+            </a:extLst>
+          </p:cNvPr>
+          <p:cNvPicPr>
+            <a:picLocks noChangeAspect="1"/>
+          </p:cNvPicPr>
+          <p:nvPr/>
+        </p:nvPicPr>
+        <p:blipFill>
+          <a:blip r:embed="rId4"/>
+          <a:stretch>
+            <a:fillRect/>
+          </a:stretch>
+        </p:blipFill>
+        <p:spPr>
+          <a:xfrm>
+            <a:off x="422780" y="2458912"/>
+            <a:ext cx="4534533" cy="1238423"/>
+          </a:xfrm>
+          <a:prstGeom prst="rect">
+            <a:avLst/>
+          </a:prstGeom>
+        </p:spPr>
+      </p:pic>
+      <p:pic>
+        <p:nvPicPr>
+          <p:cNvPr id="25" name="Picture 24">
+            <a:extLst>
+              <a:ext uri="{FF2B5EF4-FFF2-40B4-BE49-F238E27FC236}">
+                <a16:creationId xmlns:a16="http://schemas.microsoft.com/office/drawing/2014/main" id="{BC8F2B0F-36EF-9330-53E6-6DB3471272F2}"/>
+              </a:ext>
+            </a:extLst>
+          </p:cNvPr>
+          <p:cNvPicPr>
+            <a:picLocks noChangeAspect="1"/>
+          </p:cNvPicPr>
+          <p:nvPr/>
+        </p:nvPicPr>
+        <p:blipFill>
+          <a:blip r:embed="rId5"/>
+          <a:stretch>
+            <a:fillRect/>
+          </a:stretch>
+        </p:blipFill>
+        <p:spPr>
+          <a:xfrm>
+            <a:off x="6616745" y="2388932"/>
+            <a:ext cx="3877216" cy="1333686"/>
+          </a:xfrm>
+          <a:prstGeom prst="rect">
+            <a:avLst/>
+          </a:prstGeom>
+          <a:solidFill>
+            <a:schemeClr val="bg1"/>
+          </a:solidFill>
+        </p:spPr>
+      </p:pic>
+      <p:pic>
+        <p:nvPicPr>
+          <p:cNvPr id="27" name="Picture 26">
+            <a:extLst>
+              <a:ext uri="{FF2B5EF4-FFF2-40B4-BE49-F238E27FC236}">
+                <a16:creationId xmlns:a16="http://schemas.microsoft.com/office/drawing/2014/main" id="{F42525DE-56C3-104D-7FCB-478FA07B4AF4}"/>
+              </a:ext>
+            </a:extLst>
+          </p:cNvPr>
+          <p:cNvPicPr>
+            <a:picLocks noChangeAspect="1"/>
+          </p:cNvPicPr>
+          <p:nvPr/>
+        </p:nvPicPr>
+        <p:blipFill>
+          <a:blip r:embed="rId6"/>
+          <a:stretch>
+            <a:fillRect/>
+          </a:stretch>
+        </p:blipFill>
+        <p:spPr>
+          <a:xfrm>
+            <a:off x="2490366" y="5585540"/>
+            <a:ext cx="2819794" cy="933580"/>
+          </a:xfrm>
+          <a:prstGeom prst="rect">
+            <a:avLst/>
+          </a:prstGeom>
+        </p:spPr>
+      </p:pic>
+      <p:pic>
+        <p:nvPicPr>
+          <p:cNvPr id="29" name="Picture 28">
+            <a:extLst>
+              <a:ext uri="{FF2B5EF4-FFF2-40B4-BE49-F238E27FC236}">
+                <a16:creationId xmlns:a16="http://schemas.microsoft.com/office/drawing/2014/main" id="{51961971-89C6-1E61-5E87-26CBD37D032F}"/>
+              </a:ext>
+            </a:extLst>
+          </p:cNvPr>
+          <p:cNvPicPr>
+            <a:picLocks noChangeAspect="1"/>
+          </p:cNvPicPr>
+          <p:nvPr/>
+        </p:nvPicPr>
+        <p:blipFill>
+          <a:blip r:embed="rId7"/>
+          <a:stretch>
+            <a:fillRect/>
+          </a:stretch>
+        </p:blipFill>
+        <p:spPr>
+          <a:xfrm>
+            <a:off x="9049209" y="4030082"/>
+            <a:ext cx="1609950" cy="1943371"/>
+          </a:xfrm>
+          <a:prstGeom prst="rect">
+            <a:avLst/>
+          </a:prstGeom>
+        </p:spPr>
+      </p:pic>
+      <p:pic>
+        <p:nvPicPr>
+          <p:cNvPr id="31" name="Picture 30">
+            <a:extLst>
+              <a:ext uri="{FF2B5EF4-FFF2-40B4-BE49-F238E27FC236}">
+                <a16:creationId xmlns:a16="http://schemas.microsoft.com/office/drawing/2014/main" id="{7C869FD2-D880-4610-5F55-EEEF89044EF8}"/>
+              </a:ext>
+            </a:extLst>
+          </p:cNvPr>
+          <p:cNvPicPr>
+            <a:picLocks noChangeAspect="1"/>
+          </p:cNvPicPr>
+          <p:nvPr/>
+        </p:nvPicPr>
+        <p:blipFill>
+          <a:blip r:embed="rId8"/>
+          <a:stretch>
+            <a:fillRect/>
+          </a:stretch>
+        </p:blipFill>
+        <p:spPr>
+          <a:xfrm>
+            <a:off x="422780" y="4100101"/>
+            <a:ext cx="2991267" cy="1209844"/>
+          </a:xfrm>
+          <a:prstGeom prst="rect">
+            <a:avLst/>
+          </a:prstGeom>
+        </p:spPr>
+      </p:pic>
+      <p:pic>
+        <p:nvPicPr>
+          <p:cNvPr id="33" name="Picture 32">
+            <a:extLst>
+              <a:ext uri="{FF2B5EF4-FFF2-40B4-BE49-F238E27FC236}">
+                <a16:creationId xmlns:a16="http://schemas.microsoft.com/office/drawing/2014/main" id="{93C2B845-9411-67BB-4B22-1DF043BD6950}"/>
+              </a:ext>
+            </a:extLst>
+          </p:cNvPr>
+          <p:cNvPicPr>
+            <a:picLocks noChangeAspect="1"/>
+          </p:cNvPicPr>
+          <p:nvPr/>
+        </p:nvPicPr>
+        <p:blipFill>
+          <a:blip r:embed="rId9"/>
+          <a:stretch>
+            <a:fillRect/>
+          </a:stretch>
+        </p:blipFill>
+        <p:spPr>
+          <a:xfrm>
+            <a:off x="4559969" y="4159274"/>
+            <a:ext cx="2991267" cy="1114581"/>
+          </a:xfrm>
+          <a:prstGeom prst="rect">
+            <a:avLst/>
+          </a:prstGeom>
+        </p:spPr>
+      </p:pic>
+      <p:pic>
+        <p:nvPicPr>
+          <p:cNvPr id="35" name="Picture 34">
+            <a:extLst>
+              <a:ext uri="{FF2B5EF4-FFF2-40B4-BE49-F238E27FC236}">
+                <a16:creationId xmlns:a16="http://schemas.microsoft.com/office/drawing/2014/main" id="{1B715F51-7085-5F43-2DA3-F82AAC7CBC1D}"/>
+              </a:ext>
+            </a:extLst>
+          </p:cNvPr>
+          <p:cNvPicPr>
+            <a:picLocks noChangeAspect="1"/>
+          </p:cNvPicPr>
+          <p:nvPr/>
+        </p:nvPicPr>
+        <p:blipFill>
+          <a:blip r:embed="rId10"/>
+          <a:stretch>
+            <a:fillRect/>
+          </a:stretch>
+        </p:blipFill>
+        <p:spPr>
+          <a:xfrm>
+            <a:off x="5894672" y="5576013"/>
+            <a:ext cx="2286319" cy="943107"/>
+          </a:xfrm>
+          <a:prstGeom prst="rect">
+            <a:avLst/>
+          </a:prstGeom>
+        </p:spPr>
+      </p:pic>
+    </p:spTree>
+    <p:extLst>
+      <p:ext uri="{BB962C8B-B14F-4D97-AF65-F5344CB8AC3E}">
+        <p14:creationId xmlns:p14="http://schemas.microsoft.com/office/powerpoint/2010/main" val="1551213563"/>
+      </p:ext>
+    </p:extLst>
+  </p:cSld>
+  <p:clrMapOvr>
+    <a:masterClrMapping/>
+  </p:clrMapOvr>
+</p:sld>
+</file>
+
+<file path=ppt/slides/slide4.xml><?xml version="1.0" encoding="utf-8"?>
+<p:sld xmlns:a="http://schemas.openxmlformats.org/drawingml/2006/main" xmlns:r="http://schemas.openxmlformats.org/officeDocument/2006/relationships" xmlns:p="http://schemas.openxmlformats.org/presentationml/2006/main">
+  <p:cSld>
+    <p:spTree>
+      <p:nvGrpSpPr>
+        <p:cNvPr id="1" name=""/>
+        <p:cNvGrpSpPr/>
+        <p:nvPr/>
+      </p:nvGrpSpPr>
+      <p:grpSpPr>
+        <a:xfrm>
+          <a:off x="0" y="0"/>
+          <a:ext cx="0" cy="0"/>
+          <a:chOff x="0" y="0"/>
+          <a:chExt cx="0" cy="0"/>
+        </a:xfrm>
+      </p:grpSpPr>
+      <p:sp>
+        <p:nvSpPr>
           <p:cNvPr id="2" name="Rubrik 1">
             <a:extLst>
               <a:ext uri="{FF2B5EF4-FFF2-40B4-BE49-F238E27FC236}">
@@ -6684,7 +13088,7 @@
 </p:sld>
 </file>
 
-<file path=ppt/slides/slide3.xml><?xml version="1.0" encoding="utf-8"?>
+<file path=ppt/slides/slide5.xml><?xml version="1.0" encoding="utf-8"?>
 <p:sld xmlns:a="http://schemas.openxmlformats.org/drawingml/2006/main" xmlns:r="http://schemas.openxmlformats.org/officeDocument/2006/relationships" xmlns:p="http://schemas.openxmlformats.org/presentationml/2006/main">
   <p:cSld>
     <p:spTree>
@@ -7050,7 +13454,7 @@
 </p:sld>
 </file>
 
-<file path=ppt/slides/slide4.xml><?xml version="1.0" encoding="utf-8"?>
+<file path=ppt/slides/slide6.xml><?xml version="1.0" encoding="utf-8"?>
 <p:sld xmlns:a="http://schemas.openxmlformats.org/drawingml/2006/main" xmlns:r="http://schemas.openxmlformats.org/officeDocument/2006/relationships" xmlns:p="http://schemas.openxmlformats.org/presentationml/2006/main">
   <p:cSld>
     <p:spTree>
@@ -7191,6 +13595,114 @@
           </a:p>
         </p:txBody>
       </p:sp>
+      <p:sp>
+        <p:nvSpPr>
+          <p:cNvPr id="4" name="TextBox 3">
+            <a:extLst>
+              <a:ext uri="{FF2B5EF4-FFF2-40B4-BE49-F238E27FC236}">
+                <a16:creationId xmlns:a16="http://schemas.microsoft.com/office/drawing/2014/main" id="{9EFC78F8-69C1-911D-29E5-23C8DCC0094B}"/>
+              </a:ext>
+            </a:extLst>
+          </p:cNvPr>
+          <p:cNvSpPr txBox="1"/>
+          <p:nvPr/>
+        </p:nvSpPr>
+        <p:spPr>
+          <a:xfrm rot="21035740">
+            <a:off x="3694839" y="3513529"/>
+            <a:ext cx="8062190" cy="646331"/>
+          </a:xfrm>
+          <a:prstGeom prst="rect">
+            <a:avLst/>
+          </a:prstGeom>
+          <a:solidFill>
+            <a:srgbClr val="FFFF00"/>
+          </a:solidFill>
+        </p:spPr>
+        <p:txBody>
+          <a:bodyPr wrap="square" rtlCol="0">
+            <a:spAutoFit/>
+          </a:bodyPr>
+          <a:lstStyle/>
+          <a:p>
+            <a:r>
+              <a:rPr lang="sv-SE" dirty="0"/>
+              <a:t>Migrations </a:t>
+            </a:r>
+            <a:r>
+              <a:rPr lang="sv-SE" dirty="0" err="1"/>
+              <a:t>based</a:t>
+            </a:r>
+            <a:r>
+              <a:rPr lang="sv-SE" dirty="0"/>
+              <a:t> </a:t>
+            </a:r>
+            <a:r>
+              <a:rPr lang="sv-SE" dirty="0" err="1"/>
+              <a:t>deployments</a:t>
+            </a:r>
+            <a:r>
+              <a:rPr lang="sv-SE" dirty="0"/>
+              <a:t>. </a:t>
+            </a:r>
+            <a:r>
+              <a:rPr lang="sv-SE" dirty="0" err="1"/>
+              <a:t>What</a:t>
+            </a:r>
+            <a:r>
+              <a:rPr lang="sv-SE" dirty="0"/>
+              <a:t> </a:t>
+            </a:r>
+            <a:r>
+              <a:rPr lang="sv-SE" dirty="0" err="1"/>
+              <a:t>they</a:t>
+            </a:r>
+            <a:r>
+              <a:rPr lang="sv-SE" dirty="0"/>
+              <a:t> </a:t>
+            </a:r>
+            <a:r>
+              <a:rPr lang="sv-SE" dirty="0" err="1"/>
+              <a:t>are</a:t>
+            </a:r>
+            <a:r>
+              <a:rPr lang="sv-SE" dirty="0"/>
+              <a:t> and </a:t>
+            </a:r>
+            <a:r>
+              <a:rPr lang="sv-SE" dirty="0" err="1"/>
+              <a:t>why</a:t>
+            </a:r>
+            <a:r>
+              <a:rPr lang="sv-SE" dirty="0"/>
+              <a:t> I </a:t>
+            </a:r>
+            <a:r>
+              <a:rPr lang="sv-SE" dirty="0" err="1"/>
+              <a:t>don’t</a:t>
+            </a:r>
+            <a:r>
+              <a:rPr lang="sv-SE" dirty="0"/>
+              <a:t> like </a:t>
+            </a:r>
+            <a:r>
+              <a:rPr lang="sv-SE" dirty="0" err="1"/>
+              <a:t>them</a:t>
+            </a:r>
+            <a:r>
+              <a:rPr lang="sv-SE" dirty="0"/>
+              <a:t>.</a:t>
+            </a:r>
+          </a:p>
+          <a:p>
+            <a:r>
+              <a:rPr lang="sv-SE" dirty="0"/>
+              <a:t>https://www.youtube.com/watch?v=-WR-XA_1aXA</a:t>
+            </a:r>
+            <a:endParaRPr lang="LID4096" dirty="0"/>
+          </a:p>
+        </p:txBody>
+      </p:sp>
     </p:spTree>
     <p:extLst>
       <p:ext uri="{BB962C8B-B14F-4D97-AF65-F5344CB8AC3E}">
@@ -7201,10 +13713,88 @@
   <p:clrMapOvr>
     <a:masterClrMapping/>
   </p:clrMapOvr>
+  <p:timing>
+    <p:tnLst>
+      <p:par>
+        <p:cTn id="1" dur="indefinite" restart="never" nodeType="tmRoot">
+          <p:childTnLst>
+            <p:seq concurrent="1" nextAc="seek">
+              <p:cTn id="2" dur="indefinite" nodeType="mainSeq">
+                <p:childTnLst>
+                  <p:par>
+                    <p:cTn id="3" fill="hold">
+                      <p:stCondLst>
+                        <p:cond delay="indefinite"/>
+                      </p:stCondLst>
+                      <p:childTnLst>
+                        <p:par>
+                          <p:cTn id="4" fill="hold">
+                            <p:stCondLst>
+                              <p:cond delay="0"/>
+                            </p:stCondLst>
+                            <p:childTnLst>
+                              <p:par>
+                                <p:cTn id="5" presetID="1" presetClass="entr" presetSubtype="0" fill="hold" grpId="0" nodeType="clickEffect">
+                                  <p:stCondLst>
+                                    <p:cond delay="0"/>
+                                  </p:stCondLst>
+                                  <p:childTnLst>
+                                    <p:set>
+                                      <p:cBhvr>
+                                        <p:cTn id="6" dur="1" fill="hold">
+                                          <p:stCondLst>
+                                            <p:cond delay="0"/>
+                                          </p:stCondLst>
+                                        </p:cTn>
+                                        <p:tgtEl>
+                                          <p:spTgt spid="4"/>
+                                        </p:tgtEl>
+                                        <p:attrNameLst>
+                                          <p:attrName>style.visibility</p:attrName>
+                                        </p:attrNameLst>
+                                      </p:cBhvr>
+                                      <p:to>
+                                        <p:strVal val="visible"/>
+                                      </p:to>
+                                    </p:set>
+                                  </p:childTnLst>
+                                </p:cTn>
+                              </p:par>
+                            </p:childTnLst>
+                          </p:cTn>
+                        </p:par>
+                      </p:childTnLst>
+                    </p:cTn>
+                  </p:par>
+                </p:childTnLst>
+              </p:cTn>
+              <p:prevCondLst>
+                <p:cond evt="onPrev" delay="0">
+                  <p:tgtEl>
+                    <p:sldTgt/>
+                  </p:tgtEl>
+                </p:cond>
+              </p:prevCondLst>
+              <p:nextCondLst>
+                <p:cond evt="onNext" delay="0">
+                  <p:tgtEl>
+                    <p:sldTgt/>
+                  </p:tgtEl>
+                </p:cond>
+              </p:nextCondLst>
+            </p:seq>
+          </p:childTnLst>
+        </p:cTn>
+      </p:par>
+    </p:tnLst>
+    <p:bldLst>
+      <p:bldP spid="4" grpId="0" animBg="1"/>
+    </p:bldLst>
+  </p:timing>
 </p:sld>
 </file>
 
-<file path=ppt/slides/slide5.xml><?xml version="1.0" encoding="utf-8"?>
+<file path=ppt/slides/slide7.xml><?xml version="1.0" encoding="utf-8"?>
 <p:sld xmlns:a="http://schemas.openxmlformats.org/drawingml/2006/main" xmlns:r="http://schemas.openxmlformats.org/officeDocument/2006/relationships" xmlns:p="http://schemas.openxmlformats.org/presentationml/2006/main">
   <p:cSld>
     <p:spTree>
@@ -8273,7 +14863,7 @@
 </p:sld>
 </file>
 
-<file path=ppt/slides/slide6.xml><?xml version="1.0" encoding="utf-8"?>
+<file path=ppt/slides/slide8.xml><?xml version="1.0" encoding="utf-8"?>
 <p:sld xmlns:a="http://schemas.openxmlformats.org/drawingml/2006/main" xmlns:r="http://schemas.openxmlformats.org/officeDocument/2006/relationships" xmlns:p="http://schemas.openxmlformats.org/presentationml/2006/main">
   <p:cSld>
     <p:spTree>
@@ -8367,7 +14957,7 @@
 </p:sld>
 </file>
 
-<file path=ppt/slides/slide7.xml><?xml version="1.0" encoding="utf-8"?>
+<file path=ppt/slides/slide9.xml><?xml version="1.0" encoding="utf-8"?>
 <p:sld xmlns:a="http://schemas.openxmlformats.org/drawingml/2006/main" xmlns:r="http://schemas.openxmlformats.org/officeDocument/2006/relationships" xmlns:p="http://schemas.openxmlformats.org/presentationml/2006/main">
   <p:cSld>
     <p:spTree>
@@ -8452,405 +15042,6 @@
     <p:extLst>
       <p:ext uri="{BB962C8B-B14F-4D97-AF65-F5344CB8AC3E}">
         <p14:creationId xmlns:p14="http://schemas.microsoft.com/office/powerpoint/2010/main" val="350649973"/>
-      </p:ext>
-    </p:extLst>
-  </p:cSld>
-  <p:clrMapOvr>
-    <a:masterClrMapping/>
-  </p:clrMapOvr>
-</p:sld>
-</file>
-
-<file path=ppt/slides/slide8.xml><?xml version="1.0" encoding="utf-8"?>
-<p:sld xmlns:a="http://schemas.openxmlformats.org/drawingml/2006/main" xmlns:r="http://schemas.openxmlformats.org/officeDocument/2006/relationships" xmlns:p="http://schemas.openxmlformats.org/presentationml/2006/main">
-  <p:cSld>
-    <p:spTree>
-      <p:nvGrpSpPr>
-        <p:cNvPr id="1" name="">
-          <a:extLst>
-            <a:ext uri="{FF2B5EF4-FFF2-40B4-BE49-F238E27FC236}">
-              <a16:creationId xmlns:a16="http://schemas.microsoft.com/office/drawing/2014/main" id="{FB56CB45-0FED-AB92-18B7-D6035CE0D640}"/>
-            </a:ext>
-          </a:extLst>
-        </p:cNvPr>
-        <p:cNvGrpSpPr/>
-        <p:nvPr/>
-      </p:nvGrpSpPr>
-      <p:grpSpPr>
-        <a:xfrm>
-          <a:off x="0" y="0"/>
-          <a:ext cx="0" cy="0"/>
-          <a:chOff x="0" y="0"/>
-          <a:chExt cx="0" cy="0"/>
-        </a:xfrm>
-      </p:grpSpPr>
-      <p:sp>
-        <p:nvSpPr>
-          <p:cNvPr id="2" name="Rubrik 1">
-            <a:extLst>
-              <a:ext uri="{FF2B5EF4-FFF2-40B4-BE49-F238E27FC236}">
-                <a16:creationId xmlns:a16="http://schemas.microsoft.com/office/drawing/2014/main" id="{DEC8900D-BCFA-CE4B-83F1-3C9668EBF241}"/>
-              </a:ext>
-            </a:extLst>
-          </p:cNvPr>
-          <p:cNvSpPr>
-            <a:spLocks noGrp="1"/>
-          </p:cNvSpPr>
-          <p:nvPr>
-            <p:ph type="title"/>
-          </p:nvPr>
-        </p:nvSpPr>
-        <p:spPr/>
-        <p:txBody>
-          <a:bodyPr/>
-          <a:lstStyle/>
-          <a:p>
-            <a:r>
-              <a:rPr lang="sv-SE" dirty="0"/>
-              <a:t>Version 1.2.0</a:t>
-            </a:r>
-          </a:p>
-        </p:txBody>
-      </p:sp>
-      <p:pic>
-        <p:nvPicPr>
-          <p:cNvPr id="5" name="Bildobjekt 4">
-            <a:extLst>
-              <a:ext uri="{FF2B5EF4-FFF2-40B4-BE49-F238E27FC236}">
-                <a16:creationId xmlns:a16="http://schemas.microsoft.com/office/drawing/2014/main" id="{56D2E51E-E6AB-AC40-D569-664A64441FBE}"/>
-              </a:ext>
-            </a:extLst>
-          </p:cNvPr>
-          <p:cNvPicPr>
-            <a:picLocks noChangeAspect="1"/>
-          </p:cNvPicPr>
-          <p:nvPr/>
-        </p:nvPicPr>
-        <p:blipFill>
-          <a:blip r:embed="rId2"/>
-          <a:stretch>
-            <a:fillRect/>
-          </a:stretch>
-        </p:blipFill>
-        <p:spPr>
-          <a:xfrm>
-            <a:off x="3678607" y="609600"/>
-            <a:ext cx="6478854" cy="5680512"/>
-          </a:xfrm>
-          <a:prstGeom prst="rect">
-            <a:avLst/>
-          </a:prstGeom>
-        </p:spPr>
-      </p:pic>
-    </p:spTree>
-    <p:extLst>
-      <p:ext uri="{BB962C8B-B14F-4D97-AF65-F5344CB8AC3E}">
-        <p14:creationId xmlns:p14="http://schemas.microsoft.com/office/powerpoint/2010/main" val="3434008758"/>
-      </p:ext>
-    </p:extLst>
-  </p:cSld>
-  <p:clrMapOvr>
-    <a:masterClrMapping/>
-  </p:clrMapOvr>
-</p:sld>
-</file>
-
-<file path=ppt/slides/slide9.xml><?xml version="1.0" encoding="utf-8"?>
-<p:sld xmlns:a="http://schemas.openxmlformats.org/drawingml/2006/main" xmlns:r="http://schemas.openxmlformats.org/officeDocument/2006/relationships" xmlns:p="http://schemas.openxmlformats.org/presentationml/2006/main">
-  <p:cSld>
-    <p:spTree>
-      <p:nvGrpSpPr>
-        <p:cNvPr id="1" name=""/>
-        <p:cNvGrpSpPr/>
-        <p:nvPr/>
-      </p:nvGrpSpPr>
-      <p:grpSpPr>
-        <a:xfrm>
-          <a:off x="0" y="0"/>
-          <a:ext cx="0" cy="0"/>
-          <a:chOff x="0" y="0"/>
-          <a:chExt cx="0" cy="0"/>
-        </a:xfrm>
-      </p:grpSpPr>
-      <p:sp>
-        <p:nvSpPr>
-          <p:cNvPr id="2" name="Rubrik 1">
-            <a:extLst>
-              <a:ext uri="{FF2B5EF4-FFF2-40B4-BE49-F238E27FC236}">
-                <a16:creationId xmlns:a16="http://schemas.microsoft.com/office/drawing/2014/main" id="{4BFF07C0-1EBD-0808-1199-66A4D3075621}"/>
-              </a:ext>
-            </a:extLst>
-          </p:cNvPr>
-          <p:cNvSpPr>
-            <a:spLocks noGrp="1"/>
-          </p:cNvSpPr>
-          <p:nvPr>
-            <p:ph type="title"/>
-          </p:nvPr>
-        </p:nvSpPr>
-        <p:spPr/>
-        <p:txBody>
-          <a:bodyPr/>
-          <a:lstStyle/>
-          <a:p>
-            <a:r>
-              <a:rPr lang="sv-SE" dirty="0" err="1"/>
-              <a:t>Model</a:t>
-            </a:r>
-            <a:r>
-              <a:rPr lang="sv-SE" dirty="0"/>
-              <a:t> </a:t>
-            </a:r>
-            <a:r>
-              <a:rPr lang="sv-SE" dirty="0" err="1"/>
-              <a:t>based</a:t>
-            </a:r>
-            <a:r>
-              <a:rPr lang="sv-SE" dirty="0"/>
-              <a:t> </a:t>
-            </a:r>
-            <a:r>
-              <a:rPr lang="sv-SE" dirty="0" err="1"/>
-              <a:t>deployment</a:t>
-            </a:r>
-            <a:endParaRPr lang="sv-SE" dirty="0"/>
-          </a:p>
-        </p:txBody>
-      </p:sp>
-      <p:sp>
-        <p:nvSpPr>
-          <p:cNvPr id="3" name="Platshållare för innehåll 2">
-            <a:extLst>
-              <a:ext uri="{FF2B5EF4-FFF2-40B4-BE49-F238E27FC236}">
-                <a16:creationId xmlns:a16="http://schemas.microsoft.com/office/drawing/2014/main" id="{D1539999-38DF-6F25-D7AF-B1B565954712}"/>
-              </a:ext>
-            </a:extLst>
-          </p:cNvPr>
-          <p:cNvSpPr>
-            <a:spLocks noGrp="1"/>
-          </p:cNvSpPr>
-          <p:nvPr>
-            <p:ph idx="1"/>
-          </p:nvPr>
-        </p:nvSpPr>
-        <p:spPr/>
-        <p:txBody>
-          <a:bodyPr/>
-          <a:lstStyle/>
-          <a:p>
-            <a:r>
-              <a:rPr lang="sv-SE" dirty="0" err="1"/>
-              <a:t>Create</a:t>
-            </a:r>
-            <a:r>
-              <a:rPr lang="sv-SE" dirty="0"/>
-              <a:t> a data </a:t>
-            </a:r>
-            <a:r>
-              <a:rPr lang="sv-SE" dirty="0" err="1"/>
-              <a:t>model</a:t>
-            </a:r>
-            <a:r>
-              <a:rPr lang="sv-SE" dirty="0"/>
-              <a:t> in </a:t>
-            </a:r>
-            <a:r>
-              <a:rPr lang="sv-SE" dirty="0" err="1"/>
-              <a:t>code</a:t>
-            </a:r>
-            <a:endParaRPr lang="sv-SE" dirty="0"/>
-          </a:p>
-          <a:p>
-            <a:pPr lvl="1"/>
-            <a:r>
-              <a:rPr lang="sv-SE" dirty="0"/>
-              <a:t>SSDT </a:t>
-            </a:r>
-            <a:r>
-              <a:rPr lang="sv-SE" dirty="0" err="1"/>
-              <a:t>Database</a:t>
-            </a:r>
-            <a:r>
-              <a:rPr lang="sv-SE" dirty="0"/>
-              <a:t> Projects</a:t>
-            </a:r>
-          </a:p>
-          <a:p>
-            <a:pPr lvl="1"/>
-            <a:r>
-              <a:rPr lang="sv-SE" dirty="0"/>
-              <a:t>SDK Style </a:t>
-            </a:r>
-            <a:r>
-              <a:rPr lang="sv-SE" dirty="0" err="1"/>
-              <a:t>Database</a:t>
-            </a:r>
-            <a:r>
-              <a:rPr lang="sv-SE" dirty="0"/>
-              <a:t> Projects</a:t>
-            </a:r>
-          </a:p>
-          <a:p>
-            <a:r>
-              <a:rPr lang="sv-SE" dirty="0" err="1"/>
-              <a:t>Compile</a:t>
-            </a:r>
-            <a:r>
-              <a:rPr lang="sv-SE" dirty="0"/>
-              <a:t> the </a:t>
-            </a:r>
-            <a:r>
-              <a:rPr lang="sv-SE" dirty="0" err="1"/>
-              <a:t>model</a:t>
-            </a:r>
-            <a:r>
-              <a:rPr lang="sv-SE" dirty="0"/>
-              <a:t> to a </a:t>
-            </a:r>
-            <a:r>
-              <a:rPr lang="sv-SE" dirty="0" err="1"/>
-              <a:t>dacpac</a:t>
-            </a:r>
-            <a:endParaRPr lang="sv-SE" dirty="0"/>
-          </a:p>
-          <a:p>
-            <a:pPr lvl="1"/>
-            <a:r>
-              <a:rPr lang="sv-SE" dirty="0" err="1"/>
-              <a:t>sqlpackage</a:t>
-            </a:r>
-            <a:r>
-              <a:rPr lang="sv-SE" dirty="0"/>
-              <a:t> </a:t>
-            </a:r>
-          </a:p>
-          <a:p>
-            <a:pPr lvl="1"/>
-            <a:r>
-              <a:rPr lang="sv-SE" dirty="0"/>
-              <a:t>dotnet </a:t>
-            </a:r>
-            <a:r>
-              <a:rPr lang="sv-SE" dirty="0" err="1"/>
-              <a:t>build</a:t>
-            </a:r>
-            <a:endParaRPr lang="sv-SE" dirty="0"/>
-          </a:p>
-          <a:p>
-            <a:r>
-              <a:rPr lang="sv-SE" dirty="0" err="1"/>
-              <a:t>Deploy</a:t>
-            </a:r>
-            <a:r>
-              <a:rPr lang="sv-SE" dirty="0"/>
-              <a:t> </a:t>
-            </a:r>
-            <a:r>
-              <a:rPr lang="sv-SE" dirty="0" err="1"/>
-              <a:t>using</a:t>
-            </a:r>
-            <a:r>
-              <a:rPr lang="sv-SE" dirty="0"/>
-              <a:t> a </a:t>
-            </a:r>
-            <a:r>
-              <a:rPr lang="sv-SE" dirty="0" err="1"/>
-              <a:t>tool</a:t>
-            </a:r>
-            <a:r>
-              <a:rPr lang="sv-SE" dirty="0"/>
-              <a:t> </a:t>
-            </a:r>
-            <a:r>
-              <a:rPr lang="sv-SE" dirty="0" err="1"/>
-              <a:t>that</a:t>
-            </a:r>
-            <a:r>
-              <a:rPr lang="sv-SE" dirty="0"/>
-              <a:t> </a:t>
-            </a:r>
-            <a:r>
-              <a:rPr lang="sv-SE" dirty="0" err="1"/>
-              <a:t>can</a:t>
-            </a:r>
-            <a:r>
-              <a:rPr lang="sv-SE" dirty="0"/>
-              <a:t> </a:t>
-            </a:r>
-            <a:r>
-              <a:rPr lang="sv-SE" dirty="0" err="1"/>
-              <a:t>compare</a:t>
-            </a:r>
-            <a:r>
-              <a:rPr lang="sv-SE" dirty="0"/>
-              <a:t> the </a:t>
-            </a:r>
-            <a:r>
-              <a:rPr lang="sv-SE" dirty="0" err="1"/>
-              <a:t>model</a:t>
-            </a:r>
-            <a:r>
-              <a:rPr lang="sv-SE" dirty="0"/>
-              <a:t> </a:t>
-            </a:r>
-            <a:r>
-              <a:rPr lang="sv-SE" dirty="0" err="1"/>
-              <a:t>with</a:t>
-            </a:r>
-            <a:r>
-              <a:rPr lang="sv-SE" dirty="0"/>
-              <a:t> the </a:t>
-            </a:r>
-            <a:r>
-              <a:rPr lang="sv-SE" dirty="0" err="1"/>
-              <a:t>target</a:t>
-            </a:r>
-            <a:r>
-              <a:rPr lang="sv-SE" dirty="0"/>
-              <a:t> data </a:t>
-            </a:r>
-            <a:r>
-              <a:rPr lang="sv-SE" dirty="0" err="1"/>
-              <a:t>model</a:t>
-            </a:r>
-            <a:r>
-              <a:rPr lang="sv-SE" dirty="0"/>
-              <a:t> and make </a:t>
-            </a:r>
-            <a:r>
-              <a:rPr lang="sv-SE" dirty="0" err="1"/>
-              <a:t>corrections</a:t>
-            </a:r>
-            <a:r>
-              <a:rPr lang="sv-SE" dirty="0"/>
-              <a:t> to the </a:t>
-            </a:r>
-            <a:r>
-              <a:rPr lang="sv-SE" dirty="0" err="1"/>
-              <a:t>target</a:t>
-            </a:r>
-            <a:endParaRPr lang="sv-SE" dirty="0"/>
-          </a:p>
-          <a:p>
-            <a:pPr lvl="1"/>
-            <a:r>
-              <a:rPr lang="sv-SE" dirty="0" err="1"/>
-              <a:t>Sqlpackage</a:t>
-            </a:r>
-            <a:endParaRPr lang="sv-SE" dirty="0"/>
-          </a:p>
-          <a:p>
-            <a:pPr marL="0" indent="0">
-              <a:buNone/>
-            </a:pPr>
-            <a:endParaRPr lang="sv-SE" dirty="0"/>
-          </a:p>
-        </p:txBody>
-      </p:sp>
-    </p:spTree>
-    <p:extLst>
-      <p:ext uri="{BB962C8B-B14F-4D97-AF65-F5344CB8AC3E}">
-        <p14:creationId xmlns:p14="http://schemas.microsoft.com/office/powerpoint/2010/main" val="2475718225"/>
       </p:ext>
     </p:extLst>
   </p:cSld>
@@ -9128,6 +15319,321 @@
         <a:sysClr val="window" lastClr="FFFFFF"/>
       </a:lt1>
       <a:dk2>
+        <a:srgbClr val="0E2841"/>
+      </a:dk2>
+      <a:lt2>
+        <a:srgbClr val="E8E8E8"/>
+      </a:lt2>
+      <a:accent1>
+        <a:srgbClr val="156082"/>
+      </a:accent1>
+      <a:accent2>
+        <a:srgbClr val="E97132"/>
+      </a:accent2>
+      <a:accent3>
+        <a:srgbClr val="196B24"/>
+      </a:accent3>
+      <a:accent4>
+        <a:srgbClr val="0F9ED5"/>
+      </a:accent4>
+      <a:accent5>
+        <a:srgbClr val="A02B93"/>
+      </a:accent5>
+      <a:accent6>
+        <a:srgbClr val="4EA72E"/>
+      </a:accent6>
+      <a:hlink>
+        <a:srgbClr val="467886"/>
+      </a:hlink>
+      <a:folHlink>
+        <a:srgbClr val="96607D"/>
+      </a:folHlink>
+    </a:clrScheme>
+    <a:fontScheme name="Office">
+      <a:majorFont>
+        <a:latin typeface="Aptos Display" panose="02110004020202020204"/>
+        <a:ea typeface=""/>
+        <a:cs typeface=""/>
+        <a:font script="Jpan" typeface="游ゴシック Light"/>
+        <a:font script="Hang" typeface="맑은 고딕"/>
+        <a:font script="Hans" typeface="等线 Light"/>
+        <a:font script="Hant" typeface="新細明體"/>
+        <a:font script="Arab" typeface="Times New Roman"/>
+        <a:font script="Hebr" typeface="Times New Roman"/>
+        <a:font script="Thai" typeface="Angsana New"/>
+        <a:font script="Ethi" typeface="Nyala"/>
+        <a:font script="Beng" typeface="Vrinda"/>
+        <a:font script="Gujr" typeface="Shruti"/>
+        <a:font script="Khmr" typeface="MoolBoran"/>
+        <a:font script="Knda" typeface="Tunga"/>
+        <a:font script="Guru" typeface="Raavi"/>
+        <a:font script="Cans" typeface="Euphemia"/>
+        <a:font script="Cher" typeface="Plantagenet Cherokee"/>
+        <a:font script="Yiii" typeface="Microsoft Yi Baiti"/>
+        <a:font script="Tibt" typeface="Microsoft Himalaya"/>
+        <a:font script="Thaa" typeface="MV Boli"/>
+        <a:font script="Deva" typeface="Mangal"/>
+        <a:font script="Telu" typeface="Gautami"/>
+        <a:font script="Taml" typeface="Latha"/>
+        <a:font script="Syrc" typeface="Estrangelo Edessa"/>
+        <a:font script="Orya" typeface="Kalinga"/>
+        <a:font script="Mlym" typeface="Kartika"/>
+        <a:font script="Laoo" typeface="DokChampa"/>
+        <a:font script="Sinh" typeface="Iskoola Pota"/>
+        <a:font script="Mong" typeface="Mongolian Baiti"/>
+        <a:font script="Viet" typeface="Times New Roman"/>
+        <a:font script="Uigh" typeface="Microsoft Uighur"/>
+        <a:font script="Geor" typeface="Sylfaen"/>
+        <a:font script="Armn" typeface="Arial"/>
+        <a:font script="Bugi" typeface="Leelawadee UI"/>
+        <a:font script="Bopo" typeface="Microsoft JhengHei"/>
+        <a:font script="Java" typeface="Javanese Text"/>
+        <a:font script="Lisu" typeface="Segoe UI"/>
+        <a:font script="Mymr" typeface="Myanmar Text"/>
+        <a:font script="Nkoo" typeface="Ebrima"/>
+        <a:font script="Olck" typeface="Nirmala UI"/>
+        <a:font script="Osma" typeface="Ebrima"/>
+        <a:font script="Phag" typeface="Phagspa"/>
+        <a:font script="Syrn" typeface="Estrangelo Edessa"/>
+        <a:font script="Syrj" typeface="Estrangelo Edessa"/>
+        <a:font script="Syre" typeface="Estrangelo Edessa"/>
+        <a:font script="Sora" typeface="Nirmala UI"/>
+        <a:font script="Tale" typeface="Microsoft Tai Le"/>
+        <a:font script="Talu" typeface="Microsoft New Tai Lue"/>
+        <a:font script="Tfng" typeface="Ebrima"/>
+      </a:majorFont>
+      <a:minorFont>
+        <a:latin typeface="Aptos" panose="02110004020202020204"/>
+        <a:ea typeface=""/>
+        <a:cs typeface=""/>
+        <a:font script="Jpan" typeface="游ゴシック"/>
+        <a:font script="Hang" typeface="맑은 고딕"/>
+        <a:font script="Hans" typeface="等线"/>
+        <a:font script="Hant" typeface="新細明體"/>
+        <a:font script="Arab" typeface="Arial"/>
+        <a:font script="Hebr" typeface="Arial"/>
+        <a:font script="Thai" typeface="Cordia New"/>
+        <a:font script="Ethi" typeface="Nyala"/>
+        <a:font script="Beng" typeface="Vrinda"/>
+        <a:font script="Gujr" typeface="Shruti"/>
+        <a:font script="Khmr" typeface="DaunPenh"/>
+        <a:font script="Knda" typeface="Tunga"/>
+        <a:font script="Guru" typeface="Raavi"/>
+        <a:font script="Cans" typeface="Euphemia"/>
+        <a:font script="Cher" typeface="Plantagenet Cherokee"/>
+        <a:font script="Yiii" typeface="Microsoft Yi Baiti"/>
+        <a:font script="Tibt" typeface="Microsoft Himalaya"/>
+        <a:font script="Thaa" typeface="MV Boli"/>
+        <a:font script="Deva" typeface="Mangal"/>
+        <a:font script="Telu" typeface="Gautami"/>
+        <a:font script="Taml" typeface="Latha"/>
+        <a:font script="Syrc" typeface="Estrangelo Edessa"/>
+        <a:font script="Orya" typeface="Kalinga"/>
+        <a:font script="Mlym" typeface="Kartika"/>
+        <a:font script="Laoo" typeface="DokChampa"/>
+        <a:font script="Sinh" typeface="Iskoola Pota"/>
+        <a:font script="Mong" typeface="Mongolian Baiti"/>
+        <a:font script="Viet" typeface="Arial"/>
+        <a:font script="Uigh" typeface="Microsoft Uighur"/>
+        <a:font script="Geor" typeface="Sylfaen"/>
+        <a:font script="Armn" typeface="Arial"/>
+        <a:font script="Bugi" typeface="Leelawadee UI"/>
+        <a:font script="Bopo" typeface="Microsoft JhengHei"/>
+        <a:font script="Java" typeface="Javanese Text"/>
+        <a:font script="Lisu" typeface="Segoe UI"/>
+        <a:font script="Mymr" typeface="Myanmar Text"/>
+        <a:font script="Nkoo" typeface="Ebrima"/>
+        <a:font script="Olck" typeface="Nirmala UI"/>
+        <a:font script="Osma" typeface="Ebrima"/>
+        <a:font script="Phag" typeface="Phagspa"/>
+        <a:font script="Syrn" typeface="Estrangelo Edessa"/>
+        <a:font script="Syrj" typeface="Estrangelo Edessa"/>
+        <a:font script="Syre" typeface="Estrangelo Edessa"/>
+        <a:font script="Sora" typeface="Nirmala UI"/>
+        <a:font script="Tale" typeface="Microsoft Tai Le"/>
+        <a:font script="Talu" typeface="Microsoft New Tai Lue"/>
+        <a:font script="Tfng" typeface="Ebrima"/>
+      </a:minorFont>
+    </a:fontScheme>
+    <a:fmtScheme name="Office">
+      <a:fillStyleLst>
+        <a:solidFill>
+          <a:schemeClr val="phClr"/>
+        </a:solidFill>
+        <a:gradFill rotWithShape="1">
+          <a:gsLst>
+            <a:gs pos="0">
+              <a:schemeClr val="phClr">
+                <a:lumMod val="110000"/>
+                <a:satMod val="105000"/>
+                <a:tint val="67000"/>
+              </a:schemeClr>
+            </a:gs>
+            <a:gs pos="50000">
+              <a:schemeClr val="phClr">
+                <a:lumMod val="105000"/>
+                <a:satMod val="103000"/>
+                <a:tint val="73000"/>
+              </a:schemeClr>
+            </a:gs>
+            <a:gs pos="100000">
+              <a:schemeClr val="phClr">
+                <a:lumMod val="105000"/>
+                <a:satMod val="109000"/>
+                <a:tint val="81000"/>
+              </a:schemeClr>
+            </a:gs>
+          </a:gsLst>
+          <a:lin ang="5400000" scaled="0"/>
+        </a:gradFill>
+        <a:gradFill rotWithShape="1">
+          <a:gsLst>
+            <a:gs pos="0">
+              <a:schemeClr val="phClr">
+                <a:satMod val="103000"/>
+                <a:lumMod val="102000"/>
+                <a:tint val="94000"/>
+              </a:schemeClr>
+            </a:gs>
+            <a:gs pos="50000">
+              <a:schemeClr val="phClr">
+                <a:satMod val="110000"/>
+                <a:lumMod val="100000"/>
+                <a:shade val="100000"/>
+              </a:schemeClr>
+            </a:gs>
+            <a:gs pos="100000">
+              <a:schemeClr val="phClr">
+                <a:lumMod val="99000"/>
+                <a:satMod val="120000"/>
+                <a:shade val="78000"/>
+              </a:schemeClr>
+            </a:gs>
+          </a:gsLst>
+          <a:lin ang="5400000" scaled="0"/>
+        </a:gradFill>
+      </a:fillStyleLst>
+      <a:lnStyleLst>
+        <a:ln w="12700" cap="flat" cmpd="sng" algn="ctr">
+          <a:solidFill>
+            <a:schemeClr val="phClr"/>
+          </a:solidFill>
+          <a:prstDash val="solid"/>
+          <a:miter lim="800000"/>
+        </a:ln>
+        <a:ln w="19050" cap="flat" cmpd="sng" algn="ctr">
+          <a:solidFill>
+            <a:schemeClr val="phClr"/>
+          </a:solidFill>
+          <a:prstDash val="solid"/>
+          <a:miter lim="800000"/>
+        </a:ln>
+        <a:ln w="25400" cap="flat" cmpd="sng" algn="ctr">
+          <a:solidFill>
+            <a:schemeClr val="phClr"/>
+          </a:solidFill>
+          <a:prstDash val="solid"/>
+          <a:miter lim="800000"/>
+        </a:ln>
+      </a:lnStyleLst>
+      <a:effectStyleLst>
+        <a:effectStyle>
+          <a:effectLst/>
+        </a:effectStyle>
+        <a:effectStyle>
+          <a:effectLst/>
+        </a:effectStyle>
+        <a:effectStyle>
+          <a:effectLst>
+            <a:outerShdw blurRad="57150" dist="19050" dir="5400000" algn="ctr" rotWithShape="0">
+              <a:srgbClr val="000000">
+                <a:alpha val="63000"/>
+              </a:srgbClr>
+            </a:outerShdw>
+          </a:effectLst>
+        </a:effectStyle>
+      </a:effectStyleLst>
+      <a:bgFillStyleLst>
+        <a:solidFill>
+          <a:schemeClr val="phClr"/>
+        </a:solidFill>
+        <a:solidFill>
+          <a:schemeClr val="phClr">
+            <a:tint val="95000"/>
+            <a:satMod val="170000"/>
+          </a:schemeClr>
+        </a:solidFill>
+        <a:gradFill rotWithShape="1">
+          <a:gsLst>
+            <a:gs pos="0">
+              <a:schemeClr val="phClr">
+                <a:tint val="93000"/>
+                <a:satMod val="150000"/>
+                <a:shade val="98000"/>
+                <a:lumMod val="102000"/>
+              </a:schemeClr>
+            </a:gs>
+            <a:gs pos="50000">
+              <a:schemeClr val="phClr">
+                <a:tint val="98000"/>
+                <a:satMod val="130000"/>
+                <a:shade val="90000"/>
+                <a:lumMod val="103000"/>
+              </a:schemeClr>
+            </a:gs>
+            <a:gs pos="100000">
+              <a:schemeClr val="phClr">
+                <a:shade val="63000"/>
+                <a:satMod val="120000"/>
+              </a:schemeClr>
+            </a:gs>
+          </a:gsLst>
+          <a:lin ang="5400000" scaled="0"/>
+        </a:gradFill>
+      </a:bgFillStyleLst>
+    </a:fmtScheme>
+  </a:themeElements>
+  <a:objectDefaults>
+    <a:lnDef>
+      <a:spPr/>
+      <a:bodyPr/>
+      <a:lstStyle/>
+      <a:style>
+        <a:lnRef idx="2">
+          <a:schemeClr val="accent1"/>
+        </a:lnRef>
+        <a:fillRef idx="0">
+          <a:schemeClr val="accent1"/>
+        </a:fillRef>
+        <a:effectRef idx="1">
+          <a:schemeClr val="accent1"/>
+        </a:effectRef>
+        <a:fontRef idx="minor">
+          <a:schemeClr val="tx1"/>
+        </a:fontRef>
+      </a:style>
+    </a:lnDef>
+  </a:objectDefaults>
+  <a:extraClrSchemeLst/>
+  <a:extLst>
+    <a:ext uri="{05A4C25C-085E-4340-85A3-A5531E510DB2}">
+      <thm15:themeFamily xmlns:thm15="http://schemas.microsoft.com/office/thememl/2012/main" name="Office Theme" id="{2E142A2C-CD16-42D6-873A-C26D2A0506FA}" vid="{1BDDFF52-6CD6-40A5-AB3C-68EB2F1E4D0A}"/>
+    </a:ext>
+  </a:extLst>
+</a:theme>
+</file>
+
+<file path=ppt/theme/theme3.xml><?xml version="1.0" encoding="utf-8"?>
+<a:theme xmlns:a="http://schemas.openxmlformats.org/drawingml/2006/main" name="Office Theme">
+  <a:themeElements>
+    <a:clrScheme name="Office">
+      <a:dk1>
+        <a:sysClr val="windowText" lastClr="000000"/>
+      </a:dk1>
+      <a:lt1>
+        <a:sysClr val="window" lastClr="FFFFFF"/>
+      </a:lt1>
+      <a:dk2>
         <a:srgbClr val="44546A"/>
       </a:dk2>
       <a:lt2>
@@ -9379,21 +15885,6 @@
 </file>
 
 <file path=customXml/item1.xml><?xml version="1.0" encoding="utf-8"?>
-<p:properties xmlns:p="http://schemas.microsoft.com/office/2006/metadata/properties" xmlns:xsi="http://www.w3.org/2001/XMLSchema-instance" xmlns:pc="http://schemas.microsoft.com/office/infopath/2007/PartnerControls">
-  <documentManagement/>
-</p:properties>
-</file>
-
-<file path=customXml/item2.xml><?xml version="1.0" encoding="utf-8"?>
-<?mso-contentType ?>
-<FormTemplates xmlns="http://schemas.microsoft.com/sharepoint/v3/contenttype/forms">
-  <Display>DocumentLibraryForm</Display>
-  <Edit>DocumentLibraryForm</Edit>
-  <New>DocumentLibraryForm</New>
-</FormTemplates>
-</file>
-
-<file path=customXml/item3.xml><?xml version="1.0" encoding="utf-8"?>
 <ct:contentTypeSchema xmlns:ct="http://schemas.microsoft.com/office/2006/metadata/contentType" xmlns:ma="http://schemas.microsoft.com/office/2006/metadata/properties/metaAttributes" ct:_="" ma:_="" ma:contentTypeName="Document" ma:contentTypeID="0x010100BE9DF362DDD05A45B86D781376AAC476" ma:contentTypeVersion="7" ma:contentTypeDescription="Create a new document." ma:contentTypeScope="" ma:versionID="3a57987203f074c548de98d113b4286b">
   <xsd:schema xmlns:xsd="http://www.w3.org/2001/XMLSchema" xmlns:xs="http://www.w3.org/2001/XMLSchema" xmlns:p="http://schemas.microsoft.com/office/2006/metadata/properties" xmlns:ns2="d199752a-3aa5-47db-8ae7-beef1561cea0" targetNamespace="http://schemas.microsoft.com/office/2006/metadata/properties" ma:root="true" ma:fieldsID="70b53b01044eee4a42e00434b4075c16" ns2:_="">
     <xsd:import namespace="d199752a-3aa5-47db-8ae7-beef1561cea0"/>
@@ -9557,24 +16048,22 @@
 </ct:contentTypeSchema>
 </file>
 
-<file path=customXml/itemProps1.xml><?xml version="1.0" encoding="utf-8"?>
-<ds:datastoreItem xmlns:ds="http://schemas.openxmlformats.org/officeDocument/2006/customXml" ds:itemID="{A5AA9653-386D-4377-A986-DC4A02C60CD5}">
-  <ds:schemaRefs>
-    <ds:schemaRef ds:uri="http://schemas.microsoft.com/office/2006/metadata/properties"/>
-    <ds:schemaRef ds:uri="http://schemas.microsoft.com/office/infopath/2007/PartnerControls"/>
-  </ds:schemaRefs>
-</ds:datastoreItem>
+<file path=customXml/item2.xml><?xml version="1.0" encoding="utf-8"?>
+<?mso-contentType ?>
+<FormTemplates xmlns="http://schemas.microsoft.com/sharepoint/v3/contenttype/forms">
+  <Display>DocumentLibraryForm</Display>
+  <Edit>DocumentLibraryForm</Edit>
+  <New>DocumentLibraryForm</New>
+</FormTemplates>
 </file>
 
-<file path=customXml/itemProps2.xml><?xml version="1.0" encoding="utf-8"?>
-<ds:datastoreItem xmlns:ds="http://schemas.openxmlformats.org/officeDocument/2006/customXml" ds:itemID="{C542A527-91EE-49D6-AF42-393E29B98637}">
-  <ds:schemaRefs>
-    <ds:schemaRef ds:uri="http://schemas.microsoft.com/sharepoint/v3/contenttype/forms"/>
-  </ds:schemaRefs>
-</ds:datastoreItem>
+<file path=customXml/item3.xml><?xml version="1.0" encoding="utf-8"?>
+<p:properties xmlns:p="http://schemas.microsoft.com/office/2006/metadata/properties" xmlns:xsi="http://www.w3.org/2001/XMLSchema-instance" xmlns:pc="http://schemas.microsoft.com/office/infopath/2007/PartnerControls">
+  <documentManagement/>
+</p:properties>
 </file>
 
-<file path=customXml/itemProps3.xml><?xml version="1.0" encoding="utf-8"?>
+<file path=customXml/itemProps1.xml><?xml version="1.0" encoding="utf-8"?>
 <ds:datastoreItem xmlns:ds="http://schemas.openxmlformats.org/officeDocument/2006/customXml" ds:itemID="{876C713D-8D2B-492D-A52A-375696712CF8}">
   <ds:schemaRefs>
     <ds:schemaRef ds:uri="http://schemas.microsoft.com/office/2006/metadata/contentType"/>
@@ -9590,4 +16079,21 @@
     <ds:schemaRef ds:uri="http://schemas.microsoft.com/internal/obd"/>
   </ds:schemaRefs>
 </ds:datastoreItem>
+</file>
+
+<file path=customXml/itemProps2.xml><?xml version="1.0" encoding="utf-8"?>
+<ds:datastoreItem xmlns:ds="http://schemas.openxmlformats.org/officeDocument/2006/customXml" ds:itemID="{C542A527-91EE-49D6-AF42-393E29B98637}">
+  <ds:schemaRefs>
+    <ds:schemaRef ds:uri="http://schemas.microsoft.com/sharepoint/v3/contenttype/forms"/>
+  </ds:schemaRefs>
+</ds:datastoreItem>
+</file>
+
+<file path=customXml/itemProps3.xml><?xml version="1.0" encoding="utf-8"?>
+<ds:datastoreItem xmlns:ds="http://schemas.openxmlformats.org/officeDocument/2006/customXml" ds:itemID="{A5AA9653-386D-4377-A986-DC4A02C60CD5}">
+  <ds:schemaRefs>
+    <ds:schemaRef ds:uri="http://schemas.microsoft.com/office/2006/metadata/properties"/>
+    <ds:schemaRef ds:uri="http://schemas.microsoft.com/office/infopath/2007/PartnerControls"/>
+  </ds:schemaRefs>
+</ds:datastoreItem>
 </file>
--- a/an-introduction-to-sql-server-database-projects/an-introduction-to-sql-server-database-projects.pptx
+++ b/an-introduction-to-sql-server-database-projects/an-introduction-to-sql-server-database-projects.pptx
@@ -6,31 +6,33 @@
     <p:sldMasterId id="2147483668" r:id="rId5"/>
   </p:sldMasterIdLst>
   <p:notesMasterIdLst>
-    <p:notesMasterId r:id="rId28"/>
+    <p:notesMasterId r:id="rId30"/>
   </p:notesMasterIdLst>
   <p:sldIdLst>
     <p:sldId id="260" r:id="rId6"/>
     <p:sldId id="279" r:id="rId7"/>
-    <p:sldId id="428" r:id="rId8"/>
+    <p:sldId id="256" r:id="rId8"/>
     <p:sldId id="261" r:id="rId9"/>
     <p:sldId id="264" r:id="rId10"/>
-    <p:sldId id="262" r:id="rId11"/>
-    <p:sldId id="263" r:id="rId12"/>
-    <p:sldId id="265" r:id="rId13"/>
-    <p:sldId id="266" r:id="rId14"/>
-    <p:sldId id="267" r:id="rId15"/>
-    <p:sldId id="429" r:id="rId16"/>
-    <p:sldId id="268" r:id="rId17"/>
-    <p:sldId id="269" r:id="rId18"/>
-    <p:sldId id="270" r:id="rId19"/>
-    <p:sldId id="271" r:id="rId20"/>
-    <p:sldId id="272" r:id="rId21"/>
-    <p:sldId id="273" r:id="rId22"/>
-    <p:sldId id="275" r:id="rId23"/>
-    <p:sldId id="276" r:id="rId24"/>
-    <p:sldId id="274" r:id="rId25"/>
-    <p:sldId id="277" r:id="rId26"/>
-    <p:sldId id="278" r:id="rId27"/>
+    <p:sldId id="430" r:id="rId11"/>
+    <p:sldId id="262" r:id="rId12"/>
+    <p:sldId id="263" r:id="rId13"/>
+    <p:sldId id="265" r:id="rId14"/>
+    <p:sldId id="266" r:id="rId15"/>
+    <p:sldId id="267" r:id="rId16"/>
+    <p:sldId id="429" r:id="rId17"/>
+    <p:sldId id="268" r:id="rId18"/>
+    <p:sldId id="269" r:id="rId19"/>
+    <p:sldId id="270" r:id="rId20"/>
+    <p:sldId id="271" r:id="rId21"/>
+    <p:sldId id="272" r:id="rId22"/>
+    <p:sldId id="273" r:id="rId23"/>
+    <p:sldId id="275" r:id="rId24"/>
+    <p:sldId id="276" r:id="rId25"/>
+    <p:sldId id="274" r:id="rId26"/>
+    <p:sldId id="277" r:id="rId27"/>
+    <p:sldId id="431" r:id="rId28"/>
+    <p:sldId id="278" r:id="rId29"/>
   </p:sldIdLst>
   <p:sldSz cx="12192000" cy="6858000"/>
   <p:notesSz cx="6858000" cy="9144000"/>
@@ -222,7 +224,7 @@
           <a:p>
             <a:fld id="{896D3B2D-3924-0B48-B558-93C031AA9A06}" type="datetimeFigureOut">
               <a:rPr lang="en-US" smtClean="0"/>
-              <a:t>5/10/2025</a:t>
+              <a:t>8/30/2025</a:t>
             </a:fld>
             <a:endParaRPr lang="en-US"/>
           </a:p>
@@ -494,13 +496,7 @@
   <p:cSld>
     <p:spTree>
       <p:nvGrpSpPr>
-        <p:cNvPr id="1" name="">
-          <a:extLst>
-            <a:ext uri="{FF2B5EF4-FFF2-40B4-BE49-F238E27FC236}">
-              <a16:creationId xmlns:a16="http://schemas.microsoft.com/office/drawing/2014/main" id="{94E0DD0A-36D5-140F-E49A-07A66272FD76}"/>
-            </a:ext>
-          </a:extLst>
-        </p:cNvPr>
+        <p:cNvPr id="1" name=""/>
         <p:cNvGrpSpPr/>
         <p:nvPr/>
       </p:nvGrpSpPr>
@@ -514,13 +510,7 @@
       </p:grpSpPr>
       <p:sp>
         <p:nvSpPr>
-          <p:cNvPr id="2" name="Slide Image Placeholder 1">
-            <a:extLst>
-              <a:ext uri="{FF2B5EF4-FFF2-40B4-BE49-F238E27FC236}">
-                <a16:creationId xmlns:a16="http://schemas.microsoft.com/office/drawing/2014/main" id="{FCC8FAAD-A82C-CEDF-7DB5-AC8FA4DB2FD1}"/>
-              </a:ext>
-            </a:extLst>
-          </p:cNvPr>
+          <p:cNvPr id="2" name="Slide Image Placeholder 1"/>
           <p:cNvSpPr>
             <a:spLocks noGrp="1" noRot="1" noChangeAspect="1"/>
           </p:cNvSpPr>
@@ -532,13 +522,7 @@
       </p:sp>
       <p:sp>
         <p:nvSpPr>
-          <p:cNvPr id="3" name="Notes Placeholder 2">
-            <a:extLst>
-              <a:ext uri="{FF2B5EF4-FFF2-40B4-BE49-F238E27FC236}">
-                <a16:creationId xmlns:a16="http://schemas.microsoft.com/office/drawing/2014/main" id="{7034EAE5-29C6-C6E7-9F6C-8B4A937C4059}"/>
-              </a:ext>
-            </a:extLst>
-          </p:cNvPr>
+          <p:cNvPr id="3" name="Notes Placeholder 2"/>
           <p:cNvSpPr>
             <a:spLocks noGrp="1"/>
           </p:cNvSpPr>
@@ -551,14 +535,97 @@
           <a:bodyPr/>
           <a:lstStyle/>
           <a:p>
-            <a:endParaRPr lang="en-US"/>
+            <a:endParaRPr lang="en-NO"/>
+          </a:p>
+        </p:txBody>
+      </p:sp>
+      <p:sp>
+        <p:nvSpPr>
+          <p:cNvPr id="4" name="Slide Number Placeholder 3"/>
+          <p:cNvSpPr>
+            <a:spLocks noGrp="1"/>
+          </p:cNvSpPr>
+          <p:nvPr>
+            <p:ph type="sldNum" sz="quarter" idx="5"/>
+          </p:nvPr>
+        </p:nvSpPr>
+        <p:spPr/>
+        <p:txBody>
+          <a:bodyPr/>
+          <a:lstStyle/>
+          <a:p>
+            <a:pPr marL="0" marR="0" lvl="0" indent="0" algn="r" defTabSz="914400" rtl="0" eaLnBrk="1" fontAlgn="auto" latinLnBrk="0" hangingPunct="1">
+              <a:lnSpc>
+                <a:spcPct val="100000"/>
+              </a:lnSpc>
+              <a:spcBef>
+                <a:spcPts val="0"/>
+              </a:spcBef>
+              <a:spcAft>
+                <a:spcPts val="0"/>
+              </a:spcAft>
+              <a:buClrTx/>
+              <a:buSzTx/>
+              <a:buFontTx/>
+              <a:buNone/>
+              <a:tabLst/>
+              <a:defRPr/>
+            </a:pPr>
+            <a:fld id="{36F2ADC0-909F-0543-A922-13880F1A3B43}" type="slidenum">
+              <a:rPr kumimoji="0" lang="en-NO" sz="1200" b="0" i="0" u="none" strike="noStrike" kern="1200" cap="none" spc="0" normalizeH="0" baseline="0" noProof="0" smtClean="0">
+                <a:ln>
+                  <a:noFill/>
+                </a:ln>
+                <a:solidFill>
+                  <a:prstClr val="black"/>
+                </a:solidFill>
+                <a:effectLst/>
+                <a:uLnTx/>
+                <a:uFillTx/>
+                <a:latin typeface="Calibri" panose="020F0502020204030204"/>
+                <a:ea typeface="+mn-ea"/>
+                <a:cs typeface="+mn-cs"/>
+              </a:rPr>
+              <a:pPr marL="0" marR="0" lvl="0" indent="0" algn="r" defTabSz="914400" rtl="0" eaLnBrk="1" fontAlgn="auto" latinLnBrk="0" hangingPunct="1">
+                <a:lnSpc>
+                  <a:spcPct val="100000"/>
+                </a:lnSpc>
+                <a:spcBef>
+                  <a:spcPts val="0"/>
+                </a:spcBef>
+                <a:spcAft>
+                  <a:spcPts val="0"/>
+                </a:spcAft>
+                <a:buClrTx/>
+                <a:buSzTx/>
+                <a:buFontTx/>
+                <a:buNone/>
+                <a:tabLst/>
+                <a:defRPr/>
+              </a:pPr>
+              <a:t>3</a:t>
+            </a:fld>
+            <a:endParaRPr kumimoji="0" lang="en-NO" sz="1200" b="0" i="0" u="none" strike="noStrike" kern="1200" cap="none" spc="0" normalizeH="0" baseline="0" noProof="0">
+              <a:ln>
+                <a:noFill/>
+              </a:ln>
+              <a:solidFill>
+                <a:prstClr val="black"/>
+              </a:solidFill>
+              <a:effectLst/>
+              <a:uLnTx/>
+              <a:uFillTx/>
+              <a:latin typeface="Calibri" panose="020F0502020204030204"/>
+              <a:ea typeface="+mn-ea"/>
+              <a:cs typeface="+mn-cs"/>
+            </a:endParaRPr>
           </a:p>
         </p:txBody>
       </p:sp>
     </p:spTree>
     <p:extLst>
       <p:ext uri="{BB962C8B-B14F-4D97-AF65-F5344CB8AC3E}">
-        <p14:creationId xmlns:p14="http://schemas.microsoft.com/office/powerpoint/2010/main" val="1186836877"/>
+        <p14:creationId xmlns:p14="http://schemas.microsoft.com/office/powerpoint/2010/main" val="2954695300"/>
       </p:ext>
     </p:extLst>
   </p:cSld>
@@ -761,7 +828,7 @@
             <a:fld id="{B61BEF0D-F0BB-DE4B-95CE-6DB70DBA9567}" type="datetimeFigureOut">
               <a:rPr lang="en-US"/>
               <a:pPr/>
-              <a:t>5/10/2025</a:t>
+              <a:t>8/30/2025</a:t>
             </a:fld>
             <a:endParaRPr lang="en-US"/>
           </a:p>
@@ -1045,7 +1112,7 @@
             <a:fld id="{B61BEF0D-F0BB-DE4B-95CE-6DB70DBA9567}" type="datetimeFigureOut">
               <a:rPr lang="en-US"/>
               <a:pPr/>
-              <a:t>5/10/2025</a:t>
+              <a:t>8/30/2025</a:t>
             </a:fld>
             <a:endParaRPr lang="en-US"/>
           </a:p>
@@ -1356,7 +1423,7 @@
             <a:fld id="{B61BEF0D-F0BB-DE4B-95CE-6DB70DBA9567}" type="datetimeFigureOut">
               <a:rPr lang="en-US"/>
               <a:pPr/>
-              <a:t>5/10/2025</a:t>
+              <a:t>8/30/2025</a:t>
             </a:fld>
             <a:endParaRPr lang="en-US"/>
           </a:p>
@@ -1694,7 +1761,7 @@
             <a:fld id="{B61BEF0D-F0BB-DE4B-95CE-6DB70DBA9567}" type="datetimeFigureOut">
               <a:rPr lang="en-US"/>
               <a:pPr/>
-              <a:t>5/10/2025</a:t>
+              <a:t>8/30/2025</a:t>
             </a:fld>
             <a:endParaRPr lang="en-US"/>
           </a:p>
@@ -2005,7 +2072,7 @@
             <a:fld id="{B61BEF0D-F0BB-DE4B-95CE-6DB70DBA9567}" type="datetimeFigureOut">
               <a:rPr lang="en-US"/>
               <a:pPr/>
-              <a:t>5/10/2025</a:t>
+              <a:t>8/30/2025</a:t>
             </a:fld>
             <a:endParaRPr lang="en-US"/>
           </a:p>
@@ -2395,7 +2462,7 @@
             <a:fld id="{B61BEF0D-F0BB-DE4B-95CE-6DB70DBA9567}" type="datetimeFigureOut">
               <a:rPr lang="en-US"/>
               <a:pPr/>
-              <a:t>5/10/2025</a:t>
+              <a:t>8/30/2025</a:t>
             </a:fld>
             <a:endParaRPr lang="en-US"/>
           </a:p>
@@ -2561,7 +2628,7 @@
           <a:p>
             <a:fld id="{55C6B4A9-1611-4792-9094-5F34BCA07E0B}" type="datetimeFigureOut">
               <a:rPr lang="en-US"/>
-              <a:t>5/10/2025</a:t>
+              <a:t>8/30/2025</a:t>
             </a:fld>
             <a:endParaRPr lang="en-US"/>
           </a:p>
@@ -2737,7 +2804,7 @@
             <a:fld id="{B61BEF0D-F0BB-DE4B-95CE-6DB70DBA9567}" type="datetimeFigureOut">
               <a:rPr lang="en-US"/>
               <a:pPr/>
-              <a:t>5/10/2025</a:t>
+              <a:t>8/30/2025</a:t>
             </a:fld>
             <a:endParaRPr lang="en-US"/>
           </a:p>
@@ -2816,7 +2883,7 @@
           <p:cNvPr id="2" name="Title 1">
             <a:extLst>
               <a:ext uri="{FF2B5EF4-FFF2-40B4-BE49-F238E27FC236}">
-                <a16:creationId xmlns:a16="http://schemas.microsoft.com/office/drawing/2014/main" id="{7375D5C0-D3A4-61E6-5660-DF7AB8989133}"/>
+                <a16:creationId xmlns:a16="http://schemas.microsoft.com/office/drawing/2014/main" id="{72267486-45A9-B79B-F1B7-853953B6BD36}"/>
               </a:ext>
             </a:extLst>
           </p:cNvPr>
@@ -2842,9 +2909,10 @@
           </a:lstStyle>
           <a:p>
             <a:r>
-              <a:rPr lang="en-US"/>
+              <a:rPr lang="en-GB"/>
               <a:t>Click to edit Master title style</a:t>
             </a:r>
+            <a:endParaRPr lang="en-NO"/>
           </a:p>
         </p:txBody>
       </p:sp>
@@ -2853,7 +2921,7 @@
           <p:cNvPr id="3" name="Subtitle 2">
             <a:extLst>
               <a:ext uri="{FF2B5EF4-FFF2-40B4-BE49-F238E27FC236}">
-                <a16:creationId xmlns:a16="http://schemas.microsoft.com/office/drawing/2014/main" id="{F00DD6B0-6D1D-7C71-F5B3-A373C8384FC7}"/>
+                <a16:creationId xmlns:a16="http://schemas.microsoft.com/office/drawing/2014/main" id="{3739D6A9-55A2-5AEF-5E80-8A8BC740B04B}"/>
               </a:ext>
             </a:extLst>
           </p:cNvPr>
@@ -2912,9 +2980,10 @@
           </a:lstStyle>
           <a:p>
             <a:r>
-              <a:rPr lang="en-US"/>
+              <a:rPr lang="en-GB"/>
               <a:t>Click to edit Master subtitle style</a:t>
             </a:r>
+            <a:endParaRPr lang="en-NO"/>
           </a:p>
         </p:txBody>
       </p:sp>
@@ -2923,7 +2992,7 @@
           <p:cNvPr id="4" name="Date Placeholder 3">
             <a:extLst>
               <a:ext uri="{FF2B5EF4-FFF2-40B4-BE49-F238E27FC236}">
-                <a16:creationId xmlns:a16="http://schemas.microsoft.com/office/drawing/2014/main" id="{415C71A3-7C80-5027-4B9A-6BBD6FACAE1D}"/>
+                <a16:creationId xmlns:a16="http://schemas.microsoft.com/office/drawing/2014/main" id="{F5E1C332-43B1-784F-86CE-FABB95A3F14C}"/>
               </a:ext>
             </a:extLst>
           </p:cNvPr>
@@ -2939,11 +3008,11 @@
           <a:bodyPr/>
           <a:lstStyle/>
           <a:p>
-            <a:fld id="{A40CF832-788C-4A30-A874-A72157BA0ED2}" type="datetimeFigureOut">
-              <a:rPr lang="en-US" smtClean="0"/>
-              <a:t>5/10/2025</a:t>
+            <a:fld id="{DD6EBC61-6493-6943-BFC0-FEDAB404CC17}" type="datetimeFigureOut">
+              <a:rPr lang="en-NO" smtClean="0"/>
+              <a:t>08/30/2025</a:t>
             </a:fld>
-            <a:endParaRPr lang="en-US"/>
+            <a:endParaRPr lang="en-NO"/>
           </a:p>
         </p:txBody>
       </p:sp>
@@ -2952,7 +3021,7 @@
           <p:cNvPr id="5" name="Footer Placeholder 4">
             <a:extLst>
               <a:ext uri="{FF2B5EF4-FFF2-40B4-BE49-F238E27FC236}">
-                <a16:creationId xmlns:a16="http://schemas.microsoft.com/office/drawing/2014/main" id="{4D4B61D6-B917-E461-AEE3-46A8D55003E7}"/>
+                <a16:creationId xmlns:a16="http://schemas.microsoft.com/office/drawing/2014/main" id="{8015C634-8243-5D4E-0C27-008C83CB4198}"/>
               </a:ext>
             </a:extLst>
           </p:cNvPr>
@@ -2968,7 +3037,7 @@
           <a:bodyPr/>
           <a:lstStyle/>
           <a:p>
-            <a:endParaRPr lang="en-US"/>
+            <a:endParaRPr lang="en-NO"/>
           </a:p>
         </p:txBody>
       </p:sp>
@@ -2977,7 +3046,7 @@
           <p:cNvPr id="6" name="Slide Number Placeholder 5">
             <a:extLst>
               <a:ext uri="{FF2B5EF4-FFF2-40B4-BE49-F238E27FC236}">
-                <a16:creationId xmlns:a16="http://schemas.microsoft.com/office/drawing/2014/main" id="{C2B4D2D2-3873-4B93-8EC2-07BA03937982}"/>
+                <a16:creationId xmlns:a16="http://schemas.microsoft.com/office/drawing/2014/main" id="{DB174C78-BB59-C152-C15F-C91CD1592EBF}"/>
               </a:ext>
             </a:extLst>
           </p:cNvPr>
@@ -2993,18 +3062,18 @@
           <a:bodyPr/>
           <a:lstStyle/>
           <a:p>
-            <a:fld id="{585491E3-9838-4B39-AEBF-3B863E6BCAE0}" type="slidenum">
-              <a:rPr lang="en-US" smtClean="0"/>
+            <a:fld id="{538158FF-A7DF-BF42-A1A6-DB8EC7A9882E}" type="slidenum">
+              <a:rPr lang="en-NO" smtClean="0"/>
               <a:t>‹#›</a:t>
             </a:fld>
-            <a:endParaRPr lang="en-US"/>
+            <a:endParaRPr lang="en-NO"/>
           </a:p>
         </p:txBody>
       </p:sp>
     </p:spTree>
     <p:extLst>
       <p:ext uri="{BB962C8B-B14F-4D97-AF65-F5344CB8AC3E}">
-        <p14:creationId xmlns:p14="http://schemas.microsoft.com/office/powerpoint/2010/main" val="1028376291"/>
+        <p14:creationId xmlns:p14="http://schemas.microsoft.com/office/powerpoint/2010/main" val="71309158"/>
       </p:ext>
     </p:extLst>
   </p:cSld>
@@ -3036,7 +3105,7 @@
           <p:cNvPr id="2" name="Title 1">
             <a:extLst>
               <a:ext uri="{FF2B5EF4-FFF2-40B4-BE49-F238E27FC236}">
-                <a16:creationId xmlns:a16="http://schemas.microsoft.com/office/drawing/2014/main" id="{E62EA6EE-13B6-FFE6-2484-339A8C421E2A}"/>
+                <a16:creationId xmlns:a16="http://schemas.microsoft.com/office/drawing/2014/main" id="{4530F42F-14DF-F8FE-A721-5E3A30CF7F8F}"/>
               </a:ext>
             </a:extLst>
           </p:cNvPr>
@@ -3053,9 +3122,10 @@
           <a:lstStyle/>
           <a:p>
             <a:r>
-              <a:rPr lang="en-US"/>
+              <a:rPr lang="en-GB"/>
               <a:t>Click to edit Master title style</a:t>
             </a:r>
+            <a:endParaRPr lang="en-NO"/>
           </a:p>
         </p:txBody>
       </p:sp>
@@ -3064,7 +3134,7 @@
           <p:cNvPr id="3" name="Content Placeholder 2">
             <a:extLst>
               <a:ext uri="{FF2B5EF4-FFF2-40B4-BE49-F238E27FC236}">
-                <a16:creationId xmlns:a16="http://schemas.microsoft.com/office/drawing/2014/main" id="{20B642EB-876B-1624-B031-13C87CCD60BC}"/>
+                <a16:creationId xmlns:a16="http://schemas.microsoft.com/office/drawing/2014/main" id="{41A785CA-D898-055F-F655-A1A2199B4CFE}"/>
               </a:ext>
             </a:extLst>
           </p:cNvPr>
@@ -3082,37 +3152,38 @@
           <a:p>
             <a:pPr lvl="0"/>
             <a:r>
-              <a:rPr lang="en-US"/>
+              <a:rPr lang="en-GB"/>
               <a:t>Click to edit Master text styles</a:t>
             </a:r>
           </a:p>
           <a:p>
             <a:pPr lvl="1"/>
             <a:r>
-              <a:rPr lang="en-US"/>
+              <a:rPr lang="en-GB"/>
               <a:t>Second level</a:t>
             </a:r>
           </a:p>
           <a:p>
             <a:pPr lvl="2"/>
             <a:r>
-              <a:rPr lang="en-US"/>
+              <a:rPr lang="en-GB"/>
               <a:t>Third level</a:t>
             </a:r>
           </a:p>
           <a:p>
             <a:pPr lvl="3"/>
             <a:r>
-              <a:rPr lang="en-US"/>
+              <a:rPr lang="en-GB"/>
               <a:t>Fourth level</a:t>
             </a:r>
           </a:p>
           <a:p>
             <a:pPr lvl="4"/>
             <a:r>
-              <a:rPr lang="en-US"/>
+              <a:rPr lang="en-GB"/>
               <a:t>Fifth level</a:t>
             </a:r>
+            <a:endParaRPr lang="en-NO"/>
           </a:p>
         </p:txBody>
       </p:sp>
@@ -3121,7 +3192,7 @@
           <p:cNvPr id="4" name="Date Placeholder 3">
             <a:extLst>
               <a:ext uri="{FF2B5EF4-FFF2-40B4-BE49-F238E27FC236}">
-                <a16:creationId xmlns:a16="http://schemas.microsoft.com/office/drawing/2014/main" id="{90201F18-F6AF-A006-03CB-2F1C7194968F}"/>
+                <a16:creationId xmlns:a16="http://schemas.microsoft.com/office/drawing/2014/main" id="{953491E6-29C6-FB54-8E5C-7177D2F7964B}"/>
               </a:ext>
             </a:extLst>
           </p:cNvPr>
@@ -3137,11 +3208,11 @@
           <a:bodyPr/>
           <a:lstStyle/>
           <a:p>
-            <a:fld id="{A40CF832-788C-4A30-A874-A72157BA0ED2}" type="datetimeFigureOut">
-              <a:rPr lang="en-US" smtClean="0"/>
-              <a:t>5/10/2025</a:t>
+            <a:fld id="{DD6EBC61-6493-6943-BFC0-FEDAB404CC17}" type="datetimeFigureOut">
+              <a:rPr lang="en-NO" smtClean="0"/>
+              <a:t>08/30/2025</a:t>
             </a:fld>
-            <a:endParaRPr lang="en-US"/>
+            <a:endParaRPr lang="en-NO"/>
           </a:p>
         </p:txBody>
       </p:sp>
@@ -3150,7 +3221,7 @@
           <p:cNvPr id="5" name="Footer Placeholder 4">
             <a:extLst>
               <a:ext uri="{FF2B5EF4-FFF2-40B4-BE49-F238E27FC236}">
-                <a16:creationId xmlns:a16="http://schemas.microsoft.com/office/drawing/2014/main" id="{3A5FD62B-4317-3E7A-AF51-51C05803E571}"/>
+                <a16:creationId xmlns:a16="http://schemas.microsoft.com/office/drawing/2014/main" id="{EB0FA81E-1DF3-D085-6F88-735C98EAFA1C}"/>
               </a:ext>
             </a:extLst>
           </p:cNvPr>
@@ -3166,7 +3237,7 @@
           <a:bodyPr/>
           <a:lstStyle/>
           <a:p>
-            <a:endParaRPr lang="en-US"/>
+            <a:endParaRPr lang="en-NO"/>
           </a:p>
         </p:txBody>
       </p:sp>
@@ -3175,7 +3246,7 @@
           <p:cNvPr id="6" name="Slide Number Placeholder 5">
             <a:extLst>
               <a:ext uri="{FF2B5EF4-FFF2-40B4-BE49-F238E27FC236}">
-                <a16:creationId xmlns:a16="http://schemas.microsoft.com/office/drawing/2014/main" id="{5EB36A03-3979-703E-E069-3B43EC61B992}"/>
+                <a16:creationId xmlns:a16="http://schemas.microsoft.com/office/drawing/2014/main" id="{7E17BE55-35C6-EECF-CB6D-DC522BA9DA5E}"/>
               </a:ext>
             </a:extLst>
           </p:cNvPr>
@@ -3191,18 +3262,18 @@
           <a:bodyPr/>
           <a:lstStyle/>
           <a:p>
-            <a:fld id="{585491E3-9838-4B39-AEBF-3B863E6BCAE0}" type="slidenum">
-              <a:rPr lang="en-US" smtClean="0"/>
+            <a:fld id="{538158FF-A7DF-BF42-A1A6-DB8EC7A9882E}" type="slidenum">
+              <a:rPr lang="en-NO" smtClean="0"/>
               <a:t>‹#›</a:t>
             </a:fld>
-            <a:endParaRPr lang="en-US"/>
+            <a:endParaRPr lang="en-NO"/>
           </a:p>
         </p:txBody>
       </p:sp>
     </p:spTree>
     <p:extLst>
       <p:ext uri="{BB962C8B-B14F-4D97-AF65-F5344CB8AC3E}">
-        <p14:creationId xmlns:p14="http://schemas.microsoft.com/office/powerpoint/2010/main" val="3082191721"/>
+        <p14:creationId xmlns:p14="http://schemas.microsoft.com/office/powerpoint/2010/main" val="3088423182"/>
       </p:ext>
     </p:extLst>
   </p:cSld>
@@ -3234,7 +3305,7 @@
           <p:cNvPr id="2" name="Title 1">
             <a:extLst>
               <a:ext uri="{FF2B5EF4-FFF2-40B4-BE49-F238E27FC236}">
-                <a16:creationId xmlns:a16="http://schemas.microsoft.com/office/drawing/2014/main" id="{5FA0C294-2E6D-3E23-8C04-FE2E25A5FA89}"/>
+                <a16:creationId xmlns:a16="http://schemas.microsoft.com/office/drawing/2014/main" id="{47FBFA6D-111E-9570-32BF-96B824C9856B}"/>
               </a:ext>
             </a:extLst>
           </p:cNvPr>
@@ -3260,9 +3331,10 @@
           </a:lstStyle>
           <a:p>
             <a:r>
-              <a:rPr lang="en-US"/>
+              <a:rPr lang="en-GB"/>
               <a:t>Click to edit Master title style</a:t>
             </a:r>
+            <a:endParaRPr lang="en-NO"/>
           </a:p>
         </p:txBody>
       </p:sp>
@@ -3271,7 +3343,7 @@
           <p:cNvPr id="3" name="Text Placeholder 2">
             <a:extLst>
               <a:ext uri="{FF2B5EF4-FFF2-40B4-BE49-F238E27FC236}">
-                <a16:creationId xmlns:a16="http://schemas.microsoft.com/office/drawing/2014/main" id="{8E383D64-67F7-B602-487B-C06BB227DE65}"/>
+                <a16:creationId xmlns:a16="http://schemas.microsoft.com/office/drawing/2014/main" id="{0687E193-7CC3-3210-53A9-77375C82E086}"/>
               </a:ext>
             </a:extLst>
           </p:cNvPr>
@@ -3296,7 +3368,7 @@
               <a:defRPr sz="2400">
                 <a:solidFill>
                   <a:schemeClr val="tx1">
-                    <a:tint val="82000"/>
+                    <a:tint val="75000"/>
                   </a:schemeClr>
                 </a:solidFill>
               </a:defRPr>
@@ -3306,7 +3378,7 @@
               <a:defRPr sz="2000">
                 <a:solidFill>
                   <a:schemeClr val="tx1">
-                    <a:tint val="82000"/>
+                    <a:tint val="75000"/>
                   </a:schemeClr>
                 </a:solidFill>
               </a:defRPr>
@@ -3316,7 +3388,7 @@
               <a:defRPr sz="1800">
                 <a:solidFill>
                   <a:schemeClr val="tx1">
-                    <a:tint val="82000"/>
+                    <a:tint val="75000"/>
                   </a:schemeClr>
                 </a:solidFill>
               </a:defRPr>
@@ -3326,7 +3398,7 @@
               <a:defRPr sz="1600">
                 <a:solidFill>
                   <a:schemeClr val="tx1">
-                    <a:tint val="82000"/>
+                    <a:tint val="75000"/>
                   </a:schemeClr>
                 </a:solidFill>
               </a:defRPr>
@@ -3336,7 +3408,7 @@
               <a:defRPr sz="1600">
                 <a:solidFill>
                   <a:schemeClr val="tx1">
-                    <a:tint val="82000"/>
+                    <a:tint val="75000"/>
                   </a:schemeClr>
                 </a:solidFill>
               </a:defRPr>
@@ -3346,7 +3418,7 @@
               <a:defRPr sz="1600">
                 <a:solidFill>
                   <a:schemeClr val="tx1">
-                    <a:tint val="82000"/>
+                    <a:tint val="75000"/>
                   </a:schemeClr>
                 </a:solidFill>
               </a:defRPr>
@@ -3356,7 +3428,7 @@
               <a:defRPr sz="1600">
                 <a:solidFill>
                   <a:schemeClr val="tx1">
-                    <a:tint val="82000"/>
+                    <a:tint val="75000"/>
                   </a:schemeClr>
                 </a:solidFill>
               </a:defRPr>
@@ -3366,7 +3438,7 @@
               <a:defRPr sz="1600">
                 <a:solidFill>
                   <a:schemeClr val="tx1">
-                    <a:tint val="82000"/>
+                    <a:tint val="75000"/>
                   </a:schemeClr>
                 </a:solidFill>
               </a:defRPr>
@@ -3376,7 +3448,7 @@
               <a:defRPr sz="1600">
                 <a:solidFill>
                   <a:schemeClr val="tx1">
-                    <a:tint val="82000"/>
+                    <a:tint val="75000"/>
                   </a:schemeClr>
                 </a:solidFill>
               </a:defRPr>
@@ -3385,7 +3457,7 @@
           <a:p>
             <a:pPr lvl="0"/>
             <a:r>
-              <a:rPr lang="en-US"/>
+              <a:rPr lang="en-GB"/>
               <a:t>Click to edit Master text styles</a:t>
             </a:r>
           </a:p>
@@ -3396,7 +3468,7 @@
           <p:cNvPr id="4" name="Date Placeholder 3">
             <a:extLst>
               <a:ext uri="{FF2B5EF4-FFF2-40B4-BE49-F238E27FC236}">
-                <a16:creationId xmlns:a16="http://schemas.microsoft.com/office/drawing/2014/main" id="{5EE73950-31A4-BD2A-71A1-5C8D7339A494}"/>
+                <a16:creationId xmlns:a16="http://schemas.microsoft.com/office/drawing/2014/main" id="{996B23E5-56BF-518B-BC01-7A58EC247117}"/>
               </a:ext>
             </a:extLst>
           </p:cNvPr>
@@ -3412,11 +3484,11 @@
           <a:bodyPr/>
           <a:lstStyle/>
           <a:p>
-            <a:fld id="{A40CF832-788C-4A30-A874-A72157BA0ED2}" type="datetimeFigureOut">
-              <a:rPr lang="en-US" smtClean="0"/>
-              <a:t>5/10/2025</a:t>
+            <a:fld id="{DD6EBC61-6493-6943-BFC0-FEDAB404CC17}" type="datetimeFigureOut">
+              <a:rPr lang="en-NO" smtClean="0"/>
+              <a:t>08/30/2025</a:t>
             </a:fld>
-            <a:endParaRPr lang="en-US"/>
+            <a:endParaRPr lang="en-NO"/>
           </a:p>
         </p:txBody>
       </p:sp>
@@ -3425,7 +3497,7 @@
           <p:cNvPr id="5" name="Footer Placeholder 4">
             <a:extLst>
               <a:ext uri="{FF2B5EF4-FFF2-40B4-BE49-F238E27FC236}">
-                <a16:creationId xmlns:a16="http://schemas.microsoft.com/office/drawing/2014/main" id="{F4E0B03D-F7F2-CCC2-122D-C4638D49C872}"/>
+                <a16:creationId xmlns:a16="http://schemas.microsoft.com/office/drawing/2014/main" id="{2D3A98D9-ADE9-F622-EB7C-C34CF76C3CBE}"/>
               </a:ext>
             </a:extLst>
           </p:cNvPr>
@@ -3441,7 +3513,7 @@
           <a:bodyPr/>
           <a:lstStyle/>
           <a:p>
-            <a:endParaRPr lang="en-US"/>
+            <a:endParaRPr lang="en-NO"/>
           </a:p>
         </p:txBody>
       </p:sp>
@@ -3450,7 +3522,7 @@
           <p:cNvPr id="6" name="Slide Number Placeholder 5">
             <a:extLst>
               <a:ext uri="{FF2B5EF4-FFF2-40B4-BE49-F238E27FC236}">
-                <a16:creationId xmlns:a16="http://schemas.microsoft.com/office/drawing/2014/main" id="{9FF1CE34-BDF2-DAB5-D863-C9A969D4195B}"/>
+                <a16:creationId xmlns:a16="http://schemas.microsoft.com/office/drawing/2014/main" id="{71E7A8CF-028B-46F6-2ED2-3BAF03C5298F}"/>
               </a:ext>
             </a:extLst>
           </p:cNvPr>
@@ -3466,18 +3538,18 @@
           <a:bodyPr/>
           <a:lstStyle/>
           <a:p>
-            <a:fld id="{585491E3-9838-4B39-AEBF-3B863E6BCAE0}" type="slidenum">
-              <a:rPr lang="en-US" smtClean="0"/>
+            <a:fld id="{538158FF-A7DF-BF42-A1A6-DB8EC7A9882E}" type="slidenum">
+              <a:rPr lang="en-NO" smtClean="0"/>
               <a:t>‹#›</a:t>
             </a:fld>
-            <a:endParaRPr lang="en-US"/>
+            <a:endParaRPr lang="en-NO"/>
           </a:p>
         </p:txBody>
       </p:sp>
     </p:spTree>
     <p:extLst>
       <p:ext uri="{BB962C8B-B14F-4D97-AF65-F5344CB8AC3E}">
-        <p14:creationId xmlns:p14="http://schemas.microsoft.com/office/powerpoint/2010/main" val="2934709516"/>
+        <p14:creationId xmlns:p14="http://schemas.microsoft.com/office/powerpoint/2010/main" val="2498286428"/>
       </p:ext>
     </p:extLst>
   </p:cSld>
@@ -3603,7 +3675,7 @@
             <a:fld id="{B61BEF0D-F0BB-DE4B-95CE-6DB70DBA9567}" type="datetimeFigureOut">
               <a:rPr lang="en-US"/>
               <a:pPr/>
-              <a:t>5/10/2025</a:t>
+              <a:t>8/30/2025</a:t>
             </a:fld>
             <a:endParaRPr lang="en-US"/>
           </a:p>
@@ -3682,7 +3754,7 @@
           <p:cNvPr id="2" name="Title 1">
             <a:extLst>
               <a:ext uri="{FF2B5EF4-FFF2-40B4-BE49-F238E27FC236}">
-                <a16:creationId xmlns:a16="http://schemas.microsoft.com/office/drawing/2014/main" id="{89FE203A-16C0-A74E-85CC-C26A0A2B1E73}"/>
+                <a16:creationId xmlns:a16="http://schemas.microsoft.com/office/drawing/2014/main" id="{4780BB59-83BB-3DC3-DED6-13C776FC0E83}"/>
               </a:ext>
             </a:extLst>
           </p:cNvPr>
@@ -3699,9 +3771,10 @@
           <a:lstStyle/>
           <a:p>
             <a:r>
-              <a:rPr lang="en-US"/>
+              <a:rPr lang="en-GB"/>
               <a:t>Click to edit Master title style</a:t>
             </a:r>
+            <a:endParaRPr lang="en-NO"/>
           </a:p>
         </p:txBody>
       </p:sp>
@@ -3710,7 +3783,7 @@
           <p:cNvPr id="3" name="Content Placeholder 2">
             <a:extLst>
               <a:ext uri="{FF2B5EF4-FFF2-40B4-BE49-F238E27FC236}">
-                <a16:creationId xmlns:a16="http://schemas.microsoft.com/office/drawing/2014/main" id="{1677619D-7282-DC33-8D24-5D6DF56E208C}"/>
+                <a16:creationId xmlns:a16="http://schemas.microsoft.com/office/drawing/2014/main" id="{999F86E2-F533-B021-7BEC-44B5C51B3BC1}"/>
               </a:ext>
             </a:extLst>
           </p:cNvPr>
@@ -3733,37 +3806,38 @@
           <a:p>
             <a:pPr lvl="0"/>
             <a:r>
-              <a:rPr lang="en-US"/>
+              <a:rPr lang="en-GB"/>
               <a:t>Click to edit Master text styles</a:t>
             </a:r>
           </a:p>
           <a:p>
             <a:pPr lvl="1"/>
             <a:r>
-              <a:rPr lang="en-US"/>
+              <a:rPr lang="en-GB"/>
               <a:t>Second level</a:t>
             </a:r>
           </a:p>
           <a:p>
             <a:pPr lvl="2"/>
             <a:r>
-              <a:rPr lang="en-US"/>
+              <a:rPr lang="en-GB"/>
               <a:t>Third level</a:t>
             </a:r>
           </a:p>
           <a:p>
             <a:pPr lvl="3"/>
             <a:r>
-              <a:rPr lang="en-US"/>
+              <a:rPr lang="en-GB"/>
               <a:t>Fourth level</a:t>
             </a:r>
           </a:p>
           <a:p>
             <a:pPr lvl="4"/>
             <a:r>
-              <a:rPr lang="en-US"/>
+              <a:rPr lang="en-GB"/>
               <a:t>Fifth level</a:t>
             </a:r>
+            <a:endParaRPr lang="en-NO"/>
           </a:p>
         </p:txBody>
       </p:sp>
@@ -3772,7 +3846,7 @@
           <p:cNvPr id="4" name="Content Placeholder 3">
             <a:extLst>
               <a:ext uri="{FF2B5EF4-FFF2-40B4-BE49-F238E27FC236}">
-                <a16:creationId xmlns:a16="http://schemas.microsoft.com/office/drawing/2014/main" id="{4112F70B-DDAB-0ED6-7AC5-498400D3B57B}"/>
+                <a16:creationId xmlns:a16="http://schemas.microsoft.com/office/drawing/2014/main" id="{0FC4F9B0-A736-A1BB-5878-1E3C4743535D}"/>
               </a:ext>
             </a:extLst>
           </p:cNvPr>
@@ -3795,37 +3869,38 @@
           <a:p>
             <a:pPr lvl="0"/>
             <a:r>
-              <a:rPr lang="en-US"/>
+              <a:rPr lang="en-GB"/>
               <a:t>Click to edit Master text styles</a:t>
             </a:r>
           </a:p>
           <a:p>
             <a:pPr lvl="1"/>
             <a:r>
-              <a:rPr lang="en-US"/>
+              <a:rPr lang="en-GB"/>
               <a:t>Second level</a:t>
             </a:r>
           </a:p>
           <a:p>
             <a:pPr lvl="2"/>
             <a:r>
-              <a:rPr lang="en-US"/>
+              <a:rPr lang="en-GB"/>
               <a:t>Third level</a:t>
             </a:r>
           </a:p>
           <a:p>
             <a:pPr lvl="3"/>
             <a:r>
-              <a:rPr lang="en-US"/>
+              <a:rPr lang="en-GB"/>
               <a:t>Fourth level</a:t>
             </a:r>
           </a:p>
           <a:p>
             <a:pPr lvl="4"/>
             <a:r>
-              <a:rPr lang="en-US"/>
+              <a:rPr lang="en-GB"/>
               <a:t>Fifth level</a:t>
             </a:r>
+            <a:endParaRPr lang="en-NO"/>
           </a:p>
         </p:txBody>
       </p:sp>
@@ -3834,7 +3909,7 @@
           <p:cNvPr id="5" name="Date Placeholder 4">
             <a:extLst>
               <a:ext uri="{FF2B5EF4-FFF2-40B4-BE49-F238E27FC236}">
-                <a16:creationId xmlns:a16="http://schemas.microsoft.com/office/drawing/2014/main" id="{B3F03CFE-477B-A1A2-F21B-6F0D93A9EB72}"/>
+                <a16:creationId xmlns:a16="http://schemas.microsoft.com/office/drawing/2014/main" id="{20772C37-5FD2-E400-7DD6-CE6231DB2794}"/>
               </a:ext>
             </a:extLst>
           </p:cNvPr>
@@ -3850,11 +3925,11 @@
           <a:bodyPr/>
           <a:lstStyle/>
           <a:p>
-            <a:fld id="{A40CF832-788C-4A30-A874-A72157BA0ED2}" type="datetimeFigureOut">
-              <a:rPr lang="en-US" smtClean="0"/>
-              <a:t>5/10/2025</a:t>
+            <a:fld id="{DD6EBC61-6493-6943-BFC0-FEDAB404CC17}" type="datetimeFigureOut">
+              <a:rPr lang="en-NO" smtClean="0"/>
+              <a:t>08/30/2025</a:t>
             </a:fld>
-            <a:endParaRPr lang="en-US"/>
+            <a:endParaRPr lang="en-NO"/>
           </a:p>
         </p:txBody>
       </p:sp>
@@ -3863,7 +3938,7 @@
           <p:cNvPr id="6" name="Footer Placeholder 5">
             <a:extLst>
               <a:ext uri="{FF2B5EF4-FFF2-40B4-BE49-F238E27FC236}">
-                <a16:creationId xmlns:a16="http://schemas.microsoft.com/office/drawing/2014/main" id="{45AD8EC1-5C61-A951-C40F-46F9849668F8}"/>
+                <a16:creationId xmlns:a16="http://schemas.microsoft.com/office/drawing/2014/main" id="{17469EB1-10F6-7AB2-3AA8-D96977872E1E}"/>
               </a:ext>
             </a:extLst>
           </p:cNvPr>
@@ -3879,7 +3954,7 @@
           <a:bodyPr/>
           <a:lstStyle/>
           <a:p>
-            <a:endParaRPr lang="en-US"/>
+            <a:endParaRPr lang="en-NO"/>
           </a:p>
         </p:txBody>
       </p:sp>
@@ -3888,7 +3963,7 @@
           <p:cNvPr id="7" name="Slide Number Placeholder 6">
             <a:extLst>
               <a:ext uri="{FF2B5EF4-FFF2-40B4-BE49-F238E27FC236}">
-                <a16:creationId xmlns:a16="http://schemas.microsoft.com/office/drawing/2014/main" id="{94B3A397-9A9C-DF8E-598F-4724E51B7396}"/>
+                <a16:creationId xmlns:a16="http://schemas.microsoft.com/office/drawing/2014/main" id="{5996596F-D125-3A93-2F55-CE3E319A86EC}"/>
               </a:ext>
             </a:extLst>
           </p:cNvPr>
@@ -3904,18 +3979,18 @@
           <a:bodyPr/>
           <a:lstStyle/>
           <a:p>
-            <a:fld id="{585491E3-9838-4B39-AEBF-3B863E6BCAE0}" type="slidenum">
-              <a:rPr lang="en-US" smtClean="0"/>
+            <a:fld id="{538158FF-A7DF-BF42-A1A6-DB8EC7A9882E}" type="slidenum">
+              <a:rPr lang="en-NO" smtClean="0"/>
               <a:t>‹#›</a:t>
             </a:fld>
-            <a:endParaRPr lang="en-US"/>
+            <a:endParaRPr lang="en-NO"/>
           </a:p>
         </p:txBody>
       </p:sp>
     </p:spTree>
     <p:extLst>
       <p:ext uri="{BB962C8B-B14F-4D97-AF65-F5344CB8AC3E}">
-        <p14:creationId xmlns:p14="http://schemas.microsoft.com/office/powerpoint/2010/main" val="1328175584"/>
+        <p14:creationId xmlns:p14="http://schemas.microsoft.com/office/powerpoint/2010/main" val="638078911"/>
       </p:ext>
     </p:extLst>
   </p:cSld>
@@ -3947,7 +4022,7 @@
           <p:cNvPr id="2" name="Title 1">
             <a:extLst>
               <a:ext uri="{FF2B5EF4-FFF2-40B4-BE49-F238E27FC236}">
-                <a16:creationId xmlns:a16="http://schemas.microsoft.com/office/drawing/2014/main" id="{82E72AAB-A70D-7001-CA13-45A1A72A0D46}"/>
+                <a16:creationId xmlns:a16="http://schemas.microsoft.com/office/drawing/2014/main" id="{F0F3BD46-B2DA-2FE6-4E3E-E569AAD4B666}"/>
               </a:ext>
             </a:extLst>
           </p:cNvPr>
@@ -3969,9 +4044,10 @@
           <a:lstStyle/>
           <a:p>
             <a:r>
-              <a:rPr lang="en-US"/>
+              <a:rPr lang="en-GB"/>
               <a:t>Click to edit Master title style</a:t>
             </a:r>
+            <a:endParaRPr lang="en-NO"/>
           </a:p>
         </p:txBody>
       </p:sp>
@@ -3980,7 +4056,7 @@
           <p:cNvPr id="3" name="Text Placeholder 2">
             <a:extLst>
               <a:ext uri="{FF2B5EF4-FFF2-40B4-BE49-F238E27FC236}">
-                <a16:creationId xmlns:a16="http://schemas.microsoft.com/office/drawing/2014/main" id="{25184B8F-87D7-2544-83F2-68167710230A}"/>
+                <a16:creationId xmlns:a16="http://schemas.microsoft.com/office/drawing/2014/main" id="{B9788DCE-CB1C-CF73-DEE2-0E162DD0B63F}"/>
               </a:ext>
             </a:extLst>
           </p:cNvPr>
@@ -4040,7 +4116,7 @@
           <a:p>
             <a:pPr lvl="0"/>
             <a:r>
-              <a:rPr lang="en-US"/>
+              <a:rPr lang="en-GB"/>
               <a:t>Click to edit Master text styles</a:t>
             </a:r>
           </a:p>
@@ -4051,7 +4127,7 @@
           <p:cNvPr id="4" name="Content Placeholder 3">
             <a:extLst>
               <a:ext uri="{FF2B5EF4-FFF2-40B4-BE49-F238E27FC236}">
-                <a16:creationId xmlns:a16="http://schemas.microsoft.com/office/drawing/2014/main" id="{07C12A0F-F411-514A-41B9-F24A67EE444B}"/>
+                <a16:creationId xmlns:a16="http://schemas.microsoft.com/office/drawing/2014/main" id="{FAB37499-7F8D-0C01-8709-E86D0AD17DC8}"/>
               </a:ext>
             </a:extLst>
           </p:cNvPr>
@@ -4074,37 +4150,38 @@
           <a:p>
             <a:pPr lvl="0"/>
             <a:r>
-              <a:rPr lang="en-US"/>
+              <a:rPr lang="en-GB"/>
               <a:t>Click to edit Master text styles</a:t>
             </a:r>
           </a:p>
           <a:p>
             <a:pPr lvl="1"/>
             <a:r>
-              <a:rPr lang="en-US"/>
+              <a:rPr lang="en-GB"/>
               <a:t>Second level</a:t>
             </a:r>
           </a:p>
           <a:p>
             <a:pPr lvl="2"/>
             <a:r>
-              <a:rPr lang="en-US"/>
+              <a:rPr lang="en-GB"/>
               <a:t>Third level</a:t>
             </a:r>
           </a:p>
           <a:p>
             <a:pPr lvl="3"/>
             <a:r>
-              <a:rPr lang="en-US"/>
+              <a:rPr lang="en-GB"/>
               <a:t>Fourth level</a:t>
             </a:r>
           </a:p>
           <a:p>
             <a:pPr lvl="4"/>
             <a:r>
-              <a:rPr lang="en-US"/>
+              <a:rPr lang="en-GB"/>
               <a:t>Fifth level</a:t>
             </a:r>
+            <a:endParaRPr lang="en-NO"/>
           </a:p>
         </p:txBody>
       </p:sp>
@@ -4113,7 +4190,7 @@
           <p:cNvPr id="5" name="Text Placeholder 4">
             <a:extLst>
               <a:ext uri="{FF2B5EF4-FFF2-40B4-BE49-F238E27FC236}">
-                <a16:creationId xmlns:a16="http://schemas.microsoft.com/office/drawing/2014/main" id="{72996525-1740-0EC3-BFE0-38FE8F3AD123}"/>
+                <a16:creationId xmlns:a16="http://schemas.microsoft.com/office/drawing/2014/main" id="{AE012BC1-ABA8-02B0-5E1B-DBAAB7EE3BBA}"/>
               </a:ext>
             </a:extLst>
           </p:cNvPr>
@@ -4173,7 +4250,7 @@
           <a:p>
             <a:pPr lvl="0"/>
             <a:r>
-              <a:rPr lang="en-US"/>
+              <a:rPr lang="en-GB"/>
               <a:t>Click to edit Master text styles</a:t>
             </a:r>
           </a:p>
@@ -4184,7 +4261,7 @@
           <p:cNvPr id="6" name="Content Placeholder 5">
             <a:extLst>
               <a:ext uri="{FF2B5EF4-FFF2-40B4-BE49-F238E27FC236}">
-                <a16:creationId xmlns:a16="http://schemas.microsoft.com/office/drawing/2014/main" id="{D883692C-E1BF-6155-0666-92A40A9CCBA3}"/>
+                <a16:creationId xmlns:a16="http://schemas.microsoft.com/office/drawing/2014/main" id="{D5C7B3B7-2053-CD19-12BB-23144DABC1EF}"/>
               </a:ext>
             </a:extLst>
           </p:cNvPr>
@@ -4207,37 +4284,38 @@
           <a:p>
             <a:pPr lvl="0"/>
             <a:r>
-              <a:rPr lang="en-US"/>
+              <a:rPr lang="en-GB"/>
               <a:t>Click to edit Master text styles</a:t>
             </a:r>
           </a:p>
           <a:p>
             <a:pPr lvl="1"/>
             <a:r>
-              <a:rPr lang="en-US"/>
+              <a:rPr lang="en-GB"/>
               <a:t>Second level</a:t>
             </a:r>
           </a:p>
           <a:p>
             <a:pPr lvl="2"/>
             <a:r>
-              <a:rPr lang="en-US"/>
+              <a:rPr lang="en-GB"/>
               <a:t>Third level</a:t>
             </a:r>
           </a:p>
           <a:p>
             <a:pPr lvl="3"/>
             <a:r>
-              <a:rPr lang="en-US"/>
+              <a:rPr lang="en-GB"/>
               <a:t>Fourth level</a:t>
             </a:r>
           </a:p>
           <a:p>
             <a:pPr lvl="4"/>
             <a:r>
-              <a:rPr lang="en-US"/>
+              <a:rPr lang="en-GB"/>
               <a:t>Fifth level</a:t>
             </a:r>
+            <a:endParaRPr lang="en-NO"/>
           </a:p>
         </p:txBody>
       </p:sp>
@@ -4246,7 +4324,7 @@
           <p:cNvPr id="7" name="Date Placeholder 6">
             <a:extLst>
               <a:ext uri="{FF2B5EF4-FFF2-40B4-BE49-F238E27FC236}">
-                <a16:creationId xmlns:a16="http://schemas.microsoft.com/office/drawing/2014/main" id="{88B14E80-8307-A854-8CB3-4497297BE3EC}"/>
+                <a16:creationId xmlns:a16="http://schemas.microsoft.com/office/drawing/2014/main" id="{5097BA41-FD5F-D012-37F1-1D013481D86B}"/>
               </a:ext>
             </a:extLst>
           </p:cNvPr>
@@ -4262,11 +4340,11 @@
           <a:bodyPr/>
           <a:lstStyle/>
           <a:p>
-            <a:fld id="{A40CF832-788C-4A30-A874-A72157BA0ED2}" type="datetimeFigureOut">
-              <a:rPr lang="en-US" smtClean="0"/>
-              <a:t>5/10/2025</a:t>
+            <a:fld id="{DD6EBC61-6493-6943-BFC0-FEDAB404CC17}" type="datetimeFigureOut">
+              <a:rPr lang="en-NO" smtClean="0"/>
+              <a:t>08/30/2025</a:t>
             </a:fld>
-            <a:endParaRPr lang="en-US"/>
+            <a:endParaRPr lang="en-NO"/>
           </a:p>
         </p:txBody>
       </p:sp>
@@ -4275,7 +4353,7 @@
           <p:cNvPr id="8" name="Footer Placeholder 7">
             <a:extLst>
               <a:ext uri="{FF2B5EF4-FFF2-40B4-BE49-F238E27FC236}">
-                <a16:creationId xmlns:a16="http://schemas.microsoft.com/office/drawing/2014/main" id="{37C69997-D89A-503A-2D29-EC2BE4923306}"/>
+                <a16:creationId xmlns:a16="http://schemas.microsoft.com/office/drawing/2014/main" id="{9107797C-737C-61AB-B45E-892A29DA2308}"/>
               </a:ext>
             </a:extLst>
           </p:cNvPr>
@@ -4291,7 +4369,7 @@
           <a:bodyPr/>
           <a:lstStyle/>
           <a:p>
-            <a:endParaRPr lang="en-US"/>
+            <a:endParaRPr lang="en-NO"/>
           </a:p>
         </p:txBody>
       </p:sp>
@@ -4300,7 +4378,7 @@
           <p:cNvPr id="9" name="Slide Number Placeholder 8">
             <a:extLst>
               <a:ext uri="{FF2B5EF4-FFF2-40B4-BE49-F238E27FC236}">
-                <a16:creationId xmlns:a16="http://schemas.microsoft.com/office/drawing/2014/main" id="{0AFCE766-4360-CD39-023D-6ABAD9576A9C}"/>
+                <a16:creationId xmlns:a16="http://schemas.microsoft.com/office/drawing/2014/main" id="{92FB60D1-81D5-CFE3-8454-2EF0052FA216}"/>
               </a:ext>
             </a:extLst>
           </p:cNvPr>
@@ -4316,18 +4394,18 @@
           <a:bodyPr/>
           <a:lstStyle/>
           <a:p>
-            <a:fld id="{585491E3-9838-4B39-AEBF-3B863E6BCAE0}" type="slidenum">
-              <a:rPr lang="en-US" smtClean="0"/>
+            <a:fld id="{538158FF-A7DF-BF42-A1A6-DB8EC7A9882E}" type="slidenum">
+              <a:rPr lang="en-NO" smtClean="0"/>
               <a:t>‹#›</a:t>
             </a:fld>
-            <a:endParaRPr lang="en-US"/>
+            <a:endParaRPr lang="en-NO"/>
           </a:p>
         </p:txBody>
       </p:sp>
     </p:spTree>
     <p:extLst>
       <p:ext uri="{BB962C8B-B14F-4D97-AF65-F5344CB8AC3E}">
-        <p14:creationId xmlns:p14="http://schemas.microsoft.com/office/powerpoint/2010/main" val="1445308030"/>
+        <p14:creationId xmlns:p14="http://schemas.microsoft.com/office/powerpoint/2010/main" val="3544486774"/>
       </p:ext>
     </p:extLst>
   </p:cSld>
@@ -4359,7 +4437,7 @@
           <p:cNvPr id="2" name="Title 1">
             <a:extLst>
               <a:ext uri="{FF2B5EF4-FFF2-40B4-BE49-F238E27FC236}">
-                <a16:creationId xmlns:a16="http://schemas.microsoft.com/office/drawing/2014/main" id="{74DE2385-1093-2183-F7B5-F3FB6E1B49CB}"/>
+                <a16:creationId xmlns:a16="http://schemas.microsoft.com/office/drawing/2014/main" id="{F046B01A-92A8-01CD-3EF4-48BE450788B5}"/>
               </a:ext>
             </a:extLst>
           </p:cNvPr>
@@ -4376,9 +4454,10 @@
           <a:lstStyle/>
           <a:p>
             <a:r>
-              <a:rPr lang="en-US"/>
+              <a:rPr lang="en-GB"/>
               <a:t>Click to edit Master title style</a:t>
             </a:r>
+            <a:endParaRPr lang="en-NO"/>
           </a:p>
         </p:txBody>
       </p:sp>
@@ -4387,7 +4466,7 @@
           <p:cNvPr id="3" name="Date Placeholder 2">
             <a:extLst>
               <a:ext uri="{FF2B5EF4-FFF2-40B4-BE49-F238E27FC236}">
-                <a16:creationId xmlns:a16="http://schemas.microsoft.com/office/drawing/2014/main" id="{AB87E04E-8382-5C5F-7DB9-9F85BA2ED324}"/>
+                <a16:creationId xmlns:a16="http://schemas.microsoft.com/office/drawing/2014/main" id="{D3D03904-975F-536D-6BBE-248696E485C1}"/>
               </a:ext>
             </a:extLst>
           </p:cNvPr>
@@ -4403,11 +4482,11 @@
           <a:bodyPr/>
           <a:lstStyle/>
           <a:p>
-            <a:fld id="{A40CF832-788C-4A30-A874-A72157BA0ED2}" type="datetimeFigureOut">
-              <a:rPr lang="en-US" smtClean="0"/>
-              <a:t>5/10/2025</a:t>
+            <a:fld id="{DD6EBC61-6493-6943-BFC0-FEDAB404CC17}" type="datetimeFigureOut">
+              <a:rPr lang="en-NO" smtClean="0"/>
+              <a:t>08/30/2025</a:t>
             </a:fld>
-            <a:endParaRPr lang="en-US"/>
+            <a:endParaRPr lang="en-NO"/>
           </a:p>
         </p:txBody>
       </p:sp>
@@ -4416,7 +4495,7 @@
           <p:cNvPr id="4" name="Footer Placeholder 3">
             <a:extLst>
               <a:ext uri="{FF2B5EF4-FFF2-40B4-BE49-F238E27FC236}">
-                <a16:creationId xmlns:a16="http://schemas.microsoft.com/office/drawing/2014/main" id="{2AB74B82-B851-9186-2A46-4C8AAA938E24}"/>
+                <a16:creationId xmlns:a16="http://schemas.microsoft.com/office/drawing/2014/main" id="{A394E7DD-991E-8A33-418C-74A555DC48E2}"/>
               </a:ext>
             </a:extLst>
           </p:cNvPr>
@@ -4432,7 +4511,7 @@
           <a:bodyPr/>
           <a:lstStyle/>
           <a:p>
-            <a:endParaRPr lang="en-US"/>
+            <a:endParaRPr lang="en-NO"/>
           </a:p>
         </p:txBody>
       </p:sp>
@@ -4441,7 +4520,7 @@
           <p:cNvPr id="5" name="Slide Number Placeholder 4">
             <a:extLst>
               <a:ext uri="{FF2B5EF4-FFF2-40B4-BE49-F238E27FC236}">
-                <a16:creationId xmlns:a16="http://schemas.microsoft.com/office/drawing/2014/main" id="{9FE9DDB3-5810-FF9D-7E20-A9CFA7ADBA82}"/>
+                <a16:creationId xmlns:a16="http://schemas.microsoft.com/office/drawing/2014/main" id="{FE5CC7F7-2F46-6D7B-F0C3-BFD6FC0048E1}"/>
               </a:ext>
             </a:extLst>
           </p:cNvPr>
@@ -4457,18 +4536,18 @@
           <a:bodyPr/>
           <a:lstStyle/>
           <a:p>
-            <a:fld id="{585491E3-9838-4B39-AEBF-3B863E6BCAE0}" type="slidenum">
-              <a:rPr lang="en-US" smtClean="0"/>
+            <a:fld id="{538158FF-A7DF-BF42-A1A6-DB8EC7A9882E}" type="slidenum">
+              <a:rPr lang="en-NO" smtClean="0"/>
               <a:t>‹#›</a:t>
             </a:fld>
-            <a:endParaRPr lang="en-US"/>
+            <a:endParaRPr lang="en-NO"/>
           </a:p>
         </p:txBody>
       </p:sp>
     </p:spTree>
     <p:extLst>
       <p:ext uri="{BB962C8B-B14F-4D97-AF65-F5344CB8AC3E}">
-        <p14:creationId xmlns:p14="http://schemas.microsoft.com/office/powerpoint/2010/main" val="4013479975"/>
+        <p14:creationId xmlns:p14="http://schemas.microsoft.com/office/powerpoint/2010/main" val="1122354990"/>
       </p:ext>
     </p:extLst>
   </p:cSld>
@@ -4500,7 +4579,7 @@
           <p:cNvPr id="2" name="Date Placeholder 1">
             <a:extLst>
               <a:ext uri="{FF2B5EF4-FFF2-40B4-BE49-F238E27FC236}">
-                <a16:creationId xmlns:a16="http://schemas.microsoft.com/office/drawing/2014/main" id="{EC827F9E-8A0B-70A9-5DE0-65D8B30E90F6}"/>
+                <a16:creationId xmlns:a16="http://schemas.microsoft.com/office/drawing/2014/main" id="{4BEE5288-F0A3-F9CB-F7E5-66B81BB59CE3}"/>
               </a:ext>
             </a:extLst>
           </p:cNvPr>
@@ -4516,11 +4595,11 @@
           <a:bodyPr/>
           <a:lstStyle/>
           <a:p>
-            <a:fld id="{A40CF832-788C-4A30-A874-A72157BA0ED2}" type="datetimeFigureOut">
-              <a:rPr lang="en-US" smtClean="0"/>
-              <a:t>5/10/2025</a:t>
+            <a:fld id="{DD6EBC61-6493-6943-BFC0-FEDAB404CC17}" type="datetimeFigureOut">
+              <a:rPr lang="en-NO" smtClean="0"/>
+              <a:t>08/30/2025</a:t>
             </a:fld>
-            <a:endParaRPr lang="en-US"/>
+            <a:endParaRPr lang="en-NO"/>
           </a:p>
         </p:txBody>
       </p:sp>
@@ -4529,7 +4608,7 @@
           <p:cNvPr id="3" name="Footer Placeholder 2">
             <a:extLst>
               <a:ext uri="{FF2B5EF4-FFF2-40B4-BE49-F238E27FC236}">
-                <a16:creationId xmlns:a16="http://schemas.microsoft.com/office/drawing/2014/main" id="{5B481B6D-E527-6F1D-CA4F-864D4F8946B2}"/>
+                <a16:creationId xmlns:a16="http://schemas.microsoft.com/office/drawing/2014/main" id="{E348B219-3E8B-3320-CAAF-5EFBBB4E70AD}"/>
               </a:ext>
             </a:extLst>
           </p:cNvPr>
@@ -4545,7 +4624,7 @@
           <a:bodyPr/>
           <a:lstStyle/>
           <a:p>
-            <a:endParaRPr lang="en-US"/>
+            <a:endParaRPr lang="en-NO"/>
           </a:p>
         </p:txBody>
       </p:sp>
@@ -4554,7 +4633,7 @@
           <p:cNvPr id="4" name="Slide Number Placeholder 3">
             <a:extLst>
               <a:ext uri="{FF2B5EF4-FFF2-40B4-BE49-F238E27FC236}">
-                <a16:creationId xmlns:a16="http://schemas.microsoft.com/office/drawing/2014/main" id="{89DE466B-B7D4-CDBF-0DC2-D36B30638A4F}"/>
+                <a16:creationId xmlns:a16="http://schemas.microsoft.com/office/drawing/2014/main" id="{71193DAA-AD53-7489-568C-005EAEFF1C33}"/>
               </a:ext>
             </a:extLst>
           </p:cNvPr>
@@ -4570,18 +4649,18 @@
           <a:bodyPr/>
           <a:lstStyle/>
           <a:p>
-            <a:fld id="{585491E3-9838-4B39-AEBF-3B863E6BCAE0}" type="slidenum">
-              <a:rPr lang="en-US" smtClean="0"/>
+            <a:fld id="{538158FF-A7DF-BF42-A1A6-DB8EC7A9882E}" type="slidenum">
+              <a:rPr lang="en-NO" smtClean="0"/>
               <a:t>‹#›</a:t>
             </a:fld>
-            <a:endParaRPr lang="en-US"/>
+            <a:endParaRPr lang="en-NO"/>
           </a:p>
         </p:txBody>
       </p:sp>
     </p:spTree>
     <p:extLst>
       <p:ext uri="{BB962C8B-B14F-4D97-AF65-F5344CB8AC3E}">
-        <p14:creationId xmlns:p14="http://schemas.microsoft.com/office/powerpoint/2010/main" val="1322768652"/>
+        <p14:creationId xmlns:p14="http://schemas.microsoft.com/office/powerpoint/2010/main" val="3649111161"/>
       </p:ext>
     </p:extLst>
   </p:cSld>
@@ -4613,7 +4692,7 @@
           <p:cNvPr id="2" name="Title 1">
             <a:extLst>
               <a:ext uri="{FF2B5EF4-FFF2-40B4-BE49-F238E27FC236}">
-                <a16:creationId xmlns:a16="http://schemas.microsoft.com/office/drawing/2014/main" id="{9B5095B8-D80B-1AAD-7703-5CE2154C90F8}"/>
+                <a16:creationId xmlns:a16="http://schemas.microsoft.com/office/drawing/2014/main" id="{E71E6ED0-08DB-00E8-AE01-79ECEEC5B3F0}"/>
               </a:ext>
             </a:extLst>
           </p:cNvPr>
@@ -4639,9 +4718,10 @@
           </a:lstStyle>
           <a:p>
             <a:r>
-              <a:rPr lang="en-US"/>
+              <a:rPr lang="en-GB"/>
               <a:t>Click to edit Master title style</a:t>
             </a:r>
+            <a:endParaRPr lang="en-NO"/>
           </a:p>
         </p:txBody>
       </p:sp>
@@ -4650,7 +4730,7 @@
           <p:cNvPr id="3" name="Content Placeholder 2">
             <a:extLst>
               <a:ext uri="{FF2B5EF4-FFF2-40B4-BE49-F238E27FC236}">
-                <a16:creationId xmlns:a16="http://schemas.microsoft.com/office/drawing/2014/main" id="{6AB2E391-EB7D-CB6C-5398-07D39544129F}"/>
+                <a16:creationId xmlns:a16="http://schemas.microsoft.com/office/drawing/2014/main" id="{3F23DD02-C41B-3B83-F9A3-F468F9FABA35}"/>
               </a:ext>
             </a:extLst>
           </p:cNvPr>
@@ -4701,37 +4781,38 @@
           <a:p>
             <a:pPr lvl="0"/>
             <a:r>
-              <a:rPr lang="en-US"/>
+              <a:rPr lang="en-GB"/>
               <a:t>Click to edit Master text styles</a:t>
             </a:r>
           </a:p>
           <a:p>
             <a:pPr lvl="1"/>
             <a:r>
-              <a:rPr lang="en-US"/>
+              <a:rPr lang="en-GB"/>
               <a:t>Second level</a:t>
             </a:r>
           </a:p>
           <a:p>
             <a:pPr lvl="2"/>
             <a:r>
-              <a:rPr lang="en-US"/>
+              <a:rPr lang="en-GB"/>
               <a:t>Third level</a:t>
             </a:r>
           </a:p>
           <a:p>
             <a:pPr lvl="3"/>
             <a:r>
-              <a:rPr lang="en-US"/>
+              <a:rPr lang="en-GB"/>
               <a:t>Fourth level</a:t>
             </a:r>
           </a:p>
           <a:p>
             <a:pPr lvl="4"/>
             <a:r>
-              <a:rPr lang="en-US"/>
+              <a:rPr lang="en-GB"/>
               <a:t>Fifth level</a:t>
             </a:r>
+            <a:endParaRPr lang="en-NO"/>
           </a:p>
         </p:txBody>
       </p:sp>
@@ -4740,7 +4821,7 @@
           <p:cNvPr id="4" name="Text Placeholder 3">
             <a:extLst>
               <a:ext uri="{FF2B5EF4-FFF2-40B4-BE49-F238E27FC236}">
-                <a16:creationId xmlns:a16="http://schemas.microsoft.com/office/drawing/2014/main" id="{12E6B379-D720-CF16-ED19-9AAE4F7A1281}"/>
+                <a16:creationId xmlns:a16="http://schemas.microsoft.com/office/drawing/2014/main" id="{8C135E61-918F-3C45-F118-392A2BC8AAD1}"/>
               </a:ext>
             </a:extLst>
           </p:cNvPr>
@@ -4800,7 +4881,7 @@
           <a:p>
             <a:pPr lvl="0"/>
             <a:r>
-              <a:rPr lang="en-US"/>
+              <a:rPr lang="en-GB"/>
               <a:t>Click to edit Master text styles</a:t>
             </a:r>
           </a:p>
@@ -4811,7 +4892,7 @@
           <p:cNvPr id="5" name="Date Placeholder 4">
             <a:extLst>
               <a:ext uri="{FF2B5EF4-FFF2-40B4-BE49-F238E27FC236}">
-                <a16:creationId xmlns:a16="http://schemas.microsoft.com/office/drawing/2014/main" id="{C1186FFA-01E2-73C0-2AD5-12E1AFA21309}"/>
+                <a16:creationId xmlns:a16="http://schemas.microsoft.com/office/drawing/2014/main" id="{4F5A81E5-F2D3-4795-6537-E9665DE32328}"/>
               </a:ext>
             </a:extLst>
           </p:cNvPr>
@@ -4827,11 +4908,11 @@
           <a:bodyPr/>
           <a:lstStyle/>
           <a:p>
-            <a:fld id="{A40CF832-788C-4A30-A874-A72157BA0ED2}" type="datetimeFigureOut">
-              <a:rPr lang="en-US" smtClean="0"/>
-              <a:t>5/10/2025</a:t>
+            <a:fld id="{DD6EBC61-6493-6943-BFC0-FEDAB404CC17}" type="datetimeFigureOut">
+              <a:rPr lang="en-NO" smtClean="0"/>
+              <a:t>08/30/2025</a:t>
             </a:fld>
-            <a:endParaRPr lang="en-US"/>
+            <a:endParaRPr lang="en-NO"/>
           </a:p>
         </p:txBody>
       </p:sp>
@@ -4840,7 +4921,7 @@
           <p:cNvPr id="6" name="Footer Placeholder 5">
             <a:extLst>
               <a:ext uri="{FF2B5EF4-FFF2-40B4-BE49-F238E27FC236}">
-                <a16:creationId xmlns:a16="http://schemas.microsoft.com/office/drawing/2014/main" id="{CA104D07-2FFB-0FE6-3B11-3608BF680DA4}"/>
+                <a16:creationId xmlns:a16="http://schemas.microsoft.com/office/drawing/2014/main" id="{66F95264-43C8-CB4C-D04F-7F40F33ABEB2}"/>
               </a:ext>
             </a:extLst>
           </p:cNvPr>
@@ -4856,7 +4937,7 @@
           <a:bodyPr/>
           <a:lstStyle/>
           <a:p>
-            <a:endParaRPr lang="en-US"/>
+            <a:endParaRPr lang="en-NO"/>
           </a:p>
         </p:txBody>
       </p:sp>
@@ -4865,7 +4946,7 @@
           <p:cNvPr id="7" name="Slide Number Placeholder 6">
             <a:extLst>
               <a:ext uri="{FF2B5EF4-FFF2-40B4-BE49-F238E27FC236}">
-                <a16:creationId xmlns:a16="http://schemas.microsoft.com/office/drawing/2014/main" id="{1F5A4AD7-6E95-C824-857F-4247F2341426}"/>
+                <a16:creationId xmlns:a16="http://schemas.microsoft.com/office/drawing/2014/main" id="{FF52CCD9-BAAC-E2B0-F364-19B9ACDE5925}"/>
               </a:ext>
             </a:extLst>
           </p:cNvPr>
@@ -4881,18 +4962,18 @@
           <a:bodyPr/>
           <a:lstStyle/>
           <a:p>
-            <a:fld id="{585491E3-9838-4B39-AEBF-3B863E6BCAE0}" type="slidenum">
-              <a:rPr lang="en-US" smtClean="0"/>
+            <a:fld id="{538158FF-A7DF-BF42-A1A6-DB8EC7A9882E}" type="slidenum">
+              <a:rPr lang="en-NO" smtClean="0"/>
               <a:t>‹#›</a:t>
             </a:fld>
-            <a:endParaRPr lang="en-US"/>
+            <a:endParaRPr lang="en-NO"/>
           </a:p>
         </p:txBody>
       </p:sp>
     </p:spTree>
     <p:extLst>
       <p:ext uri="{BB962C8B-B14F-4D97-AF65-F5344CB8AC3E}">
-        <p14:creationId xmlns:p14="http://schemas.microsoft.com/office/powerpoint/2010/main" val="1895663295"/>
+        <p14:creationId xmlns:p14="http://schemas.microsoft.com/office/powerpoint/2010/main" val="151198004"/>
       </p:ext>
     </p:extLst>
   </p:cSld>
@@ -4924,7 +5005,7 @@
           <p:cNvPr id="2" name="Title 1">
             <a:extLst>
               <a:ext uri="{FF2B5EF4-FFF2-40B4-BE49-F238E27FC236}">
-                <a16:creationId xmlns:a16="http://schemas.microsoft.com/office/drawing/2014/main" id="{9C819ABC-2F1D-BA90-E5A5-10CD9A9FBED4}"/>
+                <a16:creationId xmlns:a16="http://schemas.microsoft.com/office/drawing/2014/main" id="{FA8C2248-12FC-D658-16F1-6F8A2381FA18}"/>
               </a:ext>
             </a:extLst>
           </p:cNvPr>
@@ -4950,9 +5031,10 @@
           </a:lstStyle>
           <a:p>
             <a:r>
-              <a:rPr lang="en-US"/>
+              <a:rPr lang="en-GB"/>
               <a:t>Click to edit Master title style</a:t>
             </a:r>
+            <a:endParaRPr lang="en-NO"/>
           </a:p>
         </p:txBody>
       </p:sp>
@@ -4961,7 +5043,7 @@
           <p:cNvPr id="3" name="Picture Placeholder 2">
             <a:extLst>
               <a:ext uri="{FF2B5EF4-FFF2-40B4-BE49-F238E27FC236}">
-                <a16:creationId xmlns:a16="http://schemas.microsoft.com/office/drawing/2014/main" id="{88E4A561-6E11-14E0-D957-5331D733C184}"/>
+                <a16:creationId xmlns:a16="http://schemas.microsoft.com/office/drawing/2014/main" id="{EB37C41A-A1F7-4E7C-4C04-D995969900D7}"/>
               </a:ext>
             </a:extLst>
           </p:cNvPr>
@@ -5019,7 +5101,7 @@
             </a:lvl9pPr>
           </a:lstStyle>
           <a:p>
-            <a:endParaRPr lang="en-US"/>
+            <a:endParaRPr lang="en-NO"/>
           </a:p>
         </p:txBody>
       </p:sp>
@@ -5028,7 +5110,7 @@
           <p:cNvPr id="4" name="Text Placeholder 3">
             <a:extLst>
               <a:ext uri="{FF2B5EF4-FFF2-40B4-BE49-F238E27FC236}">
-                <a16:creationId xmlns:a16="http://schemas.microsoft.com/office/drawing/2014/main" id="{913C73B7-26AF-DCA4-45CA-813AB4BE2D7F}"/>
+                <a16:creationId xmlns:a16="http://schemas.microsoft.com/office/drawing/2014/main" id="{2F0696B0-C746-B4A6-1F99-D51A5217F402}"/>
               </a:ext>
             </a:extLst>
           </p:cNvPr>
@@ -5088,7 +5170,7 @@
           <a:p>
             <a:pPr lvl="0"/>
             <a:r>
-              <a:rPr lang="en-US"/>
+              <a:rPr lang="en-GB"/>
               <a:t>Click to edit Master text styles</a:t>
             </a:r>
           </a:p>
@@ -5099,7 +5181,7 @@
           <p:cNvPr id="5" name="Date Placeholder 4">
             <a:extLst>
               <a:ext uri="{FF2B5EF4-FFF2-40B4-BE49-F238E27FC236}">
-                <a16:creationId xmlns:a16="http://schemas.microsoft.com/office/drawing/2014/main" id="{2DB3DD63-B60F-F425-C1DC-530E1DEA2047}"/>
+                <a16:creationId xmlns:a16="http://schemas.microsoft.com/office/drawing/2014/main" id="{BBE135C5-5369-8F43-0FDA-FFC61CE44409}"/>
               </a:ext>
             </a:extLst>
           </p:cNvPr>
@@ -5115,11 +5197,11 @@
           <a:bodyPr/>
           <a:lstStyle/>
           <a:p>
-            <a:fld id="{A40CF832-788C-4A30-A874-A72157BA0ED2}" type="datetimeFigureOut">
-              <a:rPr lang="en-US" smtClean="0"/>
-              <a:t>5/10/2025</a:t>
+            <a:fld id="{DD6EBC61-6493-6943-BFC0-FEDAB404CC17}" type="datetimeFigureOut">
+              <a:rPr lang="en-NO" smtClean="0"/>
+              <a:t>08/30/2025</a:t>
             </a:fld>
-            <a:endParaRPr lang="en-US"/>
+            <a:endParaRPr lang="en-NO"/>
           </a:p>
         </p:txBody>
       </p:sp>
@@ -5128,7 +5210,7 @@
           <p:cNvPr id="6" name="Footer Placeholder 5">
             <a:extLst>
               <a:ext uri="{FF2B5EF4-FFF2-40B4-BE49-F238E27FC236}">
-                <a16:creationId xmlns:a16="http://schemas.microsoft.com/office/drawing/2014/main" id="{47B57511-41B3-BD3F-4EE0-A5E16FA1E6B3}"/>
+                <a16:creationId xmlns:a16="http://schemas.microsoft.com/office/drawing/2014/main" id="{F1144886-AB42-A3B9-3A4C-34A7EC7F8E7D}"/>
               </a:ext>
             </a:extLst>
           </p:cNvPr>
@@ -5144,7 +5226,7 @@
           <a:bodyPr/>
           <a:lstStyle/>
           <a:p>
-            <a:endParaRPr lang="en-US"/>
+            <a:endParaRPr lang="en-NO"/>
           </a:p>
         </p:txBody>
       </p:sp>
@@ -5153,7 +5235,7 @@
           <p:cNvPr id="7" name="Slide Number Placeholder 6">
             <a:extLst>
               <a:ext uri="{FF2B5EF4-FFF2-40B4-BE49-F238E27FC236}">
-                <a16:creationId xmlns:a16="http://schemas.microsoft.com/office/drawing/2014/main" id="{AACE1EF5-6030-20DB-35E0-72910A719F5A}"/>
+                <a16:creationId xmlns:a16="http://schemas.microsoft.com/office/drawing/2014/main" id="{E536630B-E468-4C4E-8D09-D62654DF9C2C}"/>
               </a:ext>
             </a:extLst>
           </p:cNvPr>
@@ -5169,18 +5251,18 @@
           <a:bodyPr/>
           <a:lstStyle/>
           <a:p>
-            <a:fld id="{585491E3-9838-4B39-AEBF-3B863E6BCAE0}" type="slidenum">
-              <a:rPr lang="en-US" smtClean="0"/>
+            <a:fld id="{538158FF-A7DF-BF42-A1A6-DB8EC7A9882E}" type="slidenum">
+              <a:rPr lang="en-NO" smtClean="0"/>
               <a:t>‹#›</a:t>
             </a:fld>
-            <a:endParaRPr lang="en-US"/>
+            <a:endParaRPr lang="en-NO"/>
           </a:p>
         </p:txBody>
       </p:sp>
     </p:spTree>
     <p:extLst>
       <p:ext uri="{BB962C8B-B14F-4D97-AF65-F5344CB8AC3E}">
-        <p14:creationId xmlns:p14="http://schemas.microsoft.com/office/powerpoint/2010/main" val="3200418133"/>
+        <p14:creationId xmlns:p14="http://schemas.microsoft.com/office/powerpoint/2010/main" val="3817559804"/>
       </p:ext>
     </p:extLst>
   </p:cSld>
@@ -5212,7 +5294,7 @@
           <p:cNvPr id="2" name="Title 1">
             <a:extLst>
               <a:ext uri="{FF2B5EF4-FFF2-40B4-BE49-F238E27FC236}">
-                <a16:creationId xmlns:a16="http://schemas.microsoft.com/office/drawing/2014/main" id="{011435EC-D673-8992-CBA5-90014B3A1314}"/>
+                <a16:creationId xmlns:a16="http://schemas.microsoft.com/office/drawing/2014/main" id="{D2877DDE-E58A-F882-5693-3677113E5CE4}"/>
               </a:ext>
             </a:extLst>
           </p:cNvPr>
@@ -5229,9 +5311,10 @@
           <a:lstStyle/>
           <a:p>
             <a:r>
-              <a:rPr lang="en-US"/>
+              <a:rPr lang="en-GB"/>
               <a:t>Click to edit Master title style</a:t>
             </a:r>
+            <a:endParaRPr lang="en-NO"/>
           </a:p>
         </p:txBody>
       </p:sp>
@@ -5240,7 +5323,7 @@
           <p:cNvPr id="3" name="Vertical Text Placeholder 2">
             <a:extLst>
               <a:ext uri="{FF2B5EF4-FFF2-40B4-BE49-F238E27FC236}">
-                <a16:creationId xmlns:a16="http://schemas.microsoft.com/office/drawing/2014/main" id="{654B72E5-3BAD-22D3-AE08-4569AEBA7949}"/>
+                <a16:creationId xmlns:a16="http://schemas.microsoft.com/office/drawing/2014/main" id="{AE2F361E-C12C-1A89-8474-308A975570FB}"/>
               </a:ext>
             </a:extLst>
           </p:cNvPr>
@@ -5258,37 +5341,38 @@
           <a:p>
             <a:pPr lvl="0"/>
             <a:r>
-              <a:rPr lang="en-US"/>
+              <a:rPr lang="en-GB"/>
               <a:t>Click to edit Master text styles</a:t>
             </a:r>
           </a:p>
           <a:p>
             <a:pPr lvl="1"/>
             <a:r>
-              <a:rPr lang="en-US"/>
+              <a:rPr lang="en-GB"/>
               <a:t>Second level</a:t>
             </a:r>
           </a:p>
           <a:p>
             <a:pPr lvl="2"/>
             <a:r>
-              <a:rPr lang="en-US"/>
+              <a:rPr lang="en-GB"/>
               <a:t>Third level</a:t>
             </a:r>
           </a:p>
           <a:p>
             <a:pPr lvl="3"/>
             <a:r>
-              <a:rPr lang="en-US"/>
+              <a:rPr lang="en-GB"/>
               <a:t>Fourth level</a:t>
             </a:r>
           </a:p>
           <a:p>
             <a:pPr lvl="4"/>
             <a:r>
-              <a:rPr lang="en-US"/>
+              <a:rPr lang="en-GB"/>
               <a:t>Fifth level</a:t>
             </a:r>
+            <a:endParaRPr lang="en-NO"/>
           </a:p>
         </p:txBody>
       </p:sp>
@@ -5297,7 +5381,7 @@
           <p:cNvPr id="4" name="Date Placeholder 3">
             <a:extLst>
               <a:ext uri="{FF2B5EF4-FFF2-40B4-BE49-F238E27FC236}">
-                <a16:creationId xmlns:a16="http://schemas.microsoft.com/office/drawing/2014/main" id="{5E34BD88-BB31-3027-6D5E-53A842B1DEBC}"/>
+                <a16:creationId xmlns:a16="http://schemas.microsoft.com/office/drawing/2014/main" id="{7578D924-1BC5-D794-4DD9-1FAA004DDC79}"/>
               </a:ext>
             </a:extLst>
           </p:cNvPr>
@@ -5313,11 +5397,11 @@
           <a:bodyPr/>
           <a:lstStyle/>
           <a:p>
-            <a:fld id="{A40CF832-788C-4A30-A874-A72157BA0ED2}" type="datetimeFigureOut">
-              <a:rPr lang="en-US" smtClean="0"/>
-              <a:t>5/10/2025</a:t>
+            <a:fld id="{DD6EBC61-6493-6943-BFC0-FEDAB404CC17}" type="datetimeFigureOut">
+              <a:rPr lang="en-NO" smtClean="0"/>
+              <a:t>08/30/2025</a:t>
             </a:fld>
-            <a:endParaRPr lang="en-US"/>
+            <a:endParaRPr lang="en-NO"/>
           </a:p>
         </p:txBody>
       </p:sp>
@@ -5326,7 +5410,7 @@
           <p:cNvPr id="5" name="Footer Placeholder 4">
             <a:extLst>
               <a:ext uri="{FF2B5EF4-FFF2-40B4-BE49-F238E27FC236}">
-                <a16:creationId xmlns:a16="http://schemas.microsoft.com/office/drawing/2014/main" id="{9CA81009-507C-30DD-B462-C2E752D85888}"/>
+                <a16:creationId xmlns:a16="http://schemas.microsoft.com/office/drawing/2014/main" id="{CD5C02EF-4417-C4C2-C048-B050F740401D}"/>
               </a:ext>
             </a:extLst>
           </p:cNvPr>
@@ -5342,7 +5426,7 @@
           <a:bodyPr/>
           <a:lstStyle/>
           <a:p>
-            <a:endParaRPr lang="en-US"/>
+            <a:endParaRPr lang="en-NO"/>
           </a:p>
         </p:txBody>
       </p:sp>
@@ -5351,7 +5435,7 @@
           <p:cNvPr id="6" name="Slide Number Placeholder 5">
             <a:extLst>
               <a:ext uri="{FF2B5EF4-FFF2-40B4-BE49-F238E27FC236}">
-                <a16:creationId xmlns:a16="http://schemas.microsoft.com/office/drawing/2014/main" id="{E0531FC5-4127-84E0-5708-29DBFECB3E2E}"/>
+                <a16:creationId xmlns:a16="http://schemas.microsoft.com/office/drawing/2014/main" id="{BCAAB4C4-4F2F-E306-3D2A-E703AA693A0F}"/>
               </a:ext>
             </a:extLst>
           </p:cNvPr>
@@ -5367,18 +5451,18 @@
           <a:bodyPr/>
           <a:lstStyle/>
           <a:p>
-            <a:fld id="{585491E3-9838-4B39-AEBF-3B863E6BCAE0}" type="slidenum">
-              <a:rPr lang="en-US" smtClean="0"/>
+            <a:fld id="{538158FF-A7DF-BF42-A1A6-DB8EC7A9882E}" type="slidenum">
+              <a:rPr lang="en-NO" smtClean="0"/>
               <a:t>‹#›</a:t>
             </a:fld>
-            <a:endParaRPr lang="en-US"/>
+            <a:endParaRPr lang="en-NO"/>
           </a:p>
         </p:txBody>
       </p:sp>
     </p:spTree>
     <p:extLst>
       <p:ext uri="{BB962C8B-B14F-4D97-AF65-F5344CB8AC3E}">
-        <p14:creationId xmlns:p14="http://schemas.microsoft.com/office/powerpoint/2010/main" val="2341850142"/>
+        <p14:creationId xmlns:p14="http://schemas.microsoft.com/office/powerpoint/2010/main" val="4271846649"/>
       </p:ext>
     </p:extLst>
   </p:cSld>
@@ -5410,7 +5494,7 @@
           <p:cNvPr id="2" name="Vertical Title 1">
             <a:extLst>
               <a:ext uri="{FF2B5EF4-FFF2-40B4-BE49-F238E27FC236}">
-                <a16:creationId xmlns:a16="http://schemas.microsoft.com/office/drawing/2014/main" id="{F9F56996-EB65-BAF7-64EC-6948A4F34190}"/>
+                <a16:creationId xmlns:a16="http://schemas.microsoft.com/office/drawing/2014/main" id="{AFAD423F-7794-68D0-A867-145334D83D91}"/>
               </a:ext>
             </a:extLst>
           </p:cNvPr>
@@ -5432,9 +5516,10 @@
           <a:lstStyle/>
           <a:p>
             <a:r>
-              <a:rPr lang="en-US"/>
+              <a:rPr lang="en-GB"/>
               <a:t>Click to edit Master title style</a:t>
             </a:r>
+            <a:endParaRPr lang="en-NO"/>
           </a:p>
         </p:txBody>
       </p:sp>
@@ -5443,7 +5528,7 @@
           <p:cNvPr id="3" name="Vertical Text Placeholder 2">
             <a:extLst>
               <a:ext uri="{FF2B5EF4-FFF2-40B4-BE49-F238E27FC236}">
-                <a16:creationId xmlns:a16="http://schemas.microsoft.com/office/drawing/2014/main" id="{88BC782F-36B1-0499-A1AC-3336563C22F2}"/>
+                <a16:creationId xmlns:a16="http://schemas.microsoft.com/office/drawing/2014/main" id="{CC947388-7409-506A-8002-B8ED97FD4CC4}"/>
               </a:ext>
             </a:extLst>
           </p:cNvPr>
@@ -5466,37 +5551,38 @@
           <a:p>
             <a:pPr lvl="0"/>
             <a:r>
-              <a:rPr lang="en-US"/>
+              <a:rPr lang="en-GB"/>
               <a:t>Click to edit Master text styles</a:t>
             </a:r>
           </a:p>
           <a:p>
             <a:pPr lvl="1"/>
             <a:r>
-              <a:rPr lang="en-US"/>
+              <a:rPr lang="en-GB"/>
               <a:t>Second level</a:t>
             </a:r>
           </a:p>
           <a:p>
             <a:pPr lvl="2"/>
             <a:r>
-              <a:rPr lang="en-US"/>
+              <a:rPr lang="en-GB"/>
               <a:t>Third level</a:t>
             </a:r>
           </a:p>
           <a:p>
             <a:pPr lvl="3"/>
             <a:r>
-              <a:rPr lang="en-US"/>
+              <a:rPr lang="en-GB"/>
               <a:t>Fourth level</a:t>
             </a:r>
           </a:p>
           <a:p>
             <a:pPr lvl="4"/>
             <a:r>
-              <a:rPr lang="en-US"/>
+              <a:rPr lang="en-GB"/>
               <a:t>Fifth level</a:t>
             </a:r>
+            <a:endParaRPr lang="en-NO"/>
           </a:p>
         </p:txBody>
       </p:sp>
@@ -5505,7 +5591,7 @@
           <p:cNvPr id="4" name="Date Placeholder 3">
             <a:extLst>
               <a:ext uri="{FF2B5EF4-FFF2-40B4-BE49-F238E27FC236}">
-                <a16:creationId xmlns:a16="http://schemas.microsoft.com/office/drawing/2014/main" id="{A2D27777-04BC-7800-8D87-2EDA773B03E8}"/>
+                <a16:creationId xmlns:a16="http://schemas.microsoft.com/office/drawing/2014/main" id="{887B418C-4E65-3506-2DF6-699A7A50616D}"/>
               </a:ext>
             </a:extLst>
           </p:cNvPr>
@@ -5521,11 +5607,11 @@
           <a:bodyPr/>
           <a:lstStyle/>
           <a:p>
-            <a:fld id="{A40CF832-788C-4A30-A874-A72157BA0ED2}" type="datetimeFigureOut">
-              <a:rPr lang="en-US" smtClean="0"/>
-              <a:t>5/10/2025</a:t>
+            <a:fld id="{DD6EBC61-6493-6943-BFC0-FEDAB404CC17}" type="datetimeFigureOut">
+              <a:rPr lang="en-NO" smtClean="0"/>
+              <a:t>08/30/2025</a:t>
             </a:fld>
-            <a:endParaRPr lang="en-US"/>
+            <a:endParaRPr lang="en-NO"/>
           </a:p>
         </p:txBody>
       </p:sp>
@@ -5534,7 +5620,7 @@
           <p:cNvPr id="5" name="Footer Placeholder 4">
             <a:extLst>
               <a:ext uri="{FF2B5EF4-FFF2-40B4-BE49-F238E27FC236}">
-                <a16:creationId xmlns:a16="http://schemas.microsoft.com/office/drawing/2014/main" id="{F05A39FE-BF87-6257-88A8-58FC6865267A}"/>
+                <a16:creationId xmlns:a16="http://schemas.microsoft.com/office/drawing/2014/main" id="{F02C2B6E-1506-167A-03BC-965F8BFE1887}"/>
               </a:ext>
             </a:extLst>
           </p:cNvPr>
@@ -5550,7 +5636,7 @@
           <a:bodyPr/>
           <a:lstStyle/>
           <a:p>
-            <a:endParaRPr lang="en-US"/>
+            <a:endParaRPr lang="en-NO"/>
           </a:p>
         </p:txBody>
       </p:sp>
@@ -5559,7 +5645,7 @@
           <p:cNvPr id="6" name="Slide Number Placeholder 5">
             <a:extLst>
               <a:ext uri="{FF2B5EF4-FFF2-40B4-BE49-F238E27FC236}">
-                <a16:creationId xmlns:a16="http://schemas.microsoft.com/office/drawing/2014/main" id="{C3E53152-6F1F-E9BB-37F4-1E36AB69B427}"/>
+                <a16:creationId xmlns:a16="http://schemas.microsoft.com/office/drawing/2014/main" id="{9552969C-9A2A-3393-EA5C-9AD911918E1F}"/>
               </a:ext>
             </a:extLst>
           </p:cNvPr>
@@ -5575,125 +5661,18 @@
           <a:bodyPr/>
           <a:lstStyle/>
           <a:p>
-            <a:fld id="{585491E3-9838-4B39-AEBF-3B863E6BCAE0}" type="slidenum">
-              <a:rPr lang="en-US" smtClean="0"/>
+            <a:fld id="{538158FF-A7DF-BF42-A1A6-DB8EC7A9882E}" type="slidenum">
+              <a:rPr lang="en-NO" smtClean="0"/>
               <a:t>‹#›</a:t>
             </a:fld>
-            <a:endParaRPr lang="en-US"/>
+            <a:endParaRPr lang="en-NO"/>
           </a:p>
         </p:txBody>
       </p:sp>
     </p:spTree>
     <p:extLst>
       <p:ext uri="{BB962C8B-B14F-4D97-AF65-F5344CB8AC3E}">
-        <p14:creationId xmlns:p14="http://schemas.microsoft.com/office/powerpoint/2010/main" val="4090387869"/>
-      </p:ext>
-    </p:extLst>
-  </p:cSld>
-  <p:clrMapOvr>
-    <a:masterClrMapping/>
-  </p:clrMapOvr>
-</p:sldLayout>
-</file>
-
-<file path=ppt/slideLayouts/slideLayout28.xml><?xml version="1.0" encoding="utf-8"?>
-<p:sldLayout xmlns:a="http://schemas.openxmlformats.org/drawingml/2006/main" xmlns:r="http://schemas.openxmlformats.org/officeDocument/2006/relationships" xmlns:p="http://schemas.openxmlformats.org/presentationml/2006/main" userDrawn="1">
-  <p:cSld name="Virtual background dark">
-    <p:bg>
-      <p:bgPr>
-        <a:solidFill>
-          <a:schemeClr val="tx1"/>
-        </a:solidFill>
-        <a:effectLst/>
-      </p:bgPr>
-    </p:bg>
-    <p:spTree>
-      <p:nvGrpSpPr>
-        <p:cNvPr id="1" name=""/>
-        <p:cNvGrpSpPr/>
-        <p:nvPr/>
-      </p:nvGrpSpPr>
-      <p:grpSpPr>
-        <a:xfrm>
-          <a:off x="0" y="0"/>
-          <a:ext cx="0" cy="0"/>
-          <a:chOff x="0" y="0"/>
-          <a:chExt cx="0" cy="0"/>
-        </a:xfrm>
-      </p:grpSpPr>
-      <p:sp>
-        <p:nvSpPr>
-          <p:cNvPr id="2" name="Rectangle 1">
-            <a:extLst>
-              <a:ext uri="{FF2B5EF4-FFF2-40B4-BE49-F238E27FC236}">
-                <a16:creationId xmlns:a16="http://schemas.microsoft.com/office/drawing/2014/main" id="{BBB12E87-3B96-7F05-48CB-19DAB2A3F9A6}"/>
-              </a:ext>
-            </a:extLst>
-          </p:cNvPr>
-          <p:cNvSpPr/>
-          <p:nvPr userDrawn="1"/>
-        </p:nvSpPr>
-        <p:spPr>
-          <a:xfrm>
-            <a:off x="0" y="6791325"/>
-            <a:ext cx="12192000" cy="66675"/>
-          </a:xfrm>
-          <a:prstGeom prst="rect">
-            <a:avLst/>
-          </a:prstGeom>
-          <a:gradFill>
-            <a:gsLst>
-              <a:gs pos="0">
-                <a:schemeClr val="accent4"/>
-              </a:gs>
-              <a:gs pos="34000">
-                <a:schemeClr val="accent1"/>
-              </a:gs>
-              <a:gs pos="65560">
-                <a:schemeClr val="accent2"/>
-              </a:gs>
-              <a:gs pos="99890">
-                <a:schemeClr val="accent6"/>
-              </a:gs>
-            </a:gsLst>
-            <a:lin ang="0" scaled="1"/>
-          </a:gradFill>
-          <a:ln>
-            <a:noFill/>
-          </a:ln>
-        </p:spPr>
-        <p:style>
-          <a:lnRef idx="2">
-            <a:schemeClr val="accent1">
-              <a:shade val="50000"/>
-            </a:schemeClr>
-          </a:lnRef>
-          <a:fillRef idx="1">
-            <a:schemeClr val="accent1"/>
-          </a:fillRef>
-          <a:effectRef idx="0">
-            <a:schemeClr val="accent1"/>
-          </a:effectRef>
-          <a:fontRef idx="minor">
-            <a:schemeClr val="lt1"/>
-          </a:fontRef>
-        </p:style>
-        <p:txBody>
-          <a:bodyPr rtlCol="0" anchor="ctr"/>
-          <a:lstStyle/>
-          <a:p>
-            <a:pPr algn="ctr"/>
-            <a:endParaRPr lang="en-US" err="1">
-              <a:latin typeface="Roboto" panose="02000000000000000000" pitchFamily="2" charset="0"/>
-              <a:ea typeface="Roboto" panose="02000000000000000000" pitchFamily="2" charset="0"/>
-            </a:endParaRPr>
-          </a:p>
-        </p:txBody>
-      </p:sp>
-    </p:spTree>
-    <p:extLst>
-      <p:ext uri="{BB962C8B-B14F-4D97-AF65-F5344CB8AC3E}">
-        <p14:creationId xmlns:p14="http://schemas.microsoft.com/office/powerpoint/2010/main" val="2983617475"/>
+        <p14:creationId xmlns:p14="http://schemas.microsoft.com/office/powerpoint/2010/main" val="4280957889"/>
       </p:ext>
     </p:extLst>
   </p:cSld>
@@ -5890,7 +5869,7 @@
             <a:fld id="{B61BEF0D-F0BB-DE4B-95CE-6DB70DBA9567}" type="datetimeFigureOut">
               <a:rPr lang="en-US"/>
               <a:pPr/>
-              <a:t>5/10/2025</a:t>
+              <a:t>8/30/2025</a:t>
             </a:fld>
             <a:endParaRPr lang="en-US"/>
           </a:p>
@@ -6118,7 +6097,7 @@
           <a:p>
             <a:fld id="{EB712588-04B1-427B-82EE-E8DB90309F08}" type="datetimeFigureOut">
               <a:rPr lang="en-US"/>
-              <a:t>5/10/2025</a:t>
+              <a:t>8/30/2025</a:t>
             </a:fld>
             <a:endParaRPr lang="en-US"/>
           </a:p>
@@ -6488,7 +6467,7 @@
             <a:fld id="{B61BEF0D-F0BB-DE4B-95CE-6DB70DBA9567}" type="datetimeFigureOut">
               <a:rPr lang="en-US"/>
               <a:pPr/>
-              <a:t>5/10/2025</a:t>
+              <a:t>8/30/2025</a:t>
             </a:fld>
             <a:endParaRPr lang="en-US"/>
           </a:p>
@@ -6608,7 +6587,7 @@
             <a:fld id="{B61BEF0D-F0BB-DE4B-95CE-6DB70DBA9567}" type="datetimeFigureOut">
               <a:rPr lang="en-US"/>
               <a:pPr/>
-              <a:t>5/10/2025</a:t>
+              <a:t>8/30/2025</a:t>
             </a:fld>
             <a:endParaRPr lang="en-US"/>
           </a:p>
@@ -6700,7 +6679,7 @@
             <a:fld id="{B61BEF0D-F0BB-DE4B-95CE-6DB70DBA9567}" type="datetimeFigureOut">
               <a:rPr lang="en-US"/>
               <a:pPr/>
-              <a:t>5/10/2025</a:t>
+              <a:t>8/30/2025</a:t>
             </a:fld>
             <a:endParaRPr lang="en-US"/>
           </a:p>
@@ -6951,7 +6930,7 @@
           <a:p>
             <a:fld id="{42A54C80-263E-416B-A8E0-580EDEADCBDC}" type="datetimeFigureOut">
               <a:rPr lang="en-US"/>
-              <a:t>5/10/2025</a:t>
+              <a:t>8/30/2025</a:t>
             </a:fld>
             <a:endParaRPr lang="en-US"/>
           </a:p>
@@ -7210,7 +7189,7 @@
             <a:fld id="{B61BEF0D-F0BB-DE4B-95CE-6DB70DBA9567}" type="datetimeFigureOut">
               <a:rPr lang="en-US"/>
               <a:pPr/>
-              <a:t>5/10/2025</a:t>
+              <a:t>8/30/2025</a:t>
             </a:fld>
             <a:endParaRPr lang="en-US"/>
           </a:p>
@@ -7435,7 +7414,7 @@
             <a:fld id="{B61BEF0D-F0BB-DE4B-95CE-6DB70DBA9567}" type="datetimeFigureOut">
               <a:rPr lang="en-US"/>
               <a:pPr/>
-              <a:t>5/10/2025</a:t>
+              <a:t>8/30/2025</a:t>
             </a:fld>
             <a:endParaRPr lang="en-US"/>
           </a:p>
@@ -8001,7 +7980,7 @@
           <p:cNvPr id="2" name="Title Placeholder 1">
             <a:extLst>
               <a:ext uri="{FF2B5EF4-FFF2-40B4-BE49-F238E27FC236}">
-                <a16:creationId xmlns:a16="http://schemas.microsoft.com/office/drawing/2014/main" id="{D88D91DD-9C86-5A26-FB7A-76238A55C547}"/>
+                <a16:creationId xmlns:a16="http://schemas.microsoft.com/office/drawing/2014/main" id="{BECE41E0-4198-634A-5109-D9D570D38D3A}"/>
               </a:ext>
             </a:extLst>
           </p:cNvPr>
@@ -8028,9 +8007,10 @@
           <a:lstStyle/>
           <a:p>
             <a:r>
-              <a:rPr lang="en-US"/>
+              <a:rPr lang="en-GB"/>
               <a:t>Click to edit Master title style</a:t>
             </a:r>
+            <a:endParaRPr lang="en-NO"/>
           </a:p>
         </p:txBody>
       </p:sp>
@@ -8039,7 +8019,7 @@
           <p:cNvPr id="3" name="Text Placeholder 2">
             <a:extLst>
               <a:ext uri="{FF2B5EF4-FFF2-40B4-BE49-F238E27FC236}">
-                <a16:creationId xmlns:a16="http://schemas.microsoft.com/office/drawing/2014/main" id="{7F7C6946-7BEC-D069-B51F-80526B722B4A}"/>
+                <a16:creationId xmlns:a16="http://schemas.microsoft.com/office/drawing/2014/main" id="{1AC549B9-70F4-0315-693E-E0D11FC91143}"/>
               </a:ext>
             </a:extLst>
           </p:cNvPr>
@@ -8067,37 +8047,38 @@
           <a:p>
             <a:pPr lvl="0"/>
             <a:r>
-              <a:rPr lang="en-US"/>
+              <a:rPr lang="en-GB"/>
               <a:t>Click to edit Master text styles</a:t>
             </a:r>
           </a:p>
           <a:p>
             <a:pPr lvl="1"/>
             <a:r>
-              <a:rPr lang="en-US"/>
+              <a:rPr lang="en-GB"/>
               <a:t>Second level</a:t>
             </a:r>
           </a:p>
           <a:p>
             <a:pPr lvl="2"/>
             <a:r>
-              <a:rPr lang="en-US"/>
+              <a:rPr lang="en-GB"/>
               <a:t>Third level</a:t>
             </a:r>
           </a:p>
           <a:p>
             <a:pPr lvl="3"/>
             <a:r>
-              <a:rPr lang="en-US"/>
+              <a:rPr lang="en-GB"/>
               <a:t>Fourth level</a:t>
             </a:r>
           </a:p>
           <a:p>
             <a:pPr lvl="4"/>
             <a:r>
-              <a:rPr lang="en-US"/>
+              <a:rPr lang="en-GB"/>
               <a:t>Fifth level</a:t>
             </a:r>
+            <a:endParaRPr lang="en-NO"/>
           </a:p>
         </p:txBody>
       </p:sp>
@@ -8106,7 +8087,7 @@
           <p:cNvPr id="4" name="Date Placeholder 3">
             <a:extLst>
               <a:ext uri="{FF2B5EF4-FFF2-40B4-BE49-F238E27FC236}">
-                <a16:creationId xmlns:a16="http://schemas.microsoft.com/office/drawing/2014/main" id="{E4FBA022-6C80-2C5D-78F7-24B9C8C37E2B}"/>
+                <a16:creationId xmlns:a16="http://schemas.microsoft.com/office/drawing/2014/main" id="{9E076994-A343-2FE2-2885-EB961F7E8E2E}"/>
               </a:ext>
             </a:extLst>
           </p:cNvPr>
@@ -8133,18 +8114,18 @@
               <a:defRPr sz="1200">
                 <a:solidFill>
                   <a:schemeClr val="tx1">
-                    <a:tint val="82000"/>
+                    <a:tint val="75000"/>
                   </a:schemeClr>
                 </a:solidFill>
               </a:defRPr>
             </a:lvl1pPr>
           </a:lstStyle>
           <a:p>
-            <a:fld id="{A40CF832-788C-4A30-A874-A72157BA0ED2}" type="datetimeFigureOut">
-              <a:rPr lang="en-US" smtClean="0"/>
-              <a:t>5/10/2025</a:t>
+            <a:fld id="{DD6EBC61-6493-6943-BFC0-FEDAB404CC17}" type="datetimeFigureOut">
+              <a:rPr lang="en-NO" smtClean="0"/>
+              <a:t>08/30/2025</a:t>
             </a:fld>
-            <a:endParaRPr lang="en-US"/>
+            <a:endParaRPr lang="en-NO"/>
           </a:p>
         </p:txBody>
       </p:sp>
@@ -8153,7 +8134,7 @@
           <p:cNvPr id="5" name="Footer Placeholder 4">
             <a:extLst>
               <a:ext uri="{FF2B5EF4-FFF2-40B4-BE49-F238E27FC236}">
-                <a16:creationId xmlns:a16="http://schemas.microsoft.com/office/drawing/2014/main" id="{508B292C-9725-0905-F7F4-D1A2D6A7F31A}"/>
+                <a16:creationId xmlns:a16="http://schemas.microsoft.com/office/drawing/2014/main" id="{080FE761-BE5D-2F46-4641-26C400DFE35D}"/>
               </a:ext>
             </a:extLst>
           </p:cNvPr>
@@ -8180,14 +8161,14 @@
               <a:defRPr sz="1200">
                 <a:solidFill>
                   <a:schemeClr val="tx1">
-                    <a:tint val="82000"/>
+                    <a:tint val="75000"/>
                   </a:schemeClr>
                 </a:solidFill>
               </a:defRPr>
             </a:lvl1pPr>
           </a:lstStyle>
           <a:p>
-            <a:endParaRPr lang="en-US"/>
+            <a:endParaRPr lang="en-NO"/>
           </a:p>
         </p:txBody>
       </p:sp>
@@ -8196,7 +8177,7 @@
           <p:cNvPr id="6" name="Slide Number Placeholder 5">
             <a:extLst>
               <a:ext uri="{FF2B5EF4-FFF2-40B4-BE49-F238E27FC236}">
-                <a16:creationId xmlns:a16="http://schemas.microsoft.com/office/drawing/2014/main" id="{7C1B4A79-D050-B793-30B0-27CDA4199CF8}"/>
+                <a16:creationId xmlns:a16="http://schemas.microsoft.com/office/drawing/2014/main" id="{6B4C6E91-15C1-AB93-9E2E-E6B863374A9F}"/>
               </a:ext>
             </a:extLst>
           </p:cNvPr>
@@ -8223,25 +8204,25 @@
               <a:defRPr sz="1200">
                 <a:solidFill>
                   <a:schemeClr val="tx1">
-                    <a:tint val="82000"/>
+                    <a:tint val="75000"/>
                   </a:schemeClr>
                 </a:solidFill>
               </a:defRPr>
             </a:lvl1pPr>
           </a:lstStyle>
           <a:p>
-            <a:fld id="{585491E3-9838-4B39-AEBF-3B863E6BCAE0}" type="slidenum">
-              <a:rPr lang="en-US" smtClean="0"/>
+            <a:fld id="{538158FF-A7DF-BF42-A1A6-DB8EC7A9882E}" type="slidenum">
+              <a:rPr lang="en-NO" smtClean="0"/>
               <a:t>‹#›</a:t>
             </a:fld>
-            <a:endParaRPr lang="en-US"/>
+            <a:endParaRPr lang="en-NO"/>
           </a:p>
         </p:txBody>
       </p:sp>
     </p:spTree>
     <p:extLst>
       <p:ext uri="{BB962C8B-B14F-4D97-AF65-F5344CB8AC3E}">
-        <p14:creationId xmlns:p14="http://schemas.microsoft.com/office/powerpoint/2010/main" val="2475330917"/>
+        <p14:creationId xmlns:p14="http://schemas.microsoft.com/office/powerpoint/2010/main" val="3235716538"/>
       </p:ext>
     </p:extLst>
   </p:cSld>
@@ -8258,7 +8239,6 @@
     <p:sldLayoutId id="2147483677" r:id="rId9"/>
     <p:sldLayoutId id="2147483678" r:id="rId10"/>
     <p:sldLayoutId id="2147483679" r:id="rId11"/>
-    <p:sldLayoutId id="2147483680" r:id="rId12"/>
   </p:sldLayoutIdLst>
   <p:txStyles>
     <p:titleStyle>
@@ -8446,7 +8426,7 @@
     </p:bodyStyle>
     <p:otherStyle>
       <a:defPPr>
-        <a:defRPr lang="en-US"/>
+        <a:defRPr lang="en-NO"/>
       </a:defPPr>
       <a:lvl1pPr marL="0" algn="l" defTabSz="914400" rtl="0" eaLnBrk="1" latinLnBrk="0" hangingPunct="1">
         <a:defRPr sz="1800" kern="1200">
@@ -8706,6 +8686,100 @@
         <p:cNvPr id="1" name="">
           <a:extLst>
             <a:ext uri="{FF2B5EF4-FFF2-40B4-BE49-F238E27FC236}">
+              <a16:creationId xmlns:a16="http://schemas.microsoft.com/office/drawing/2014/main" id="{5A43C7FC-7A09-107A-EDC9-0909D3CADF6A}"/>
+            </a:ext>
+          </a:extLst>
+        </p:cNvPr>
+        <p:cNvGrpSpPr/>
+        <p:nvPr/>
+      </p:nvGrpSpPr>
+      <p:grpSpPr>
+        <a:xfrm>
+          <a:off x="0" y="0"/>
+          <a:ext cx="0" cy="0"/>
+          <a:chOff x="0" y="0"/>
+          <a:chExt cx="0" cy="0"/>
+        </a:xfrm>
+      </p:grpSpPr>
+      <p:sp>
+        <p:nvSpPr>
+          <p:cNvPr id="2" name="Rubrik 1">
+            <a:extLst>
+              <a:ext uri="{FF2B5EF4-FFF2-40B4-BE49-F238E27FC236}">
+                <a16:creationId xmlns:a16="http://schemas.microsoft.com/office/drawing/2014/main" id="{9B7B1F15-2E6C-2333-CBE7-DE22736854C6}"/>
+              </a:ext>
+            </a:extLst>
+          </p:cNvPr>
+          <p:cNvSpPr>
+            <a:spLocks noGrp="1"/>
+          </p:cNvSpPr>
+          <p:nvPr>
+            <p:ph type="title"/>
+          </p:nvPr>
+        </p:nvSpPr>
+        <p:spPr/>
+        <p:txBody>
+          <a:bodyPr/>
+          <a:lstStyle/>
+          <a:p>
+            <a:r>
+              <a:rPr lang="sv-SE" dirty="0"/>
+              <a:t>Version 1.1.0</a:t>
+            </a:r>
+          </a:p>
+        </p:txBody>
+      </p:sp>
+      <p:pic>
+        <p:nvPicPr>
+          <p:cNvPr id="4" name="Bildobjekt 3">
+            <a:extLst>
+              <a:ext uri="{FF2B5EF4-FFF2-40B4-BE49-F238E27FC236}">
+                <a16:creationId xmlns:a16="http://schemas.microsoft.com/office/drawing/2014/main" id="{6BEEE4E5-0E15-AA43-E170-E7E55D31C119}"/>
+              </a:ext>
+            </a:extLst>
+          </p:cNvPr>
+          <p:cNvPicPr>
+            <a:picLocks noChangeAspect="1"/>
+          </p:cNvPicPr>
+          <p:nvPr/>
+        </p:nvPicPr>
+        <p:blipFill>
+          <a:blip r:embed="rId2"/>
+          <a:stretch>
+            <a:fillRect/>
+          </a:stretch>
+        </p:blipFill>
+        <p:spPr>
+          <a:xfrm>
+            <a:off x="3784024" y="609600"/>
+            <a:ext cx="6289616" cy="5470194"/>
+          </a:xfrm>
+          <a:prstGeom prst="rect">
+            <a:avLst/>
+          </a:prstGeom>
+        </p:spPr>
+      </p:pic>
+    </p:spTree>
+    <p:extLst>
+      <p:ext uri="{BB962C8B-B14F-4D97-AF65-F5344CB8AC3E}">
+        <p14:creationId xmlns:p14="http://schemas.microsoft.com/office/powerpoint/2010/main" val="350649973"/>
+      </p:ext>
+    </p:extLst>
+  </p:cSld>
+  <p:clrMapOvr>
+    <a:masterClrMapping/>
+  </p:clrMapOvr>
+</p:sld>
+</file>
+
+<file path=ppt/slides/slide11.xml><?xml version="1.0" encoding="utf-8"?>
+<p:sld xmlns:a="http://schemas.openxmlformats.org/drawingml/2006/main" xmlns:r="http://schemas.openxmlformats.org/officeDocument/2006/relationships" xmlns:p="http://schemas.openxmlformats.org/presentationml/2006/main">
+  <p:cSld>
+    <p:spTree>
+      <p:nvGrpSpPr>
+        <p:cNvPr id="1" name="">
+          <a:extLst>
+            <a:ext uri="{FF2B5EF4-FFF2-40B4-BE49-F238E27FC236}">
               <a16:creationId xmlns:a16="http://schemas.microsoft.com/office/drawing/2014/main" id="{FB56CB45-0FED-AB92-18B7-D6035CE0D640}"/>
             </a:ext>
           </a:extLst>
@@ -8792,97 +8866,6 @@
 </p:sld>
 </file>
 
-<file path=ppt/slides/slide11.xml><?xml version="1.0" encoding="utf-8"?>
-<p:sld xmlns:a="http://schemas.openxmlformats.org/drawingml/2006/main" xmlns:r="http://schemas.openxmlformats.org/officeDocument/2006/relationships" xmlns:p="http://schemas.openxmlformats.org/presentationml/2006/main">
-  <p:cSld>
-    <p:spTree>
-      <p:nvGrpSpPr>
-        <p:cNvPr id="1" name=""/>
-        <p:cNvGrpSpPr/>
-        <p:nvPr/>
-      </p:nvGrpSpPr>
-      <p:grpSpPr>
-        <a:xfrm>
-          <a:off x="0" y="0"/>
-          <a:ext cx="0" cy="0"/>
-          <a:chOff x="0" y="0"/>
-          <a:chExt cx="0" cy="0"/>
-        </a:xfrm>
-      </p:grpSpPr>
-      <p:sp>
-        <p:nvSpPr>
-          <p:cNvPr id="2" name="Title 1">
-            <a:extLst>
-              <a:ext uri="{FF2B5EF4-FFF2-40B4-BE49-F238E27FC236}">
-                <a16:creationId xmlns:a16="http://schemas.microsoft.com/office/drawing/2014/main" id="{6C4B0CC8-6C08-B949-7F94-6E6B5C4DAC15}"/>
-              </a:ext>
-            </a:extLst>
-          </p:cNvPr>
-          <p:cNvSpPr>
-            <a:spLocks noGrp="1"/>
-          </p:cNvSpPr>
-          <p:nvPr>
-            <p:ph type="title"/>
-          </p:nvPr>
-        </p:nvSpPr>
-        <p:spPr/>
-        <p:txBody>
-          <a:bodyPr/>
-          <a:lstStyle/>
-          <a:p>
-            <a:r>
-              <a:rPr lang="en-GB" dirty="0"/>
-              <a:t>Short demo</a:t>
-            </a:r>
-            <a:endParaRPr lang="LID4096" dirty="0"/>
-          </a:p>
-        </p:txBody>
-      </p:sp>
-      <p:sp>
-        <p:nvSpPr>
-          <p:cNvPr id="3" name="Content Placeholder 2">
-            <a:extLst>
-              <a:ext uri="{FF2B5EF4-FFF2-40B4-BE49-F238E27FC236}">
-                <a16:creationId xmlns:a16="http://schemas.microsoft.com/office/drawing/2014/main" id="{D52D2805-BF0E-C045-BFF8-12A430A107E2}"/>
-              </a:ext>
-            </a:extLst>
-          </p:cNvPr>
-          <p:cNvSpPr>
-            <a:spLocks noGrp="1"/>
-          </p:cNvSpPr>
-          <p:nvPr>
-            <p:ph idx="1"/>
-          </p:nvPr>
-        </p:nvSpPr>
-        <p:spPr/>
-        <p:txBody>
-          <a:bodyPr/>
-          <a:lstStyle/>
-          <a:p>
-            <a:pPr marL="0" indent="0">
-              <a:buNone/>
-            </a:pPr>
-            <a:r>
-              <a:rPr lang="en-GB" dirty="0"/>
-              <a:t>Migrations</a:t>
-            </a:r>
-            <a:endParaRPr lang="LID4096" dirty="0"/>
-          </a:p>
-        </p:txBody>
-      </p:sp>
-    </p:spTree>
-    <p:extLst>
-      <p:ext uri="{BB962C8B-B14F-4D97-AF65-F5344CB8AC3E}">
-        <p14:creationId xmlns:p14="http://schemas.microsoft.com/office/powerpoint/2010/main" val="483047288"/>
-      </p:ext>
-    </p:extLst>
-  </p:cSld>
-  <p:clrMapOvr>
-    <a:masterClrMapping/>
-  </p:clrMapOvr>
-</p:sld>
-</file>
-
 <file path=ppt/slides/slide12.xml><?xml version="1.0" encoding="utf-8"?>
 <p:sld xmlns:a="http://schemas.openxmlformats.org/drawingml/2006/main" xmlns:r="http://schemas.openxmlformats.org/officeDocument/2006/relationships" xmlns:p="http://schemas.openxmlformats.org/presentationml/2006/main">
   <p:cSld>
@@ -8902,10 +8885,10 @@
       </p:grpSpPr>
       <p:sp>
         <p:nvSpPr>
-          <p:cNvPr id="2" name="Rubrik 1">
+          <p:cNvPr id="2" name="Title 1">
             <a:extLst>
               <a:ext uri="{FF2B5EF4-FFF2-40B4-BE49-F238E27FC236}">
-                <a16:creationId xmlns:a16="http://schemas.microsoft.com/office/drawing/2014/main" id="{4BFF07C0-1EBD-0808-1199-66A4D3075621}"/>
+                <a16:creationId xmlns:a16="http://schemas.microsoft.com/office/drawing/2014/main" id="{6C4B0CC8-6C08-B949-7F94-6E6B5C4DAC15}"/>
               </a:ext>
             </a:extLst>
           </p:cNvPr>
@@ -8922,35 +8905,19 @@
           <a:lstStyle/>
           <a:p>
             <a:r>
-              <a:rPr lang="sv-SE" dirty="0" err="1"/>
-              <a:t>Model</a:t>
-            </a:r>
-            <a:r>
-              <a:rPr lang="sv-SE" dirty="0"/>
-              <a:t> </a:t>
-            </a:r>
-            <a:r>
-              <a:rPr lang="sv-SE" dirty="0" err="1"/>
-              <a:t>based</a:t>
-            </a:r>
-            <a:r>
-              <a:rPr lang="sv-SE" dirty="0"/>
-              <a:t> </a:t>
-            </a:r>
-            <a:r>
-              <a:rPr lang="sv-SE" dirty="0" err="1"/>
-              <a:t>deployment</a:t>
-            </a:r>
-            <a:endParaRPr lang="sv-SE" dirty="0"/>
-          </a:p>
-        </p:txBody>
-      </p:sp>
-      <p:sp>
-        <p:nvSpPr>
-          <p:cNvPr id="3" name="Platshållare för innehåll 2">
+              <a:rPr lang="en-GB" dirty="0"/>
+              <a:t>Short demo</a:t>
+            </a:r>
+            <a:endParaRPr lang="LID4096" dirty="0"/>
+          </a:p>
+        </p:txBody>
+      </p:sp>
+      <p:sp>
+        <p:nvSpPr>
+          <p:cNvPr id="3" name="Content Placeholder 2">
             <a:extLst>
               <a:ext uri="{FF2B5EF4-FFF2-40B4-BE49-F238E27FC236}">
-                <a16:creationId xmlns:a16="http://schemas.microsoft.com/office/drawing/2014/main" id="{D1539999-38DF-6F25-D7AF-B1B565954712}"/>
+                <a16:creationId xmlns:a16="http://schemas.microsoft.com/office/drawing/2014/main" id="{D52D2805-BF0E-C045-BFF8-12A430A107E2}"/>
               </a:ext>
             </a:extLst>
           </p:cNvPr>
@@ -8966,219 +8933,21 @@
           <a:bodyPr/>
           <a:lstStyle/>
           <a:p>
-            <a:r>
-              <a:rPr lang="sv-SE" dirty="0" err="1"/>
-              <a:t>Create</a:t>
-            </a:r>
-            <a:r>
-              <a:rPr lang="sv-SE" dirty="0"/>
-              <a:t> a data </a:t>
-            </a:r>
-            <a:r>
-              <a:rPr lang="sv-SE" dirty="0" err="1"/>
-              <a:t>model</a:t>
-            </a:r>
-            <a:r>
-              <a:rPr lang="sv-SE" dirty="0"/>
-              <a:t> in </a:t>
-            </a:r>
-            <a:r>
-              <a:rPr lang="sv-SE" dirty="0" err="1"/>
-              <a:t>code</a:t>
-            </a:r>
-            <a:endParaRPr lang="sv-SE" dirty="0"/>
-          </a:p>
-          <a:p>
-            <a:pPr lvl="1"/>
-            <a:r>
-              <a:rPr lang="sv-SE" dirty="0"/>
-              <a:t>SSDT </a:t>
-            </a:r>
-            <a:r>
-              <a:rPr lang="sv-SE" dirty="0" err="1"/>
-              <a:t>Database</a:t>
-            </a:r>
-            <a:r>
-              <a:rPr lang="sv-SE" dirty="0"/>
-              <a:t> Projects</a:t>
-            </a:r>
-          </a:p>
-          <a:p>
-            <a:pPr lvl="1"/>
-            <a:r>
-              <a:rPr lang="sv-SE" dirty="0"/>
-              <a:t>SDK Style </a:t>
-            </a:r>
-            <a:r>
-              <a:rPr lang="sv-SE" dirty="0" err="1"/>
-              <a:t>Database</a:t>
-            </a:r>
-            <a:r>
-              <a:rPr lang="sv-SE" dirty="0"/>
-              <a:t> Projects</a:t>
-            </a:r>
-          </a:p>
-          <a:p>
-            <a:r>
-              <a:rPr lang="sv-SE" dirty="0" err="1"/>
-              <a:t>Compile</a:t>
-            </a:r>
-            <a:r>
-              <a:rPr lang="sv-SE" dirty="0"/>
-              <a:t> the </a:t>
-            </a:r>
-            <a:r>
-              <a:rPr lang="sv-SE" dirty="0" err="1"/>
-              <a:t>model</a:t>
-            </a:r>
-            <a:r>
-              <a:rPr lang="sv-SE" dirty="0"/>
-              <a:t> to a </a:t>
-            </a:r>
-            <a:r>
-              <a:rPr lang="sv-SE" dirty="0" err="1"/>
-              <a:t>dacpac</a:t>
-            </a:r>
-            <a:endParaRPr lang="sv-SE" dirty="0"/>
-          </a:p>
-          <a:p>
-            <a:pPr lvl="1"/>
-            <a:r>
-              <a:rPr lang="sv-SE" dirty="0" err="1"/>
-              <a:t>sqlpackage</a:t>
-            </a:r>
-            <a:r>
-              <a:rPr lang="sv-SE" dirty="0"/>
-              <a:t> </a:t>
-            </a:r>
-          </a:p>
-          <a:p>
-            <a:pPr lvl="1"/>
-            <a:r>
-              <a:rPr lang="sv-SE" dirty="0"/>
-              <a:t>dotnet </a:t>
-            </a:r>
-            <a:r>
-              <a:rPr lang="sv-SE" dirty="0" err="1"/>
-              <a:t>build</a:t>
-            </a:r>
-            <a:endParaRPr lang="sv-SE" dirty="0"/>
-          </a:p>
-          <a:p>
-            <a:r>
-              <a:rPr lang="sv-SE" dirty="0" err="1"/>
-              <a:t>Deploy</a:t>
-            </a:r>
-            <a:r>
-              <a:rPr lang="sv-SE" dirty="0"/>
-              <a:t> </a:t>
-            </a:r>
-            <a:r>
-              <a:rPr lang="sv-SE" dirty="0" err="1"/>
-              <a:t>using</a:t>
-            </a:r>
-            <a:r>
-              <a:rPr lang="sv-SE" dirty="0"/>
-              <a:t> a </a:t>
-            </a:r>
-            <a:r>
-              <a:rPr lang="sv-SE" dirty="0" err="1"/>
-              <a:t>tool</a:t>
-            </a:r>
-            <a:r>
-              <a:rPr lang="sv-SE" dirty="0"/>
-              <a:t> </a:t>
-            </a:r>
-            <a:r>
-              <a:rPr lang="sv-SE" dirty="0" err="1"/>
-              <a:t>that</a:t>
-            </a:r>
-            <a:r>
-              <a:rPr lang="sv-SE" dirty="0"/>
-              <a:t> </a:t>
-            </a:r>
-            <a:r>
-              <a:rPr lang="sv-SE" dirty="0" err="1"/>
-              <a:t>can</a:t>
-            </a:r>
-            <a:r>
-              <a:rPr lang="sv-SE" dirty="0"/>
-              <a:t> </a:t>
-            </a:r>
-            <a:r>
-              <a:rPr lang="sv-SE" dirty="0" err="1"/>
-              <a:t>compare</a:t>
-            </a:r>
-            <a:r>
-              <a:rPr lang="sv-SE" dirty="0"/>
-              <a:t> the </a:t>
-            </a:r>
-            <a:r>
-              <a:rPr lang="sv-SE" dirty="0" err="1"/>
-              <a:t>model</a:t>
-            </a:r>
-            <a:r>
-              <a:rPr lang="sv-SE" dirty="0"/>
-              <a:t> </a:t>
-            </a:r>
-            <a:r>
-              <a:rPr lang="sv-SE" dirty="0" err="1"/>
-              <a:t>with</a:t>
-            </a:r>
-            <a:r>
-              <a:rPr lang="sv-SE" dirty="0"/>
-              <a:t> the </a:t>
-            </a:r>
-            <a:r>
-              <a:rPr lang="sv-SE" dirty="0" err="1"/>
-              <a:t>target</a:t>
-            </a:r>
-            <a:r>
-              <a:rPr lang="sv-SE" dirty="0"/>
-              <a:t> data </a:t>
-            </a:r>
-            <a:r>
-              <a:rPr lang="sv-SE" dirty="0" err="1"/>
-              <a:t>model</a:t>
-            </a:r>
-            <a:r>
-              <a:rPr lang="sv-SE" dirty="0"/>
-              <a:t> and make </a:t>
-            </a:r>
-            <a:r>
-              <a:rPr lang="sv-SE" dirty="0" err="1"/>
-              <a:t>corrections</a:t>
-            </a:r>
-            <a:r>
-              <a:rPr lang="sv-SE" dirty="0"/>
-              <a:t> to the </a:t>
-            </a:r>
-            <a:r>
-              <a:rPr lang="sv-SE" dirty="0" err="1"/>
-              <a:t>target</a:t>
-            </a:r>
-            <a:endParaRPr lang="sv-SE" dirty="0"/>
-          </a:p>
-          <a:p>
-            <a:pPr lvl="1"/>
-            <a:r>
-              <a:rPr lang="sv-SE" dirty="0" err="1"/>
-              <a:t>Sqlpackage</a:t>
-            </a:r>
-            <a:endParaRPr lang="sv-SE" dirty="0"/>
-          </a:p>
-          <a:p>
             <a:pPr marL="0" indent="0">
               <a:buNone/>
             </a:pPr>
-            <a:endParaRPr lang="sv-SE" dirty="0"/>
+            <a:r>
+              <a:rPr lang="en-GB" dirty="0"/>
+              <a:t>Migrations</a:t>
+            </a:r>
+            <a:endParaRPr lang="LID4096" dirty="0"/>
           </a:p>
         </p:txBody>
       </p:sp>
     </p:spTree>
     <p:extLst>
       <p:ext uri="{BB962C8B-B14F-4D97-AF65-F5344CB8AC3E}">
-        <p14:creationId xmlns:p14="http://schemas.microsoft.com/office/powerpoint/2010/main" val="2475718225"/>
+        <p14:creationId xmlns:p14="http://schemas.microsoft.com/office/powerpoint/2010/main" val="483047288"/>
       </p:ext>
     </p:extLst>
   </p:cSld>
@@ -9210,6 +8979,311 @@
           <p:cNvPr id="2" name="Rubrik 1">
             <a:extLst>
               <a:ext uri="{FF2B5EF4-FFF2-40B4-BE49-F238E27FC236}">
+                <a16:creationId xmlns:a16="http://schemas.microsoft.com/office/drawing/2014/main" id="{4BFF07C0-1EBD-0808-1199-66A4D3075621}"/>
+              </a:ext>
+            </a:extLst>
+          </p:cNvPr>
+          <p:cNvSpPr>
+            <a:spLocks noGrp="1"/>
+          </p:cNvSpPr>
+          <p:nvPr>
+            <p:ph type="title"/>
+          </p:nvPr>
+        </p:nvSpPr>
+        <p:spPr/>
+        <p:txBody>
+          <a:bodyPr/>
+          <a:lstStyle/>
+          <a:p>
+            <a:r>
+              <a:rPr lang="sv-SE" dirty="0" err="1"/>
+              <a:t>Model</a:t>
+            </a:r>
+            <a:r>
+              <a:rPr lang="sv-SE" dirty="0"/>
+              <a:t> </a:t>
+            </a:r>
+            <a:r>
+              <a:rPr lang="sv-SE" dirty="0" err="1"/>
+              <a:t>based</a:t>
+            </a:r>
+            <a:r>
+              <a:rPr lang="sv-SE" dirty="0"/>
+              <a:t> </a:t>
+            </a:r>
+            <a:r>
+              <a:rPr lang="sv-SE" dirty="0" err="1"/>
+              <a:t>deployment</a:t>
+            </a:r>
+            <a:endParaRPr lang="sv-SE" dirty="0"/>
+          </a:p>
+        </p:txBody>
+      </p:sp>
+      <p:sp>
+        <p:nvSpPr>
+          <p:cNvPr id="3" name="Platshållare för innehåll 2">
+            <a:extLst>
+              <a:ext uri="{FF2B5EF4-FFF2-40B4-BE49-F238E27FC236}">
+                <a16:creationId xmlns:a16="http://schemas.microsoft.com/office/drawing/2014/main" id="{D1539999-38DF-6F25-D7AF-B1B565954712}"/>
+              </a:ext>
+            </a:extLst>
+          </p:cNvPr>
+          <p:cNvSpPr>
+            <a:spLocks noGrp="1"/>
+          </p:cNvSpPr>
+          <p:nvPr>
+            <p:ph idx="1"/>
+          </p:nvPr>
+        </p:nvSpPr>
+        <p:spPr/>
+        <p:txBody>
+          <a:bodyPr/>
+          <a:lstStyle/>
+          <a:p>
+            <a:r>
+              <a:rPr lang="sv-SE" dirty="0" err="1"/>
+              <a:t>Create</a:t>
+            </a:r>
+            <a:r>
+              <a:rPr lang="sv-SE" dirty="0"/>
+              <a:t> a data </a:t>
+            </a:r>
+            <a:r>
+              <a:rPr lang="sv-SE" dirty="0" err="1"/>
+              <a:t>model</a:t>
+            </a:r>
+            <a:r>
+              <a:rPr lang="sv-SE" dirty="0"/>
+              <a:t> in </a:t>
+            </a:r>
+            <a:r>
+              <a:rPr lang="sv-SE" dirty="0" err="1"/>
+              <a:t>code</a:t>
+            </a:r>
+            <a:endParaRPr lang="sv-SE" dirty="0"/>
+          </a:p>
+          <a:p>
+            <a:pPr lvl="1"/>
+            <a:r>
+              <a:rPr lang="sv-SE" dirty="0"/>
+              <a:t>SSDT </a:t>
+            </a:r>
+            <a:r>
+              <a:rPr lang="sv-SE" dirty="0" err="1"/>
+              <a:t>Database</a:t>
+            </a:r>
+            <a:r>
+              <a:rPr lang="sv-SE" dirty="0"/>
+              <a:t> Projects</a:t>
+            </a:r>
+          </a:p>
+          <a:p>
+            <a:pPr lvl="1"/>
+            <a:r>
+              <a:rPr lang="sv-SE" dirty="0"/>
+              <a:t>SDK Style </a:t>
+            </a:r>
+            <a:r>
+              <a:rPr lang="sv-SE" dirty="0" err="1"/>
+              <a:t>Database</a:t>
+            </a:r>
+            <a:r>
+              <a:rPr lang="sv-SE" dirty="0"/>
+              <a:t> Projects</a:t>
+            </a:r>
+          </a:p>
+          <a:p>
+            <a:r>
+              <a:rPr lang="sv-SE" dirty="0" err="1"/>
+              <a:t>Compile</a:t>
+            </a:r>
+            <a:r>
+              <a:rPr lang="sv-SE" dirty="0"/>
+              <a:t> the </a:t>
+            </a:r>
+            <a:r>
+              <a:rPr lang="sv-SE" dirty="0" err="1"/>
+              <a:t>model</a:t>
+            </a:r>
+            <a:r>
+              <a:rPr lang="sv-SE" dirty="0"/>
+              <a:t> to a </a:t>
+            </a:r>
+            <a:r>
+              <a:rPr lang="sv-SE" dirty="0" err="1"/>
+              <a:t>dacpac</a:t>
+            </a:r>
+            <a:endParaRPr lang="sv-SE" dirty="0"/>
+          </a:p>
+          <a:p>
+            <a:pPr lvl="1"/>
+            <a:r>
+              <a:rPr lang="sv-SE" dirty="0" err="1"/>
+              <a:t>sqlpackage</a:t>
+            </a:r>
+            <a:r>
+              <a:rPr lang="sv-SE" dirty="0"/>
+              <a:t> </a:t>
+            </a:r>
+          </a:p>
+          <a:p>
+            <a:pPr lvl="1"/>
+            <a:r>
+              <a:rPr lang="sv-SE" dirty="0"/>
+              <a:t>dotnet </a:t>
+            </a:r>
+            <a:r>
+              <a:rPr lang="sv-SE" dirty="0" err="1"/>
+              <a:t>build</a:t>
+            </a:r>
+            <a:endParaRPr lang="sv-SE" dirty="0"/>
+          </a:p>
+          <a:p>
+            <a:r>
+              <a:rPr lang="sv-SE" dirty="0" err="1"/>
+              <a:t>Deploy</a:t>
+            </a:r>
+            <a:r>
+              <a:rPr lang="sv-SE" dirty="0"/>
+              <a:t> </a:t>
+            </a:r>
+            <a:r>
+              <a:rPr lang="sv-SE" dirty="0" err="1"/>
+              <a:t>using</a:t>
+            </a:r>
+            <a:r>
+              <a:rPr lang="sv-SE" dirty="0"/>
+              <a:t> a </a:t>
+            </a:r>
+            <a:r>
+              <a:rPr lang="sv-SE" dirty="0" err="1"/>
+              <a:t>tool</a:t>
+            </a:r>
+            <a:r>
+              <a:rPr lang="sv-SE" dirty="0"/>
+              <a:t> </a:t>
+            </a:r>
+            <a:r>
+              <a:rPr lang="sv-SE" dirty="0" err="1"/>
+              <a:t>that</a:t>
+            </a:r>
+            <a:r>
+              <a:rPr lang="sv-SE" dirty="0"/>
+              <a:t> </a:t>
+            </a:r>
+            <a:r>
+              <a:rPr lang="sv-SE" dirty="0" err="1"/>
+              <a:t>can</a:t>
+            </a:r>
+            <a:r>
+              <a:rPr lang="sv-SE" dirty="0"/>
+              <a:t> </a:t>
+            </a:r>
+            <a:r>
+              <a:rPr lang="sv-SE" dirty="0" err="1"/>
+              <a:t>compare</a:t>
+            </a:r>
+            <a:r>
+              <a:rPr lang="sv-SE" dirty="0"/>
+              <a:t> the </a:t>
+            </a:r>
+            <a:r>
+              <a:rPr lang="sv-SE" dirty="0" err="1"/>
+              <a:t>model</a:t>
+            </a:r>
+            <a:r>
+              <a:rPr lang="sv-SE" dirty="0"/>
+              <a:t> </a:t>
+            </a:r>
+            <a:r>
+              <a:rPr lang="sv-SE" dirty="0" err="1"/>
+              <a:t>with</a:t>
+            </a:r>
+            <a:r>
+              <a:rPr lang="sv-SE" dirty="0"/>
+              <a:t> the </a:t>
+            </a:r>
+            <a:r>
+              <a:rPr lang="sv-SE" dirty="0" err="1"/>
+              <a:t>target</a:t>
+            </a:r>
+            <a:r>
+              <a:rPr lang="sv-SE" dirty="0"/>
+              <a:t> data </a:t>
+            </a:r>
+            <a:r>
+              <a:rPr lang="sv-SE" dirty="0" err="1"/>
+              <a:t>model</a:t>
+            </a:r>
+            <a:r>
+              <a:rPr lang="sv-SE" dirty="0"/>
+              <a:t> and make </a:t>
+            </a:r>
+            <a:r>
+              <a:rPr lang="sv-SE" dirty="0" err="1"/>
+              <a:t>corrections</a:t>
+            </a:r>
+            <a:r>
+              <a:rPr lang="sv-SE" dirty="0"/>
+              <a:t> to the </a:t>
+            </a:r>
+            <a:r>
+              <a:rPr lang="sv-SE" dirty="0" err="1"/>
+              <a:t>target</a:t>
+            </a:r>
+            <a:endParaRPr lang="sv-SE" dirty="0"/>
+          </a:p>
+          <a:p>
+            <a:pPr lvl="1"/>
+            <a:r>
+              <a:rPr lang="sv-SE" dirty="0" err="1"/>
+              <a:t>Sqlpackage</a:t>
+            </a:r>
+            <a:endParaRPr lang="sv-SE" dirty="0"/>
+          </a:p>
+          <a:p>
+            <a:pPr marL="0" indent="0">
+              <a:buNone/>
+            </a:pPr>
+            <a:endParaRPr lang="sv-SE" dirty="0"/>
+          </a:p>
+        </p:txBody>
+      </p:sp>
+    </p:spTree>
+    <p:extLst>
+      <p:ext uri="{BB962C8B-B14F-4D97-AF65-F5344CB8AC3E}">
+        <p14:creationId xmlns:p14="http://schemas.microsoft.com/office/powerpoint/2010/main" val="2475718225"/>
+      </p:ext>
+    </p:extLst>
+  </p:cSld>
+  <p:clrMapOvr>
+    <a:masterClrMapping/>
+  </p:clrMapOvr>
+</p:sld>
+</file>
+
+<file path=ppt/slides/slide14.xml><?xml version="1.0" encoding="utf-8"?>
+<p:sld xmlns:a="http://schemas.openxmlformats.org/drawingml/2006/main" xmlns:r="http://schemas.openxmlformats.org/officeDocument/2006/relationships" xmlns:p="http://schemas.openxmlformats.org/presentationml/2006/main">
+  <p:cSld>
+    <p:spTree>
+      <p:nvGrpSpPr>
+        <p:cNvPr id="1" name=""/>
+        <p:cNvGrpSpPr/>
+        <p:nvPr/>
+      </p:nvGrpSpPr>
+      <p:grpSpPr>
+        <a:xfrm>
+          <a:off x="0" y="0"/>
+          <a:ext cx="0" cy="0"/>
+          <a:chOff x="0" y="0"/>
+          <a:chExt cx="0" cy="0"/>
+        </a:xfrm>
+      </p:grpSpPr>
+      <p:sp>
+        <p:nvSpPr>
+          <p:cNvPr id="2" name="Rubrik 1">
+            <a:extLst>
+              <a:ext uri="{FF2B5EF4-FFF2-40B4-BE49-F238E27FC236}">
                 <a16:creationId xmlns:a16="http://schemas.microsoft.com/office/drawing/2014/main" id="{41BD2D2D-8C5C-76A0-ADED-C851B8A4A725}"/>
               </a:ext>
             </a:extLst>
@@ -9345,7 +9419,7 @@
 </p:sld>
 </file>
 
-<file path=ppt/slides/slide14.xml><?xml version="1.0" encoding="utf-8"?>
+<file path=ppt/slides/slide15.xml><?xml version="1.0" encoding="utf-8"?>
 <p:sld xmlns:a="http://schemas.openxmlformats.org/drawingml/2006/main" xmlns:r="http://schemas.openxmlformats.org/officeDocument/2006/relationships" xmlns:p="http://schemas.openxmlformats.org/presentationml/2006/main">
   <p:cSld>
     <p:spTree>
@@ -10636,7 +10710,7 @@
 </p:sld>
 </file>
 
-<file path=ppt/slides/slide15.xml><?xml version="1.0" encoding="utf-8"?>
+<file path=ppt/slides/slide16.xml><?xml version="1.0" encoding="utf-8"?>
 <p:sld xmlns:a="http://schemas.openxmlformats.org/drawingml/2006/main" xmlns:r="http://schemas.openxmlformats.org/officeDocument/2006/relationships" xmlns:p="http://schemas.openxmlformats.org/presentationml/2006/main">
   <p:cSld>
     <p:spTree>
@@ -10776,7 +10850,7 @@
 </p:sld>
 </file>
 
-<file path=ppt/slides/slide16.xml><?xml version="1.0" encoding="utf-8"?>
+<file path=ppt/slides/slide17.xml><?xml version="1.0" encoding="utf-8"?>
 <p:sld xmlns:a="http://schemas.openxmlformats.org/drawingml/2006/main" xmlns:r="http://schemas.openxmlformats.org/officeDocument/2006/relationships" xmlns:p="http://schemas.openxmlformats.org/presentationml/2006/main">
   <p:cSld>
     <p:spTree>
@@ -10907,94 +10981,6 @@
 </p:sld>
 </file>
 
-<file path=ppt/slides/slide17.xml><?xml version="1.0" encoding="utf-8"?>
-<p:sld xmlns:a="http://schemas.openxmlformats.org/drawingml/2006/main" xmlns:r="http://schemas.openxmlformats.org/officeDocument/2006/relationships" xmlns:p="http://schemas.openxmlformats.org/presentationml/2006/main">
-  <p:cSld>
-    <p:spTree>
-      <p:nvGrpSpPr>
-        <p:cNvPr id="1" name=""/>
-        <p:cNvGrpSpPr/>
-        <p:nvPr/>
-      </p:nvGrpSpPr>
-      <p:grpSpPr>
-        <a:xfrm>
-          <a:off x="0" y="0"/>
-          <a:ext cx="0" cy="0"/>
-          <a:chOff x="0" y="0"/>
-          <a:chExt cx="0" cy="0"/>
-        </a:xfrm>
-      </p:grpSpPr>
-      <p:sp>
-        <p:nvSpPr>
-          <p:cNvPr id="2" name="Title 1">
-            <a:extLst>
-              <a:ext uri="{FF2B5EF4-FFF2-40B4-BE49-F238E27FC236}">
-                <a16:creationId xmlns:a16="http://schemas.microsoft.com/office/drawing/2014/main" id="{A7B8F760-B367-6E08-C5A6-FA249A9DA3DF}"/>
-              </a:ext>
-            </a:extLst>
-          </p:cNvPr>
-          <p:cNvSpPr>
-            <a:spLocks noGrp="1"/>
-          </p:cNvSpPr>
-          <p:nvPr>
-            <p:ph type="ctrTitle"/>
-          </p:nvPr>
-        </p:nvSpPr>
-        <p:spPr/>
-        <p:txBody>
-          <a:bodyPr/>
-          <a:lstStyle/>
-          <a:p>
-            <a:r>
-              <a:rPr lang="en-GB" dirty="0"/>
-              <a:t>Create, don’t alter</a:t>
-            </a:r>
-            <a:endParaRPr lang="LID4096" dirty="0"/>
-          </a:p>
-        </p:txBody>
-      </p:sp>
-      <p:sp>
-        <p:nvSpPr>
-          <p:cNvPr id="4" name="Subtitle 3">
-            <a:extLst>
-              <a:ext uri="{FF2B5EF4-FFF2-40B4-BE49-F238E27FC236}">
-                <a16:creationId xmlns:a16="http://schemas.microsoft.com/office/drawing/2014/main" id="{610C7DCB-DAE1-0CD7-C8ED-063D70AD4AA6}"/>
-              </a:ext>
-            </a:extLst>
-          </p:cNvPr>
-          <p:cNvSpPr>
-            <a:spLocks noGrp="1"/>
-          </p:cNvSpPr>
-          <p:nvPr>
-            <p:ph type="subTitle" idx="1"/>
-          </p:nvPr>
-        </p:nvSpPr>
-        <p:spPr/>
-        <p:txBody>
-          <a:bodyPr/>
-          <a:lstStyle/>
-          <a:p>
-            <a:r>
-              <a:rPr lang="en-GB" dirty="0"/>
-              <a:t>…except in pre- and post-deploy</a:t>
-            </a:r>
-            <a:endParaRPr lang="LID4096" dirty="0"/>
-          </a:p>
-        </p:txBody>
-      </p:sp>
-    </p:spTree>
-    <p:extLst>
-      <p:ext uri="{BB962C8B-B14F-4D97-AF65-F5344CB8AC3E}">
-        <p14:creationId xmlns:p14="http://schemas.microsoft.com/office/powerpoint/2010/main" val="931876582"/>
-      </p:ext>
-    </p:extLst>
-  </p:cSld>
-  <p:clrMapOvr>
-    <a:masterClrMapping/>
-  </p:clrMapOvr>
-</p:sld>
-</file>
-
 <file path=ppt/slides/slide18.xml><?xml version="1.0" encoding="utf-8"?>
 <p:sld xmlns:a="http://schemas.openxmlformats.org/drawingml/2006/main" xmlns:r="http://schemas.openxmlformats.org/officeDocument/2006/relationships" xmlns:p="http://schemas.openxmlformats.org/presentationml/2006/main">
   <p:cSld>
@@ -11017,7 +11003,7 @@
           <p:cNvPr id="2" name="Title 1">
             <a:extLst>
               <a:ext uri="{FF2B5EF4-FFF2-40B4-BE49-F238E27FC236}">
-                <a16:creationId xmlns:a16="http://schemas.microsoft.com/office/drawing/2014/main" id="{AEFAB30D-54DA-3A1F-3B93-84F647E0A622}"/>
+                <a16:creationId xmlns:a16="http://schemas.microsoft.com/office/drawing/2014/main" id="{A7B8F760-B367-6E08-C5A6-FA249A9DA3DF}"/>
               </a:ext>
             </a:extLst>
           </p:cNvPr>
@@ -11025,7 +11011,7 @@
             <a:spLocks noGrp="1"/>
           </p:cNvSpPr>
           <p:nvPr>
-            <p:ph type="title"/>
+            <p:ph type="ctrTitle"/>
           </p:nvPr>
         </p:nvSpPr>
         <p:spPr/>
@@ -11035,7 +11021,7 @@
           <a:p>
             <a:r>
               <a:rPr lang="en-GB" dirty="0"/>
-              <a:t>Get started</a:t>
+              <a:t>Create, don’t alter</a:t>
             </a:r>
             <a:endParaRPr lang="LID4096" dirty="0"/>
           </a:p>
@@ -11043,10 +11029,10 @@
       </p:sp>
       <p:sp>
         <p:nvSpPr>
-          <p:cNvPr id="3" name="Content Placeholder 2">
+          <p:cNvPr id="4" name="Subtitle 3">
             <a:extLst>
               <a:ext uri="{FF2B5EF4-FFF2-40B4-BE49-F238E27FC236}">
-                <a16:creationId xmlns:a16="http://schemas.microsoft.com/office/drawing/2014/main" id="{E4071478-AF36-5F1B-AA7C-A686E5AB46C6}"/>
+                <a16:creationId xmlns:a16="http://schemas.microsoft.com/office/drawing/2014/main" id="{610C7DCB-DAE1-0CD7-C8ED-063D70AD4AA6}"/>
               </a:ext>
             </a:extLst>
           </p:cNvPr>
@@ -11054,7 +11040,7 @@
             <a:spLocks noGrp="1"/>
           </p:cNvSpPr>
           <p:nvPr>
-            <p:ph idx="1"/>
+            <p:ph type="subTitle" idx="1"/>
           </p:nvPr>
         </p:nvSpPr>
         <p:spPr/>
@@ -11064,21 +11050,16 @@
           <a:p>
             <a:r>
               <a:rPr lang="en-GB" dirty="0"/>
-              <a:t>Start clean</a:t>
-            </a:r>
-          </a:p>
-          <a:p>
-            <a:r>
-              <a:rPr lang="en-GB" dirty="0"/>
-              <a:t>Import existing database with Schema Comparison</a:t>
-            </a:r>
+              <a:t>…except in pre- and post-deploy</a:t>
+            </a:r>
+            <a:endParaRPr lang="LID4096" dirty="0"/>
           </a:p>
         </p:txBody>
       </p:sp>
     </p:spTree>
     <p:extLst>
       <p:ext uri="{BB962C8B-B14F-4D97-AF65-F5344CB8AC3E}">
-        <p14:creationId xmlns:p14="http://schemas.microsoft.com/office/powerpoint/2010/main" val="2316356074"/>
+        <p14:creationId xmlns:p14="http://schemas.microsoft.com/office/powerpoint/2010/main" val="931876582"/>
       </p:ext>
     </p:extLst>
   </p:cSld>
@@ -11110,7 +11091,7 @@
           <p:cNvPr id="2" name="Title 1">
             <a:extLst>
               <a:ext uri="{FF2B5EF4-FFF2-40B4-BE49-F238E27FC236}">
-                <a16:creationId xmlns:a16="http://schemas.microsoft.com/office/drawing/2014/main" id="{937EF7FE-4AD3-24F3-DFAC-A603E30D423C}"/>
+                <a16:creationId xmlns:a16="http://schemas.microsoft.com/office/drawing/2014/main" id="{AEFAB30D-54DA-3A1F-3B93-84F647E0A622}"/>
               </a:ext>
             </a:extLst>
           </p:cNvPr>
@@ -11128,7 +11109,7 @@
           <a:p>
             <a:r>
               <a:rPr lang="en-GB" dirty="0"/>
-              <a:t>Database references</a:t>
+              <a:t>Get started</a:t>
             </a:r>
             <a:endParaRPr lang="LID4096" dirty="0"/>
           </a:p>
@@ -11139,7 +11120,7 @@
           <p:cNvPr id="3" name="Content Placeholder 2">
             <a:extLst>
               <a:ext uri="{FF2B5EF4-FFF2-40B4-BE49-F238E27FC236}">
-                <a16:creationId xmlns:a16="http://schemas.microsoft.com/office/drawing/2014/main" id="{AA23214C-7556-D124-FFBE-2C39A324D01F}"/>
+                <a16:creationId xmlns:a16="http://schemas.microsoft.com/office/drawing/2014/main" id="{E4071478-AF36-5F1B-AA7C-A686E5AB46C6}"/>
               </a:ext>
             </a:extLst>
           </p:cNvPr>
@@ -11157,88 +11138,21 @@
           <a:p>
             <a:r>
               <a:rPr lang="en-GB" dirty="0"/>
-              <a:t>Cross database</a:t>
-            </a:r>
-          </a:p>
-          <a:p>
-            <a:pPr lvl="1"/>
+              <a:t>Start clean</a:t>
+            </a:r>
+          </a:p>
+          <a:p>
             <a:r>
               <a:rPr lang="en-GB" dirty="0"/>
-              <a:t>Reference system databases</a:t>
-            </a:r>
-          </a:p>
-          <a:p>
-            <a:pPr lvl="1"/>
-            <a:r>
-              <a:rPr lang="en-GB" dirty="0"/>
-              <a:t>Reference user databases</a:t>
-            </a:r>
-          </a:p>
-          <a:p>
-            <a:pPr lvl="2"/>
-            <a:r>
-              <a:rPr lang="en-GB" dirty="0"/>
-              <a:t>Database project reference</a:t>
-            </a:r>
-          </a:p>
-          <a:p>
-            <a:pPr lvl="2"/>
-            <a:r>
-              <a:rPr lang="en-GB" dirty="0" err="1"/>
-              <a:t>Dacpac</a:t>
-            </a:r>
-            <a:r>
-              <a:rPr lang="en-GB" dirty="0"/>
-              <a:t> reference</a:t>
-            </a:r>
-          </a:p>
-          <a:p>
-            <a:pPr lvl="2"/>
-            <a:r>
-              <a:rPr lang="en-GB" dirty="0" err="1"/>
-              <a:t>Nuget</a:t>
-            </a:r>
-            <a:r>
-              <a:rPr lang="en-GB" dirty="0"/>
-              <a:t> reference (SDK-style only)</a:t>
-            </a:r>
-          </a:p>
-          <a:p>
-            <a:r>
-              <a:rPr lang="en-GB" dirty="0"/>
-              <a:t>Reference as inheritance</a:t>
-            </a:r>
-          </a:p>
-          <a:p>
-            <a:pPr lvl="1"/>
-            <a:r>
-              <a:rPr lang="en-GB" dirty="0"/>
-              <a:t>Useful </a:t>
-            </a:r>
-            <a:r>
-              <a:rPr lang="en-GB" dirty="0" err="1"/>
-              <a:t>eg</a:t>
-            </a:r>
-            <a:r>
-              <a:rPr lang="en-GB" dirty="0"/>
-              <a:t> when using </a:t>
-            </a:r>
-            <a:r>
-              <a:rPr lang="en-GB" dirty="0" err="1"/>
-              <a:t>tSQLt</a:t>
-            </a:r>
-            <a:r>
-              <a:rPr lang="en-GB" dirty="0"/>
-              <a:t> for tests</a:t>
-            </a:r>
-            <a:endParaRPr lang="LID4096" dirty="0"/>
+              <a:t>Import existing database with Schema Comparison</a:t>
+            </a:r>
           </a:p>
         </p:txBody>
       </p:sp>
     </p:spTree>
     <p:extLst>
       <p:ext uri="{BB962C8B-B14F-4D97-AF65-F5344CB8AC3E}">
-        <p14:creationId xmlns:p14="http://schemas.microsoft.com/office/powerpoint/2010/main" val="403353632"/>
+        <p14:creationId xmlns:p14="http://schemas.microsoft.com/office/powerpoint/2010/main" val="2316356074"/>
       </p:ext>
     </p:extLst>
   </p:cSld>
@@ -11419,6 +11333,166 @@
 </file>
 
 <file path=ppt/slides/slide20.xml><?xml version="1.0" encoding="utf-8"?>
+<p:sld xmlns:a="http://schemas.openxmlformats.org/drawingml/2006/main" xmlns:r="http://schemas.openxmlformats.org/officeDocument/2006/relationships" xmlns:p="http://schemas.openxmlformats.org/presentationml/2006/main">
+  <p:cSld>
+    <p:spTree>
+      <p:nvGrpSpPr>
+        <p:cNvPr id="1" name=""/>
+        <p:cNvGrpSpPr/>
+        <p:nvPr/>
+      </p:nvGrpSpPr>
+      <p:grpSpPr>
+        <a:xfrm>
+          <a:off x="0" y="0"/>
+          <a:ext cx="0" cy="0"/>
+          <a:chOff x="0" y="0"/>
+          <a:chExt cx="0" cy="0"/>
+        </a:xfrm>
+      </p:grpSpPr>
+      <p:sp>
+        <p:nvSpPr>
+          <p:cNvPr id="2" name="Title 1">
+            <a:extLst>
+              <a:ext uri="{FF2B5EF4-FFF2-40B4-BE49-F238E27FC236}">
+                <a16:creationId xmlns:a16="http://schemas.microsoft.com/office/drawing/2014/main" id="{937EF7FE-4AD3-24F3-DFAC-A603E30D423C}"/>
+              </a:ext>
+            </a:extLst>
+          </p:cNvPr>
+          <p:cNvSpPr>
+            <a:spLocks noGrp="1"/>
+          </p:cNvSpPr>
+          <p:nvPr>
+            <p:ph type="title"/>
+          </p:nvPr>
+        </p:nvSpPr>
+        <p:spPr/>
+        <p:txBody>
+          <a:bodyPr/>
+          <a:lstStyle/>
+          <a:p>
+            <a:r>
+              <a:rPr lang="en-GB" dirty="0"/>
+              <a:t>Database references</a:t>
+            </a:r>
+            <a:endParaRPr lang="LID4096" dirty="0"/>
+          </a:p>
+        </p:txBody>
+      </p:sp>
+      <p:sp>
+        <p:nvSpPr>
+          <p:cNvPr id="3" name="Content Placeholder 2">
+            <a:extLst>
+              <a:ext uri="{FF2B5EF4-FFF2-40B4-BE49-F238E27FC236}">
+                <a16:creationId xmlns:a16="http://schemas.microsoft.com/office/drawing/2014/main" id="{AA23214C-7556-D124-FFBE-2C39A324D01F}"/>
+              </a:ext>
+            </a:extLst>
+          </p:cNvPr>
+          <p:cNvSpPr>
+            <a:spLocks noGrp="1"/>
+          </p:cNvSpPr>
+          <p:nvPr>
+            <p:ph idx="1"/>
+          </p:nvPr>
+        </p:nvSpPr>
+        <p:spPr/>
+        <p:txBody>
+          <a:bodyPr/>
+          <a:lstStyle/>
+          <a:p>
+            <a:r>
+              <a:rPr lang="en-GB" dirty="0"/>
+              <a:t>Cross database</a:t>
+            </a:r>
+          </a:p>
+          <a:p>
+            <a:pPr lvl="1"/>
+            <a:r>
+              <a:rPr lang="en-GB" dirty="0"/>
+              <a:t>Reference system databases</a:t>
+            </a:r>
+          </a:p>
+          <a:p>
+            <a:pPr lvl="1"/>
+            <a:r>
+              <a:rPr lang="en-GB" dirty="0"/>
+              <a:t>Reference user databases</a:t>
+            </a:r>
+          </a:p>
+          <a:p>
+            <a:pPr lvl="2"/>
+            <a:r>
+              <a:rPr lang="en-GB" dirty="0"/>
+              <a:t>Database project reference</a:t>
+            </a:r>
+          </a:p>
+          <a:p>
+            <a:pPr lvl="2"/>
+            <a:r>
+              <a:rPr lang="en-GB" dirty="0" err="1"/>
+              <a:t>Dacpac</a:t>
+            </a:r>
+            <a:r>
+              <a:rPr lang="en-GB" dirty="0"/>
+              <a:t> reference</a:t>
+            </a:r>
+          </a:p>
+          <a:p>
+            <a:pPr lvl="2"/>
+            <a:r>
+              <a:rPr lang="en-GB" dirty="0" err="1"/>
+              <a:t>Nuget</a:t>
+            </a:r>
+            <a:r>
+              <a:rPr lang="en-GB" dirty="0"/>
+              <a:t> reference (SDK-style only)</a:t>
+            </a:r>
+          </a:p>
+          <a:p>
+            <a:r>
+              <a:rPr lang="en-GB" dirty="0"/>
+              <a:t>Reference as inheritance</a:t>
+            </a:r>
+          </a:p>
+          <a:p>
+            <a:pPr lvl="1"/>
+            <a:r>
+              <a:rPr lang="en-GB" dirty="0"/>
+              <a:t>Useful </a:t>
+            </a:r>
+            <a:r>
+              <a:rPr lang="en-GB" dirty="0" err="1"/>
+              <a:t>eg</a:t>
+            </a:r>
+            <a:r>
+              <a:rPr lang="en-GB" dirty="0"/>
+              <a:t> when using </a:t>
+            </a:r>
+            <a:r>
+              <a:rPr lang="en-GB" dirty="0" err="1"/>
+              <a:t>tSQLt</a:t>
+            </a:r>
+            <a:r>
+              <a:rPr lang="en-GB" dirty="0"/>
+              <a:t> for tests</a:t>
+            </a:r>
+            <a:endParaRPr lang="LID4096" dirty="0"/>
+          </a:p>
+        </p:txBody>
+      </p:sp>
+    </p:spTree>
+    <p:extLst>
+      <p:ext uri="{BB962C8B-B14F-4D97-AF65-F5344CB8AC3E}">
+        <p14:creationId xmlns:p14="http://schemas.microsoft.com/office/powerpoint/2010/main" val="403353632"/>
+      </p:ext>
+    </p:extLst>
+  </p:cSld>
+  <p:clrMapOvr>
+    <a:masterClrMapping/>
+  </p:clrMapOvr>
+</p:sld>
+</file>
+
+<file path=ppt/slides/slide21.xml><?xml version="1.0" encoding="utf-8"?>
 <p:sld xmlns:a="http://schemas.openxmlformats.org/drawingml/2006/main" xmlns:r="http://schemas.openxmlformats.org/officeDocument/2006/relationships" xmlns:p="http://schemas.openxmlformats.org/presentationml/2006/main">
   <p:cSld>
     <p:spTree>
@@ -12123,139 +12197,6 @@
 </p:sld>
 </file>
 
-<file path=ppt/slides/slide21.xml><?xml version="1.0" encoding="utf-8"?>
-<p:sld xmlns:a="http://schemas.openxmlformats.org/drawingml/2006/main" xmlns:r="http://schemas.openxmlformats.org/officeDocument/2006/relationships" xmlns:p="http://schemas.openxmlformats.org/presentationml/2006/main">
-  <p:cSld>
-    <p:spTree>
-      <p:nvGrpSpPr>
-        <p:cNvPr id="1" name=""/>
-        <p:cNvGrpSpPr/>
-        <p:nvPr/>
-      </p:nvGrpSpPr>
-      <p:grpSpPr>
-        <a:xfrm>
-          <a:off x="0" y="0"/>
-          <a:ext cx="0" cy="0"/>
-          <a:chOff x="0" y="0"/>
-          <a:chExt cx="0" cy="0"/>
-        </a:xfrm>
-      </p:grpSpPr>
-      <p:sp>
-        <p:nvSpPr>
-          <p:cNvPr id="2" name="Title 1">
-            <a:extLst>
-              <a:ext uri="{FF2B5EF4-FFF2-40B4-BE49-F238E27FC236}">
-                <a16:creationId xmlns:a16="http://schemas.microsoft.com/office/drawing/2014/main" id="{E532E17D-6843-9CA5-6E77-CE249D89D86A}"/>
-              </a:ext>
-            </a:extLst>
-          </p:cNvPr>
-          <p:cNvSpPr>
-            <a:spLocks noGrp="1"/>
-          </p:cNvSpPr>
-          <p:nvPr>
-            <p:ph type="title"/>
-          </p:nvPr>
-        </p:nvSpPr>
-        <p:spPr/>
-        <p:txBody>
-          <a:bodyPr/>
-          <a:lstStyle/>
-          <a:p>
-            <a:r>
-              <a:rPr lang="en-GB" dirty="0"/>
-              <a:t>Deploy </a:t>
-            </a:r>
-            <a:r>
-              <a:rPr lang="en-GB" dirty="0" err="1"/>
-              <a:t>dacpac</a:t>
-            </a:r>
-            <a:endParaRPr lang="LID4096" dirty="0"/>
-          </a:p>
-        </p:txBody>
-      </p:sp>
-      <p:sp>
-        <p:nvSpPr>
-          <p:cNvPr id="3" name="Content Placeholder 2">
-            <a:extLst>
-              <a:ext uri="{FF2B5EF4-FFF2-40B4-BE49-F238E27FC236}">
-                <a16:creationId xmlns:a16="http://schemas.microsoft.com/office/drawing/2014/main" id="{7E2DC42A-F835-EC06-1EAD-6160065B1DC1}"/>
-              </a:ext>
-            </a:extLst>
-          </p:cNvPr>
-          <p:cNvSpPr>
-            <a:spLocks noGrp="1"/>
-          </p:cNvSpPr>
-          <p:nvPr>
-            <p:ph idx="1"/>
-          </p:nvPr>
-        </p:nvSpPr>
-        <p:spPr/>
-        <p:txBody>
-          <a:bodyPr/>
-          <a:lstStyle/>
-          <a:p>
-            <a:r>
-              <a:rPr lang="en-GB" dirty="0"/>
-              <a:t>Publish action from Visual Studio/Azure Data Studio/</a:t>
-            </a:r>
-            <a:r>
-              <a:rPr lang="en-GB" dirty="0" err="1"/>
-              <a:t>VSCode</a:t>
-            </a:r>
-            <a:endParaRPr lang="en-GB" dirty="0"/>
-          </a:p>
-          <a:p>
-            <a:r>
-              <a:rPr lang="en-GB" dirty="0"/>
-              <a:t>Sqlpackage.exe /Action=Publish</a:t>
-            </a:r>
-          </a:p>
-          <a:p>
-            <a:r>
-              <a:rPr lang="en-GB" dirty="0"/>
-              <a:t>Azure DevOps pipeline</a:t>
-            </a:r>
-          </a:p>
-          <a:p>
-            <a:r>
-              <a:rPr lang="en-GB" dirty="0"/>
-              <a:t>GitHub action</a:t>
-            </a:r>
-          </a:p>
-          <a:p>
-            <a:r>
-              <a:rPr lang="en-GB" dirty="0"/>
-              <a:t>…</a:t>
-            </a:r>
-          </a:p>
-          <a:p>
-            <a:r>
-              <a:rPr lang="en-GB" dirty="0"/>
-              <a:t>…</a:t>
-            </a:r>
-          </a:p>
-          <a:p>
-            <a:r>
-              <a:rPr lang="en-GB" dirty="0"/>
-              <a:t>…</a:t>
-            </a:r>
-            <a:endParaRPr lang="LID4096" dirty="0"/>
-          </a:p>
-        </p:txBody>
-      </p:sp>
-    </p:spTree>
-    <p:extLst>
-      <p:ext uri="{BB962C8B-B14F-4D97-AF65-F5344CB8AC3E}">
-        <p14:creationId xmlns:p14="http://schemas.microsoft.com/office/powerpoint/2010/main" val="297265126"/>
-      </p:ext>
-    </p:extLst>
-  </p:cSld>
-  <p:clrMapOvr>
-    <a:masterClrMapping/>
-  </p:clrMapOvr>
-</p:sld>
-</file>
-
 <file path=ppt/slides/slide22.xml><?xml version="1.0" encoding="utf-8"?>
 <p:sld xmlns:a="http://schemas.openxmlformats.org/drawingml/2006/main" xmlns:r="http://schemas.openxmlformats.org/officeDocument/2006/relationships" xmlns:p="http://schemas.openxmlformats.org/presentationml/2006/main">
   <p:cSld>
@@ -12275,6 +12216,169 @@
       </p:grpSpPr>
       <p:sp>
         <p:nvSpPr>
+          <p:cNvPr id="2" name="Title 1">
+            <a:extLst>
+              <a:ext uri="{FF2B5EF4-FFF2-40B4-BE49-F238E27FC236}">
+                <a16:creationId xmlns:a16="http://schemas.microsoft.com/office/drawing/2014/main" id="{E532E17D-6843-9CA5-6E77-CE249D89D86A}"/>
+              </a:ext>
+            </a:extLst>
+          </p:cNvPr>
+          <p:cNvSpPr>
+            <a:spLocks noGrp="1"/>
+          </p:cNvSpPr>
+          <p:nvPr>
+            <p:ph type="title"/>
+          </p:nvPr>
+        </p:nvSpPr>
+        <p:spPr/>
+        <p:txBody>
+          <a:bodyPr/>
+          <a:lstStyle/>
+          <a:p>
+            <a:r>
+              <a:rPr lang="en-GB" dirty="0"/>
+              <a:t>Deploy </a:t>
+            </a:r>
+            <a:r>
+              <a:rPr lang="en-GB" dirty="0" err="1"/>
+              <a:t>dacpac</a:t>
+            </a:r>
+            <a:endParaRPr lang="LID4096" dirty="0"/>
+          </a:p>
+        </p:txBody>
+      </p:sp>
+      <p:sp>
+        <p:nvSpPr>
+          <p:cNvPr id="3" name="Content Placeholder 2">
+            <a:extLst>
+              <a:ext uri="{FF2B5EF4-FFF2-40B4-BE49-F238E27FC236}">
+                <a16:creationId xmlns:a16="http://schemas.microsoft.com/office/drawing/2014/main" id="{7E2DC42A-F835-EC06-1EAD-6160065B1DC1}"/>
+              </a:ext>
+            </a:extLst>
+          </p:cNvPr>
+          <p:cNvSpPr>
+            <a:spLocks noGrp="1"/>
+          </p:cNvSpPr>
+          <p:nvPr>
+            <p:ph idx="1"/>
+          </p:nvPr>
+        </p:nvSpPr>
+        <p:spPr/>
+        <p:txBody>
+          <a:bodyPr/>
+          <a:lstStyle/>
+          <a:p>
+            <a:r>
+              <a:rPr lang="en-GB" dirty="0"/>
+              <a:t>Publish action from Visual Studio/Azure Data Studio/</a:t>
+            </a:r>
+            <a:r>
+              <a:rPr lang="en-GB" dirty="0" err="1"/>
+              <a:t>VSCode</a:t>
+            </a:r>
+            <a:endParaRPr lang="en-GB" dirty="0"/>
+          </a:p>
+          <a:p>
+            <a:r>
+              <a:rPr lang="en-GB" dirty="0"/>
+              <a:t>Sqlpackage.exe /Action=Publish</a:t>
+            </a:r>
+          </a:p>
+          <a:p>
+            <a:r>
+              <a:rPr lang="en-GB" dirty="0"/>
+              <a:t>Azure DevOps pipeline</a:t>
+            </a:r>
+          </a:p>
+          <a:p>
+            <a:r>
+              <a:rPr lang="en-GB" dirty="0"/>
+              <a:t>GitHub action</a:t>
+            </a:r>
+          </a:p>
+          <a:p>
+            <a:r>
+              <a:rPr lang="en-GB" dirty="0"/>
+              <a:t>…</a:t>
+            </a:r>
+          </a:p>
+          <a:p>
+            <a:r>
+              <a:rPr lang="en-GB" dirty="0"/>
+              <a:t>…</a:t>
+            </a:r>
+          </a:p>
+          <a:p>
+            <a:r>
+              <a:rPr lang="en-GB" dirty="0"/>
+              <a:t>…</a:t>
+            </a:r>
+            <a:endParaRPr lang="LID4096" dirty="0"/>
+          </a:p>
+        </p:txBody>
+      </p:sp>
+    </p:spTree>
+    <p:extLst>
+      <p:ext uri="{BB962C8B-B14F-4D97-AF65-F5344CB8AC3E}">
+        <p14:creationId xmlns:p14="http://schemas.microsoft.com/office/powerpoint/2010/main" val="297265126"/>
+      </p:ext>
+    </p:extLst>
+  </p:cSld>
+  <p:clrMapOvr>
+    <a:masterClrMapping/>
+  </p:clrMapOvr>
+</p:sld>
+</file>
+
+<file path=ppt/slides/slide23.xml><?xml version="1.0" encoding="utf-8"?>
+<p:sld xmlns:a="http://schemas.openxmlformats.org/drawingml/2006/main" xmlns:r="http://schemas.openxmlformats.org/officeDocument/2006/relationships" xmlns:p="http://schemas.openxmlformats.org/presentationml/2006/main">
+  <p:cSld>
+    <p:spTree>
+      <p:nvGrpSpPr>
+        <p:cNvPr id="1" name=""/>
+        <p:cNvGrpSpPr/>
+        <p:nvPr/>
+      </p:nvGrpSpPr>
+      <p:grpSpPr>
+        <a:xfrm>
+          <a:off x="0" y="0"/>
+          <a:ext cx="0" cy="0"/>
+          <a:chOff x="0" y="0"/>
+          <a:chExt cx="0" cy="0"/>
+        </a:xfrm>
+      </p:grpSpPr>
+    </p:spTree>
+    <p:extLst>
+      <p:ext uri="{BB962C8B-B14F-4D97-AF65-F5344CB8AC3E}">
+        <p14:creationId xmlns:p14="http://schemas.microsoft.com/office/powerpoint/2010/main" val="577535280"/>
+      </p:ext>
+    </p:extLst>
+  </p:cSld>
+  <p:clrMapOvr>
+    <a:masterClrMapping/>
+  </p:clrMapOvr>
+</p:sld>
+</file>
+
+<file path=ppt/slides/slide24.xml><?xml version="1.0" encoding="utf-8"?>
+<p:sld xmlns:a="http://schemas.openxmlformats.org/drawingml/2006/main" xmlns:r="http://schemas.openxmlformats.org/officeDocument/2006/relationships" xmlns:p="http://schemas.openxmlformats.org/presentationml/2006/main">
+  <p:cSld>
+    <p:spTree>
+      <p:nvGrpSpPr>
+        <p:cNvPr id="1" name=""/>
+        <p:cNvGrpSpPr/>
+        <p:nvPr/>
+      </p:nvGrpSpPr>
+      <p:grpSpPr>
+        <a:xfrm>
+          <a:off x="0" y="0"/>
+          <a:ext cx="0" cy="0"/>
+          <a:chOff x="0" y="0"/>
+          <a:chExt cx="0" cy="0"/>
+        </a:xfrm>
+      </p:grpSpPr>
+      <p:sp>
+        <p:nvSpPr>
           <p:cNvPr id="4" name="Title 3">
             <a:extLst>
               <a:ext uri="{FF2B5EF4-FFF2-40B4-BE49-F238E27FC236}">
@@ -12367,6 +12471,36 @@
           </a:p>
         </p:txBody>
       </p:sp>
+      <p:pic>
+        <p:nvPicPr>
+          <p:cNvPr id="2" name="Picture 1">
+            <a:extLst>
+              <a:ext uri="{FF2B5EF4-FFF2-40B4-BE49-F238E27FC236}">
+                <a16:creationId xmlns:a16="http://schemas.microsoft.com/office/drawing/2014/main" id="{D70447CC-E54C-0212-1B76-FF1CDF03B764}"/>
+              </a:ext>
+            </a:extLst>
+          </p:cNvPr>
+          <p:cNvPicPr>
+            <a:picLocks noChangeAspect="1"/>
+          </p:cNvPicPr>
+          <p:nvPr/>
+        </p:nvPicPr>
+        <p:blipFill>
+          <a:blip r:embed="rId2"/>
+          <a:stretch>
+            <a:fillRect/>
+          </a:stretch>
+        </p:blipFill>
+        <p:spPr>
+          <a:xfrm>
+            <a:off x="6884874" y="-17066"/>
+            <a:ext cx="5307126" cy="5148459"/>
+          </a:xfrm>
+          <a:prstGeom prst="rect">
+            <a:avLst/>
+          </a:prstGeom>
+        </p:spPr>
+      </p:pic>
     </p:spTree>
     <p:extLst>
       <p:ext uri="{BB962C8B-B14F-4D97-AF65-F5344CB8AC3E}">
@@ -12383,26 +12517,9 @@
 <file path=ppt/slides/slide3.xml><?xml version="1.0" encoding="utf-8"?>
 <p:sld xmlns:a="http://schemas.openxmlformats.org/drawingml/2006/main" xmlns:r="http://schemas.openxmlformats.org/officeDocument/2006/relationships" xmlns:p="http://schemas.openxmlformats.org/presentationml/2006/main">
   <p:cSld>
-    <p:bg>
-      <p:bgPr>
-        <a:solidFill>
-          <a:schemeClr val="tx2">
-            <a:lumMod val="25000"/>
-            <a:lumOff val="75000"/>
-          </a:schemeClr>
-        </a:solidFill>
-        <a:effectLst/>
-      </p:bgPr>
-    </p:bg>
     <p:spTree>
       <p:nvGrpSpPr>
-        <p:cNvPr id="1" name="">
-          <a:extLst>
-            <a:ext uri="{FF2B5EF4-FFF2-40B4-BE49-F238E27FC236}">
-              <a16:creationId xmlns:a16="http://schemas.microsoft.com/office/drawing/2014/main" id="{AAC6105C-5259-01B6-6476-37D103B303B1}"/>
-            </a:ext>
-          </a:extLst>
-        </p:cNvPr>
+        <p:cNvPr id="1" name=""/>
         <p:cNvGrpSpPr/>
         <p:nvPr/>
       </p:nvGrpSpPr>
@@ -12416,33 +12533,46 @@
       </p:grpSpPr>
       <p:sp>
         <p:nvSpPr>
-          <p:cNvPr id="2" name="TextBox 1">
+          <p:cNvPr id="7" name="AutoShape 4">
             <a:extLst>
               <a:ext uri="{FF2B5EF4-FFF2-40B4-BE49-F238E27FC236}">
-                <a16:creationId xmlns:a16="http://schemas.microsoft.com/office/drawing/2014/main" id="{8A0B0E9B-705E-1F83-7712-3AA2F4F59507}"/>
+                <a16:creationId xmlns:a16="http://schemas.microsoft.com/office/drawing/2014/main" id="{A280507D-CA14-E682-CC12-B4F4F48EEC3B}"/>
               </a:ext>
             </a:extLst>
           </p:cNvPr>
-          <p:cNvSpPr txBox="1"/>
+          <p:cNvSpPr>
+            <a:spLocks noChangeAspect="1" noChangeArrowheads="1"/>
+          </p:cNvSpPr>
           <p:nvPr/>
         </p:nvSpPr>
-        <p:spPr>
+        <p:spPr bwMode="auto">
           <a:xfrm>
-            <a:off x="4711353" y="365757"/>
-            <a:ext cx="6805061" cy="1631216"/>
+            <a:off x="5943600" y="3276600"/>
+            <a:ext cx="304800" cy="304800"/>
           </a:xfrm>
           <a:prstGeom prst="rect">
             <a:avLst/>
           </a:prstGeom>
           <a:noFill/>
+          <a:extLst>
+            <a:ext uri="{909E8E84-426E-40DD-AFC4-6F175D3DCCD1}">
+              <a14:hiddenFill xmlns:a14="http://schemas.microsoft.com/office/drawing/2010/main">
+                <a:solidFill>
+                  <a:srgbClr val="FFFFFF"/>
+                </a:solidFill>
+              </a14:hiddenFill>
+            </a:ext>
+          </a:extLst>
         </p:spPr>
         <p:txBody>
-          <a:bodyPr wrap="square" rtlCol="0">
-            <a:spAutoFit/>
+          <a:bodyPr vert="horz" wrap="square" lIns="91440" tIns="45720" rIns="91440" bIns="45720" numCol="1" anchor="t" anchorCtr="0" compatLnSpc="1">
+            <a:prstTxWarp prst="textNoShape">
+              <a:avLst/>
+            </a:prstTxWarp>
           </a:bodyPr>
           <a:lstStyle/>
           <a:p>
-            <a:pPr marL="0" marR="0" lvl="0" indent="0" algn="ctr" defTabSz="914400" rtl="0" eaLnBrk="1" fontAlgn="auto" latinLnBrk="0" hangingPunct="1">
+            <a:pPr marL="0" marR="0" lvl="0" indent="0" algn="l" defTabSz="914400" rtl="0" eaLnBrk="1" fontAlgn="auto" latinLnBrk="0" hangingPunct="1">
               <a:lnSpc>
                 <a:spcPct val="100000"/>
               </a:lnSpc>
@@ -12459,34 +12589,249 @@
               <a:tabLst/>
               <a:defRPr/>
             </a:pPr>
-            <a:r>
-              <a:rPr kumimoji="0" lang="en-US" sz="5000" b="1" i="0" u="none" strike="noStrike" kern="1200" cap="none" spc="0" normalizeH="0" baseline="0" noProof="0" dirty="0">
+            <a:endParaRPr kumimoji="0" lang="en-NO" sz="1800" b="0" i="0" u="none" strike="noStrike" kern="1200" cap="none" spc="0" normalizeH="0" baseline="0" noProof="0">
+              <a:ln>
+                <a:noFill/>
+              </a:ln>
+              <a:solidFill>
+                <a:prstClr val="black"/>
+              </a:solidFill>
+              <a:effectLst/>
+              <a:uLnTx/>
+              <a:uFillTx/>
+              <a:latin typeface="Calibri" panose="020F0502020204030204"/>
+              <a:ea typeface="+mn-ea"/>
+              <a:cs typeface="+mn-cs"/>
+            </a:endParaRPr>
+          </a:p>
+        </p:txBody>
+      </p:sp>
+      <p:sp>
+        <p:nvSpPr>
+          <p:cNvPr id="13" name="AutoShape 8" descr="signature_2217393165">
+            <a:extLst>
+              <a:ext uri="{FF2B5EF4-FFF2-40B4-BE49-F238E27FC236}">
+                <a16:creationId xmlns:a16="http://schemas.microsoft.com/office/drawing/2014/main" id="{8E02CA26-DFA6-50C3-BFEC-779A63D71C01}"/>
+              </a:ext>
+            </a:extLst>
+          </p:cNvPr>
+          <p:cNvSpPr>
+            <a:spLocks noChangeAspect="1" noChangeArrowheads="1"/>
+          </p:cNvSpPr>
+          <p:nvPr/>
+        </p:nvSpPr>
+        <p:spPr bwMode="auto">
+          <a:xfrm>
+            <a:off x="6096000" y="3429000"/>
+            <a:ext cx="304800" cy="304800"/>
+          </a:xfrm>
+          <a:prstGeom prst="rect">
+            <a:avLst/>
+          </a:prstGeom>
+          <a:noFill/>
+          <a:extLst>
+            <a:ext uri="{909E8E84-426E-40DD-AFC4-6F175D3DCCD1}">
+              <a14:hiddenFill xmlns:a14="http://schemas.microsoft.com/office/drawing/2010/main">
+                <a:solidFill>
+                  <a:srgbClr val="FFFFFF"/>
+                </a:solidFill>
+              </a14:hiddenFill>
+            </a:ext>
+          </a:extLst>
+        </p:spPr>
+        <p:txBody>
+          <a:bodyPr vert="horz" wrap="square" lIns="91440" tIns="45720" rIns="91440" bIns="45720" numCol="1" anchor="t" anchorCtr="0" compatLnSpc="1">
+            <a:prstTxWarp prst="textNoShape">
+              <a:avLst/>
+            </a:prstTxWarp>
+          </a:bodyPr>
+          <a:lstStyle/>
+          <a:p>
+            <a:pPr marL="0" marR="0" lvl="0" indent="0" algn="l" defTabSz="914400" rtl="0" eaLnBrk="1" fontAlgn="auto" latinLnBrk="0" hangingPunct="1">
+              <a:lnSpc>
+                <a:spcPct val="100000"/>
+              </a:lnSpc>
+              <a:spcBef>
+                <a:spcPts val="0"/>
+              </a:spcBef>
+              <a:spcAft>
+                <a:spcPts val="0"/>
+              </a:spcAft>
+              <a:buClrTx/>
+              <a:buSzTx/>
+              <a:buFontTx/>
+              <a:buNone/>
+              <a:tabLst/>
+              <a:defRPr/>
+            </a:pPr>
+            <a:endParaRPr kumimoji="0" lang="en-NO" sz="1800" b="0" i="0" u="none" strike="noStrike" kern="1200" cap="none" spc="0" normalizeH="0" baseline="0" noProof="0">
+              <a:ln>
+                <a:noFill/>
+              </a:ln>
+              <a:solidFill>
+                <a:prstClr val="black"/>
+              </a:solidFill>
+              <a:effectLst/>
+              <a:uLnTx/>
+              <a:uFillTx/>
+              <a:latin typeface="Calibri" panose="020F0502020204030204"/>
+              <a:ea typeface="+mn-ea"/>
+              <a:cs typeface="+mn-cs"/>
+            </a:endParaRPr>
+          </a:p>
+        </p:txBody>
+      </p:sp>
+      <p:sp>
+        <p:nvSpPr>
+          <p:cNvPr id="17" name="AutoShape 10" descr="DataBrothers">
+            <a:extLst>
+              <a:ext uri="{FF2B5EF4-FFF2-40B4-BE49-F238E27FC236}">
+                <a16:creationId xmlns:a16="http://schemas.microsoft.com/office/drawing/2014/main" id="{28AB2310-E80C-D142-A16A-AA62E769FF96}"/>
+              </a:ext>
+            </a:extLst>
+          </p:cNvPr>
+          <p:cNvSpPr>
+            <a:spLocks noChangeAspect="1" noChangeArrowheads="1"/>
+          </p:cNvSpPr>
+          <p:nvPr/>
+        </p:nvSpPr>
+        <p:spPr bwMode="auto">
+          <a:xfrm>
+            <a:off x="6248400" y="3581400"/>
+            <a:ext cx="304800" cy="304800"/>
+          </a:xfrm>
+          <a:prstGeom prst="rect">
+            <a:avLst/>
+          </a:prstGeom>
+          <a:noFill/>
+          <a:extLst>
+            <a:ext uri="{909E8E84-426E-40DD-AFC4-6F175D3DCCD1}">
+              <a14:hiddenFill xmlns:a14="http://schemas.microsoft.com/office/drawing/2010/main">
+                <a:solidFill>
+                  <a:srgbClr val="FFFFFF"/>
+                </a:solidFill>
+              </a14:hiddenFill>
+            </a:ext>
+          </a:extLst>
+        </p:spPr>
+        <p:txBody>
+          <a:bodyPr vert="horz" wrap="square" lIns="91440" tIns="45720" rIns="91440" bIns="45720" numCol="1" anchor="t" anchorCtr="0" compatLnSpc="1">
+            <a:prstTxWarp prst="textNoShape">
+              <a:avLst/>
+            </a:prstTxWarp>
+          </a:bodyPr>
+          <a:lstStyle/>
+          <a:p>
+            <a:pPr marL="0" marR="0" lvl="0" indent="0" algn="l" defTabSz="914400" rtl="0" eaLnBrk="1" fontAlgn="auto" latinLnBrk="0" hangingPunct="1">
+              <a:lnSpc>
+                <a:spcPct val="100000"/>
+              </a:lnSpc>
+              <a:spcBef>
+                <a:spcPts val="0"/>
+              </a:spcBef>
+              <a:spcAft>
+                <a:spcPts val="0"/>
+              </a:spcAft>
+              <a:buClrTx/>
+              <a:buSzTx/>
+              <a:buFontTx/>
+              <a:buNone/>
+              <a:tabLst/>
+              <a:defRPr/>
+            </a:pPr>
+            <a:endParaRPr kumimoji="0" lang="en-NO" sz="1800" b="0" i="0" u="none" strike="noStrike" kern="1200" cap="none" spc="0" normalizeH="0" baseline="0" noProof="0">
+              <a:ln>
+                <a:noFill/>
+              </a:ln>
+              <a:solidFill>
+                <a:prstClr val="black"/>
+              </a:solidFill>
+              <a:effectLst/>
+              <a:uLnTx/>
+              <a:uFillTx/>
+              <a:latin typeface="Calibri" panose="020F0502020204030204"/>
+              <a:ea typeface="+mn-ea"/>
+              <a:cs typeface="+mn-cs"/>
+            </a:endParaRPr>
+          </a:p>
+        </p:txBody>
+      </p:sp>
+      <p:sp>
+        <p:nvSpPr>
+          <p:cNvPr id="2" name="TextBox 1">
+            <a:extLst>
+              <a:ext uri="{FF2B5EF4-FFF2-40B4-BE49-F238E27FC236}">
+                <a16:creationId xmlns:a16="http://schemas.microsoft.com/office/drawing/2014/main" id="{A27D6DC8-F446-93B3-B577-CB84D41AE2E5}"/>
+              </a:ext>
+            </a:extLst>
+          </p:cNvPr>
+          <p:cNvSpPr txBox="1"/>
+          <p:nvPr/>
+        </p:nvSpPr>
+        <p:spPr>
+          <a:xfrm>
+            <a:off x="3831981" y="445520"/>
+            <a:ext cx="4161215" cy="2794383"/>
+          </a:xfrm>
+          <a:prstGeom prst="rect">
+            <a:avLst/>
+          </a:prstGeom>
+          <a:noFill/>
+        </p:spPr>
+        <p:txBody>
+          <a:bodyPr wrap="none" rtlCol="0">
+            <a:prstTxWarp prst="textArchUp">
+              <a:avLst>
+                <a:gd name="adj" fmla="val 10670077"/>
+              </a:avLst>
+            </a:prstTxWarp>
+            <a:spAutoFit/>
+          </a:bodyPr>
+          <a:lstStyle/>
+          <a:p>
+            <a:pPr marL="0" marR="0" lvl="0" indent="0" algn="l" defTabSz="914400" rtl="0" eaLnBrk="1" fontAlgn="auto" latinLnBrk="0" hangingPunct="1">
+              <a:lnSpc>
+                <a:spcPct val="100000"/>
+              </a:lnSpc>
+              <a:spcBef>
+                <a:spcPts val="0"/>
+              </a:spcBef>
+              <a:spcAft>
+                <a:spcPts val="0"/>
+              </a:spcAft>
+              <a:buClrTx/>
+              <a:buSzTx/>
+              <a:buFontTx/>
+              <a:buNone/>
+              <a:tabLst/>
+              <a:defRPr/>
+            </a:pPr>
+            <a:r>
+              <a:rPr kumimoji="0" lang="en-NO" sz="8000" b="0" i="0" u="none" strike="noStrike" kern="1200" cap="none" spc="0" normalizeH="0" baseline="0" noProof="0">
                 <a:ln>
                   <a:noFill/>
                 </a:ln>
                 <a:solidFill>
-                  <a:srgbClr val="156082">
-                    <a:lumMod val="50000"/>
-                  </a:srgbClr>
+                  <a:prstClr val="black"/>
                 </a:solidFill>
                 <a:effectLst/>
                 <a:uLnTx/>
                 <a:uFillTx/>
-                <a:latin typeface="Aptos" panose="02110004020202020204"/>
+                <a:latin typeface="Gotham Medium" pitchFamily="2" charset="0"/>
                 <a:ea typeface="+mn-ea"/>
-                <a:cs typeface="+mn-cs"/>
+                <a:cs typeface="Gotham Medium" pitchFamily="2" charset="0"/>
               </a:rPr>
-              <a:t>Thank You To Our Sponsors! </a:t>
+              <a:t>Thank you to our sponsors</a:t>
             </a:r>
           </a:p>
         </p:txBody>
       </p:sp>
       <p:pic>
         <p:nvPicPr>
-          <p:cNvPr id="14" name="Picture 13" descr="A logo with text and colorful arrows&#10;&#10;AI-generated content may be incorrect.">
+          <p:cNvPr id="23" name="Graphic 22">
             <a:extLst>
               <a:ext uri="{FF2B5EF4-FFF2-40B4-BE49-F238E27FC236}">
-                <a16:creationId xmlns:a16="http://schemas.microsoft.com/office/drawing/2014/main" id="{460A906B-6413-D200-DE7A-332CCD751723}"/>
+                <a16:creationId xmlns:a16="http://schemas.microsoft.com/office/drawing/2014/main" id="{E51DE4C2-F060-B536-024C-B2D02DEE833B}"/>
               </a:ext>
             </a:extLst>
           </p:cNvPr>
@@ -12498,8 +12843,8 @@
         <p:blipFill>
           <a:blip r:embed="rId3">
             <a:extLst>
-              <a:ext uri="{28A0092B-C50C-407E-A947-70E740481C1C}">
-                <a14:useLocalDpi xmlns:a14="http://schemas.microsoft.com/office/drawing/2010/main" val="0"/>
+              <a:ext uri="{96DAC541-7B7A-43D3-8B79-37D633B846F1}">
+                <asvg:svgBlip xmlns:asvg="http://schemas.microsoft.com/office/drawing/2016/SVG/main" r:embed="rId4"/>
               </a:ext>
             </a:extLst>
           </a:blip>
@@ -12509,8 +12854,8 @@
         </p:blipFill>
         <p:spPr>
           <a:xfrm>
-            <a:off x="668742" y="207716"/>
-            <a:ext cx="4042611" cy="1947299"/>
+            <a:off x="7407577" y="3073834"/>
+            <a:ext cx="2098377" cy="1616761"/>
           </a:xfrm>
           <a:prstGeom prst="rect">
             <a:avLst/>
@@ -12519,10 +12864,10 @@
       </p:pic>
       <p:pic>
         <p:nvPicPr>
-          <p:cNvPr id="16" name="Picture 15">
+          <p:cNvPr id="34" name="Graphic 33">
             <a:extLst>
               <a:ext uri="{FF2B5EF4-FFF2-40B4-BE49-F238E27FC236}">
-                <a16:creationId xmlns:a16="http://schemas.microsoft.com/office/drawing/2014/main" id="{93AB514A-7E63-B358-5CF1-BEF8647B4BEE}"/>
+                <a16:creationId xmlns:a16="http://schemas.microsoft.com/office/drawing/2014/main" id="{0A1E68C9-5DE7-5624-7A91-EEFE80066229}"/>
               </a:ext>
             </a:extLst>
           </p:cNvPr>
@@ -12532,15 +12877,21 @@
           <p:nvPr/>
         </p:nvPicPr>
         <p:blipFill>
-          <a:blip r:embed="rId4"/>
+          <a:blip r:embed="rId5">
+            <a:extLst>
+              <a:ext uri="{96DAC541-7B7A-43D3-8B79-37D633B846F1}">
+                <asvg:svgBlip xmlns:asvg="http://schemas.microsoft.com/office/drawing/2016/SVG/main" r:embed="rId6"/>
+              </a:ext>
+            </a:extLst>
+          </a:blip>
           <a:stretch>
             <a:fillRect/>
           </a:stretch>
         </p:blipFill>
         <p:spPr>
           <a:xfrm>
-            <a:off x="422780" y="2458912"/>
-            <a:ext cx="4534533" cy="1238423"/>
+            <a:off x="878487" y="2900132"/>
+            <a:ext cx="3191097" cy="1062698"/>
           </a:xfrm>
           <a:prstGeom prst="rect">
             <a:avLst/>
@@ -12549,73 +12900,10 @@
       </p:pic>
       <p:pic>
         <p:nvPicPr>
-          <p:cNvPr id="25" name="Picture 24">
+          <p:cNvPr id="52" name="Picture 51" descr="A black background with a black square&#10;&#10;Description automatically generated with medium confidence">
             <a:extLst>
               <a:ext uri="{FF2B5EF4-FFF2-40B4-BE49-F238E27FC236}">
-                <a16:creationId xmlns:a16="http://schemas.microsoft.com/office/drawing/2014/main" id="{BC8F2B0F-36EF-9330-53E6-6DB3471272F2}"/>
-              </a:ext>
-            </a:extLst>
-          </p:cNvPr>
-          <p:cNvPicPr>
-            <a:picLocks noChangeAspect="1"/>
-          </p:cNvPicPr>
-          <p:nvPr/>
-        </p:nvPicPr>
-        <p:blipFill>
-          <a:blip r:embed="rId5"/>
-          <a:stretch>
-            <a:fillRect/>
-          </a:stretch>
-        </p:blipFill>
-        <p:spPr>
-          <a:xfrm>
-            <a:off x="6616745" y="2388932"/>
-            <a:ext cx="3877216" cy="1333686"/>
-          </a:xfrm>
-          <a:prstGeom prst="rect">
-            <a:avLst/>
-          </a:prstGeom>
-          <a:solidFill>
-            <a:schemeClr val="bg1"/>
-          </a:solidFill>
-        </p:spPr>
-      </p:pic>
-      <p:pic>
-        <p:nvPicPr>
-          <p:cNvPr id="27" name="Picture 26">
-            <a:extLst>
-              <a:ext uri="{FF2B5EF4-FFF2-40B4-BE49-F238E27FC236}">
-                <a16:creationId xmlns:a16="http://schemas.microsoft.com/office/drawing/2014/main" id="{F42525DE-56C3-104D-7FCB-478FA07B4AF4}"/>
-              </a:ext>
-            </a:extLst>
-          </p:cNvPr>
-          <p:cNvPicPr>
-            <a:picLocks noChangeAspect="1"/>
-          </p:cNvPicPr>
-          <p:nvPr/>
-        </p:nvPicPr>
-        <p:blipFill>
-          <a:blip r:embed="rId6"/>
-          <a:stretch>
-            <a:fillRect/>
-          </a:stretch>
-        </p:blipFill>
-        <p:spPr>
-          <a:xfrm>
-            <a:off x="2490366" y="5585540"/>
-            <a:ext cx="2819794" cy="933580"/>
-          </a:xfrm>
-          <a:prstGeom prst="rect">
-            <a:avLst/>
-          </a:prstGeom>
-        </p:spPr>
-      </p:pic>
-      <p:pic>
-        <p:nvPicPr>
-          <p:cNvPr id="29" name="Picture 28">
-            <a:extLst>
-              <a:ext uri="{FF2B5EF4-FFF2-40B4-BE49-F238E27FC236}">
-                <a16:creationId xmlns:a16="http://schemas.microsoft.com/office/drawing/2014/main" id="{51961971-89C6-1E61-5E87-26CBD37D032F}"/>
+                <a16:creationId xmlns:a16="http://schemas.microsoft.com/office/drawing/2014/main" id="{7DC134D0-2A42-6F67-B55A-8DA4DB61F03C}"/>
               </a:ext>
             </a:extLst>
           </p:cNvPr>
@@ -12632,8 +12920,8 @@
         </p:blipFill>
         <p:spPr>
           <a:xfrm>
-            <a:off x="9049209" y="4030082"/>
-            <a:ext cx="1609950" cy="1943371"/>
+            <a:off x="4361301" y="3737769"/>
+            <a:ext cx="2705277" cy="479821"/>
           </a:xfrm>
           <a:prstGeom prst="rect">
             <a:avLst/>
@@ -12642,10 +12930,10 @@
       </p:pic>
       <p:pic>
         <p:nvPicPr>
-          <p:cNvPr id="31" name="Picture 30">
+          <p:cNvPr id="56" name="Picture 55" descr="A black and white logo&#10;&#10;Description automatically generated">
             <a:extLst>
               <a:ext uri="{FF2B5EF4-FFF2-40B4-BE49-F238E27FC236}">
-                <a16:creationId xmlns:a16="http://schemas.microsoft.com/office/drawing/2014/main" id="{7C869FD2-D880-4610-5F55-EEEF89044EF8}"/>
+                <a16:creationId xmlns:a16="http://schemas.microsoft.com/office/drawing/2014/main" id="{5CD93F81-DDFF-1D00-C01D-C8B9B27F33C9}"/>
               </a:ext>
             </a:extLst>
           </p:cNvPr>
@@ -12662,8 +12950,8 @@
         </p:blipFill>
         <p:spPr>
           <a:xfrm>
-            <a:off x="422780" y="4100101"/>
-            <a:ext cx="2991267" cy="1209844"/>
+            <a:off x="9294015" y="775221"/>
+            <a:ext cx="2048929" cy="1053734"/>
           </a:xfrm>
           <a:prstGeom prst="rect">
             <a:avLst/>
@@ -12672,10 +12960,10 @@
       </p:pic>
       <p:pic>
         <p:nvPicPr>
-          <p:cNvPr id="33" name="Picture 32">
+          <p:cNvPr id="5" name="Picture 4" descr="A heart with a blue and yellow flag on it&#10;&#10;Description automatically generated">
             <a:extLst>
               <a:ext uri="{FF2B5EF4-FFF2-40B4-BE49-F238E27FC236}">
-                <a16:creationId xmlns:a16="http://schemas.microsoft.com/office/drawing/2014/main" id="{93C2B845-9411-67BB-4B22-1DF043BD6950}"/>
+                <a16:creationId xmlns:a16="http://schemas.microsoft.com/office/drawing/2014/main" id="{E248FEED-3EE0-92C0-FBC7-FF9B63E29F00}"/>
               </a:ext>
             </a:extLst>
           </p:cNvPr>
@@ -12686,14 +12974,15 @@
         </p:nvPicPr>
         <p:blipFill>
           <a:blip r:embed="rId9"/>
+          <a:srcRect l="-1326" t="-871" b="13000"/>
           <a:stretch>
             <a:fillRect/>
           </a:stretch>
         </p:blipFill>
         <p:spPr>
           <a:xfrm>
-            <a:off x="4559969" y="4159274"/>
-            <a:ext cx="2991267" cy="1114581"/>
+            <a:off x="4241957" y="449814"/>
+            <a:ext cx="3299190" cy="2861077"/>
           </a:xfrm>
           <a:prstGeom prst="rect">
             <a:avLst/>
@@ -12702,10 +12991,10 @@
       </p:pic>
       <p:pic>
         <p:nvPicPr>
-          <p:cNvPr id="35" name="Picture 34">
+          <p:cNvPr id="6" name="Grafikk 5">
             <a:extLst>
               <a:ext uri="{FF2B5EF4-FFF2-40B4-BE49-F238E27FC236}">
-                <a16:creationId xmlns:a16="http://schemas.microsoft.com/office/drawing/2014/main" id="{1B715F51-7085-5F43-2DA3-F82AAC7CBC1D}"/>
+                <a16:creationId xmlns:a16="http://schemas.microsoft.com/office/drawing/2014/main" id="{4FC612B2-D645-A870-F662-1360ADBE184D}"/>
               </a:ext>
             </a:extLst>
           </p:cNvPr>
@@ -12715,15 +13004,207 @@
           <p:nvPr/>
         </p:nvPicPr>
         <p:blipFill>
-          <a:blip r:embed="rId10"/>
+          <a:blip r:embed="rId10">
+            <a:extLst>
+              <a:ext uri="{96DAC541-7B7A-43D3-8B79-37D633B846F1}">
+                <asvg:svgBlip xmlns:asvg="http://schemas.microsoft.com/office/drawing/2016/SVG/main" r:embed="rId11"/>
+              </a:ext>
+            </a:extLst>
+          </a:blip>
           <a:stretch>
             <a:fillRect/>
           </a:stretch>
         </p:blipFill>
         <p:spPr>
           <a:xfrm>
-            <a:off x="5894672" y="5576013"/>
-            <a:ext cx="2286319" cy="943107"/>
+            <a:off x="189791" y="981470"/>
+            <a:ext cx="3110993" cy="736873"/>
+          </a:xfrm>
+          <a:prstGeom prst="rect">
+            <a:avLst/>
+          </a:prstGeom>
+        </p:spPr>
+      </p:pic>
+      <p:pic>
+        <p:nvPicPr>
+          <p:cNvPr id="8" name="Bilde 7" descr="Et bilde som inneholder Font, tekst, Grafikk, logo&#10;&#10;KI-generert innhold kan være feil.">
+            <a:extLst>
+              <a:ext uri="{FF2B5EF4-FFF2-40B4-BE49-F238E27FC236}">
+                <a16:creationId xmlns:a16="http://schemas.microsoft.com/office/drawing/2014/main" id="{8949F131-4DC4-4AAB-60A2-64780EC3368D}"/>
+              </a:ext>
+            </a:extLst>
+          </p:cNvPr>
+          <p:cNvPicPr>
+            <a:picLocks noChangeAspect="1"/>
+          </p:cNvPicPr>
+          <p:nvPr/>
+        </p:nvPicPr>
+        <p:blipFill>
+          <a:blip r:embed="rId12"/>
+          <a:stretch>
+            <a:fillRect/>
+          </a:stretch>
+        </p:blipFill>
+        <p:spPr>
+          <a:xfrm>
+            <a:off x="6806292" y="4936587"/>
+            <a:ext cx="3515316" cy="737097"/>
+          </a:xfrm>
+          <a:prstGeom prst="rect">
+            <a:avLst/>
+          </a:prstGeom>
+        </p:spPr>
+      </p:pic>
+      <p:pic>
+        <p:nvPicPr>
+          <p:cNvPr id="9" name="Bilde 8" descr="Et bilde som inneholder logo, symbol, Font, design&#10;&#10;KI-generert innhold kan være feil.">
+            <a:extLst>
+              <a:ext uri="{FF2B5EF4-FFF2-40B4-BE49-F238E27FC236}">
+                <a16:creationId xmlns:a16="http://schemas.microsoft.com/office/drawing/2014/main" id="{9335216A-3AE8-F64B-63CA-1F4A309220A1}"/>
+              </a:ext>
+            </a:extLst>
+          </p:cNvPr>
+          <p:cNvPicPr>
+            <a:picLocks noChangeAspect="1"/>
+          </p:cNvPicPr>
+          <p:nvPr/>
+        </p:nvPicPr>
+        <p:blipFill>
+          <a:blip r:embed="rId13"/>
+          <a:stretch>
+            <a:fillRect/>
+          </a:stretch>
+        </p:blipFill>
+        <p:spPr>
+          <a:xfrm>
+            <a:off x="2308149" y="4508669"/>
+            <a:ext cx="3045424" cy="1818625"/>
+          </a:xfrm>
+          <a:prstGeom prst="rect">
+            <a:avLst/>
+          </a:prstGeom>
+        </p:spPr>
+      </p:pic>
+      <p:pic>
+        <p:nvPicPr>
+          <p:cNvPr id="10" name="Grafikk 9">
+            <a:extLst>
+              <a:ext uri="{FF2B5EF4-FFF2-40B4-BE49-F238E27FC236}">
+                <a16:creationId xmlns:a16="http://schemas.microsoft.com/office/drawing/2014/main" id="{F1A910C6-4EC6-F638-89F9-368CF1D5E81D}"/>
+              </a:ext>
+            </a:extLst>
+          </p:cNvPr>
+          <p:cNvPicPr>
+            <a:picLocks noChangeAspect="1"/>
+          </p:cNvPicPr>
+          <p:nvPr/>
+        </p:nvPicPr>
+        <p:blipFill>
+          <a:blip r:embed="rId14">
+            <a:extLst>
+              <a:ext uri="{96DAC541-7B7A-43D3-8B79-37D633B846F1}">
+                <asvg:svgBlip xmlns:asvg="http://schemas.microsoft.com/office/drawing/2016/SVG/main" r:embed="rId15"/>
+              </a:ext>
+            </a:extLst>
+          </a:blip>
+          <a:stretch>
+            <a:fillRect/>
+          </a:stretch>
+        </p:blipFill>
+        <p:spPr>
+          <a:xfrm>
+            <a:off x="9098629" y="2740102"/>
+            <a:ext cx="3093372" cy="1384859"/>
+          </a:xfrm>
+          <a:prstGeom prst="rect">
+            <a:avLst/>
+          </a:prstGeom>
+        </p:spPr>
+      </p:pic>
+      <p:pic>
+        <p:nvPicPr>
+          <p:cNvPr id="4" name="Picture 3" descr="A close up of a logo&#10;&#10;AI-generated content may be incorrect.">
+            <a:extLst>
+              <a:ext uri="{FF2B5EF4-FFF2-40B4-BE49-F238E27FC236}">
+                <a16:creationId xmlns:a16="http://schemas.microsoft.com/office/drawing/2014/main" id="{BDEED1EA-7691-4D10-1395-A28AF5FDD934}"/>
+              </a:ext>
+            </a:extLst>
+          </p:cNvPr>
+          <p:cNvPicPr>
+            <a:picLocks noChangeAspect="1"/>
+          </p:cNvPicPr>
+          <p:nvPr/>
+        </p:nvPicPr>
+        <p:blipFill>
+          <a:blip r:embed="rId16"/>
+          <a:stretch>
+            <a:fillRect/>
+          </a:stretch>
+        </p:blipFill>
+        <p:spPr>
+          <a:xfrm>
+            <a:off x="10140400" y="1910872"/>
+            <a:ext cx="1378834" cy="578161"/>
+          </a:xfrm>
+          <a:prstGeom prst="rect">
+            <a:avLst/>
+          </a:prstGeom>
+        </p:spPr>
+      </p:pic>
+      <p:pic>
+        <p:nvPicPr>
+          <p:cNvPr id="11" name="Bilde 10" descr="A logo of a horse head&#10;&#10;Description automatically generated">
+            <a:extLst>
+              <a:ext uri="{FF2B5EF4-FFF2-40B4-BE49-F238E27FC236}">
+                <a16:creationId xmlns:a16="http://schemas.microsoft.com/office/drawing/2014/main" id="{9674F16B-3694-E92B-843E-CC85BC3B61E1}"/>
+              </a:ext>
+            </a:extLst>
+          </p:cNvPr>
+          <p:cNvPicPr>
+            <a:picLocks noChangeAspect="1"/>
+          </p:cNvPicPr>
+          <p:nvPr/>
+        </p:nvPicPr>
+        <p:blipFill>
+          <a:blip r:embed="rId17"/>
+          <a:stretch>
+            <a:fillRect/>
+          </a:stretch>
+        </p:blipFill>
+        <p:spPr>
+          <a:xfrm>
+            <a:off x="5448671" y="5676281"/>
+            <a:ext cx="992827" cy="1057152"/>
+          </a:xfrm>
+          <a:prstGeom prst="rect">
+            <a:avLst/>
+          </a:prstGeom>
+        </p:spPr>
+      </p:pic>
+      <p:pic>
+        <p:nvPicPr>
+          <p:cNvPr id="3" name="Picture 2" descr="A black letter g&#10;&#10;Description automatically generated">
+            <a:extLst>
+              <a:ext uri="{FF2B5EF4-FFF2-40B4-BE49-F238E27FC236}">
+                <a16:creationId xmlns:a16="http://schemas.microsoft.com/office/drawing/2014/main" id="{CCDFE0FF-D7FE-325F-6318-00638A557BA7}"/>
+              </a:ext>
+            </a:extLst>
+          </p:cNvPr>
+          <p:cNvPicPr>
+            <a:picLocks noChangeAspect="1"/>
+          </p:cNvPicPr>
+          <p:nvPr/>
+        </p:nvPicPr>
+        <p:blipFill>
+          <a:blip r:embed="rId18"/>
+          <a:stretch>
+            <a:fillRect/>
+          </a:stretch>
+        </p:blipFill>
+        <p:spPr>
+          <a:xfrm>
+            <a:off x="303566" y="4102191"/>
+            <a:ext cx="2743198" cy="589359"/>
           </a:xfrm>
           <a:prstGeom prst="rect">
             <a:avLst/>
@@ -12733,7 +13214,7 @@
     </p:spTree>
     <p:extLst>
       <p:ext uri="{BB962C8B-B14F-4D97-AF65-F5344CB8AC3E}">
-        <p14:creationId xmlns:p14="http://schemas.microsoft.com/office/powerpoint/2010/main" val="1551213563"/>
+        <p14:creationId xmlns:p14="http://schemas.microsoft.com/office/powerpoint/2010/main" val="2624240746"/>
       </p:ext>
     </p:extLst>
   </p:cSld>
@@ -13471,6 +13952,66 @@
           <a:chExt cx="0" cy="0"/>
         </a:xfrm>
       </p:grpSpPr>
+      <p:pic>
+        <p:nvPicPr>
+          <p:cNvPr id="7" name="Picture 6">
+            <a:extLst>
+              <a:ext uri="{FF2B5EF4-FFF2-40B4-BE49-F238E27FC236}">
+                <a16:creationId xmlns:a16="http://schemas.microsoft.com/office/drawing/2014/main" id="{1C75FBDA-298A-AA0E-87CD-E32A36DFA20E}"/>
+              </a:ext>
+            </a:extLst>
+          </p:cNvPr>
+          <p:cNvPicPr>
+            <a:picLocks noChangeAspect="1"/>
+          </p:cNvPicPr>
+          <p:nvPr/>
+        </p:nvPicPr>
+        <p:blipFill>
+          <a:blip r:embed="rId2"/>
+          <a:stretch>
+            <a:fillRect/>
+          </a:stretch>
+        </p:blipFill>
+        <p:spPr>
+          <a:xfrm>
+            <a:off x="2561324" y="0"/>
+            <a:ext cx="7069352" cy="6858000"/>
+          </a:xfrm>
+          <a:prstGeom prst="rect">
+            <a:avLst/>
+          </a:prstGeom>
+        </p:spPr>
+      </p:pic>
+    </p:spTree>
+    <p:extLst>
+      <p:ext uri="{BB962C8B-B14F-4D97-AF65-F5344CB8AC3E}">
+        <p14:creationId xmlns:p14="http://schemas.microsoft.com/office/powerpoint/2010/main" val="3573605297"/>
+      </p:ext>
+    </p:extLst>
+  </p:cSld>
+  <p:clrMapOvr>
+    <a:masterClrMapping/>
+  </p:clrMapOvr>
+</p:sld>
+</file>
+
+<file path=ppt/slides/slide7.xml><?xml version="1.0" encoding="utf-8"?>
+<p:sld xmlns:a="http://schemas.openxmlformats.org/drawingml/2006/main" xmlns:r="http://schemas.openxmlformats.org/officeDocument/2006/relationships" xmlns:p="http://schemas.openxmlformats.org/presentationml/2006/main">
+  <p:cSld>
+    <p:spTree>
+      <p:nvGrpSpPr>
+        <p:cNvPr id="1" name=""/>
+        <p:cNvGrpSpPr/>
+        <p:nvPr/>
+      </p:nvGrpSpPr>
+      <p:grpSpPr>
+        <a:xfrm>
+          <a:off x="0" y="0"/>
+          <a:ext cx="0" cy="0"/>
+          <a:chOff x="0" y="0"/>
+          <a:chExt cx="0" cy="0"/>
+        </a:xfrm>
+      </p:grpSpPr>
       <p:sp>
         <p:nvSpPr>
           <p:cNvPr id="2" name="Rubrik 1">
@@ -13794,7 +14335,7 @@
 </p:sld>
 </file>
 
-<file path=ppt/slides/slide7.xml><?xml version="1.0" encoding="utf-8"?>
+<file path=ppt/slides/slide8.xml><?xml version="1.0" encoding="utf-8"?>
 <p:sld xmlns:a="http://schemas.openxmlformats.org/drawingml/2006/main" xmlns:r="http://schemas.openxmlformats.org/officeDocument/2006/relationships" xmlns:p="http://schemas.openxmlformats.org/presentationml/2006/main">
   <p:cSld>
     <p:spTree>
@@ -14863,7 +15404,7 @@
 </p:sld>
 </file>
 
-<file path=ppt/slides/slide8.xml><?xml version="1.0" encoding="utf-8"?>
+<file path=ppt/slides/slide9.xml><?xml version="1.0" encoding="utf-8"?>
 <p:sld xmlns:a="http://schemas.openxmlformats.org/drawingml/2006/main" xmlns:r="http://schemas.openxmlformats.org/officeDocument/2006/relationships" xmlns:p="http://schemas.openxmlformats.org/presentationml/2006/main">
   <p:cSld>
     <p:spTree>
@@ -14948,100 +15489,6 @@
     <p:extLst>
       <p:ext uri="{BB962C8B-B14F-4D97-AF65-F5344CB8AC3E}">
         <p14:creationId xmlns:p14="http://schemas.microsoft.com/office/powerpoint/2010/main" val="2274104317"/>
-      </p:ext>
-    </p:extLst>
-  </p:cSld>
-  <p:clrMapOvr>
-    <a:masterClrMapping/>
-  </p:clrMapOvr>
-</p:sld>
-</file>
-
-<file path=ppt/slides/slide9.xml><?xml version="1.0" encoding="utf-8"?>
-<p:sld xmlns:a="http://schemas.openxmlformats.org/drawingml/2006/main" xmlns:r="http://schemas.openxmlformats.org/officeDocument/2006/relationships" xmlns:p="http://schemas.openxmlformats.org/presentationml/2006/main">
-  <p:cSld>
-    <p:spTree>
-      <p:nvGrpSpPr>
-        <p:cNvPr id="1" name="">
-          <a:extLst>
-            <a:ext uri="{FF2B5EF4-FFF2-40B4-BE49-F238E27FC236}">
-              <a16:creationId xmlns:a16="http://schemas.microsoft.com/office/drawing/2014/main" id="{5A43C7FC-7A09-107A-EDC9-0909D3CADF6A}"/>
-            </a:ext>
-          </a:extLst>
-        </p:cNvPr>
-        <p:cNvGrpSpPr/>
-        <p:nvPr/>
-      </p:nvGrpSpPr>
-      <p:grpSpPr>
-        <a:xfrm>
-          <a:off x="0" y="0"/>
-          <a:ext cx="0" cy="0"/>
-          <a:chOff x="0" y="0"/>
-          <a:chExt cx="0" cy="0"/>
-        </a:xfrm>
-      </p:grpSpPr>
-      <p:sp>
-        <p:nvSpPr>
-          <p:cNvPr id="2" name="Rubrik 1">
-            <a:extLst>
-              <a:ext uri="{FF2B5EF4-FFF2-40B4-BE49-F238E27FC236}">
-                <a16:creationId xmlns:a16="http://schemas.microsoft.com/office/drawing/2014/main" id="{9B7B1F15-2E6C-2333-CBE7-DE22736854C6}"/>
-              </a:ext>
-            </a:extLst>
-          </p:cNvPr>
-          <p:cNvSpPr>
-            <a:spLocks noGrp="1"/>
-          </p:cNvSpPr>
-          <p:nvPr>
-            <p:ph type="title"/>
-          </p:nvPr>
-        </p:nvSpPr>
-        <p:spPr/>
-        <p:txBody>
-          <a:bodyPr/>
-          <a:lstStyle/>
-          <a:p>
-            <a:r>
-              <a:rPr lang="sv-SE" dirty="0"/>
-              <a:t>Version 1.1.0</a:t>
-            </a:r>
-          </a:p>
-        </p:txBody>
-      </p:sp>
-      <p:pic>
-        <p:nvPicPr>
-          <p:cNvPr id="4" name="Bildobjekt 3">
-            <a:extLst>
-              <a:ext uri="{FF2B5EF4-FFF2-40B4-BE49-F238E27FC236}">
-                <a16:creationId xmlns:a16="http://schemas.microsoft.com/office/drawing/2014/main" id="{6BEEE4E5-0E15-AA43-E170-E7E55D31C119}"/>
-              </a:ext>
-            </a:extLst>
-          </p:cNvPr>
-          <p:cNvPicPr>
-            <a:picLocks noChangeAspect="1"/>
-          </p:cNvPicPr>
-          <p:nvPr/>
-        </p:nvPicPr>
-        <p:blipFill>
-          <a:blip r:embed="rId2"/>
-          <a:stretch>
-            <a:fillRect/>
-          </a:stretch>
-        </p:blipFill>
-        <p:spPr>
-          <a:xfrm>
-            <a:off x="3784024" y="609600"/>
-            <a:ext cx="6289616" cy="5470194"/>
-          </a:xfrm>
-          <a:prstGeom prst="rect">
-            <a:avLst/>
-          </a:prstGeom>
-        </p:spPr>
-      </p:pic>
-    </p:spTree>
-    <p:extLst>
-      <p:ext uri="{BB962C8B-B14F-4D97-AF65-F5344CB8AC3E}">
-        <p14:creationId xmlns:p14="http://schemas.microsoft.com/office/powerpoint/2010/main" val="350649973"/>
       </p:ext>
     </p:extLst>
   </p:cSld>
@@ -15319,39 +15766,39 @@
         <a:sysClr val="window" lastClr="FFFFFF"/>
       </a:lt1>
       <a:dk2>
-        <a:srgbClr val="0E2841"/>
+        <a:srgbClr val="44546A"/>
       </a:dk2>
       <a:lt2>
-        <a:srgbClr val="E8E8E8"/>
+        <a:srgbClr val="E7E6E6"/>
       </a:lt2>
       <a:accent1>
-        <a:srgbClr val="156082"/>
+        <a:srgbClr val="4472C4"/>
       </a:accent1>
       <a:accent2>
-        <a:srgbClr val="E97132"/>
+        <a:srgbClr val="ED7D31"/>
       </a:accent2>
       <a:accent3>
-        <a:srgbClr val="196B24"/>
+        <a:srgbClr val="A5A5A5"/>
       </a:accent3>
       <a:accent4>
-        <a:srgbClr val="0F9ED5"/>
+        <a:srgbClr val="FFC000"/>
       </a:accent4>
       <a:accent5>
-        <a:srgbClr val="A02B93"/>
+        <a:srgbClr val="5B9BD5"/>
       </a:accent5>
       <a:accent6>
-        <a:srgbClr val="4EA72E"/>
+        <a:srgbClr val="70AD47"/>
       </a:accent6>
       <a:hlink>
-        <a:srgbClr val="467886"/>
+        <a:srgbClr val="0563C1"/>
       </a:hlink>
       <a:folHlink>
-        <a:srgbClr val="96607D"/>
+        <a:srgbClr val="954F72"/>
       </a:folHlink>
     </a:clrScheme>
     <a:fontScheme name="Office">
       <a:majorFont>
-        <a:latin typeface="Aptos Display" panose="02110004020202020204"/>
+        <a:latin typeface="Calibri Light" panose="020F0302020204030204"/>
         <a:ea typeface=""/>
         <a:cs typeface=""/>
         <a:font script="Jpan" typeface="游ゴシック Light"/>
@@ -15403,7 +15850,7 @@
         <a:font script="Tfng" typeface="Ebrima"/>
       </a:majorFont>
       <a:minorFont>
-        <a:latin typeface="Aptos" panose="02110004020202020204"/>
+        <a:latin typeface="Calibri" panose="020F0502020204030204"/>
         <a:ea typeface=""/>
         <a:cs typeface=""/>
         <a:font script="Jpan" typeface="游ゴシック"/>
@@ -15514,6 +15961,13 @@
         </a:gradFill>
       </a:fillStyleLst>
       <a:lnStyleLst>
+        <a:ln w="6350" cap="flat" cmpd="sng" algn="ctr">
+          <a:solidFill>
+            <a:schemeClr val="phClr"/>
+          </a:solidFill>
+          <a:prstDash val="solid"/>
+          <a:miter lim="800000"/>
+        </a:ln>
         <a:ln w="12700" cap="flat" cmpd="sng" algn="ctr">
           <a:solidFill>
             <a:schemeClr val="phClr"/>
@@ -15522,13 +15976,6 @@
           <a:miter lim="800000"/>
         </a:ln>
         <a:ln w="19050" cap="flat" cmpd="sng" algn="ctr">
-          <a:solidFill>
-            <a:schemeClr val="phClr"/>
-          </a:solidFill>
-          <a:prstDash val="solid"/>
-          <a:miter lim="800000"/>
-        </a:ln>
-        <a:ln w="25400" cap="flat" cmpd="sng" algn="ctr">
           <a:solidFill>
             <a:schemeClr val="phClr"/>
           </a:solidFill>
@@ -15593,31 +16040,11 @@
       </a:bgFillStyleLst>
     </a:fmtScheme>
   </a:themeElements>
-  <a:objectDefaults>
-    <a:lnDef>
-      <a:spPr/>
-      <a:bodyPr/>
-      <a:lstStyle/>
-      <a:style>
-        <a:lnRef idx="2">
-          <a:schemeClr val="accent1"/>
-        </a:lnRef>
-        <a:fillRef idx="0">
-          <a:schemeClr val="accent1"/>
-        </a:fillRef>
-        <a:effectRef idx="1">
-          <a:schemeClr val="accent1"/>
-        </a:effectRef>
-        <a:fontRef idx="minor">
-          <a:schemeClr val="tx1"/>
-        </a:fontRef>
-      </a:style>
-    </a:lnDef>
-  </a:objectDefaults>
+  <a:objectDefaults/>
   <a:extraClrSchemeLst/>
   <a:extLst>
     <a:ext uri="{05A4C25C-085E-4340-85A3-A5531E510DB2}">
-      <thm15:themeFamily xmlns:thm15="http://schemas.microsoft.com/office/thememl/2012/main" name="Office Theme" id="{2E142A2C-CD16-42D6-873A-C26D2A0506FA}" vid="{1BDDFF52-6CD6-40A5-AB3C-68EB2F1E4D0A}"/>
+      <thm15:themeFamily xmlns:thm15="http://schemas.microsoft.com/office/thememl/2012/main" name="Office Theme" id="{62F939B6-93AF-4DB8-9C6B-D6C7DFDC589F}" vid="{4A3C46E8-61CC-4603-A589-7422A47A8E4A}"/>
     </a:ext>
   </a:extLst>
 </a:theme>
